--- a/docs/Data-Source-Onboarding-Agent.pptx
+++ b/docs/Data-Source-Onboarding-Agent.pptx
@@ -24,6 +24,8 @@
     <p:sldId id="272" r:id="rId23"/>
     <p:sldId id="273" r:id="rId24"/>
     <p:sldId id="274" r:id="rId25"/>
+    <p:sldId id="275" r:id="rId26"/>
+    <p:sldId id="276" r:id="rId27"/>
   </p:sldIdLst>
   <p:sldSz cx="12191695" cy="6858000" type="screen4x3"/>
   <p:notesSz cx="6858000" cy="9144000"/>
@@ -3384,7 +3386,7 @@
                 </a:solidFill>
                 <a:latin typeface="Courier New"/>
               </a:rPr>
-              <a:t>THE PRODUCT · 5 OF 6</a:t>
+              <a:t>THE PRODUCT · 3 OF 6</a:t>
             </a:r>
           </a:p>
         </p:txBody>
@@ -3423,14 +3425,14 @@
                 </a:solidFill>
                 <a:latin typeface="Arial"/>
               </a:rPr>
-              <a:t>Proven against a real database, not just compiled</a:t>
+              <a:t>Extraction, generation, and the standards gate</a:t>
             </a:r>
           </a:p>
         </p:txBody>
       </p:sp>
       <p:pic>
         <p:nvPicPr>
-          <p:cNvPr id="5" name="Picture 4" descr="06-connection.png"/>
+          <p:cNvPr id="5" name="Picture 4" descr="04-standards.png"/>
           <p:cNvPicPr>
             <a:picLocks noChangeAspect="1"/>
           </p:cNvPicPr>
@@ -3486,7 +3488,7 @@
                 </a:solidFill>
                 <a:latin typeface="Arial"/>
               </a:rPr>
-              <a:t>Executed in a sandboxed subprocess against live PostgreSQL. Three tables discovered with their primary keys. Credentials are sent once and never stored, logged, or written to the artifact.</a:t>
+              <a:t>Everything the agent understood is shown for review — including what it assumed. 13 of 13 checks pass, so the artifact is accepted.</a:t>
             </a:r>
           </a:p>
         </p:txBody>
@@ -3587,7 +3589,7 @@
                 </a:solidFill>
                 <a:latin typeface="Courier New"/>
               </a:rPr>
-              <a:t>THE PRODUCT · 6 OF 6</a:t>
+              <a:t>THE PRODUCT · 4 OF 6</a:t>
             </a:r>
           </a:p>
         </p:txBody>
@@ -3626,14 +3628,14 @@
                 </a:solidFill>
                 <a:latin typeface="Arial"/>
               </a:rPr>
-              <a:t>The handover artifact</a:t>
+              <a:t>The generated connector</a:t>
             </a:r>
           </a:p>
         </p:txBody>
       </p:sp>
       <p:pic>
         <p:nvPicPr>
-          <p:cNvPr id="5" name="Picture 4" descr="07-artifact.png"/>
+          <p:cNvPr id="5" name="Picture 4" descr="05-code.png"/>
           <p:cNvPicPr>
             <a:picLocks noChangeAspect="1"/>
           </p:cNvPicPr>
@@ -3689,7 +3691,7 @@
                 </a:solidFill>
                 <a:latin typeface="Arial"/>
               </a:rPr>
-              <a:t>Connector, README, requirements, explanation and a manifest — packaged as a versioned zip with a checksum over the whole bundle.</a:t>
+              <a:t>Provenance above the code: template version, spec checksum, code checksum, repair count. Written by a template, never by the model.</a:t>
             </a:r>
           </a:p>
         </p:txBody>
@@ -3703,6 +3705,412 @@
 </file>
 
 <file path=ppt/slides/slide12.xml><?xml version="1.0" encoding="utf-8"?>
+<p:sld xmlns:a="http://schemas.openxmlformats.org/drawingml/2006/main" xmlns:p="http://schemas.openxmlformats.org/presentationml/2006/main" xmlns:r="http://schemas.openxmlformats.org/officeDocument/2006/relationships">
+  <p:cSld>
+    <p:spTree>
+      <p:nvGrpSpPr>
+        <p:cNvPr id="1" name=""/>
+        <p:cNvGrpSpPr/>
+        <p:nvPr/>
+      </p:nvGrpSpPr>
+      <p:grpSpPr/>
+      <p:sp>
+        <p:nvSpPr>
+          <p:cNvPr id="2" name="Rectangle 1"/>
+          <p:cNvSpPr/>
+          <p:nvPr/>
+        </p:nvSpPr>
+        <p:spPr>
+          <a:xfrm>
+            <a:off x="0" y="0"/>
+            <a:ext cx="12191695" cy="6858000"/>
+          </a:xfrm>
+          <a:prstGeom prst="rect">
+            <a:avLst/>
+          </a:prstGeom>
+          <a:solidFill>
+            <a:srgbClr val="0A0F1C"/>
+          </a:solidFill>
+          <a:ln>
+            <a:noFill/>
+          </a:ln>
+          <a:effectLst/>
+        </p:spPr>
+        <p:style>
+          <a:lnRef idx="1">
+            <a:schemeClr val="accent1"/>
+          </a:lnRef>
+          <a:fillRef idx="3">
+            <a:schemeClr val="accent1"/>
+          </a:fillRef>
+          <a:effectRef idx="2">
+            <a:schemeClr val="accent1"/>
+          </a:effectRef>
+          <a:fontRef idx="minor">
+            <a:schemeClr val="lt1"/>
+          </a:fontRef>
+        </p:style>
+        <p:txBody>
+          <a:bodyPr rtlCol="0" anchor="ctr"/>
+          <a:lstStyle/>
+          <a:p>
+            <a:pPr algn="ctr"/>
+          </a:p>
+        </p:txBody>
+      </p:sp>
+      <p:sp>
+        <p:nvSpPr>
+          <p:cNvPr id="3" name="TextBox 2"/>
+          <p:cNvSpPr txBox="1"/>
+          <p:nvPr/>
+        </p:nvSpPr>
+        <p:spPr>
+          <a:xfrm>
+            <a:off x="685800" y="384048"/>
+            <a:ext cx="10058400" cy="274320"/>
+          </a:xfrm>
+          <a:prstGeom prst="rect">
+            <a:avLst/>
+          </a:prstGeom>
+          <a:noFill/>
+        </p:spPr>
+        <p:txBody>
+          <a:bodyPr wrap="square" lIns="0" rIns="0" tIns="0" bIns="0">
+            <a:spAutoFit/>
+          </a:bodyPr>
+          <a:lstStyle/>
+          <a:p>
+            <a:pPr>
+              <a:spcAft>
+                <a:spcPts val="600"/>
+              </a:spcAft>
+            </a:pPr>
+            <a:r>
+              <a:rPr sz="1100" b="1">
+                <a:solidFill>
+                  <a:srgbClr val="4B5975"/>
+                </a:solidFill>
+                <a:latin typeface="Courier New"/>
+              </a:rPr>
+              <a:t>THE PRODUCT · 5 OF 6</a:t>
+            </a:r>
+          </a:p>
+        </p:txBody>
+      </p:sp>
+      <p:sp>
+        <p:nvSpPr>
+          <p:cNvPr id="4" name="TextBox 3"/>
+          <p:cNvSpPr txBox="1"/>
+          <p:nvPr/>
+        </p:nvSpPr>
+        <p:spPr>
+          <a:xfrm>
+            <a:off x="685800" y="658368"/>
+            <a:ext cx="10789920" cy="457200"/>
+          </a:xfrm>
+          <a:prstGeom prst="rect">
+            <a:avLst/>
+          </a:prstGeom>
+          <a:noFill/>
+        </p:spPr>
+        <p:txBody>
+          <a:bodyPr wrap="square" lIns="0" rIns="0" tIns="0" bIns="0">
+            <a:spAutoFit/>
+          </a:bodyPr>
+          <a:lstStyle/>
+          <a:p>
+            <a:pPr>
+              <a:spcAft>
+                <a:spcPts val="600"/>
+              </a:spcAft>
+            </a:pPr>
+            <a:r>
+              <a:rPr sz="2400" b="1">
+                <a:solidFill>
+                  <a:srgbClr val="E8EDF5"/>
+                </a:solidFill>
+                <a:latin typeface="Arial"/>
+              </a:rPr>
+              <a:t>Proven against a real database, not just compiled</a:t>
+            </a:r>
+          </a:p>
+        </p:txBody>
+      </p:sp>
+      <p:pic>
+        <p:nvPicPr>
+          <p:cNvPr id="5" name="Picture 4" descr="06-connection.png"/>
+          <p:cNvPicPr>
+            <a:picLocks noChangeAspect="1"/>
+          </p:cNvPicPr>
+          <p:nvPr/>
+        </p:nvPicPr>
+        <p:blipFill>
+          <a:blip r:embed="rId2"/>
+          <a:stretch>
+            <a:fillRect/>
+          </a:stretch>
+        </p:blipFill>
+        <p:spPr>
+          <a:xfrm>
+            <a:off x="1853031" y="1188720"/>
+            <a:ext cx="8485632" cy="4773168"/>
+          </a:xfrm>
+          <a:prstGeom prst="rect">
+            <a:avLst/>
+          </a:prstGeom>
+        </p:spPr>
+      </p:pic>
+      <p:sp>
+        <p:nvSpPr>
+          <p:cNvPr id="6" name="TextBox 5"/>
+          <p:cNvSpPr txBox="1"/>
+          <p:nvPr/>
+        </p:nvSpPr>
+        <p:spPr>
+          <a:xfrm>
+            <a:off x="685800" y="6108192"/>
+            <a:ext cx="10789920" cy="502920"/>
+          </a:xfrm>
+          <a:prstGeom prst="rect">
+            <a:avLst/>
+          </a:prstGeom>
+          <a:noFill/>
+        </p:spPr>
+        <p:txBody>
+          <a:bodyPr wrap="square" lIns="0" rIns="0" tIns="0" bIns="0">
+            <a:spAutoFit/>
+          </a:bodyPr>
+          <a:lstStyle/>
+          <a:p>
+            <a:pPr>
+              <a:spcAft>
+                <a:spcPts val="600"/>
+              </a:spcAft>
+            </a:pPr>
+            <a:r>
+              <a:rPr sz="1300" b="0">
+                <a:solidFill>
+                  <a:srgbClr val="8896B0"/>
+                </a:solidFill>
+                <a:latin typeface="Arial"/>
+              </a:rPr>
+              <a:t>Executed in a sandboxed subprocess against live PostgreSQL. Three tables discovered with their primary keys. Credentials are sent once and never stored, logged, or written to the artifact.</a:t>
+            </a:r>
+          </a:p>
+        </p:txBody>
+      </p:sp>
+    </p:spTree>
+  </p:cSld>
+  <p:clrMapOvr>
+    <a:masterClrMapping/>
+  </p:clrMapOvr>
+</p:sld>
+</file>
+
+<file path=ppt/slides/slide13.xml><?xml version="1.0" encoding="utf-8"?>
+<p:sld xmlns:a="http://schemas.openxmlformats.org/drawingml/2006/main" xmlns:p="http://schemas.openxmlformats.org/presentationml/2006/main" xmlns:r="http://schemas.openxmlformats.org/officeDocument/2006/relationships">
+  <p:cSld>
+    <p:spTree>
+      <p:nvGrpSpPr>
+        <p:cNvPr id="1" name=""/>
+        <p:cNvGrpSpPr/>
+        <p:nvPr/>
+      </p:nvGrpSpPr>
+      <p:grpSpPr/>
+      <p:sp>
+        <p:nvSpPr>
+          <p:cNvPr id="2" name="Rectangle 1"/>
+          <p:cNvSpPr/>
+          <p:nvPr/>
+        </p:nvSpPr>
+        <p:spPr>
+          <a:xfrm>
+            <a:off x="0" y="0"/>
+            <a:ext cx="12191695" cy="6858000"/>
+          </a:xfrm>
+          <a:prstGeom prst="rect">
+            <a:avLst/>
+          </a:prstGeom>
+          <a:solidFill>
+            <a:srgbClr val="0A0F1C"/>
+          </a:solidFill>
+          <a:ln>
+            <a:noFill/>
+          </a:ln>
+          <a:effectLst/>
+        </p:spPr>
+        <p:style>
+          <a:lnRef idx="1">
+            <a:schemeClr val="accent1"/>
+          </a:lnRef>
+          <a:fillRef idx="3">
+            <a:schemeClr val="accent1"/>
+          </a:fillRef>
+          <a:effectRef idx="2">
+            <a:schemeClr val="accent1"/>
+          </a:effectRef>
+          <a:fontRef idx="minor">
+            <a:schemeClr val="lt1"/>
+          </a:fontRef>
+        </p:style>
+        <p:txBody>
+          <a:bodyPr rtlCol="0" anchor="ctr"/>
+          <a:lstStyle/>
+          <a:p>
+            <a:pPr algn="ctr"/>
+          </a:p>
+        </p:txBody>
+      </p:sp>
+      <p:sp>
+        <p:nvSpPr>
+          <p:cNvPr id="3" name="TextBox 2"/>
+          <p:cNvSpPr txBox="1"/>
+          <p:nvPr/>
+        </p:nvSpPr>
+        <p:spPr>
+          <a:xfrm>
+            <a:off x="685800" y="384048"/>
+            <a:ext cx="10058400" cy="274320"/>
+          </a:xfrm>
+          <a:prstGeom prst="rect">
+            <a:avLst/>
+          </a:prstGeom>
+          <a:noFill/>
+        </p:spPr>
+        <p:txBody>
+          <a:bodyPr wrap="square" lIns="0" rIns="0" tIns="0" bIns="0">
+            <a:spAutoFit/>
+          </a:bodyPr>
+          <a:lstStyle/>
+          <a:p>
+            <a:pPr>
+              <a:spcAft>
+                <a:spcPts val="600"/>
+              </a:spcAft>
+            </a:pPr>
+            <a:r>
+              <a:rPr sz="1100" b="1">
+                <a:solidFill>
+                  <a:srgbClr val="4B5975"/>
+                </a:solidFill>
+                <a:latin typeface="Courier New"/>
+              </a:rPr>
+              <a:t>THE PRODUCT · 6 OF 6</a:t>
+            </a:r>
+          </a:p>
+        </p:txBody>
+      </p:sp>
+      <p:sp>
+        <p:nvSpPr>
+          <p:cNvPr id="4" name="TextBox 3"/>
+          <p:cNvSpPr txBox="1"/>
+          <p:nvPr/>
+        </p:nvSpPr>
+        <p:spPr>
+          <a:xfrm>
+            <a:off x="685800" y="658368"/>
+            <a:ext cx="10789920" cy="457200"/>
+          </a:xfrm>
+          <a:prstGeom prst="rect">
+            <a:avLst/>
+          </a:prstGeom>
+          <a:noFill/>
+        </p:spPr>
+        <p:txBody>
+          <a:bodyPr wrap="square" lIns="0" rIns="0" tIns="0" bIns="0">
+            <a:spAutoFit/>
+          </a:bodyPr>
+          <a:lstStyle/>
+          <a:p>
+            <a:pPr>
+              <a:spcAft>
+                <a:spcPts val="600"/>
+              </a:spcAft>
+            </a:pPr>
+            <a:r>
+              <a:rPr sz="2400" b="1">
+                <a:solidFill>
+                  <a:srgbClr val="E8EDF5"/>
+                </a:solidFill>
+                <a:latin typeface="Arial"/>
+              </a:rPr>
+              <a:t>The handover artifact</a:t>
+            </a:r>
+          </a:p>
+        </p:txBody>
+      </p:sp>
+      <p:pic>
+        <p:nvPicPr>
+          <p:cNvPr id="5" name="Picture 4" descr="07-artifact.png"/>
+          <p:cNvPicPr>
+            <a:picLocks noChangeAspect="1"/>
+          </p:cNvPicPr>
+          <p:nvPr/>
+        </p:nvPicPr>
+        <p:blipFill>
+          <a:blip r:embed="rId2"/>
+          <a:stretch>
+            <a:fillRect/>
+          </a:stretch>
+        </p:blipFill>
+        <p:spPr>
+          <a:xfrm>
+            <a:off x="1853031" y="1188720"/>
+            <a:ext cx="8485632" cy="4773168"/>
+          </a:xfrm>
+          <a:prstGeom prst="rect">
+            <a:avLst/>
+          </a:prstGeom>
+        </p:spPr>
+      </p:pic>
+      <p:sp>
+        <p:nvSpPr>
+          <p:cNvPr id="6" name="TextBox 5"/>
+          <p:cNvSpPr txBox="1"/>
+          <p:nvPr/>
+        </p:nvSpPr>
+        <p:spPr>
+          <a:xfrm>
+            <a:off x="685800" y="6108192"/>
+            <a:ext cx="10789920" cy="502920"/>
+          </a:xfrm>
+          <a:prstGeom prst="rect">
+            <a:avLst/>
+          </a:prstGeom>
+          <a:noFill/>
+        </p:spPr>
+        <p:txBody>
+          <a:bodyPr wrap="square" lIns="0" rIns="0" tIns="0" bIns="0">
+            <a:spAutoFit/>
+          </a:bodyPr>
+          <a:lstStyle/>
+          <a:p>
+            <a:pPr>
+              <a:spcAft>
+                <a:spcPts val="600"/>
+              </a:spcAft>
+            </a:pPr>
+            <a:r>
+              <a:rPr sz="1300" b="0">
+                <a:solidFill>
+                  <a:srgbClr val="8896B0"/>
+                </a:solidFill>
+                <a:latin typeface="Arial"/>
+              </a:rPr>
+              <a:t>Connector, README, requirements, explanation and a manifest — packaged as a versioned zip with a checksum over the whole bundle.</a:t>
+            </a:r>
+          </a:p>
+        </p:txBody>
+      </p:sp>
+    </p:spTree>
+  </p:cSld>
+  <p:clrMapOvr>
+    <a:masterClrMapping/>
+  </p:clrMapOvr>
+</p:sld>
+</file>
+
+<file path=ppt/slides/slide14.xml><?xml version="1.0" encoding="utf-8"?>
 <p:sld xmlns:a="http://schemas.openxmlformats.org/drawingml/2006/main" xmlns:p="http://schemas.openxmlformats.org/presentationml/2006/main" xmlns:r="http://schemas.openxmlformats.org/officeDocument/2006/relationships">
   <p:cSld>
     <p:spTree>
@@ -5104,676 +5512,6 @@
 </p:sld>
 </file>
 
-<file path=ppt/slides/slide13.xml><?xml version="1.0" encoding="utf-8"?>
-<p:sld xmlns:a="http://schemas.openxmlformats.org/drawingml/2006/main" xmlns:p="http://schemas.openxmlformats.org/presentationml/2006/main" xmlns:r="http://schemas.openxmlformats.org/officeDocument/2006/relationships">
-  <p:cSld>
-    <p:spTree>
-      <p:nvGrpSpPr>
-        <p:cNvPr id="1" name=""/>
-        <p:cNvGrpSpPr/>
-        <p:nvPr/>
-      </p:nvGrpSpPr>
-      <p:grpSpPr/>
-      <p:sp>
-        <p:nvSpPr>
-          <p:cNvPr id="2" name="Rectangle 1"/>
-          <p:cNvSpPr/>
-          <p:nvPr/>
-        </p:nvSpPr>
-        <p:spPr>
-          <a:xfrm>
-            <a:off x="0" y="0"/>
-            <a:ext cx="12191695" cy="6858000"/>
-          </a:xfrm>
-          <a:prstGeom prst="rect">
-            <a:avLst/>
-          </a:prstGeom>
-          <a:solidFill>
-            <a:srgbClr val="0A0F1C"/>
-          </a:solidFill>
-          <a:ln>
-            <a:noFill/>
-          </a:ln>
-          <a:effectLst/>
-        </p:spPr>
-        <p:style>
-          <a:lnRef idx="1">
-            <a:schemeClr val="accent1"/>
-          </a:lnRef>
-          <a:fillRef idx="3">
-            <a:schemeClr val="accent1"/>
-          </a:fillRef>
-          <a:effectRef idx="2">
-            <a:schemeClr val="accent1"/>
-          </a:effectRef>
-          <a:fontRef idx="minor">
-            <a:schemeClr val="lt1"/>
-          </a:fontRef>
-        </p:style>
-        <p:txBody>
-          <a:bodyPr rtlCol="0" anchor="ctr"/>
-          <a:lstStyle/>
-          <a:p>
-            <a:pPr algn="ctr"/>
-          </a:p>
-        </p:txBody>
-      </p:sp>
-      <p:sp>
-        <p:nvSpPr>
-          <p:cNvPr id="3" name="TextBox 2"/>
-          <p:cNvSpPr txBox="1"/>
-          <p:nvPr/>
-        </p:nvSpPr>
-        <p:spPr>
-          <a:xfrm>
-            <a:off x="685800" y="457200"/>
-            <a:ext cx="10058400" cy="274320"/>
-          </a:xfrm>
-          <a:prstGeom prst="rect">
-            <a:avLst/>
-          </a:prstGeom>
-          <a:noFill/>
-        </p:spPr>
-        <p:txBody>
-          <a:bodyPr wrap="square" lIns="0" rIns="0" tIns="0" bIns="0">
-            <a:spAutoFit/>
-          </a:bodyPr>
-          <a:lstStyle/>
-          <a:p>
-            <a:pPr>
-              <a:spcAft>
-                <a:spcPts val="600"/>
-              </a:spcAft>
-            </a:pPr>
-            <a:r>
-              <a:rPr sz="1100" b="1">
-                <a:solidFill>
-                  <a:srgbClr val="4B5975"/>
-                </a:solidFill>
-                <a:latin typeface="Courier New"/>
-              </a:rPr>
-              <a:t>DESIGN · QUALITY</a:t>
-            </a:r>
-          </a:p>
-        </p:txBody>
-      </p:sp>
-      <p:sp>
-        <p:nvSpPr>
-          <p:cNvPr id="4" name="TextBox 3"/>
-          <p:cNvSpPr txBox="1"/>
-          <p:nvPr/>
-        </p:nvSpPr>
-        <p:spPr>
-          <a:xfrm>
-            <a:off x="685800" y="777240"/>
-            <a:ext cx="10789920" cy="914400"/>
-          </a:xfrm>
-          <a:prstGeom prst="rect">
-            <a:avLst/>
-          </a:prstGeom>
-          <a:noFill/>
-        </p:spPr>
-        <p:txBody>
-          <a:bodyPr wrap="square" lIns="0" rIns="0" tIns="0" bIns="0">
-            <a:spAutoFit/>
-          </a:bodyPr>
-          <a:lstStyle/>
-          <a:p>
-            <a:pPr>
-              <a:spcAft>
-                <a:spcPts val="600"/>
-              </a:spcAft>
-            </a:pPr>
-            <a:r>
-              <a:rPr sz="3000" b="1">
-                <a:solidFill>
-                  <a:srgbClr val="E8EDF5"/>
-                </a:solidFill>
-                <a:latin typeface="Arial"/>
-              </a:rPr>
-              <a:t>What happens when generation goes wrong</a:t>
-            </a:r>
-          </a:p>
-        </p:txBody>
-      </p:sp>
-      <p:sp>
-        <p:nvSpPr>
-          <p:cNvPr id="5" name="Rectangle 4"/>
-          <p:cNvSpPr/>
-          <p:nvPr/>
-        </p:nvSpPr>
-        <p:spPr>
-          <a:xfrm>
-            <a:off x="685800" y="1691640"/>
-            <a:ext cx="10789920" cy="9525"/>
-          </a:xfrm>
-          <a:prstGeom prst="rect">
-            <a:avLst/>
-          </a:prstGeom>
-          <a:solidFill>
-            <a:srgbClr val="1F2A40"/>
-          </a:solidFill>
-          <a:ln>
-            <a:noFill/>
-          </a:ln>
-          <a:effectLst/>
-        </p:spPr>
-        <p:style>
-          <a:lnRef idx="1">
-            <a:schemeClr val="accent1"/>
-          </a:lnRef>
-          <a:fillRef idx="3">
-            <a:schemeClr val="accent1"/>
-          </a:fillRef>
-          <a:effectRef idx="2">
-            <a:schemeClr val="accent1"/>
-          </a:effectRef>
-          <a:fontRef idx="minor">
-            <a:schemeClr val="lt1"/>
-          </a:fontRef>
-        </p:style>
-        <p:txBody>
-          <a:bodyPr rtlCol="0" anchor="ctr"/>
-          <a:lstStyle/>
-          <a:p>
-            <a:pPr algn="ctr"/>
-          </a:p>
-        </p:txBody>
-      </p:sp>
-      <p:sp>
-        <p:nvSpPr>
-          <p:cNvPr id="6" name="TextBox 5"/>
-          <p:cNvSpPr txBox="1"/>
-          <p:nvPr/>
-        </p:nvSpPr>
-        <p:spPr>
-          <a:xfrm>
-            <a:off x="685800" y="1965960"/>
-            <a:ext cx="10789920" cy="4023360"/>
-          </a:xfrm>
-          <a:prstGeom prst="rect">
-            <a:avLst/>
-          </a:prstGeom>
-          <a:noFill/>
-        </p:spPr>
-        <p:txBody>
-          <a:bodyPr wrap="square" lIns="0" rIns="0" tIns="0" bIns="0">
-            <a:spAutoFit/>
-          </a:bodyPr>
-          <a:lstStyle/>
-          <a:p>
-            <a:pPr>
-              <a:spcAft>
-                <a:spcPts val="300"/>
-              </a:spcAft>
-            </a:pPr>
-            <a:r>
-              <a:rPr sz="1700" b="1">
-                <a:solidFill>
-                  <a:srgbClr val="E8EDF5"/>
-                </a:solidFill>
-                <a:latin typeface="Arial"/>
-              </a:rPr>
-              <a:t>13 AST checks, run on parsed source</a:t>
-            </a:r>
-          </a:p>
-          <a:p>
-            <a:pPr>
-              <a:spcAft>
-                <a:spcPts val="1600"/>
-              </a:spcAft>
-            </a:pPr>
-            <a:r>
-              <a:rPr sz="1450" b="0">
-                <a:solidFill>
-                  <a:srgbClr val="8896B0"/>
-                </a:solidFill>
-                <a:latin typeface="Arial"/>
-              </a:rPr>
-              <a:t>no-hardcoded-credentials · no-dynamic-sql · env-for-secrets · no-dangerous-calls ·type-hints · docstrings · and seven more. The code is never imported to be checked.</a:t>
-            </a:r>
-          </a:p>
-          <a:p>
-            <a:pPr>
-              <a:spcAft>
-                <a:spcPts val="300"/>
-              </a:spcAft>
-            </a:pPr>
-            <a:r>
-              <a:rPr sz="1700" b="1">
-                <a:solidFill>
-                  <a:srgbClr val="E8EDF5"/>
-                </a:solidFill>
-                <a:latin typeface="Arial"/>
-              </a:rPr>
-              <a:t>A bounded repair loop with a regression guard</a:t>
-            </a:r>
-          </a:p>
-          <a:p>
-            <a:pPr>
-              <a:spcAft>
-                <a:spcPts val="1600"/>
-              </a:spcAft>
-            </a:pPr>
-            <a:r>
-              <a:rPr sz="1450" b="0">
-                <a:solidFill>
-                  <a:srgbClr val="8896B0"/>
-                </a:solidFill>
-                <a:latin typeface="Arial"/>
-              </a:rPr>
-              <a:t>At most three attempts, and a candidate is adopted only if it strictly reduces theerror count. The returned code is never worse than the input.</a:t>
-            </a:r>
-          </a:p>
-          <a:p>
-            <a:pPr>
-              <a:spcAft>
-                <a:spcPts val="300"/>
-              </a:spcAft>
-            </a:pPr>
-            <a:r>
-              <a:rPr sz="1700" b="1">
-                <a:solidFill>
-                  <a:srgbClr val="E8EDF5"/>
-                </a:solidFill>
-                <a:latin typeface="Arial"/>
-              </a:rPr>
-              <a:t>Rejection is a rendered outcome, not a crash</a:t>
-            </a:r>
-          </a:p>
-          <a:p>
-            <a:pPr>
-              <a:spcAft>
-                <a:spcPts val="1600"/>
-              </a:spcAft>
-            </a:pPr>
-            <a:r>
-              <a:rPr sz="1450" b="0">
-                <a:solidFill>
-                  <a:srgbClr val="8896B0"/>
-                </a:solidFill>
-                <a:latin typeface="Arial"/>
-              </a:rPr>
-              <a:t>A failing connector still comes back, with its findings, so a reviewer can see exactly what went wrong.</a:t>
-            </a:r>
-          </a:p>
-          <a:p>
-            <a:pPr>
-              <a:spcAft>
-                <a:spcPts val="300"/>
-              </a:spcAft>
-            </a:pPr>
-            <a:r>
-              <a:rPr sz="1700" b="1">
-                <a:solidFill>
-                  <a:srgbClr val="E8EDF5"/>
-                </a:solidFill>
-                <a:latin typeface="Arial"/>
-              </a:rPr>
-              <a:t>The checker is tested against bad input</a:t>
-            </a:r>
-          </a:p>
-          <a:p>
-            <a:pPr>
-              <a:spcAft>
-                <a:spcPts val="1600"/>
-              </a:spcAft>
-            </a:pPr>
-            <a:r>
-              <a:rPr sz="1450" b="0">
-                <a:solidFill>
-                  <a:srgbClr val="8896B0"/>
-                </a:solidFill>
-                <a:latin typeface="Arial"/>
-              </a:rPr>
-              <a:t>npm run generate:faults injects a hardcoded password, an eval(), an f-string SQL query. A checker that has only seen good input has demonstrated nothing.</a:t>
-            </a:r>
-          </a:p>
-        </p:txBody>
-      </p:sp>
-    </p:spTree>
-  </p:cSld>
-  <p:clrMapOvr>
-    <a:masterClrMapping/>
-  </p:clrMapOvr>
-</p:sld>
-</file>
-
-<file path=ppt/slides/slide14.xml><?xml version="1.0" encoding="utf-8"?>
-<p:sld xmlns:a="http://schemas.openxmlformats.org/drawingml/2006/main" xmlns:p="http://schemas.openxmlformats.org/presentationml/2006/main" xmlns:r="http://schemas.openxmlformats.org/officeDocument/2006/relationships">
-  <p:cSld>
-    <p:spTree>
-      <p:nvGrpSpPr>
-        <p:cNvPr id="1" name=""/>
-        <p:cNvGrpSpPr/>
-        <p:nvPr/>
-      </p:nvGrpSpPr>
-      <p:grpSpPr/>
-      <p:sp>
-        <p:nvSpPr>
-          <p:cNvPr id="2" name="Rectangle 1"/>
-          <p:cNvSpPr/>
-          <p:nvPr/>
-        </p:nvSpPr>
-        <p:spPr>
-          <a:xfrm>
-            <a:off x="0" y="0"/>
-            <a:ext cx="12191695" cy="6858000"/>
-          </a:xfrm>
-          <a:prstGeom prst="rect">
-            <a:avLst/>
-          </a:prstGeom>
-          <a:solidFill>
-            <a:srgbClr val="0A0F1C"/>
-          </a:solidFill>
-          <a:ln>
-            <a:noFill/>
-          </a:ln>
-          <a:effectLst/>
-        </p:spPr>
-        <p:style>
-          <a:lnRef idx="1">
-            <a:schemeClr val="accent1"/>
-          </a:lnRef>
-          <a:fillRef idx="3">
-            <a:schemeClr val="accent1"/>
-          </a:fillRef>
-          <a:effectRef idx="2">
-            <a:schemeClr val="accent1"/>
-          </a:effectRef>
-          <a:fontRef idx="minor">
-            <a:schemeClr val="lt1"/>
-          </a:fontRef>
-        </p:style>
-        <p:txBody>
-          <a:bodyPr rtlCol="0" anchor="ctr"/>
-          <a:lstStyle/>
-          <a:p>
-            <a:pPr algn="ctr"/>
-          </a:p>
-        </p:txBody>
-      </p:sp>
-      <p:sp>
-        <p:nvSpPr>
-          <p:cNvPr id="3" name="TextBox 2"/>
-          <p:cNvSpPr txBox="1"/>
-          <p:nvPr/>
-        </p:nvSpPr>
-        <p:spPr>
-          <a:xfrm>
-            <a:off x="685800" y="457200"/>
-            <a:ext cx="10058400" cy="274320"/>
-          </a:xfrm>
-          <a:prstGeom prst="rect">
-            <a:avLst/>
-          </a:prstGeom>
-          <a:noFill/>
-        </p:spPr>
-        <p:txBody>
-          <a:bodyPr wrap="square" lIns="0" rIns="0" tIns="0" bIns="0">
-            <a:spAutoFit/>
-          </a:bodyPr>
-          <a:lstStyle/>
-          <a:p>
-            <a:pPr>
-              <a:spcAft>
-                <a:spcPts val="600"/>
-              </a:spcAft>
-            </a:pPr>
-            <a:r>
-              <a:rPr sz="1100" b="1">
-                <a:solidFill>
-                  <a:srgbClr val="4B5975"/>
-                </a:solidFill>
-                <a:latin typeface="Courier New"/>
-              </a:rPr>
-              <a:t>DESIGN · SECURITY</a:t>
-            </a:r>
-          </a:p>
-        </p:txBody>
-      </p:sp>
-      <p:sp>
-        <p:nvSpPr>
-          <p:cNvPr id="4" name="TextBox 3"/>
-          <p:cNvSpPr txBox="1"/>
-          <p:nvPr/>
-        </p:nvSpPr>
-        <p:spPr>
-          <a:xfrm>
-            <a:off x="685800" y="777240"/>
-            <a:ext cx="10789920" cy="914400"/>
-          </a:xfrm>
-          <a:prstGeom prst="rect">
-            <a:avLst/>
-          </a:prstGeom>
-          <a:noFill/>
-        </p:spPr>
-        <p:txBody>
-          <a:bodyPr wrap="square" lIns="0" rIns="0" tIns="0" bIns="0">
-            <a:spAutoFit/>
-          </a:bodyPr>
-          <a:lstStyle/>
-          <a:p>
-            <a:pPr>
-              <a:spcAft>
-                <a:spcPts val="600"/>
-              </a:spcAft>
-            </a:pPr>
-            <a:r>
-              <a:rPr sz="3000" b="1">
-                <a:solidFill>
-                  <a:srgbClr val="E8EDF5"/>
-                </a:solidFill>
-                <a:latin typeface="Arial"/>
-              </a:rPr>
-              <a:t>Secrets never touch the artifact</a:t>
-            </a:r>
-          </a:p>
-        </p:txBody>
-      </p:sp>
-      <p:sp>
-        <p:nvSpPr>
-          <p:cNvPr id="5" name="Rectangle 4"/>
-          <p:cNvSpPr/>
-          <p:nvPr/>
-        </p:nvSpPr>
-        <p:spPr>
-          <a:xfrm>
-            <a:off x="685800" y="1691640"/>
-            <a:ext cx="10789920" cy="9525"/>
-          </a:xfrm>
-          <a:prstGeom prst="rect">
-            <a:avLst/>
-          </a:prstGeom>
-          <a:solidFill>
-            <a:srgbClr val="1F2A40"/>
-          </a:solidFill>
-          <a:ln>
-            <a:noFill/>
-          </a:ln>
-          <a:effectLst/>
-        </p:spPr>
-        <p:style>
-          <a:lnRef idx="1">
-            <a:schemeClr val="accent1"/>
-          </a:lnRef>
-          <a:fillRef idx="3">
-            <a:schemeClr val="accent1"/>
-          </a:fillRef>
-          <a:effectRef idx="2">
-            <a:schemeClr val="accent1"/>
-          </a:effectRef>
-          <a:fontRef idx="minor">
-            <a:schemeClr val="lt1"/>
-          </a:fontRef>
-        </p:style>
-        <p:txBody>
-          <a:bodyPr rtlCol="0" anchor="ctr"/>
-          <a:lstStyle/>
-          <a:p>
-            <a:pPr algn="ctr"/>
-          </a:p>
-        </p:txBody>
-      </p:sp>
-      <p:sp>
-        <p:nvSpPr>
-          <p:cNvPr id="6" name="TextBox 5"/>
-          <p:cNvSpPr txBox="1"/>
-          <p:nvPr/>
-        </p:nvSpPr>
-        <p:spPr>
-          <a:xfrm>
-            <a:off x="685800" y="1965960"/>
-            <a:ext cx="10789920" cy="4023360"/>
-          </a:xfrm>
-          <a:prstGeom prst="rect">
-            <a:avLst/>
-          </a:prstGeom>
-          <a:noFill/>
-        </p:spPr>
-        <p:txBody>
-          <a:bodyPr wrap="square" lIns="0" rIns="0" tIns="0" bIns="0">
-            <a:spAutoFit/>
-          </a:bodyPr>
-          <a:lstStyle/>
-          <a:p>
-            <a:pPr>
-              <a:spcAft>
-                <a:spcPts val="300"/>
-              </a:spcAft>
-            </a:pPr>
-            <a:r>
-              <a:rPr sz="1700" b="1">
-                <a:solidFill>
-                  <a:srgbClr val="E8EDF5"/>
-                </a:solidFill>
-                <a:latin typeface="Arial"/>
-              </a:rPr>
-              <a:t>Scrubbed at input</a:t>
-            </a:r>
-          </a:p>
-          <a:p>
-            <a:pPr>
-              <a:spcAft>
-                <a:spcPts val="1600"/>
-              </a:spcAft>
-            </a:pPr>
-            <a:r>
-              <a:rPr sz="1450" b="0">
-                <a:solidFill>
-                  <a:srgbClr val="8896B0"/>
-                </a:solidFill>
-                <a:latin typeface="Arial"/>
-              </a:rPr>
-              <a:t>Credentials are redacted before the prompt reaches the model, and the stored record holds the scrubbed copy — so a pasted password cannot resurface in a later response.</a:t>
-            </a:r>
-          </a:p>
-          <a:p>
-            <a:pPr>
-              <a:spcAft>
-                <a:spcPts val="300"/>
-              </a:spcAft>
-            </a:pPr>
-            <a:r>
-              <a:rPr sz="1700" b="1">
-                <a:solidFill>
-                  <a:srgbClr val="E8EDF5"/>
-                </a:solidFill>
-                <a:latin typeface="Arial"/>
-              </a:rPr>
-              <a:t>Structurally impossible in the output</a:t>
-            </a:r>
-          </a:p>
-          <a:p>
-            <a:pPr>
-              <a:spcAft>
-                <a:spcPts val="1600"/>
-              </a:spcAft>
-            </a:pPr>
-            <a:r>
-              <a:rPr sz="1450" b="0">
-                <a:solidFill>
-                  <a:srgbClr val="8896B0"/>
-                </a:solidFill>
-                <a:latin typeface="Arial"/>
-              </a:rPr>
-              <a:t>Two AST checks make a literal credential a rejection rather than a review comment.</a:t>
-            </a:r>
-          </a:p>
-          <a:p>
-            <a:pPr>
-              <a:spcAft>
-                <a:spcPts val="300"/>
-              </a:spcAft>
-            </a:pPr>
-            <a:r>
-              <a:rPr sz="1700" b="1">
-                <a:solidFill>
-                  <a:srgbClr val="E8EDF5"/>
-                </a:solidFill>
-                <a:latin typeface="Arial"/>
-              </a:rPr>
-              <a:t>Names only in the manifest</a:t>
-            </a:r>
-          </a:p>
-          <a:p>
-            <a:pPr>
-              <a:spcAft>
-                <a:spcPts val="1600"/>
-              </a:spcAft>
-            </a:pPr>
-            <a:r>
-              <a:rPr sz="1450" b="0">
-                <a:solidFill>
-                  <a:srgbClr val="8896B0"/>
-                </a:solidFill>
-                <a:latin typeface="Arial"/>
-              </a:rPr>
-              <a:t>The bundle records which environment variables are required, never their values.</a:t>
-            </a:r>
-          </a:p>
-          <a:p>
-            <a:pPr>
-              <a:spcAft>
-                <a:spcPts val="300"/>
-              </a:spcAft>
-            </a:pPr>
-            <a:r>
-              <a:rPr sz="1700" b="1">
-                <a:solidFill>
-                  <a:srgbClr val="E8EDF5"/>
-                </a:solidFill>
-                <a:latin typeface="Arial"/>
-              </a:rPr>
-              <a:t>Transient at test time</a:t>
-            </a:r>
-          </a:p>
-          <a:p>
-            <a:pPr>
-              <a:spcAft>
-                <a:spcPts val="1600"/>
-              </a:spcAft>
-            </a:pPr>
-            <a:r>
-              <a:rPr sz="1450" b="0">
-                <a:solidFill>
-                  <a:srgbClr val="8896B0"/>
-                </a:solidFill>
-                <a:latin typeface="Arial"/>
-              </a:rPr>
-              <a:t>The sandbox child gets an allowlisted environment — not a denylist, because a denylist exposes every newly added secret until someone remembers to update it.</a:t>
-            </a:r>
-          </a:p>
-        </p:txBody>
-      </p:sp>
-    </p:spTree>
-  </p:cSld>
-  <p:clrMapOvr>
-    <a:masterClrMapping/>
-  </p:clrMapOvr>
-</p:sld>
-</file>
-
 <file path=ppt/slides/slide15.xml><?xml version="1.0" encoding="utf-8"?>
 <p:sld xmlns:a="http://schemas.openxmlformats.org/drawingml/2006/main" xmlns:p="http://schemas.openxmlformats.org/presentationml/2006/main" xmlns:r="http://schemas.openxmlformats.org/officeDocument/2006/relationships">
   <p:cSld>
@@ -5836,7 +5574,7 @@
         </p:nvSpPr>
         <p:spPr>
           <a:xfrm>
-            <a:off x="685800" y="384048"/>
+            <a:off x="685800" y="457200"/>
             <a:ext cx="10058400" cy="274320"/>
           </a:xfrm>
           <a:prstGeom prst="rect">
@@ -5862,7 +5600,7 @@
                 </a:solidFill>
                 <a:latin typeface="Courier New"/>
               </a:rPr>
-              <a:t>DESIGN · PROVENANCE</a:t>
+              <a:t>DESIGN · QUALITY</a:t>
             </a:r>
           </a:p>
         </p:txBody>
@@ -5875,8 +5613,8 @@
         </p:nvSpPr>
         <p:spPr>
           <a:xfrm>
-            <a:off x="685800" y="658368"/>
-            <a:ext cx="10789920" cy="457200"/>
+            <a:off x="685800" y="777240"/>
+            <a:ext cx="10789920" cy="914400"/>
           </a:xfrm>
           <a:prstGeom prst="rect">
             <a:avLst/>
@@ -5895,41 +5633,61 @@
               </a:spcAft>
             </a:pPr>
             <a:r>
-              <a:rPr sz="2400" b="1">
+              <a:rPr sz="3000" b="1">
                 <a:solidFill>
                   <a:srgbClr val="E8EDF5"/>
                 </a:solidFill>
                 <a:latin typeface="Arial"/>
               </a:rPr>
-              <a:t>Every artifact answers 'where did this come from?'</a:t>
-            </a:r>
-          </a:p>
-        </p:txBody>
-      </p:sp>
-      <p:pic>
-        <p:nvPicPr>
-          <p:cNvPr id="5" name="Picture 4" descr="08-manifest.png"/>
-          <p:cNvPicPr>
-            <a:picLocks noChangeAspect="1"/>
-          </p:cNvPicPr>
-          <p:nvPr/>
-        </p:nvPicPr>
-        <p:blipFill>
-          <a:blip r:embed="rId2"/>
-          <a:stretch>
-            <a:fillRect/>
-          </a:stretch>
-        </p:blipFill>
-        <p:spPr>
-          <a:xfrm>
-            <a:off x="1853031" y="1188720"/>
-            <a:ext cx="8485632" cy="4773168"/>
-          </a:xfrm>
-          <a:prstGeom prst="rect">
-            <a:avLst/>
-          </a:prstGeom>
-        </p:spPr>
-      </p:pic>
+              <a:t>What happens when generation goes wrong</a:t>
+            </a:r>
+          </a:p>
+        </p:txBody>
+      </p:sp>
+      <p:sp>
+        <p:nvSpPr>
+          <p:cNvPr id="5" name="Rectangle 4"/>
+          <p:cNvSpPr/>
+          <p:nvPr/>
+        </p:nvSpPr>
+        <p:spPr>
+          <a:xfrm>
+            <a:off x="685800" y="1691640"/>
+            <a:ext cx="10789920" cy="9525"/>
+          </a:xfrm>
+          <a:prstGeom prst="rect">
+            <a:avLst/>
+          </a:prstGeom>
+          <a:solidFill>
+            <a:srgbClr val="1F2A40"/>
+          </a:solidFill>
+          <a:ln>
+            <a:noFill/>
+          </a:ln>
+          <a:effectLst/>
+        </p:spPr>
+        <p:style>
+          <a:lnRef idx="1">
+            <a:schemeClr val="accent1"/>
+          </a:lnRef>
+          <a:fillRef idx="3">
+            <a:schemeClr val="accent1"/>
+          </a:fillRef>
+          <a:effectRef idx="2">
+            <a:schemeClr val="accent1"/>
+          </a:effectRef>
+          <a:fontRef idx="minor">
+            <a:schemeClr val="lt1"/>
+          </a:fontRef>
+        </p:style>
+        <p:txBody>
+          <a:bodyPr rtlCol="0" anchor="ctr"/>
+          <a:lstStyle/>
+          <a:p>
+            <a:pPr algn="ctr"/>
+          </a:p>
+        </p:txBody>
+      </p:sp>
       <p:sp>
         <p:nvSpPr>
           <p:cNvPr id="6" name="TextBox 5"/>
@@ -5938,8 +5696,8 @@
         </p:nvSpPr>
         <p:spPr>
           <a:xfrm>
-            <a:off x="685800" y="6108192"/>
-            <a:ext cx="10789920" cy="502920"/>
+            <a:off x="685800" y="1965960"/>
+            <a:ext cx="10789920" cy="4023360"/>
           </a:xfrm>
           <a:prstGeom prst="rect">
             <a:avLst/>
@@ -5954,17 +5712,129 @@
           <a:p>
             <a:pPr>
               <a:spcAft>
-                <a:spcPts val="600"/>
-              </a:spcAft>
-            </a:pPr>
-            <a:r>
-              <a:rPr sz="1300" b="0">
+                <a:spcPts val="300"/>
+              </a:spcAft>
+            </a:pPr>
+            <a:r>
+              <a:rPr sz="1700" b="1">
+                <a:solidFill>
+                  <a:srgbClr val="E8EDF5"/>
+                </a:solidFill>
+                <a:latin typeface="Arial"/>
+              </a:rPr>
+              <a:t>13 AST checks, run on parsed source</a:t>
+            </a:r>
+          </a:p>
+          <a:p>
+            <a:pPr>
+              <a:spcAft>
+                <a:spcPts val="1600"/>
+              </a:spcAft>
+            </a:pPr>
+            <a:r>
+              <a:rPr sz="1450" b="0">
                 <a:solidFill>
                   <a:srgbClr val="8896B0"/>
                 </a:solidFill>
                 <a:latin typeface="Arial"/>
               </a:rPr>
-              <a:t>Request → spec checksum → template version → code checksum → artifact version. Packaging is byte-reproducible: the zip uses a fixed timestamp, not the clock.</a:t>
+              <a:t>no-hardcoded-credentials · no-dynamic-sql · env-for-secrets · no-dangerous-calls ·type-hints · docstrings · and seven more. The code is never imported to be checked.</a:t>
+            </a:r>
+          </a:p>
+          <a:p>
+            <a:pPr>
+              <a:spcAft>
+                <a:spcPts val="300"/>
+              </a:spcAft>
+            </a:pPr>
+            <a:r>
+              <a:rPr sz="1700" b="1">
+                <a:solidFill>
+                  <a:srgbClr val="E8EDF5"/>
+                </a:solidFill>
+                <a:latin typeface="Arial"/>
+              </a:rPr>
+              <a:t>A bounded repair loop with a regression guard</a:t>
+            </a:r>
+          </a:p>
+          <a:p>
+            <a:pPr>
+              <a:spcAft>
+                <a:spcPts val="1600"/>
+              </a:spcAft>
+            </a:pPr>
+            <a:r>
+              <a:rPr sz="1450" b="0">
+                <a:solidFill>
+                  <a:srgbClr val="8896B0"/>
+                </a:solidFill>
+                <a:latin typeface="Arial"/>
+              </a:rPr>
+              <a:t>At most three attempts, and a candidate is adopted only if it strictly reduces theerror count. The returned code is never worse than the input.</a:t>
+            </a:r>
+          </a:p>
+          <a:p>
+            <a:pPr>
+              <a:spcAft>
+                <a:spcPts val="300"/>
+              </a:spcAft>
+            </a:pPr>
+            <a:r>
+              <a:rPr sz="1700" b="1">
+                <a:solidFill>
+                  <a:srgbClr val="E8EDF5"/>
+                </a:solidFill>
+                <a:latin typeface="Arial"/>
+              </a:rPr>
+              <a:t>Rejection is a rendered outcome, not a crash</a:t>
+            </a:r>
+          </a:p>
+          <a:p>
+            <a:pPr>
+              <a:spcAft>
+                <a:spcPts val="1600"/>
+              </a:spcAft>
+            </a:pPr>
+            <a:r>
+              <a:rPr sz="1450" b="0">
+                <a:solidFill>
+                  <a:srgbClr val="8896B0"/>
+                </a:solidFill>
+                <a:latin typeface="Arial"/>
+              </a:rPr>
+              <a:t>A failing connector still comes back, with its findings, so a reviewer can see exactly what went wrong.</a:t>
+            </a:r>
+          </a:p>
+          <a:p>
+            <a:pPr>
+              <a:spcAft>
+                <a:spcPts val="300"/>
+              </a:spcAft>
+            </a:pPr>
+            <a:r>
+              <a:rPr sz="1700" b="1">
+                <a:solidFill>
+                  <a:srgbClr val="E8EDF5"/>
+                </a:solidFill>
+                <a:latin typeface="Arial"/>
+              </a:rPr>
+              <a:t>The checker is tested against bad input</a:t>
+            </a:r>
+          </a:p>
+          <a:p>
+            <a:pPr>
+              <a:spcAft>
+                <a:spcPts val="1600"/>
+              </a:spcAft>
+            </a:pPr>
+            <a:r>
+              <a:rPr sz="1450" b="0">
+                <a:solidFill>
+                  <a:srgbClr val="8896B0"/>
+                </a:solidFill>
+                <a:latin typeface="Arial"/>
+              </a:rPr>
+              <a:t>npm run generate:faults injects a hardcoded password, an eval(), an f-string SQL query. A checker that has only seen good input has demonstrated nothing.</a:t>
             </a:r>
           </a:p>
         </p:txBody>
@@ -6065,7 +5935,7 @@
                 </a:solidFill>
                 <a:latin typeface="Courier New"/>
               </a:rPr>
-              <a:t>DESIGN · INTERFACE</a:t>
+              <a:t>DESIGN · SECURITY</a:t>
             </a:r>
           </a:p>
         </p:txBody>
@@ -6104,7 +5974,7 @@
                 </a:solidFill>
                 <a:latin typeface="Arial"/>
               </a:rPr>
-              <a:t>Why the UI looks like a conversation</a:t>
+              <a:t>Secrets never touch the artifact</a:t>
             </a:r>
           </a:p>
         </p:txBody>
@@ -6187,7 +6057,7 @@
                 </a:solidFill>
                 <a:latin typeface="Arial"/>
               </a:rPr>
-              <a:t>The interaction is a dialogue, so the interface is one</a:t>
+              <a:t>Scrubbed at input</a:t>
             </a:r>
           </a:p>
           <a:p>
@@ -6203,7 +6073,7 @@
                 </a:solidFill>
                 <a:latin typeface="Arial"/>
               </a:rPr>
-              <a:t>The agent asks when it is unsure. A form cannot do that; a thread can.</a:t>
+              <a:t>Credentials are redacted before the prompt reaches the model, and the stored record holds the scrubbed copy — so a pasted password cannot resurface in a later response.</a:t>
             </a:r>
           </a:p>
           <a:p>
@@ -6219,7 +6089,7 @@
                 </a:solidFill>
                 <a:latin typeface="Arial"/>
               </a:rPr>
-              <a:t>Evidence sits beside the conversation, not inside it</a:t>
+              <a:t>Structurally impossible in the output</a:t>
             </a:r>
           </a:p>
           <a:p>
@@ -6235,7 +6105,7 @@
                 </a:solidFill>
                 <a:latin typeface="Arial"/>
               </a:rPr>
-              <a:t>Standards, code, connection and artifact live in a persistent right-hand panel, so a reviewer can check the output without losing the thread.</a:t>
+              <a:t>Two AST checks make a literal credential a rejection rather than a review comment.</a:t>
             </a:r>
           </a:p>
           <a:p>
@@ -6251,7 +6121,7 @@
                 </a:solidFill>
                 <a:latin typeface="Arial"/>
               </a:rPr>
-              <a:t>The server owns state; the thread is a log of how it was reached</a:t>
+              <a:t>Names only in the manifest</a:t>
             </a:r>
           </a:p>
           <a:p>
@@ -6267,46 +6137,39 @@
                 </a:solidFill>
                 <a:latin typeface="Arial"/>
               </a:rPr>
-              <a:t>Reopening a request replays it from stored state rather than a saved transcript — the backend stores state, not conversation, and pretending otherwise would drift.</a:t>
-            </a:r>
-          </a:p>
-        </p:txBody>
-      </p:sp>
-      <p:sp>
-        <p:nvSpPr>
-          <p:cNvPr id="7" name="TextBox 6"/>
-          <p:cNvSpPr txBox="1"/>
-          <p:nvPr/>
-        </p:nvSpPr>
-        <p:spPr>
-          <a:xfrm>
-            <a:off x="685800" y="5989320"/>
-            <a:ext cx="10789920" cy="548640"/>
-          </a:xfrm>
-          <a:prstGeom prst="rect">
-            <a:avLst/>
-          </a:prstGeom>
-          <a:noFill/>
-        </p:spPr>
-        <p:txBody>
-          <a:bodyPr wrap="square" lIns="0" rIns="0" tIns="0" bIns="0">
-            <a:spAutoFit/>
-          </a:bodyPr>
-          <a:lstStyle/>
+              <a:t>The bundle records which environment variables are required, never their values.</a:t>
+            </a:r>
+          </a:p>
           <a:p>
             <a:pPr>
               <a:spcAft>
-                <a:spcPts val="600"/>
-              </a:spcAft>
-            </a:pPr>
-            <a:r>
-              <a:rPr sz="1250" b="0">
+                <a:spcPts val="300"/>
+              </a:spcAft>
+            </a:pPr>
+            <a:r>
+              <a:rPr sz="1700" b="1">
+                <a:solidFill>
+                  <a:srgbClr val="E8EDF5"/>
+                </a:solidFill>
+                <a:latin typeface="Arial"/>
+              </a:rPr>
+              <a:t>Transient at test time</a:t>
+            </a:r>
+          </a:p>
+          <a:p>
+            <a:pPr>
+              <a:spcAft>
+                <a:spcPts val="1600"/>
+              </a:spcAft>
+            </a:pPr>
+            <a:r>
+              <a:rPr sz="1450" b="0">
                 <a:solidFill>
                   <a:srgbClr val="8896B0"/>
                 </a:solidFill>
-                <a:latin typeface="Courier New"/>
-              </a:rPr>
-              <a:t>React 18 + TypeScript · built to static files · served by the API process · no CORS anywhere</a:t>
+                <a:latin typeface="Arial"/>
+              </a:rPr>
+              <a:t>The sandbox child gets an allowlisted environment — not a denylist, because a denylist exposes every newly added secret until someone remembers to update it.</a:t>
             </a:r>
           </a:p>
         </p:txBody>
@@ -6320,6 +6183,551 @@
 </file>
 
 <file path=ppt/slides/slide17.xml><?xml version="1.0" encoding="utf-8"?>
+<p:sld xmlns:a="http://schemas.openxmlformats.org/drawingml/2006/main" xmlns:p="http://schemas.openxmlformats.org/presentationml/2006/main" xmlns:r="http://schemas.openxmlformats.org/officeDocument/2006/relationships">
+  <p:cSld>
+    <p:spTree>
+      <p:nvGrpSpPr>
+        <p:cNvPr id="1" name=""/>
+        <p:cNvGrpSpPr/>
+        <p:nvPr/>
+      </p:nvGrpSpPr>
+      <p:grpSpPr/>
+      <p:sp>
+        <p:nvSpPr>
+          <p:cNvPr id="2" name="Rectangle 1"/>
+          <p:cNvSpPr/>
+          <p:nvPr/>
+        </p:nvSpPr>
+        <p:spPr>
+          <a:xfrm>
+            <a:off x="0" y="0"/>
+            <a:ext cx="12191695" cy="6858000"/>
+          </a:xfrm>
+          <a:prstGeom prst="rect">
+            <a:avLst/>
+          </a:prstGeom>
+          <a:solidFill>
+            <a:srgbClr val="0A0F1C"/>
+          </a:solidFill>
+          <a:ln>
+            <a:noFill/>
+          </a:ln>
+          <a:effectLst/>
+        </p:spPr>
+        <p:style>
+          <a:lnRef idx="1">
+            <a:schemeClr val="accent1"/>
+          </a:lnRef>
+          <a:fillRef idx="3">
+            <a:schemeClr val="accent1"/>
+          </a:fillRef>
+          <a:effectRef idx="2">
+            <a:schemeClr val="accent1"/>
+          </a:effectRef>
+          <a:fontRef idx="minor">
+            <a:schemeClr val="lt1"/>
+          </a:fontRef>
+        </p:style>
+        <p:txBody>
+          <a:bodyPr rtlCol="0" anchor="ctr"/>
+          <a:lstStyle/>
+          <a:p>
+            <a:pPr algn="ctr"/>
+          </a:p>
+        </p:txBody>
+      </p:sp>
+      <p:sp>
+        <p:nvSpPr>
+          <p:cNvPr id="3" name="TextBox 2"/>
+          <p:cNvSpPr txBox="1"/>
+          <p:nvPr/>
+        </p:nvSpPr>
+        <p:spPr>
+          <a:xfrm>
+            <a:off x="685800" y="384048"/>
+            <a:ext cx="10058400" cy="274320"/>
+          </a:xfrm>
+          <a:prstGeom prst="rect">
+            <a:avLst/>
+          </a:prstGeom>
+          <a:noFill/>
+        </p:spPr>
+        <p:txBody>
+          <a:bodyPr wrap="square" lIns="0" rIns="0" tIns="0" bIns="0">
+            <a:spAutoFit/>
+          </a:bodyPr>
+          <a:lstStyle/>
+          <a:p>
+            <a:pPr>
+              <a:spcAft>
+                <a:spcPts val="600"/>
+              </a:spcAft>
+            </a:pPr>
+            <a:r>
+              <a:rPr sz="1100" b="1">
+                <a:solidFill>
+                  <a:srgbClr val="4B5975"/>
+                </a:solidFill>
+                <a:latin typeface="Courier New"/>
+              </a:rPr>
+              <a:t>DESIGN · PROVENANCE</a:t>
+            </a:r>
+          </a:p>
+        </p:txBody>
+      </p:sp>
+      <p:sp>
+        <p:nvSpPr>
+          <p:cNvPr id="4" name="TextBox 3"/>
+          <p:cNvSpPr txBox="1"/>
+          <p:nvPr/>
+        </p:nvSpPr>
+        <p:spPr>
+          <a:xfrm>
+            <a:off x="685800" y="658368"/>
+            <a:ext cx="10789920" cy="457200"/>
+          </a:xfrm>
+          <a:prstGeom prst="rect">
+            <a:avLst/>
+          </a:prstGeom>
+          <a:noFill/>
+        </p:spPr>
+        <p:txBody>
+          <a:bodyPr wrap="square" lIns="0" rIns="0" tIns="0" bIns="0">
+            <a:spAutoFit/>
+          </a:bodyPr>
+          <a:lstStyle/>
+          <a:p>
+            <a:pPr>
+              <a:spcAft>
+                <a:spcPts val="600"/>
+              </a:spcAft>
+            </a:pPr>
+            <a:r>
+              <a:rPr sz="2400" b="1">
+                <a:solidFill>
+                  <a:srgbClr val="E8EDF5"/>
+                </a:solidFill>
+                <a:latin typeface="Arial"/>
+              </a:rPr>
+              <a:t>Every artifact answers 'where did this come from?'</a:t>
+            </a:r>
+          </a:p>
+        </p:txBody>
+      </p:sp>
+      <p:pic>
+        <p:nvPicPr>
+          <p:cNvPr id="5" name="Picture 4" descr="08-manifest.png"/>
+          <p:cNvPicPr>
+            <a:picLocks noChangeAspect="1"/>
+          </p:cNvPicPr>
+          <p:nvPr/>
+        </p:nvPicPr>
+        <p:blipFill>
+          <a:blip r:embed="rId2"/>
+          <a:stretch>
+            <a:fillRect/>
+          </a:stretch>
+        </p:blipFill>
+        <p:spPr>
+          <a:xfrm>
+            <a:off x="1853031" y="1188720"/>
+            <a:ext cx="8485632" cy="4773168"/>
+          </a:xfrm>
+          <a:prstGeom prst="rect">
+            <a:avLst/>
+          </a:prstGeom>
+        </p:spPr>
+      </p:pic>
+      <p:sp>
+        <p:nvSpPr>
+          <p:cNvPr id="6" name="TextBox 5"/>
+          <p:cNvSpPr txBox="1"/>
+          <p:nvPr/>
+        </p:nvSpPr>
+        <p:spPr>
+          <a:xfrm>
+            <a:off x="685800" y="6108192"/>
+            <a:ext cx="10789920" cy="502920"/>
+          </a:xfrm>
+          <a:prstGeom prst="rect">
+            <a:avLst/>
+          </a:prstGeom>
+          <a:noFill/>
+        </p:spPr>
+        <p:txBody>
+          <a:bodyPr wrap="square" lIns="0" rIns="0" tIns="0" bIns="0">
+            <a:spAutoFit/>
+          </a:bodyPr>
+          <a:lstStyle/>
+          <a:p>
+            <a:pPr>
+              <a:spcAft>
+                <a:spcPts val="600"/>
+              </a:spcAft>
+            </a:pPr>
+            <a:r>
+              <a:rPr sz="1300" b="0">
+                <a:solidFill>
+                  <a:srgbClr val="8896B0"/>
+                </a:solidFill>
+                <a:latin typeface="Arial"/>
+              </a:rPr>
+              <a:t>Request → spec checksum → template version → code checksum → artifact version. Packaging is byte-reproducible: the zip uses a fixed timestamp, not the clock.</a:t>
+            </a:r>
+          </a:p>
+        </p:txBody>
+      </p:sp>
+    </p:spTree>
+  </p:cSld>
+  <p:clrMapOvr>
+    <a:masterClrMapping/>
+  </p:clrMapOvr>
+</p:sld>
+</file>
+
+<file path=ppt/slides/slide18.xml><?xml version="1.0" encoding="utf-8"?>
+<p:sld xmlns:a="http://schemas.openxmlformats.org/drawingml/2006/main" xmlns:p="http://schemas.openxmlformats.org/presentationml/2006/main" xmlns:r="http://schemas.openxmlformats.org/officeDocument/2006/relationships">
+  <p:cSld>
+    <p:spTree>
+      <p:nvGrpSpPr>
+        <p:cNvPr id="1" name=""/>
+        <p:cNvGrpSpPr/>
+        <p:nvPr/>
+      </p:nvGrpSpPr>
+      <p:grpSpPr/>
+      <p:sp>
+        <p:nvSpPr>
+          <p:cNvPr id="2" name="Rectangle 1"/>
+          <p:cNvSpPr/>
+          <p:nvPr/>
+        </p:nvSpPr>
+        <p:spPr>
+          <a:xfrm>
+            <a:off x="0" y="0"/>
+            <a:ext cx="12191695" cy="6858000"/>
+          </a:xfrm>
+          <a:prstGeom prst="rect">
+            <a:avLst/>
+          </a:prstGeom>
+          <a:solidFill>
+            <a:srgbClr val="0A0F1C"/>
+          </a:solidFill>
+          <a:ln>
+            <a:noFill/>
+          </a:ln>
+          <a:effectLst/>
+        </p:spPr>
+        <p:style>
+          <a:lnRef idx="1">
+            <a:schemeClr val="accent1"/>
+          </a:lnRef>
+          <a:fillRef idx="3">
+            <a:schemeClr val="accent1"/>
+          </a:fillRef>
+          <a:effectRef idx="2">
+            <a:schemeClr val="accent1"/>
+          </a:effectRef>
+          <a:fontRef idx="minor">
+            <a:schemeClr val="lt1"/>
+          </a:fontRef>
+        </p:style>
+        <p:txBody>
+          <a:bodyPr rtlCol="0" anchor="ctr"/>
+          <a:lstStyle/>
+          <a:p>
+            <a:pPr algn="ctr"/>
+          </a:p>
+        </p:txBody>
+      </p:sp>
+      <p:sp>
+        <p:nvSpPr>
+          <p:cNvPr id="3" name="TextBox 2"/>
+          <p:cNvSpPr txBox="1"/>
+          <p:nvPr/>
+        </p:nvSpPr>
+        <p:spPr>
+          <a:xfrm>
+            <a:off x="685800" y="457200"/>
+            <a:ext cx="10058400" cy="274320"/>
+          </a:xfrm>
+          <a:prstGeom prst="rect">
+            <a:avLst/>
+          </a:prstGeom>
+          <a:noFill/>
+        </p:spPr>
+        <p:txBody>
+          <a:bodyPr wrap="square" lIns="0" rIns="0" tIns="0" bIns="0">
+            <a:spAutoFit/>
+          </a:bodyPr>
+          <a:lstStyle/>
+          <a:p>
+            <a:pPr>
+              <a:spcAft>
+                <a:spcPts val="600"/>
+              </a:spcAft>
+            </a:pPr>
+            <a:r>
+              <a:rPr sz="1100" b="1">
+                <a:solidFill>
+                  <a:srgbClr val="4B5975"/>
+                </a:solidFill>
+                <a:latin typeface="Courier New"/>
+              </a:rPr>
+              <a:t>DESIGN · INTERFACE</a:t>
+            </a:r>
+          </a:p>
+        </p:txBody>
+      </p:sp>
+      <p:sp>
+        <p:nvSpPr>
+          <p:cNvPr id="4" name="TextBox 3"/>
+          <p:cNvSpPr txBox="1"/>
+          <p:nvPr/>
+        </p:nvSpPr>
+        <p:spPr>
+          <a:xfrm>
+            <a:off x="685800" y="777240"/>
+            <a:ext cx="10789920" cy="914400"/>
+          </a:xfrm>
+          <a:prstGeom prst="rect">
+            <a:avLst/>
+          </a:prstGeom>
+          <a:noFill/>
+        </p:spPr>
+        <p:txBody>
+          <a:bodyPr wrap="square" lIns="0" rIns="0" tIns="0" bIns="0">
+            <a:spAutoFit/>
+          </a:bodyPr>
+          <a:lstStyle/>
+          <a:p>
+            <a:pPr>
+              <a:spcAft>
+                <a:spcPts val="600"/>
+              </a:spcAft>
+            </a:pPr>
+            <a:r>
+              <a:rPr sz="3000" b="1">
+                <a:solidFill>
+                  <a:srgbClr val="E8EDF5"/>
+                </a:solidFill>
+                <a:latin typeface="Arial"/>
+              </a:rPr>
+              <a:t>Why the UI looks like a conversation</a:t>
+            </a:r>
+          </a:p>
+        </p:txBody>
+      </p:sp>
+      <p:sp>
+        <p:nvSpPr>
+          <p:cNvPr id="5" name="Rectangle 4"/>
+          <p:cNvSpPr/>
+          <p:nvPr/>
+        </p:nvSpPr>
+        <p:spPr>
+          <a:xfrm>
+            <a:off x="685800" y="1691640"/>
+            <a:ext cx="10789920" cy="9525"/>
+          </a:xfrm>
+          <a:prstGeom prst="rect">
+            <a:avLst/>
+          </a:prstGeom>
+          <a:solidFill>
+            <a:srgbClr val="1F2A40"/>
+          </a:solidFill>
+          <a:ln>
+            <a:noFill/>
+          </a:ln>
+          <a:effectLst/>
+        </p:spPr>
+        <p:style>
+          <a:lnRef idx="1">
+            <a:schemeClr val="accent1"/>
+          </a:lnRef>
+          <a:fillRef idx="3">
+            <a:schemeClr val="accent1"/>
+          </a:fillRef>
+          <a:effectRef idx="2">
+            <a:schemeClr val="accent1"/>
+          </a:effectRef>
+          <a:fontRef idx="minor">
+            <a:schemeClr val="lt1"/>
+          </a:fontRef>
+        </p:style>
+        <p:txBody>
+          <a:bodyPr rtlCol="0" anchor="ctr"/>
+          <a:lstStyle/>
+          <a:p>
+            <a:pPr algn="ctr"/>
+          </a:p>
+        </p:txBody>
+      </p:sp>
+      <p:sp>
+        <p:nvSpPr>
+          <p:cNvPr id="6" name="TextBox 5"/>
+          <p:cNvSpPr txBox="1"/>
+          <p:nvPr/>
+        </p:nvSpPr>
+        <p:spPr>
+          <a:xfrm>
+            <a:off x="685800" y="1965960"/>
+            <a:ext cx="10789920" cy="4023360"/>
+          </a:xfrm>
+          <a:prstGeom prst="rect">
+            <a:avLst/>
+          </a:prstGeom>
+          <a:noFill/>
+        </p:spPr>
+        <p:txBody>
+          <a:bodyPr wrap="square" lIns="0" rIns="0" tIns="0" bIns="0">
+            <a:spAutoFit/>
+          </a:bodyPr>
+          <a:lstStyle/>
+          <a:p>
+            <a:pPr>
+              <a:spcAft>
+                <a:spcPts val="300"/>
+              </a:spcAft>
+            </a:pPr>
+            <a:r>
+              <a:rPr sz="1700" b="1">
+                <a:solidFill>
+                  <a:srgbClr val="E8EDF5"/>
+                </a:solidFill>
+                <a:latin typeface="Arial"/>
+              </a:rPr>
+              <a:t>The interaction is a dialogue, so the interface is one</a:t>
+            </a:r>
+          </a:p>
+          <a:p>
+            <a:pPr>
+              <a:spcAft>
+                <a:spcPts val="1600"/>
+              </a:spcAft>
+            </a:pPr>
+            <a:r>
+              <a:rPr sz="1450" b="0">
+                <a:solidFill>
+                  <a:srgbClr val="8896B0"/>
+                </a:solidFill>
+                <a:latin typeface="Arial"/>
+              </a:rPr>
+              <a:t>The agent asks when it is unsure. A form cannot do that; a thread can.</a:t>
+            </a:r>
+          </a:p>
+          <a:p>
+            <a:pPr>
+              <a:spcAft>
+                <a:spcPts val="300"/>
+              </a:spcAft>
+            </a:pPr>
+            <a:r>
+              <a:rPr sz="1700" b="1">
+                <a:solidFill>
+                  <a:srgbClr val="E8EDF5"/>
+                </a:solidFill>
+                <a:latin typeface="Arial"/>
+              </a:rPr>
+              <a:t>Evidence sits beside the conversation, not inside it</a:t>
+            </a:r>
+          </a:p>
+          <a:p>
+            <a:pPr>
+              <a:spcAft>
+                <a:spcPts val="1600"/>
+              </a:spcAft>
+            </a:pPr>
+            <a:r>
+              <a:rPr sz="1450" b="0">
+                <a:solidFill>
+                  <a:srgbClr val="8896B0"/>
+                </a:solidFill>
+                <a:latin typeface="Arial"/>
+              </a:rPr>
+              <a:t>Standards, code, connection and artifact live in a persistent right-hand panel, so a reviewer can check the output without losing the thread.</a:t>
+            </a:r>
+          </a:p>
+          <a:p>
+            <a:pPr>
+              <a:spcAft>
+                <a:spcPts val="300"/>
+              </a:spcAft>
+            </a:pPr>
+            <a:r>
+              <a:rPr sz="1700" b="1">
+                <a:solidFill>
+                  <a:srgbClr val="E8EDF5"/>
+                </a:solidFill>
+                <a:latin typeface="Arial"/>
+              </a:rPr>
+              <a:t>The server owns state; the thread is a log of how it was reached</a:t>
+            </a:r>
+          </a:p>
+          <a:p>
+            <a:pPr>
+              <a:spcAft>
+                <a:spcPts val="1600"/>
+              </a:spcAft>
+            </a:pPr>
+            <a:r>
+              <a:rPr sz="1450" b="0">
+                <a:solidFill>
+                  <a:srgbClr val="8896B0"/>
+                </a:solidFill>
+                <a:latin typeface="Arial"/>
+              </a:rPr>
+              <a:t>Reopening a request replays it from stored state rather than a saved transcript — the backend stores state, not conversation, and pretending otherwise would drift.</a:t>
+            </a:r>
+          </a:p>
+        </p:txBody>
+      </p:sp>
+      <p:sp>
+        <p:nvSpPr>
+          <p:cNvPr id="7" name="TextBox 6"/>
+          <p:cNvSpPr txBox="1"/>
+          <p:nvPr/>
+        </p:nvSpPr>
+        <p:spPr>
+          <a:xfrm>
+            <a:off x="685800" y="5989320"/>
+            <a:ext cx="10789920" cy="548640"/>
+          </a:xfrm>
+          <a:prstGeom prst="rect">
+            <a:avLst/>
+          </a:prstGeom>
+          <a:noFill/>
+        </p:spPr>
+        <p:txBody>
+          <a:bodyPr wrap="square" lIns="0" rIns="0" tIns="0" bIns="0">
+            <a:spAutoFit/>
+          </a:bodyPr>
+          <a:lstStyle/>
+          <a:p>
+            <a:pPr>
+              <a:spcAft>
+                <a:spcPts val="600"/>
+              </a:spcAft>
+            </a:pPr>
+            <a:r>
+              <a:rPr sz="1250" b="0">
+                <a:solidFill>
+                  <a:srgbClr val="8896B0"/>
+                </a:solidFill>
+                <a:latin typeface="Courier New"/>
+              </a:rPr>
+              <a:t>React 18 + TypeScript · built to static files · served by the API process · no CORS anywhere</a:t>
+            </a:r>
+          </a:p>
+        </p:txBody>
+      </p:sp>
+    </p:spTree>
+  </p:cSld>
+  <p:clrMapOvr>
+    <a:masterClrMapping/>
+  </p:clrMapOvr>
+</p:sld>
+</file>
+
+<file path=ppt/slides/slide19.xml><?xml version="1.0" encoding="utf-8"?>
 <p:sld xmlns:a="http://schemas.openxmlformats.org/drawingml/2006/main" xmlns:p="http://schemas.openxmlformats.org/presentationml/2006/main" xmlns:r="http://schemas.openxmlformats.org/officeDocument/2006/relationships">
   <p:cSld>
     <p:spTree>
@@ -7465,550 +7873,6 @@
 </p:sld>
 </file>
 
-<file path=ppt/slides/slide18.xml><?xml version="1.0" encoding="utf-8"?>
-<p:sld xmlns:a="http://schemas.openxmlformats.org/drawingml/2006/main" xmlns:p="http://schemas.openxmlformats.org/presentationml/2006/main" xmlns:r="http://schemas.openxmlformats.org/officeDocument/2006/relationships">
-  <p:cSld>
-    <p:spTree>
-      <p:nvGrpSpPr>
-        <p:cNvPr id="1" name=""/>
-        <p:cNvGrpSpPr/>
-        <p:nvPr/>
-      </p:nvGrpSpPr>
-      <p:grpSpPr/>
-      <p:sp>
-        <p:nvSpPr>
-          <p:cNvPr id="2" name="Rectangle 1"/>
-          <p:cNvSpPr/>
-          <p:nvPr/>
-        </p:nvSpPr>
-        <p:spPr>
-          <a:xfrm>
-            <a:off x="0" y="0"/>
-            <a:ext cx="12191695" cy="6858000"/>
-          </a:xfrm>
-          <a:prstGeom prst="rect">
-            <a:avLst/>
-          </a:prstGeom>
-          <a:solidFill>
-            <a:srgbClr val="0A0F1C"/>
-          </a:solidFill>
-          <a:ln>
-            <a:noFill/>
-          </a:ln>
-          <a:effectLst/>
-        </p:spPr>
-        <p:style>
-          <a:lnRef idx="1">
-            <a:schemeClr val="accent1"/>
-          </a:lnRef>
-          <a:fillRef idx="3">
-            <a:schemeClr val="accent1"/>
-          </a:fillRef>
-          <a:effectRef idx="2">
-            <a:schemeClr val="accent1"/>
-          </a:effectRef>
-          <a:fontRef idx="minor">
-            <a:schemeClr val="lt1"/>
-          </a:fontRef>
-        </p:style>
-        <p:txBody>
-          <a:bodyPr rtlCol="0" anchor="ctr"/>
-          <a:lstStyle/>
-          <a:p>
-            <a:pPr algn="ctr"/>
-          </a:p>
-        </p:txBody>
-      </p:sp>
-      <p:sp>
-        <p:nvSpPr>
-          <p:cNvPr id="3" name="TextBox 2"/>
-          <p:cNvSpPr txBox="1"/>
-          <p:nvPr/>
-        </p:nvSpPr>
-        <p:spPr>
-          <a:xfrm>
-            <a:off x="685800" y="457200"/>
-            <a:ext cx="10058400" cy="274320"/>
-          </a:xfrm>
-          <a:prstGeom prst="rect">
-            <a:avLst/>
-          </a:prstGeom>
-          <a:noFill/>
-        </p:spPr>
-        <p:txBody>
-          <a:bodyPr wrap="square" lIns="0" rIns="0" tIns="0" bIns="0">
-            <a:spAutoFit/>
-          </a:bodyPr>
-          <a:lstStyle/>
-          <a:p>
-            <a:pPr>
-              <a:spcAft>
-                <a:spcPts val="600"/>
-              </a:spcAft>
-            </a:pPr>
-            <a:r>
-              <a:rPr sz="1100" b="1">
-                <a:solidFill>
-                  <a:srgbClr val="4B5975"/>
-                </a:solidFill>
-                <a:latin typeface="Courier New"/>
-              </a:rPr>
-              <a:t>ROADMAP</a:t>
-            </a:r>
-          </a:p>
-        </p:txBody>
-      </p:sp>
-      <p:sp>
-        <p:nvSpPr>
-          <p:cNvPr id="4" name="TextBox 3"/>
-          <p:cNvSpPr txBox="1"/>
-          <p:nvPr/>
-        </p:nvSpPr>
-        <p:spPr>
-          <a:xfrm>
-            <a:off x="685800" y="777240"/>
-            <a:ext cx="10789920" cy="914400"/>
-          </a:xfrm>
-          <a:prstGeom prst="rect">
-            <a:avLst/>
-          </a:prstGeom>
-          <a:noFill/>
-        </p:spPr>
-        <p:txBody>
-          <a:bodyPr wrap="square" lIns="0" rIns="0" tIns="0" bIns="0">
-            <a:spAutoFit/>
-          </a:bodyPr>
-          <a:lstStyle/>
-          <a:p>
-            <a:pPr>
-              <a:spcAft>
-                <a:spcPts val="600"/>
-              </a:spcAft>
-            </a:pPr>
-            <a:r>
-              <a:rPr sz="3000" b="1">
-                <a:solidFill>
-                  <a:srgbClr val="E8EDF5"/>
-                </a:solidFill>
-                <a:latin typeface="Arial"/>
-              </a:rPr>
-              <a:t>The next phase: generate MCP servers, not just connectors</a:t>
-            </a:r>
-          </a:p>
-        </p:txBody>
-      </p:sp>
-      <p:sp>
-        <p:nvSpPr>
-          <p:cNvPr id="5" name="Rectangle 4"/>
-          <p:cNvSpPr/>
-          <p:nvPr/>
-        </p:nvSpPr>
-        <p:spPr>
-          <a:xfrm>
-            <a:off x="685800" y="1691640"/>
-            <a:ext cx="10789920" cy="9525"/>
-          </a:xfrm>
-          <a:prstGeom prst="rect">
-            <a:avLst/>
-          </a:prstGeom>
-          <a:solidFill>
-            <a:srgbClr val="1F2A40"/>
-          </a:solidFill>
-          <a:ln>
-            <a:noFill/>
-          </a:ln>
-          <a:effectLst/>
-        </p:spPr>
-        <p:style>
-          <a:lnRef idx="1">
-            <a:schemeClr val="accent1"/>
-          </a:lnRef>
-          <a:fillRef idx="3">
-            <a:schemeClr val="accent1"/>
-          </a:fillRef>
-          <a:effectRef idx="2">
-            <a:schemeClr val="accent1"/>
-          </a:effectRef>
-          <a:fontRef idx="minor">
-            <a:schemeClr val="lt1"/>
-          </a:fontRef>
-        </p:style>
-        <p:txBody>
-          <a:bodyPr rtlCol="0" anchor="ctr"/>
-          <a:lstStyle/>
-          <a:p>
-            <a:pPr algn="ctr"/>
-          </a:p>
-        </p:txBody>
-      </p:sp>
-      <p:sp>
-        <p:nvSpPr>
-          <p:cNvPr id="6" name="TextBox 5"/>
-          <p:cNvSpPr txBox="1"/>
-          <p:nvPr/>
-        </p:nvSpPr>
-        <p:spPr>
-          <a:xfrm>
-            <a:off x="685800" y="1965960"/>
-            <a:ext cx="10789920" cy="4023360"/>
-          </a:xfrm>
-          <a:prstGeom prst="rect">
-            <a:avLst/>
-          </a:prstGeom>
-          <a:noFill/>
-        </p:spPr>
-        <p:txBody>
-          <a:bodyPr wrap="square" lIns="0" rIns="0" tIns="0" bIns="0">
-            <a:spAutoFit/>
-          </a:bodyPr>
-          <a:lstStyle/>
-          <a:p>
-            <a:pPr>
-              <a:spcAft>
-                <a:spcPts val="300"/>
-              </a:spcAft>
-            </a:pPr>
-            <a:r>
-              <a:rPr sz="1700" b="1">
-                <a:solidFill>
-                  <a:srgbClr val="E8EDF5"/>
-                </a:solidFill>
-                <a:latin typeface="Arial"/>
-              </a:rPr>
-              <a:t>Same sentence, second output target</a:t>
-            </a:r>
-          </a:p>
-          <a:p>
-            <a:pPr>
-              <a:spcAft>
-                <a:spcPts val="1600"/>
-              </a:spcAft>
-            </a:pPr>
-            <a:r>
-              <a:rPr sz="1450" b="0">
-                <a:solidFill>
-                  <a:srgbClr val="8896B0"/>
-                </a:solidFill>
-                <a:latin typeface="Arial"/>
-              </a:rPr>
-              <a:t>Describe a database in English; receive a read-only MCP server that any AI client can query — gated by the same standards pipeline.</a:t>
-            </a:r>
-          </a:p>
-          <a:p>
-            <a:pPr>
-              <a:spcAft>
-                <a:spcPts val="300"/>
-              </a:spcAft>
-            </a:pPr>
-            <a:r>
-              <a:rPr sz="1700" b="1">
-                <a:solidFill>
-                  <a:srgbClr val="E8EDF5"/>
-                </a:solidFill>
-                <a:latin typeface="Arial"/>
-              </a:rPr>
-              <a:t>The architecture already fits</a:t>
-            </a:r>
-          </a:p>
-          <a:p>
-            <a:pPr>
-              <a:spcAft>
-                <a:spcPts val="1600"/>
-              </a:spcAft>
-            </a:pPr>
-            <a:r>
-              <a:rPr sz="1450" b="0">
-                <a:solidFill>
-                  <a:srgbClr val="8896B0"/>
-                </a:solidFill>
-                <a:latin typeface="Arial"/>
-              </a:rPr>
-              <a:t>The registry is versioned and pluggable, the checks are a list, and the sandbox already spawns a subprocess and parses structured JSON from its stdout — which is most of what speaking MCP over stdio requires.</a:t>
-            </a:r>
-          </a:p>
-          <a:p>
-            <a:pPr>
-              <a:spcAft>
-                <a:spcPts val="300"/>
-              </a:spcAft>
-            </a:pPr>
-            <a:r>
-              <a:rPr sz="1700" b="1">
-                <a:solidFill>
-                  <a:srgbClr val="E8EDF5"/>
-                </a:solidFill>
-                <a:latin typeface="Arial"/>
-              </a:rPr>
-              <a:t>It needs checks a connector does not</a:t>
-            </a:r>
-          </a:p>
-          <a:p>
-            <a:pPr>
-              <a:spcAft>
-                <a:spcPts val="1600"/>
-              </a:spcAft>
-            </a:pPr>
-            <a:r>
-              <a:rPr sz="1450" b="0">
-                <a:solidFill>
-                  <a:srgbClr val="8896B0"/>
-                </a:solidFill>
-                <a:latin typeface="Arial"/>
-              </a:rPr>
-              <a:t>A tool's docstring is the description the model reads. An unbounded SELECT fills acontext window rather than crashing. A query(sql) tool hands arbitrary SQL to a model.</a:t>
-            </a:r>
-          </a:p>
-        </p:txBody>
-      </p:sp>
-      <p:sp>
-        <p:nvSpPr>
-          <p:cNvPr id="7" name="TextBox 6"/>
-          <p:cNvSpPr txBox="1"/>
-          <p:nvPr/>
-        </p:nvSpPr>
-        <p:spPr>
-          <a:xfrm>
-            <a:off x="685800" y="5989320"/>
-            <a:ext cx="10789920" cy="548640"/>
-          </a:xfrm>
-          <a:prstGeom prst="rect">
-            <a:avLst/>
-          </a:prstGeom>
-          <a:noFill/>
-        </p:spPr>
-        <p:txBody>
-          <a:bodyPr wrap="square" lIns="0" rIns="0" tIns="0" bIns="0">
-            <a:spAutoFit/>
-          </a:bodyPr>
-          <a:lstStyle/>
-          <a:p>
-            <a:pPr>
-              <a:spcAft>
-                <a:spcPts val="600"/>
-              </a:spcAft>
-            </a:pPr>
-            <a:r>
-              <a:rPr sz="1250" b="0">
-                <a:solidFill>
-                  <a:srgbClr val="8896B0"/>
-                </a:solidFill>
-                <a:latin typeface="Courier New"/>
-              </a:rPr>
-              <a:t>Estimated 8–12 days, starting with a half-day spike that makes the rest refutable.</a:t>
-            </a:r>
-          </a:p>
-        </p:txBody>
-      </p:sp>
-    </p:spTree>
-  </p:cSld>
-  <p:clrMapOvr>
-    <a:masterClrMapping/>
-  </p:clrMapOvr>
-</p:sld>
-</file>
-
-<file path=ppt/slides/slide19.xml><?xml version="1.0" encoding="utf-8"?>
-<p:sld xmlns:a="http://schemas.openxmlformats.org/drawingml/2006/main" xmlns:p="http://schemas.openxmlformats.org/presentationml/2006/main" xmlns:r="http://schemas.openxmlformats.org/officeDocument/2006/relationships">
-  <p:cSld>
-    <p:spTree>
-      <p:nvGrpSpPr>
-        <p:cNvPr id="1" name=""/>
-        <p:cNvGrpSpPr/>
-        <p:nvPr/>
-      </p:nvGrpSpPr>
-      <p:grpSpPr/>
-      <p:sp>
-        <p:nvSpPr>
-          <p:cNvPr id="2" name="Rectangle 1"/>
-          <p:cNvSpPr/>
-          <p:nvPr/>
-        </p:nvSpPr>
-        <p:spPr>
-          <a:xfrm>
-            <a:off x="0" y="0"/>
-            <a:ext cx="12191695" cy="6858000"/>
-          </a:xfrm>
-          <a:prstGeom prst="rect">
-            <a:avLst/>
-          </a:prstGeom>
-          <a:solidFill>
-            <a:srgbClr val="0A0F1C"/>
-          </a:solidFill>
-          <a:ln>
-            <a:noFill/>
-          </a:ln>
-          <a:effectLst/>
-        </p:spPr>
-        <p:style>
-          <a:lnRef idx="1">
-            <a:schemeClr val="accent1"/>
-          </a:lnRef>
-          <a:fillRef idx="3">
-            <a:schemeClr val="accent1"/>
-          </a:fillRef>
-          <a:effectRef idx="2">
-            <a:schemeClr val="accent1"/>
-          </a:effectRef>
-          <a:fontRef idx="minor">
-            <a:schemeClr val="lt1"/>
-          </a:fontRef>
-        </p:style>
-        <p:txBody>
-          <a:bodyPr rtlCol="0" anchor="ctr"/>
-          <a:lstStyle/>
-          <a:p>
-            <a:pPr algn="ctr"/>
-          </a:p>
-        </p:txBody>
-      </p:sp>
-      <p:sp>
-        <p:nvSpPr>
-          <p:cNvPr id="3" name="TextBox 2"/>
-          <p:cNvSpPr txBox="1"/>
-          <p:nvPr/>
-        </p:nvSpPr>
-        <p:spPr>
-          <a:xfrm>
-            <a:off x="685800" y="2103120"/>
-            <a:ext cx="10515600" cy="914400"/>
-          </a:xfrm>
-          <a:prstGeom prst="rect">
-            <a:avLst/>
-          </a:prstGeom>
-          <a:noFill/>
-        </p:spPr>
-        <p:txBody>
-          <a:bodyPr wrap="square" lIns="0" rIns="0" tIns="0" bIns="0">
-            <a:spAutoFit/>
-          </a:bodyPr>
-          <a:lstStyle/>
-          <a:p>
-            <a:pPr>
-              <a:spcAft>
-                <a:spcPts val="600"/>
-              </a:spcAft>
-            </a:pPr>
-            <a:r>
-              <a:rPr sz="3800" b="1">
-                <a:solidFill>
-                  <a:srgbClr val="E8EDF5"/>
-                </a:solidFill>
-                <a:latin typeface="Arial"/>
-              </a:rPr>
-              <a:t>The claim, in one line</a:t>
-            </a:r>
-          </a:p>
-        </p:txBody>
-      </p:sp>
-      <p:sp>
-        <p:nvSpPr>
-          <p:cNvPr id="4" name="TextBox 3"/>
-          <p:cNvSpPr txBox="1"/>
-          <p:nvPr/>
-        </p:nvSpPr>
-        <p:spPr>
-          <a:xfrm>
-            <a:off x="685800" y="3108960"/>
-            <a:ext cx="9601200" cy="2377440"/>
-          </a:xfrm>
-          <a:prstGeom prst="rect">
-            <a:avLst/>
-          </a:prstGeom>
-          <a:noFill/>
-        </p:spPr>
-        <p:txBody>
-          <a:bodyPr wrap="square" lIns="0" rIns="0" tIns="0" bIns="0">
-            <a:spAutoFit/>
-          </a:bodyPr>
-          <a:lstStyle/>
-          <a:p>
-            <a:pPr>
-              <a:spcAft>
-                <a:spcPts val="1400"/>
-              </a:spcAft>
-            </a:pPr>
-            <a:r>
-              <a:rPr sz="1700" b="0">
-                <a:solidFill>
-                  <a:srgbClr val="8896B0"/>
-                </a:solidFill>
-                <a:latin typeface="Arial"/>
-              </a:rPr>
-              <a:t>The model reads intent. The template writes the code. The checker decides what ships.</a:t>
-            </a:r>
-          </a:p>
-          <a:p>
-            <a:pPr>
-              <a:spcAft>
-                <a:spcPts val="1400"/>
-              </a:spcAft>
-            </a:pPr>
-          </a:p>
-          <a:p>
-            <a:pPr>
-              <a:spcAft>
-                <a:spcPts val="1400"/>
-              </a:spcAft>
-            </a:pPr>
-            <a:r>
-              <a:rPr sz="1700" b="0">
-                <a:solidFill>
-                  <a:srgbClr val="8896B0"/>
-                </a:solidFill>
-                <a:latin typeface="Arial"/>
-              </a:rPr>
-              <a:t>That separation is what turns a demo into something you could put in front of a review board — and it is why the guarantee holds for the next connector, not just this one.</a:t>
-            </a:r>
-          </a:p>
-        </p:txBody>
-      </p:sp>
-      <p:sp>
-        <p:nvSpPr>
-          <p:cNvPr id="5" name="TextBox 4"/>
-          <p:cNvSpPr txBox="1"/>
-          <p:nvPr/>
-        </p:nvSpPr>
-        <p:spPr>
-          <a:xfrm>
-            <a:off x="685800" y="5943600"/>
-            <a:ext cx="10515600" cy="457200"/>
-          </a:xfrm>
-          <a:prstGeom prst="rect">
-            <a:avLst/>
-          </a:prstGeom>
-          <a:noFill/>
-        </p:spPr>
-        <p:txBody>
-          <a:bodyPr wrap="square" lIns="0" rIns="0" tIns="0" bIns="0">
-            <a:spAutoFit/>
-          </a:bodyPr>
-          <a:lstStyle/>
-          <a:p>
-            <a:pPr>
-              <a:spcAft>
-                <a:spcPts val="600"/>
-              </a:spcAft>
-            </a:pPr>
-            <a:r>
-              <a:rPr sz="1200" b="0">
-                <a:solidFill>
-                  <a:srgbClr val="4B5975"/>
-                </a:solidFill>
-                <a:latin typeface="Courier New"/>
-              </a:rPr>
-              <a:t>280 tests · 13 standards checks · 4 source types · 100% conformance on accepted artifacts</a:t>
-            </a:r>
-          </a:p>
-        </p:txBody>
-      </p:sp>
-    </p:spTree>
-  </p:cSld>
-  <p:clrMapOvr>
-    <a:masterClrMapping/>
-  </p:clrMapOvr>
-</p:sld>
-</file>
-
 <file path=ppt/slides/slide2.xml><?xml version="1.0" encoding="utf-8"?>
 <p:sld xmlns:a="http://schemas.openxmlformats.org/drawingml/2006/main" xmlns:p="http://schemas.openxmlformats.org/presentationml/2006/main" xmlns:r="http://schemas.openxmlformats.org/officeDocument/2006/relationships">
   <p:cSld>
@@ -8300,6 +8164,550 @@
                 <a:latin typeface="Arial"/>
               </a:rPr>
               <a:t>No hardcoded credentials, no dynamic SQL, typed, documented. Everyone agrees; nothing enforces it until code review, which is a person having a bad afternoon.</a:t>
+            </a:r>
+          </a:p>
+        </p:txBody>
+      </p:sp>
+    </p:spTree>
+  </p:cSld>
+  <p:clrMapOvr>
+    <a:masterClrMapping/>
+  </p:clrMapOvr>
+</p:sld>
+</file>
+
+<file path=ppt/slides/slide20.xml><?xml version="1.0" encoding="utf-8"?>
+<p:sld xmlns:a="http://schemas.openxmlformats.org/drawingml/2006/main" xmlns:p="http://schemas.openxmlformats.org/presentationml/2006/main" xmlns:r="http://schemas.openxmlformats.org/officeDocument/2006/relationships">
+  <p:cSld>
+    <p:spTree>
+      <p:nvGrpSpPr>
+        <p:cNvPr id="1" name=""/>
+        <p:cNvGrpSpPr/>
+        <p:nvPr/>
+      </p:nvGrpSpPr>
+      <p:grpSpPr/>
+      <p:sp>
+        <p:nvSpPr>
+          <p:cNvPr id="2" name="Rectangle 1"/>
+          <p:cNvSpPr/>
+          <p:nvPr/>
+        </p:nvSpPr>
+        <p:spPr>
+          <a:xfrm>
+            <a:off x="0" y="0"/>
+            <a:ext cx="12191695" cy="6858000"/>
+          </a:xfrm>
+          <a:prstGeom prst="rect">
+            <a:avLst/>
+          </a:prstGeom>
+          <a:solidFill>
+            <a:srgbClr val="0A0F1C"/>
+          </a:solidFill>
+          <a:ln>
+            <a:noFill/>
+          </a:ln>
+          <a:effectLst/>
+        </p:spPr>
+        <p:style>
+          <a:lnRef idx="1">
+            <a:schemeClr val="accent1"/>
+          </a:lnRef>
+          <a:fillRef idx="3">
+            <a:schemeClr val="accent1"/>
+          </a:fillRef>
+          <a:effectRef idx="2">
+            <a:schemeClr val="accent1"/>
+          </a:effectRef>
+          <a:fontRef idx="minor">
+            <a:schemeClr val="lt1"/>
+          </a:fontRef>
+        </p:style>
+        <p:txBody>
+          <a:bodyPr rtlCol="0" anchor="ctr"/>
+          <a:lstStyle/>
+          <a:p>
+            <a:pPr algn="ctr"/>
+          </a:p>
+        </p:txBody>
+      </p:sp>
+      <p:sp>
+        <p:nvSpPr>
+          <p:cNvPr id="3" name="TextBox 2"/>
+          <p:cNvSpPr txBox="1"/>
+          <p:nvPr/>
+        </p:nvSpPr>
+        <p:spPr>
+          <a:xfrm>
+            <a:off x="685800" y="457200"/>
+            <a:ext cx="10058400" cy="274320"/>
+          </a:xfrm>
+          <a:prstGeom prst="rect">
+            <a:avLst/>
+          </a:prstGeom>
+          <a:noFill/>
+        </p:spPr>
+        <p:txBody>
+          <a:bodyPr wrap="square" lIns="0" rIns="0" tIns="0" bIns="0">
+            <a:spAutoFit/>
+          </a:bodyPr>
+          <a:lstStyle/>
+          <a:p>
+            <a:pPr>
+              <a:spcAft>
+                <a:spcPts val="600"/>
+              </a:spcAft>
+            </a:pPr>
+            <a:r>
+              <a:rPr sz="1100" b="1">
+                <a:solidFill>
+                  <a:srgbClr val="4B5975"/>
+                </a:solidFill>
+                <a:latin typeface="Courier New"/>
+              </a:rPr>
+              <a:t>ROADMAP</a:t>
+            </a:r>
+          </a:p>
+        </p:txBody>
+      </p:sp>
+      <p:sp>
+        <p:nvSpPr>
+          <p:cNvPr id="4" name="TextBox 3"/>
+          <p:cNvSpPr txBox="1"/>
+          <p:nvPr/>
+        </p:nvSpPr>
+        <p:spPr>
+          <a:xfrm>
+            <a:off x="685800" y="777240"/>
+            <a:ext cx="10789920" cy="914400"/>
+          </a:xfrm>
+          <a:prstGeom prst="rect">
+            <a:avLst/>
+          </a:prstGeom>
+          <a:noFill/>
+        </p:spPr>
+        <p:txBody>
+          <a:bodyPr wrap="square" lIns="0" rIns="0" tIns="0" bIns="0">
+            <a:spAutoFit/>
+          </a:bodyPr>
+          <a:lstStyle/>
+          <a:p>
+            <a:pPr>
+              <a:spcAft>
+                <a:spcPts val="600"/>
+              </a:spcAft>
+            </a:pPr>
+            <a:r>
+              <a:rPr sz="3000" b="1">
+                <a:solidFill>
+                  <a:srgbClr val="E8EDF5"/>
+                </a:solidFill>
+                <a:latin typeface="Arial"/>
+              </a:rPr>
+              <a:t>The next phase: generate MCP servers, not just connectors</a:t>
+            </a:r>
+          </a:p>
+        </p:txBody>
+      </p:sp>
+      <p:sp>
+        <p:nvSpPr>
+          <p:cNvPr id="5" name="Rectangle 4"/>
+          <p:cNvSpPr/>
+          <p:nvPr/>
+        </p:nvSpPr>
+        <p:spPr>
+          <a:xfrm>
+            <a:off x="685800" y="1691640"/>
+            <a:ext cx="10789920" cy="9525"/>
+          </a:xfrm>
+          <a:prstGeom prst="rect">
+            <a:avLst/>
+          </a:prstGeom>
+          <a:solidFill>
+            <a:srgbClr val="1F2A40"/>
+          </a:solidFill>
+          <a:ln>
+            <a:noFill/>
+          </a:ln>
+          <a:effectLst/>
+        </p:spPr>
+        <p:style>
+          <a:lnRef idx="1">
+            <a:schemeClr val="accent1"/>
+          </a:lnRef>
+          <a:fillRef idx="3">
+            <a:schemeClr val="accent1"/>
+          </a:fillRef>
+          <a:effectRef idx="2">
+            <a:schemeClr val="accent1"/>
+          </a:effectRef>
+          <a:fontRef idx="minor">
+            <a:schemeClr val="lt1"/>
+          </a:fontRef>
+        </p:style>
+        <p:txBody>
+          <a:bodyPr rtlCol="0" anchor="ctr"/>
+          <a:lstStyle/>
+          <a:p>
+            <a:pPr algn="ctr"/>
+          </a:p>
+        </p:txBody>
+      </p:sp>
+      <p:sp>
+        <p:nvSpPr>
+          <p:cNvPr id="6" name="TextBox 5"/>
+          <p:cNvSpPr txBox="1"/>
+          <p:nvPr/>
+        </p:nvSpPr>
+        <p:spPr>
+          <a:xfrm>
+            <a:off x="685800" y="1965960"/>
+            <a:ext cx="10789920" cy="4023360"/>
+          </a:xfrm>
+          <a:prstGeom prst="rect">
+            <a:avLst/>
+          </a:prstGeom>
+          <a:noFill/>
+        </p:spPr>
+        <p:txBody>
+          <a:bodyPr wrap="square" lIns="0" rIns="0" tIns="0" bIns="0">
+            <a:spAutoFit/>
+          </a:bodyPr>
+          <a:lstStyle/>
+          <a:p>
+            <a:pPr>
+              <a:spcAft>
+                <a:spcPts val="300"/>
+              </a:spcAft>
+            </a:pPr>
+            <a:r>
+              <a:rPr sz="1700" b="1">
+                <a:solidFill>
+                  <a:srgbClr val="E8EDF5"/>
+                </a:solidFill>
+                <a:latin typeface="Arial"/>
+              </a:rPr>
+              <a:t>Same sentence, second output target</a:t>
+            </a:r>
+          </a:p>
+          <a:p>
+            <a:pPr>
+              <a:spcAft>
+                <a:spcPts val="1600"/>
+              </a:spcAft>
+            </a:pPr>
+            <a:r>
+              <a:rPr sz="1450" b="0">
+                <a:solidFill>
+                  <a:srgbClr val="8896B0"/>
+                </a:solidFill>
+                <a:latin typeface="Arial"/>
+              </a:rPr>
+              <a:t>Describe a database in English; receive a read-only MCP server that any AI client can query — gated by the same standards pipeline.</a:t>
+            </a:r>
+          </a:p>
+          <a:p>
+            <a:pPr>
+              <a:spcAft>
+                <a:spcPts val="300"/>
+              </a:spcAft>
+            </a:pPr>
+            <a:r>
+              <a:rPr sz="1700" b="1">
+                <a:solidFill>
+                  <a:srgbClr val="E8EDF5"/>
+                </a:solidFill>
+                <a:latin typeface="Arial"/>
+              </a:rPr>
+              <a:t>The architecture already fits</a:t>
+            </a:r>
+          </a:p>
+          <a:p>
+            <a:pPr>
+              <a:spcAft>
+                <a:spcPts val="1600"/>
+              </a:spcAft>
+            </a:pPr>
+            <a:r>
+              <a:rPr sz="1450" b="0">
+                <a:solidFill>
+                  <a:srgbClr val="8896B0"/>
+                </a:solidFill>
+                <a:latin typeface="Arial"/>
+              </a:rPr>
+              <a:t>The registry is versioned and pluggable, the checks are a list, and the sandbox already spawns a subprocess and parses structured JSON from its stdout — which is most of what speaking MCP over stdio requires.</a:t>
+            </a:r>
+          </a:p>
+          <a:p>
+            <a:pPr>
+              <a:spcAft>
+                <a:spcPts val="300"/>
+              </a:spcAft>
+            </a:pPr>
+            <a:r>
+              <a:rPr sz="1700" b="1">
+                <a:solidFill>
+                  <a:srgbClr val="E8EDF5"/>
+                </a:solidFill>
+                <a:latin typeface="Arial"/>
+              </a:rPr>
+              <a:t>It needs checks a connector does not</a:t>
+            </a:r>
+          </a:p>
+          <a:p>
+            <a:pPr>
+              <a:spcAft>
+                <a:spcPts val="1600"/>
+              </a:spcAft>
+            </a:pPr>
+            <a:r>
+              <a:rPr sz="1450" b="0">
+                <a:solidFill>
+                  <a:srgbClr val="8896B0"/>
+                </a:solidFill>
+                <a:latin typeface="Arial"/>
+              </a:rPr>
+              <a:t>A tool's docstring is the description the model reads. An unbounded SELECT fills acontext window rather than crashing. A query(sql) tool hands arbitrary SQL to a model.</a:t>
+            </a:r>
+          </a:p>
+        </p:txBody>
+      </p:sp>
+      <p:sp>
+        <p:nvSpPr>
+          <p:cNvPr id="7" name="TextBox 6"/>
+          <p:cNvSpPr txBox="1"/>
+          <p:nvPr/>
+        </p:nvSpPr>
+        <p:spPr>
+          <a:xfrm>
+            <a:off x="685800" y="5989320"/>
+            <a:ext cx="10789920" cy="548640"/>
+          </a:xfrm>
+          <a:prstGeom prst="rect">
+            <a:avLst/>
+          </a:prstGeom>
+          <a:noFill/>
+        </p:spPr>
+        <p:txBody>
+          <a:bodyPr wrap="square" lIns="0" rIns="0" tIns="0" bIns="0">
+            <a:spAutoFit/>
+          </a:bodyPr>
+          <a:lstStyle/>
+          <a:p>
+            <a:pPr>
+              <a:spcAft>
+                <a:spcPts val="600"/>
+              </a:spcAft>
+            </a:pPr>
+            <a:r>
+              <a:rPr sz="1250" b="0">
+                <a:solidFill>
+                  <a:srgbClr val="8896B0"/>
+                </a:solidFill>
+                <a:latin typeface="Courier New"/>
+              </a:rPr>
+              <a:t>Estimated 8–12 days, starting with a half-day spike that makes the rest refutable.</a:t>
+            </a:r>
+          </a:p>
+        </p:txBody>
+      </p:sp>
+    </p:spTree>
+  </p:cSld>
+  <p:clrMapOvr>
+    <a:masterClrMapping/>
+  </p:clrMapOvr>
+</p:sld>
+</file>
+
+<file path=ppt/slides/slide21.xml><?xml version="1.0" encoding="utf-8"?>
+<p:sld xmlns:a="http://schemas.openxmlformats.org/drawingml/2006/main" xmlns:p="http://schemas.openxmlformats.org/presentationml/2006/main" xmlns:r="http://schemas.openxmlformats.org/officeDocument/2006/relationships">
+  <p:cSld>
+    <p:spTree>
+      <p:nvGrpSpPr>
+        <p:cNvPr id="1" name=""/>
+        <p:cNvGrpSpPr/>
+        <p:nvPr/>
+      </p:nvGrpSpPr>
+      <p:grpSpPr/>
+      <p:sp>
+        <p:nvSpPr>
+          <p:cNvPr id="2" name="Rectangle 1"/>
+          <p:cNvSpPr/>
+          <p:nvPr/>
+        </p:nvSpPr>
+        <p:spPr>
+          <a:xfrm>
+            <a:off x="0" y="0"/>
+            <a:ext cx="12191695" cy="6858000"/>
+          </a:xfrm>
+          <a:prstGeom prst="rect">
+            <a:avLst/>
+          </a:prstGeom>
+          <a:solidFill>
+            <a:srgbClr val="0A0F1C"/>
+          </a:solidFill>
+          <a:ln>
+            <a:noFill/>
+          </a:ln>
+          <a:effectLst/>
+        </p:spPr>
+        <p:style>
+          <a:lnRef idx="1">
+            <a:schemeClr val="accent1"/>
+          </a:lnRef>
+          <a:fillRef idx="3">
+            <a:schemeClr val="accent1"/>
+          </a:fillRef>
+          <a:effectRef idx="2">
+            <a:schemeClr val="accent1"/>
+          </a:effectRef>
+          <a:fontRef idx="minor">
+            <a:schemeClr val="lt1"/>
+          </a:fontRef>
+        </p:style>
+        <p:txBody>
+          <a:bodyPr rtlCol="0" anchor="ctr"/>
+          <a:lstStyle/>
+          <a:p>
+            <a:pPr algn="ctr"/>
+          </a:p>
+        </p:txBody>
+      </p:sp>
+      <p:sp>
+        <p:nvSpPr>
+          <p:cNvPr id="3" name="TextBox 2"/>
+          <p:cNvSpPr txBox="1"/>
+          <p:nvPr/>
+        </p:nvSpPr>
+        <p:spPr>
+          <a:xfrm>
+            <a:off x="685800" y="2103120"/>
+            <a:ext cx="10515600" cy="914400"/>
+          </a:xfrm>
+          <a:prstGeom prst="rect">
+            <a:avLst/>
+          </a:prstGeom>
+          <a:noFill/>
+        </p:spPr>
+        <p:txBody>
+          <a:bodyPr wrap="square" lIns="0" rIns="0" tIns="0" bIns="0">
+            <a:spAutoFit/>
+          </a:bodyPr>
+          <a:lstStyle/>
+          <a:p>
+            <a:pPr>
+              <a:spcAft>
+                <a:spcPts val="600"/>
+              </a:spcAft>
+            </a:pPr>
+            <a:r>
+              <a:rPr sz="3800" b="1">
+                <a:solidFill>
+                  <a:srgbClr val="E8EDF5"/>
+                </a:solidFill>
+                <a:latin typeface="Arial"/>
+              </a:rPr>
+              <a:t>The claim, in one line</a:t>
+            </a:r>
+          </a:p>
+        </p:txBody>
+      </p:sp>
+      <p:sp>
+        <p:nvSpPr>
+          <p:cNvPr id="4" name="TextBox 3"/>
+          <p:cNvSpPr txBox="1"/>
+          <p:nvPr/>
+        </p:nvSpPr>
+        <p:spPr>
+          <a:xfrm>
+            <a:off x="685800" y="3108960"/>
+            <a:ext cx="9601200" cy="2377440"/>
+          </a:xfrm>
+          <a:prstGeom prst="rect">
+            <a:avLst/>
+          </a:prstGeom>
+          <a:noFill/>
+        </p:spPr>
+        <p:txBody>
+          <a:bodyPr wrap="square" lIns="0" rIns="0" tIns="0" bIns="0">
+            <a:spAutoFit/>
+          </a:bodyPr>
+          <a:lstStyle/>
+          <a:p>
+            <a:pPr>
+              <a:spcAft>
+                <a:spcPts val="1400"/>
+              </a:spcAft>
+            </a:pPr>
+            <a:r>
+              <a:rPr sz="1700" b="0">
+                <a:solidFill>
+                  <a:srgbClr val="8896B0"/>
+                </a:solidFill>
+                <a:latin typeface="Arial"/>
+              </a:rPr>
+              <a:t>The model reads intent. The template writes the code. The checker decides what ships.</a:t>
+            </a:r>
+          </a:p>
+          <a:p>
+            <a:pPr>
+              <a:spcAft>
+                <a:spcPts val="1400"/>
+              </a:spcAft>
+            </a:pPr>
+          </a:p>
+          <a:p>
+            <a:pPr>
+              <a:spcAft>
+                <a:spcPts val="1400"/>
+              </a:spcAft>
+            </a:pPr>
+            <a:r>
+              <a:rPr sz="1700" b="0">
+                <a:solidFill>
+                  <a:srgbClr val="8896B0"/>
+                </a:solidFill>
+                <a:latin typeface="Arial"/>
+              </a:rPr>
+              <a:t>That separation is what turns a demo into something you could put in front of a review board — and it is why the guarantee holds for the next connector, not just this one.</a:t>
+            </a:r>
+          </a:p>
+        </p:txBody>
+      </p:sp>
+      <p:sp>
+        <p:nvSpPr>
+          <p:cNvPr id="5" name="TextBox 4"/>
+          <p:cNvSpPr txBox="1"/>
+          <p:nvPr/>
+        </p:nvSpPr>
+        <p:spPr>
+          <a:xfrm>
+            <a:off x="685800" y="5943600"/>
+            <a:ext cx="10515600" cy="457200"/>
+          </a:xfrm>
+          <a:prstGeom prst="rect">
+            <a:avLst/>
+          </a:prstGeom>
+          <a:noFill/>
+        </p:spPr>
+        <p:txBody>
+          <a:bodyPr wrap="square" lIns="0" rIns="0" tIns="0" bIns="0">
+            <a:spAutoFit/>
+          </a:bodyPr>
+          <a:lstStyle/>
+          <a:p>
+            <a:pPr>
+              <a:spcAft>
+                <a:spcPts val="600"/>
+              </a:spcAft>
+            </a:pPr>
+            <a:r>
+              <a:rPr sz="1200" b="0">
+                <a:solidFill>
+                  <a:srgbClr val="4B5975"/>
+                </a:solidFill>
+                <a:latin typeface="Courier New"/>
+              </a:rPr>
+              <a:t>280 tests · 13 standards checks · 4 source types · 100% conformance on accepted artifacts</a:t>
             </a:r>
           </a:p>
         </p:txBody>
@@ -8995,7 +9403,7 @@
                 </a:solidFill>
                 <a:latin typeface="Courier New"/>
               </a:rPr>
-              <a:t>THE CORE IDEA</a:t>
+              <a:t>BUSINESS OBJECTIVE</a:t>
             </a:r>
           </a:p>
         </p:txBody>
@@ -9034,7 +9442,7 @@
                 </a:solidFill>
                 <a:latin typeface="Arial"/>
               </a:rPr>
-              <a:t>The tension — and how it is resolved</a:t>
+              <a:t>Where the work actually moves</a:t>
             </a:r>
           </a:p>
         </p:txBody>
@@ -9083,16 +9491,939 @@
           </a:p>
         </p:txBody>
       </p:sp>
-      <p:sp>
-        <p:nvSpPr>
-          <p:cNvPr id="6" name="TextBox 5"/>
+      <p:graphicFrame>
+        <p:nvGraphicFramePr>
+          <p:cNvPr id="6" name="Table 5"/>
+          <p:cNvGraphicFramePr>
+            <a:graphicFrameLocks noGrp="1"/>
+          </p:cNvGraphicFramePr>
+          <p:nvPr/>
+        </p:nvGraphicFramePr>
+        <p:xfrm>
+          <a:off x="685800" y="2011680"/>
+          <a:ext cx="10789920" cy="365760"/>
+        </p:xfrm>
+        <a:graphic>
+          <a:graphicData uri="http://schemas.openxmlformats.org/drawingml/2006/table">
+            <a:tbl>
+              <a:tblPr firstRow="1" bandRow="1">
+                <a:tableStyleId>{5C22544A-7EE6-4342-B048-85BDC9FD1C3A}</a:tableStyleId>
+              </a:tblPr>
+              <a:tblGrid>
+                <a:gridCol w="3596640"/>
+                <a:gridCol w="3596640"/>
+                <a:gridCol w="3596640"/>
+              </a:tblGrid>
+              <a:tr h="52251">
+                <a:tc>
+                  <a:txBody>
+                    <a:bodyPr/>
+                    <a:lstStyle/>
+                    <a:p>
+                      <a:r>
+                        <a:rPr sz="1200" b="1">
+                          <a:solidFill>
+                            <a:srgbClr val="8896B0"/>
+                          </a:solidFill>
+                          <a:latin typeface="Courier New"/>
+                        </a:rPr>
+                        <a:t>Step in onboarding</a:t>
+                      </a:r>
+                    </a:p>
+                  </a:txBody>
+                  <a:tcPr anchor="ctr">
+                    <a:solidFill>
+                      <a:srgbClr val="111827"/>
+                    </a:solidFill>
+                    <a:lnL w="12700" cap="flat">
+                      <a:solidFill>
+                        <a:srgbClr val="1F2A40"/>
+                      </a:solidFill>
+                    </a:lnL>
+                    <a:lnR w="12700" cap="flat">
+                      <a:solidFill>
+                        <a:srgbClr val="1F2A40"/>
+                      </a:solidFill>
+                    </a:lnR>
+                    <a:lnT w="12700" cap="flat">
+                      <a:solidFill>
+                        <a:srgbClr val="1F2A40"/>
+                      </a:solidFill>
+                    </a:lnT>
+                    <a:lnB w="12700" cap="flat">
+                      <a:solidFill>
+                        <a:srgbClr val="1F2A40"/>
+                      </a:solidFill>
+                    </a:lnB>
+                  </a:tcPr>
+                </a:tc>
+                <a:tc>
+                  <a:txBody>
+                    <a:bodyPr/>
+                    <a:lstStyle/>
+                    <a:p>
+                      <a:r>
+                        <a:rPr sz="1200" b="1">
+                          <a:solidFill>
+                            <a:srgbClr val="8896B0"/>
+                          </a:solidFill>
+                          <a:latin typeface="Courier New"/>
+                        </a:rPr>
+                        <a:t>Today</a:t>
+                      </a:r>
+                    </a:p>
+                  </a:txBody>
+                  <a:tcPr anchor="ctr">
+                    <a:solidFill>
+                      <a:srgbClr val="111827"/>
+                    </a:solidFill>
+                    <a:lnL w="12700" cap="flat">
+                      <a:solidFill>
+                        <a:srgbClr val="1F2A40"/>
+                      </a:solidFill>
+                    </a:lnL>
+                    <a:lnR w="12700" cap="flat">
+                      <a:solidFill>
+                        <a:srgbClr val="1F2A40"/>
+                      </a:solidFill>
+                    </a:lnR>
+                    <a:lnT w="12700" cap="flat">
+                      <a:solidFill>
+                        <a:srgbClr val="1F2A40"/>
+                      </a:solidFill>
+                    </a:lnT>
+                    <a:lnB w="12700" cap="flat">
+                      <a:solidFill>
+                        <a:srgbClr val="1F2A40"/>
+                      </a:solidFill>
+                    </a:lnB>
+                  </a:tcPr>
+                </a:tc>
+                <a:tc>
+                  <a:txBody>
+                    <a:bodyPr/>
+                    <a:lstStyle/>
+                    <a:p>
+                      <a:r>
+                        <a:rPr sz="1200" b="1">
+                          <a:solidFill>
+                            <a:srgbClr val="8896B0"/>
+                          </a:solidFill>
+                          <a:latin typeface="Courier New"/>
+                        </a:rPr>
+                        <a:t>With the agent</a:t>
+                      </a:r>
+                    </a:p>
+                  </a:txBody>
+                  <a:tcPr anchor="ctr">
+                    <a:solidFill>
+                      <a:srgbClr val="111827"/>
+                    </a:solidFill>
+                    <a:lnL w="12700" cap="flat">
+                      <a:solidFill>
+                        <a:srgbClr val="1F2A40"/>
+                      </a:solidFill>
+                    </a:lnL>
+                    <a:lnR w="12700" cap="flat">
+                      <a:solidFill>
+                        <a:srgbClr val="1F2A40"/>
+                      </a:solidFill>
+                    </a:lnR>
+                    <a:lnT w="12700" cap="flat">
+                      <a:solidFill>
+                        <a:srgbClr val="1F2A40"/>
+                      </a:solidFill>
+                    </a:lnT>
+                    <a:lnB w="12700" cap="flat">
+                      <a:solidFill>
+                        <a:srgbClr val="1F2A40"/>
+                      </a:solidFill>
+                    </a:lnB>
+                  </a:tcPr>
+                </a:tc>
+              </a:tr>
+              <a:tr h="52251">
+                <a:tc>
+                  <a:txBody>
+                    <a:bodyPr/>
+                    <a:lstStyle/>
+                    <a:p>
+                      <a:r>
+                        <a:rPr sz="1300" b="1">
+                          <a:solidFill>
+                            <a:srgbClr val="E8EDF5"/>
+                          </a:solidFill>
+                          <a:latin typeface="Arial"/>
+                        </a:rPr>
+                        <a:t>Capture the requirement</a:t>
+                      </a:r>
+                    </a:p>
+                  </a:txBody>
+                  <a:tcPr anchor="ctr">
+                    <a:solidFill>
+                      <a:srgbClr val="0A0F1C"/>
+                    </a:solidFill>
+                    <a:lnL w="12700" cap="flat">
+                      <a:solidFill>
+                        <a:srgbClr val="1F2A40"/>
+                      </a:solidFill>
+                    </a:lnL>
+                    <a:lnR w="12700" cap="flat">
+                      <a:solidFill>
+                        <a:srgbClr val="1F2A40"/>
+                      </a:solidFill>
+                    </a:lnR>
+                    <a:lnT w="12700" cap="flat">
+                      <a:solidFill>
+                        <a:srgbClr val="1F2A40"/>
+                      </a:solidFill>
+                    </a:lnT>
+                    <a:lnB w="12700" cap="flat">
+                      <a:solidFill>
+                        <a:srgbClr val="1F2A40"/>
+                      </a:solidFill>
+                    </a:lnB>
+                  </a:tcPr>
+                </a:tc>
+                <a:tc>
+                  <a:txBody>
+                    <a:bodyPr/>
+                    <a:lstStyle/>
+                    <a:p>
+                      <a:r>
+                        <a:rPr sz="1300" b="0">
+                          <a:solidFill>
+                            <a:srgbClr val="8896B0"/>
+                          </a:solidFill>
+                          <a:latin typeface="Arial"/>
+                        </a:rPr>
+                        <a:t>A ticket, then a clarifying thread over days</a:t>
+                      </a:r>
+                    </a:p>
+                  </a:txBody>
+                  <a:tcPr anchor="ctr">
+                    <a:solidFill>
+                      <a:srgbClr val="0A0F1C"/>
+                    </a:solidFill>
+                    <a:lnL w="12700" cap="flat">
+                      <a:solidFill>
+                        <a:srgbClr val="1F2A40"/>
+                      </a:solidFill>
+                    </a:lnL>
+                    <a:lnR w="12700" cap="flat">
+                      <a:solidFill>
+                        <a:srgbClr val="1F2A40"/>
+                      </a:solidFill>
+                    </a:lnR>
+                    <a:lnT w="12700" cap="flat">
+                      <a:solidFill>
+                        <a:srgbClr val="1F2A40"/>
+                      </a:solidFill>
+                    </a:lnT>
+                    <a:lnB w="12700" cap="flat">
+                      <a:solidFill>
+                        <a:srgbClr val="1F2A40"/>
+                      </a:solidFill>
+                    </a:lnB>
+                  </a:tcPr>
+                </a:tc>
+                <a:tc>
+                  <a:txBody>
+                    <a:bodyPr/>
+                    <a:lstStyle/>
+                    <a:p>
+                      <a:r>
+                        <a:rPr sz="1300" b="0">
+                          <a:solidFill>
+                            <a:srgbClr val="8896B0"/>
+                          </a:solidFill>
+                          <a:latin typeface="Arial"/>
+                        </a:rPr>
+                        <a:t>Plain English, questions answered in the same session</a:t>
+                      </a:r>
+                    </a:p>
+                  </a:txBody>
+                  <a:tcPr anchor="ctr">
+                    <a:solidFill>
+                      <a:srgbClr val="0A0F1C"/>
+                    </a:solidFill>
+                    <a:lnL w="12700" cap="flat">
+                      <a:solidFill>
+                        <a:srgbClr val="1F2A40"/>
+                      </a:solidFill>
+                    </a:lnL>
+                    <a:lnR w="12700" cap="flat">
+                      <a:solidFill>
+                        <a:srgbClr val="1F2A40"/>
+                      </a:solidFill>
+                    </a:lnR>
+                    <a:lnT w="12700" cap="flat">
+                      <a:solidFill>
+                        <a:srgbClr val="1F2A40"/>
+                      </a:solidFill>
+                    </a:lnT>
+                    <a:lnB w="12700" cap="flat">
+                      <a:solidFill>
+                        <a:srgbClr val="1F2A40"/>
+                      </a:solidFill>
+                    </a:lnB>
+                  </a:tcPr>
+                </a:tc>
+              </a:tr>
+              <a:tr h="52251">
+                <a:tc>
+                  <a:txBody>
+                    <a:bodyPr/>
+                    <a:lstStyle/>
+                    <a:p>
+                      <a:r>
+                        <a:rPr sz="1300" b="1">
+                          <a:solidFill>
+                            <a:srgbClr val="E8EDF5"/>
+                          </a:solidFill>
+                          <a:latin typeface="Arial"/>
+                        </a:rPr>
+                        <a:t>Write the connector</a:t>
+                      </a:r>
+                    </a:p>
+                  </a:txBody>
+                  <a:tcPr anchor="ctr">
+                    <a:solidFill>
+                      <a:srgbClr val="0A0F1C"/>
+                    </a:solidFill>
+                    <a:lnL w="12700" cap="flat">
+                      <a:solidFill>
+                        <a:srgbClr val="1F2A40"/>
+                      </a:solidFill>
+                    </a:lnL>
+                    <a:lnR w="12700" cap="flat">
+                      <a:solidFill>
+                        <a:srgbClr val="1F2A40"/>
+                      </a:solidFill>
+                    </a:lnR>
+                    <a:lnT w="12700" cap="flat">
+                      <a:solidFill>
+                        <a:srgbClr val="1F2A40"/>
+                      </a:solidFill>
+                    </a:lnT>
+                    <a:lnB w="12700" cap="flat">
+                      <a:solidFill>
+                        <a:srgbClr val="1F2A40"/>
+                      </a:solidFill>
+                    </a:lnB>
+                  </a:tcPr>
+                </a:tc>
+                <a:tc>
+                  <a:txBody>
+                    <a:bodyPr/>
+                    <a:lstStyle/>
+                    <a:p>
+                      <a:r>
+                        <a:rPr sz="1300" b="0">
+                          <a:solidFill>
+                            <a:srgbClr val="8896B0"/>
+                          </a:solidFill>
+                          <a:latin typeface="Arial"/>
+                        </a:rPr>
+                        <a:t>Hand-written per source, per engineer</a:t>
+                      </a:r>
+                    </a:p>
+                  </a:txBody>
+                  <a:tcPr anchor="ctr">
+                    <a:solidFill>
+                      <a:srgbClr val="0A0F1C"/>
+                    </a:solidFill>
+                    <a:lnL w="12700" cap="flat">
+                      <a:solidFill>
+                        <a:srgbClr val="1F2A40"/>
+                      </a:solidFill>
+                    </a:lnL>
+                    <a:lnR w="12700" cap="flat">
+                      <a:solidFill>
+                        <a:srgbClr val="1F2A40"/>
+                      </a:solidFill>
+                    </a:lnR>
+                    <a:lnT w="12700" cap="flat">
+                      <a:solidFill>
+                        <a:srgbClr val="1F2A40"/>
+                      </a:solidFill>
+                    </a:lnT>
+                    <a:lnB w="12700" cap="flat">
+                      <a:solidFill>
+                        <a:srgbClr val="1F2A40"/>
+                      </a:solidFill>
+                    </a:lnB>
+                  </a:tcPr>
+                </a:tc>
+                <a:tc>
+                  <a:txBody>
+                    <a:bodyPr/>
+                    <a:lstStyle/>
+                    <a:p>
+                      <a:r>
+                        <a:rPr sz="1300" b="0">
+                          <a:solidFill>
+                            <a:srgbClr val="8896B0"/>
+                          </a:solidFill>
+                          <a:latin typeface="Arial"/>
+                        </a:rPr>
+                        <a:t>Rendered from a reviewed spec, identical every time</a:t>
+                      </a:r>
+                    </a:p>
+                  </a:txBody>
+                  <a:tcPr anchor="ctr">
+                    <a:solidFill>
+                      <a:srgbClr val="0A0F1C"/>
+                    </a:solidFill>
+                    <a:lnL w="12700" cap="flat">
+                      <a:solidFill>
+                        <a:srgbClr val="1F2A40"/>
+                      </a:solidFill>
+                    </a:lnL>
+                    <a:lnR w="12700" cap="flat">
+                      <a:solidFill>
+                        <a:srgbClr val="1F2A40"/>
+                      </a:solidFill>
+                    </a:lnR>
+                    <a:lnT w="12700" cap="flat">
+                      <a:solidFill>
+                        <a:srgbClr val="1F2A40"/>
+                      </a:solidFill>
+                    </a:lnT>
+                    <a:lnB w="12700" cap="flat">
+                      <a:solidFill>
+                        <a:srgbClr val="1F2A40"/>
+                      </a:solidFill>
+                    </a:lnB>
+                  </a:tcPr>
+                </a:tc>
+              </a:tr>
+              <a:tr h="52251">
+                <a:tc>
+                  <a:txBody>
+                    <a:bodyPr/>
+                    <a:lstStyle/>
+                    <a:p>
+                      <a:r>
+                        <a:rPr sz="1300" b="1">
+                          <a:solidFill>
+                            <a:srgbClr val="E8EDF5"/>
+                          </a:solidFill>
+                          <a:latin typeface="Arial"/>
+                        </a:rPr>
+                        <a:t>Enforce the standards</a:t>
+                      </a:r>
+                    </a:p>
+                  </a:txBody>
+                  <a:tcPr anchor="ctr">
+                    <a:solidFill>
+                      <a:srgbClr val="0A0F1C"/>
+                    </a:solidFill>
+                    <a:lnL w="12700" cap="flat">
+                      <a:solidFill>
+                        <a:srgbClr val="1F2A40"/>
+                      </a:solidFill>
+                    </a:lnL>
+                    <a:lnR w="12700" cap="flat">
+                      <a:solidFill>
+                        <a:srgbClr val="1F2A40"/>
+                      </a:solidFill>
+                    </a:lnR>
+                    <a:lnT w="12700" cap="flat">
+                      <a:solidFill>
+                        <a:srgbClr val="1F2A40"/>
+                      </a:solidFill>
+                    </a:lnT>
+                    <a:lnB w="12700" cap="flat">
+                      <a:solidFill>
+                        <a:srgbClr val="1F2A40"/>
+                      </a:solidFill>
+                    </a:lnB>
+                  </a:tcPr>
+                </a:tc>
+                <a:tc>
+                  <a:txBody>
+                    <a:bodyPr/>
+                    <a:lstStyle/>
+                    <a:p>
+                      <a:r>
+                        <a:rPr sz="1300" b="0">
+                          <a:solidFill>
+                            <a:srgbClr val="8896B0"/>
+                          </a:solidFill>
+                          <a:latin typeface="Arial"/>
+                        </a:rPr>
+                        <a:t>Code review, after the code exists</a:t>
+                      </a:r>
+                    </a:p>
+                  </a:txBody>
+                  <a:tcPr anchor="ctr">
+                    <a:solidFill>
+                      <a:srgbClr val="0A0F1C"/>
+                    </a:solidFill>
+                    <a:lnL w="12700" cap="flat">
+                      <a:solidFill>
+                        <a:srgbClr val="1F2A40"/>
+                      </a:solidFill>
+                    </a:lnL>
+                    <a:lnR w="12700" cap="flat">
+                      <a:solidFill>
+                        <a:srgbClr val="1F2A40"/>
+                      </a:solidFill>
+                    </a:lnR>
+                    <a:lnT w="12700" cap="flat">
+                      <a:solidFill>
+                        <a:srgbClr val="1F2A40"/>
+                      </a:solidFill>
+                    </a:lnT>
+                    <a:lnB w="12700" cap="flat">
+                      <a:solidFill>
+                        <a:srgbClr val="1F2A40"/>
+                      </a:solidFill>
+                    </a:lnB>
+                  </a:tcPr>
+                </a:tc>
+                <a:tc>
+                  <a:txBody>
+                    <a:bodyPr/>
+                    <a:lstStyle/>
+                    <a:p>
+                      <a:r>
+                        <a:rPr sz="1300" b="0">
+                          <a:solidFill>
+                            <a:srgbClr val="8896B0"/>
+                          </a:solidFill>
+                          <a:latin typeface="Arial"/>
+                        </a:rPr>
+                        <a:t>13 machine checks, before it can be accepted</a:t>
+                      </a:r>
+                    </a:p>
+                  </a:txBody>
+                  <a:tcPr anchor="ctr">
+                    <a:solidFill>
+                      <a:srgbClr val="0A0F1C"/>
+                    </a:solidFill>
+                    <a:lnL w="12700" cap="flat">
+                      <a:solidFill>
+                        <a:srgbClr val="1F2A40"/>
+                      </a:solidFill>
+                    </a:lnL>
+                    <a:lnR w="12700" cap="flat">
+                      <a:solidFill>
+                        <a:srgbClr val="1F2A40"/>
+                      </a:solidFill>
+                    </a:lnR>
+                    <a:lnT w="12700" cap="flat">
+                      <a:solidFill>
+                        <a:srgbClr val="1F2A40"/>
+                      </a:solidFill>
+                    </a:lnT>
+                    <a:lnB w="12700" cap="flat">
+                      <a:solidFill>
+                        <a:srgbClr val="1F2A40"/>
+                      </a:solidFill>
+                    </a:lnB>
+                  </a:tcPr>
+                </a:tc>
+              </a:tr>
+              <a:tr h="52251">
+                <a:tc>
+                  <a:txBody>
+                    <a:bodyPr/>
+                    <a:lstStyle/>
+                    <a:p>
+                      <a:r>
+                        <a:rPr sz="1300" b="1">
+                          <a:solidFill>
+                            <a:srgbClr val="E8EDF5"/>
+                          </a:solidFill>
+                          <a:latin typeface="Arial"/>
+                        </a:rPr>
+                        <a:t>Prove it connects</a:t>
+                      </a:r>
+                    </a:p>
+                  </a:txBody>
+                  <a:tcPr anchor="ctr">
+                    <a:solidFill>
+                      <a:srgbClr val="0A0F1C"/>
+                    </a:solidFill>
+                    <a:lnL w="12700" cap="flat">
+                      <a:solidFill>
+                        <a:srgbClr val="1F2A40"/>
+                      </a:solidFill>
+                    </a:lnL>
+                    <a:lnR w="12700" cap="flat">
+                      <a:solidFill>
+                        <a:srgbClr val="1F2A40"/>
+                      </a:solidFill>
+                    </a:lnR>
+                    <a:lnT w="12700" cap="flat">
+                      <a:solidFill>
+                        <a:srgbClr val="1F2A40"/>
+                      </a:solidFill>
+                    </a:lnT>
+                    <a:lnB w="12700" cap="flat">
+                      <a:solidFill>
+                        <a:srgbClr val="1F2A40"/>
+                      </a:solidFill>
+                    </a:lnB>
+                  </a:tcPr>
+                </a:tc>
+                <a:tc>
+                  <a:txBody>
+                    <a:bodyPr/>
+                    <a:lstStyle/>
+                    <a:p>
+                      <a:r>
+                        <a:rPr sz="1300" b="0">
+                          <a:solidFill>
+                            <a:srgbClr val="8896B0"/>
+                          </a:solidFill>
+                          <a:latin typeface="Arial"/>
+                        </a:rPr>
+                        <a:t>Run it locally and hope the target matches</a:t>
+                      </a:r>
+                    </a:p>
+                  </a:txBody>
+                  <a:tcPr anchor="ctr">
+                    <a:solidFill>
+                      <a:srgbClr val="0A0F1C"/>
+                    </a:solidFill>
+                    <a:lnL w="12700" cap="flat">
+                      <a:solidFill>
+                        <a:srgbClr val="1F2A40"/>
+                      </a:solidFill>
+                    </a:lnL>
+                    <a:lnR w="12700" cap="flat">
+                      <a:solidFill>
+                        <a:srgbClr val="1F2A40"/>
+                      </a:solidFill>
+                    </a:lnR>
+                    <a:lnT w="12700" cap="flat">
+                      <a:solidFill>
+                        <a:srgbClr val="1F2A40"/>
+                      </a:solidFill>
+                    </a:lnT>
+                    <a:lnB w="12700" cap="flat">
+                      <a:solidFill>
+                        <a:srgbClr val="1F2A40"/>
+                      </a:solidFill>
+                    </a:lnB>
+                  </a:tcPr>
+                </a:tc>
+                <a:tc>
+                  <a:txBody>
+                    <a:bodyPr/>
+                    <a:lstStyle/>
+                    <a:p>
+                      <a:r>
+                        <a:rPr sz="1300" b="0">
+                          <a:solidFill>
+                            <a:srgbClr val="8896B0"/>
+                          </a:solidFill>
+                          <a:latin typeface="Arial"/>
+                        </a:rPr>
+                        <a:t>Sandboxed test against the real database, recorded</a:t>
+                      </a:r>
+                    </a:p>
+                  </a:txBody>
+                  <a:tcPr anchor="ctr">
+                    <a:solidFill>
+                      <a:srgbClr val="0A0F1C"/>
+                    </a:solidFill>
+                    <a:lnL w="12700" cap="flat">
+                      <a:solidFill>
+                        <a:srgbClr val="1F2A40"/>
+                      </a:solidFill>
+                    </a:lnL>
+                    <a:lnR w="12700" cap="flat">
+                      <a:solidFill>
+                        <a:srgbClr val="1F2A40"/>
+                      </a:solidFill>
+                    </a:lnR>
+                    <a:lnT w="12700" cap="flat">
+                      <a:solidFill>
+                        <a:srgbClr val="1F2A40"/>
+                      </a:solidFill>
+                    </a:lnT>
+                    <a:lnB w="12700" cap="flat">
+                      <a:solidFill>
+                        <a:srgbClr val="1F2A40"/>
+                      </a:solidFill>
+                    </a:lnB>
+                  </a:tcPr>
+                </a:tc>
+              </a:tr>
+              <a:tr h="52251">
+                <a:tc>
+                  <a:txBody>
+                    <a:bodyPr/>
+                    <a:lstStyle/>
+                    <a:p>
+                      <a:r>
+                        <a:rPr sz="1300" b="1">
+                          <a:solidFill>
+                            <a:srgbClr val="E8EDF5"/>
+                          </a:solidFill>
+                          <a:latin typeface="Arial"/>
+                        </a:rPr>
+                        <a:t>Write the docs</a:t>
+                      </a:r>
+                    </a:p>
+                  </a:txBody>
+                  <a:tcPr anchor="ctr">
+                    <a:solidFill>
+                      <a:srgbClr val="0A0F1C"/>
+                    </a:solidFill>
+                    <a:lnL w="12700" cap="flat">
+                      <a:solidFill>
+                        <a:srgbClr val="1F2A40"/>
+                      </a:solidFill>
+                    </a:lnL>
+                    <a:lnR w="12700" cap="flat">
+                      <a:solidFill>
+                        <a:srgbClr val="1F2A40"/>
+                      </a:solidFill>
+                    </a:lnR>
+                    <a:lnT w="12700" cap="flat">
+                      <a:solidFill>
+                        <a:srgbClr val="1F2A40"/>
+                      </a:solidFill>
+                    </a:lnT>
+                    <a:lnB w="12700" cap="flat">
+                      <a:solidFill>
+                        <a:srgbClr val="1F2A40"/>
+                      </a:solidFill>
+                    </a:lnB>
+                  </a:tcPr>
+                </a:tc>
+                <a:tc>
+                  <a:txBody>
+                    <a:bodyPr/>
+                    <a:lstStyle/>
+                    <a:p>
+                      <a:r>
+                        <a:rPr sz="1300" b="0">
+                          <a:solidFill>
+                            <a:srgbClr val="8896B0"/>
+                          </a:solidFill>
+                          <a:latin typeface="Arial"/>
+                        </a:rPr>
+                        <a:t>Written last, when enthusiasm is lowest</a:t>
+                      </a:r>
+                    </a:p>
+                  </a:txBody>
+                  <a:tcPr anchor="ctr">
+                    <a:solidFill>
+                      <a:srgbClr val="0A0F1C"/>
+                    </a:solidFill>
+                    <a:lnL w="12700" cap="flat">
+                      <a:solidFill>
+                        <a:srgbClr val="1F2A40"/>
+                      </a:solidFill>
+                    </a:lnL>
+                    <a:lnR w="12700" cap="flat">
+                      <a:solidFill>
+                        <a:srgbClr val="1F2A40"/>
+                      </a:solidFill>
+                    </a:lnR>
+                    <a:lnT w="12700" cap="flat">
+                      <a:solidFill>
+                        <a:srgbClr val="1F2A40"/>
+                      </a:solidFill>
+                    </a:lnT>
+                    <a:lnB w="12700" cap="flat">
+                      <a:solidFill>
+                        <a:srgbClr val="1F2A40"/>
+                      </a:solidFill>
+                    </a:lnB>
+                  </a:tcPr>
+                </a:tc>
+                <a:tc>
+                  <a:txBody>
+                    <a:bodyPr/>
+                    <a:lstStyle/>
+                    <a:p>
+                      <a:r>
+                        <a:rPr sz="1300" b="0">
+                          <a:solidFill>
+                            <a:srgbClr val="8896B0"/>
+                          </a:solidFill>
+                          <a:latin typeface="Arial"/>
+                        </a:rPr>
+                        <a:t>Generated with the code, never out of date</a:t>
+                      </a:r>
+                    </a:p>
+                  </a:txBody>
+                  <a:tcPr anchor="ctr">
+                    <a:solidFill>
+                      <a:srgbClr val="0A0F1C"/>
+                    </a:solidFill>
+                    <a:lnL w="12700" cap="flat">
+                      <a:solidFill>
+                        <a:srgbClr val="1F2A40"/>
+                      </a:solidFill>
+                    </a:lnL>
+                    <a:lnR w="12700" cap="flat">
+                      <a:solidFill>
+                        <a:srgbClr val="1F2A40"/>
+                      </a:solidFill>
+                    </a:lnR>
+                    <a:lnT w="12700" cap="flat">
+                      <a:solidFill>
+                        <a:srgbClr val="1F2A40"/>
+                      </a:solidFill>
+                    </a:lnT>
+                    <a:lnB w="12700" cap="flat">
+                      <a:solidFill>
+                        <a:srgbClr val="1F2A40"/>
+                      </a:solidFill>
+                    </a:lnB>
+                  </a:tcPr>
+                </a:tc>
+              </a:tr>
+              <a:tr h="52254">
+                <a:tc>
+                  <a:txBody>
+                    <a:bodyPr/>
+                    <a:lstStyle/>
+                    <a:p>
+                      <a:r>
+                        <a:rPr sz="1300" b="1">
+                          <a:solidFill>
+                            <a:srgbClr val="E8EDF5"/>
+                          </a:solidFill>
+                          <a:latin typeface="Arial"/>
+                        </a:rPr>
+                        <a:t>Answer “why is this in production?”</a:t>
+                      </a:r>
+                    </a:p>
+                  </a:txBody>
+                  <a:tcPr anchor="ctr">
+                    <a:solidFill>
+                      <a:srgbClr val="0A0F1C"/>
+                    </a:solidFill>
+                    <a:lnL w="12700" cap="flat">
+                      <a:solidFill>
+                        <a:srgbClr val="1F2A40"/>
+                      </a:solidFill>
+                    </a:lnL>
+                    <a:lnR w="12700" cap="flat">
+                      <a:solidFill>
+                        <a:srgbClr val="1F2A40"/>
+                      </a:solidFill>
+                    </a:lnR>
+                    <a:lnT w="12700" cap="flat">
+                      <a:solidFill>
+                        <a:srgbClr val="1F2A40"/>
+                      </a:solidFill>
+                    </a:lnT>
+                    <a:lnB w="12700" cap="flat">
+                      <a:solidFill>
+                        <a:srgbClr val="1F2A40"/>
+                      </a:solidFill>
+                    </a:lnB>
+                  </a:tcPr>
+                </a:tc>
+                <a:tc>
+                  <a:txBody>
+                    <a:bodyPr/>
+                    <a:lstStyle/>
+                    <a:p>
+                      <a:r>
+                        <a:rPr sz="1300" b="0">
+                          <a:solidFill>
+                            <a:srgbClr val="8896B0"/>
+                          </a:solidFill>
+                          <a:latin typeface="Arial"/>
+                        </a:rPr>
+                        <a:t>Ask whoever wrote it, if they still work here</a:t>
+                      </a:r>
+                    </a:p>
+                  </a:txBody>
+                  <a:tcPr anchor="ctr">
+                    <a:solidFill>
+                      <a:srgbClr val="0A0F1C"/>
+                    </a:solidFill>
+                    <a:lnL w="12700" cap="flat">
+                      <a:solidFill>
+                        <a:srgbClr val="1F2A40"/>
+                      </a:solidFill>
+                    </a:lnL>
+                    <a:lnR w="12700" cap="flat">
+                      <a:solidFill>
+                        <a:srgbClr val="1F2A40"/>
+                      </a:solidFill>
+                    </a:lnR>
+                    <a:lnT w="12700" cap="flat">
+                      <a:solidFill>
+                        <a:srgbClr val="1F2A40"/>
+                      </a:solidFill>
+                    </a:lnT>
+                    <a:lnB w="12700" cap="flat">
+                      <a:solidFill>
+                        <a:srgbClr val="1F2A40"/>
+                      </a:solidFill>
+                    </a:lnB>
+                  </a:tcPr>
+                </a:tc>
+                <a:tc>
+                  <a:txBody>
+                    <a:bodyPr/>
+                    <a:lstStyle/>
+                    <a:p>
+                      <a:r>
+                        <a:rPr sz="1300" b="0">
+                          <a:solidFill>
+                            <a:srgbClr val="8896B0"/>
+                          </a:solidFill>
+                          <a:latin typeface="Arial"/>
+                        </a:rPr>
+                        <a:t>A manifest chaining request → spec → template → checksum</a:t>
+                      </a:r>
+                    </a:p>
+                  </a:txBody>
+                  <a:tcPr anchor="ctr">
+                    <a:solidFill>
+                      <a:srgbClr val="0A0F1C"/>
+                    </a:solidFill>
+                    <a:lnL w="12700" cap="flat">
+                      <a:solidFill>
+                        <a:srgbClr val="1F2A40"/>
+                      </a:solidFill>
+                    </a:lnL>
+                    <a:lnR w="12700" cap="flat">
+                      <a:solidFill>
+                        <a:srgbClr val="1F2A40"/>
+                      </a:solidFill>
+                    </a:lnR>
+                    <a:lnT w="12700" cap="flat">
+                      <a:solidFill>
+                        <a:srgbClr val="1F2A40"/>
+                      </a:solidFill>
+                    </a:lnT>
+                    <a:lnB w="12700" cap="flat">
+                      <a:solidFill>
+                        <a:srgbClr val="1F2A40"/>
+                      </a:solidFill>
+                    </a:lnB>
+                  </a:tcPr>
+                </a:tc>
+              </a:tr>
+            </a:tbl>
+          </a:graphicData>
+        </a:graphic>
+      </p:graphicFrame>
+      <p:sp>
+        <p:nvSpPr>
+          <p:cNvPr id="7" name="TextBox 6"/>
           <p:cNvSpPr txBox="1"/>
           <p:nvPr/>
         </p:nvSpPr>
         <p:spPr>
           <a:xfrm>
-            <a:off x="685800" y="1965960"/>
-            <a:ext cx="10789920" cy="4023360"/>
+            <a:off x="685800" y="5943600"/>
+            <a:ext cx="10789920" cy="548640"/>
           </a:xfrm>
           <a:prstGeom prst="rect">
             <a:avLst/>
@@ -9107,136 +10438,17 @@
           <a:p>
             <a:pPr>
               <a:spcAft>
-                <a:spcPts val="300"/>
-              </a:spcAft>
-            </a:pPr>
-            <a:r>
-              <a:rPr sz="1700" b="1">
-                <a:solidFill>
-                  <a:srgbClr val="E8EDF5"/>
-                </a:solidFill>
-                <a:latin typeface="Arial"/>
-              </a:rPr>
-              <a:t>The tension</a:t>
-            </a:r>
-          </a:p>
-          <a:p>
-            <a:pPr>
-              <a:spcAft>
-                <a:spcPts val="1600"/>
-              </a:spcAft>
-            </a:pPr>
-            <a:r>
-              <a:rPr sz="1450" b="0">
+                <a:spcPts val="600"/>
+              </a:spcAft>
+            </a:pPr>
+            <a:r>
+              <a:rPr sz="1250" b="0">
                 <a:solidFill>
                   <a:srgbClr val="8896B0"/>
                 </a:solidFill>
-                <a:latin typeface="Arial"/>
-              </a:rPr>
-              <a:t>Free-form English is unpredictable. Production code must be guaranteed. Letting a language model write the connector puts an unreliable component in the one place reliability is non-negotiable.</a:t>
-            </a:r>
-          </a:p>
-          <a:p>
-            <a:pPr>
-              <a:spcAft>
-                <a:spcPts val="300"/>
-              </a:spcAft>
-            </a:pPr>
-            <a:r>
-              <a:rPr sz="1700" b="1">
-                <a:solidFill>
-                  <a:srgbClr val="E8EDF5"/>
-                </a:solidFill>
-                <a:latin typeface="Arial"/>
-              </a:rPr>
-              <a:t>The resolution: the model never writes the code</a:t>
-            </a:r>
-          </a:p>
-          <a:p>
-            <a:pPr>
-              <a:spcAft>
-                <a:spcPts val="1600"/>
-              </a:spcAft>
-            </a:pPr>
-            <a:r>
-              <a:rPr sz="1450" b="0">
-                <a:solidFill>
-                  <a:srgbClr val="8896B0"/>
-                </a:solidFill>
-                <a:latin typeface="Arial"/>
-              </a:rPr>
-              <a:t>It fills in a structured spec — schema-enforced, so it selects from closed sets rather than inventing strings. A Jinja2 template renders the code, deterministically. Same spec in, same bytes out.</a:t>
-            </a:r>
-          </a:p>
-          <a:p>
-            <a:pPr>
-              <a:spcAft>
-                <a:spcPts val="300"/>
-              </a:spcAft>
-            </a:pPr>
-            <a:r>
-              <a:rPr sz="1700" b="1">
-                <a:solidFill>
-                  <a:srgbClr val="E8EDF5"/>
-                </a:solidFill>
-                <a:latin typeface="Arial"/>
-              </a:rPr>
-              <a:t>Reliability comes from constraint, not from prompting</a:t>
-            </a:r>
-          </a:p>
-          <a:p>
-            <a:pPr>
-              <a:spcAft>
-                <a:spcPts val="1600"/>
-              </a:spcAft>
-            </a:pPr>
-            <a:r>
-              <a:rPr sz="1450" b="0">
-                <a:solidFill>
-                  <a:srgbClr val="8896B0"/>
-                </a:solidFill>
-                <a:latin typeface="Arial"/>
-              </a:rPr>
-              <a:t>The model does what models are good at — reading intent from messy language. The template does what templates are good at — producing exactly the same thing every time.</a:t>
-            </a:r>
-          </a:p>
-        </p:txBody>
-      </p:sp>
-      <p:sp>
-        <p:nvSpPr>
-          <p:cNvPr id="7" name="TextBox 6"/>
-          <p:cNvSpPr txBox="1"/>
-          <p:nvPr/>
-        </p:nvSpPr>
-        <p:spPr>
-          <a:xfrm>
-            <a:off x="685800" y="5989320"/>
-            <a:ext cx="10789920" cy="548640"/>
-          </a:xfrm>
-          <a:prstGeom prst="rect">
-            <a:avLst/>
-          </a:prstGeom>
-          <a:noFill/>
-        </p:spPr>
-        <p:txBody>
-          <a:bodyPr wrap="square" lIns="0" rIns="0" tIns="0" bIns="0">
-            <a:spAutoFit/>
-          </a:bodyPr>
-          <a:lstStyle/>
-          <a:p>
-            <a:pPr>
-              <a:spcAft>
-                <a:spcPts val="600"/>
-              </a:spcAft>
-            </a:pPr>
-            <a:r>
-              <a:rPr sz="1250" b="0">
-                <a:solidFill>
-                  <a:srgbClr val="8896B0"/>
-                </a:solidFill>
                 <a:latin typeface="Courier New"/>
               </a:rPr>
-              <a:t>This is the single design decision the rest of the project follows from.</a:t>
+              <a:t>The engineer stops writing the same five methods and starts reviewing a diff.</a:t>
             </a:r>
           </a:p>
         </p:txBody>
@@ -9337,7 +10549,7 @@
                 </a:solidFill>
                 <a:latin typeface="Courier New"/>
               </a:rPr>
-              <a:t>ARCHITECTURE</a:t>
+              <a:t>BUSINESS OBJECTIVE</a:t>
             </a:r>
           </a:p>
         </p:txBody>
@@ -9376,7 +10588,7 @@
                 </a:solidFill>
                 <a:latin typeface="Arial"/>
               </a:rPr>
-              <a:t>One request, five stages</a:t>
+              <a:t>What each stakeholder gets</a:t>
             </a:r>
           </a:p>
         </p:txBody>
@@ -9427,60 +10639,14 @@
       </p:sp>
       <p:sp>
         <p:nvSpPr>
-          <p:cNvPr id="6" name="Rectangle 5"/>
-          <p:cNvSpPr/>
-          <p:nvPr/>
-        </p:nvSpPr>
-        <p:spPr>
-          <a:xfrm>
-            <a:off x="685800" y="2194560"/>
-            <a:ext cx="1997049" cy="2057400"/>
-          </a:xfrm>
-          <a:prstGeom prst="rect">
-            <a:avLst/>
-          </a:prstGeom>
-          <a:solidFill>
-            <a:srgbClr val="111827"/>
-          </a:solidFill>
-          <a:ln w="15875">
-            <a:solidFill>
-              <a:srgbClr val="60A5FA"/>
-            </a:solidFill>
-          </a:ln>
-          <a:effectLst/>
-        </p:spPr>
-        <p:style>
-          <a:lnRef idx="1">
-            <a:schemeClr val="accent1"/>
-          </a:lnRef>
-          <a:fillRef idx="3">
-            <a:schemeClr val="accent1"/>
-          </a:fillRef>
-          <a:effectRef idx="2">
-            <a:schemeClr val="accent1"/>
-          </a:effectRef>
-          <a:fontRef idx="minor">
-            <a:schemeClr val="lt1"/>
-          </a:fontRef>
-        </p:style>
-        <p:txBody>
-          <a:bodyPr rtlCol="0" anchor="ctr"/>
-          <a:lstStyle/>
-          <a:p>
-            <a:pPr algn="ctr"/>
-          </a:p>
-        </p:txBody>
-      </p:sp>
-      <p:sp>
-        <p:nvSpPr>
-          <p:cNvPr id="7" name="TextBox 6"/>
+          <p:cNvPr id="6" name="TextBox 5"/>
           <p:cNvSpPr txBox="1"/>
           <p:nvPr/>
         </p:nvSpPr>
         <p:spPr>
           <a:xfrm>
-            <a:off x="868680" y="2395728"/>
-            <a:ext cx="1631289" cy="457200"/>
+            <a:off x="685800" y="1965960"/>
+            <a:ext cx="10789920" cy="4023360"/>
           </a:xfrm>
           <a:prstGeom prst="rect">
             <a:avLst/>
@@ -9495,31 +10661,143 @@
           <a:p>
             <a:pPr>
               <a:spcAft>
-                <a:spcPts val="600"/>
-              </a:spcAft>
-            </a:pPr>
-            <a:r>
-              <a:rPr sz="1200" b="1">
-                <a:solidFill>
-                  <a:srgbClr val="60A5FA"/>
-                </a:solidFill>
-                <a:latin typeface="Courier New"/>
-              </a:rPr>
-              <a:t>1</a:t>
-            </a:r>
-          </a:p>
-        </p:txBody>
-      </p:sp>
-      <p:sp>
-        <p:nvSpPr>
-          <p:cNvPr id="8" name="TextBox 7"/>
+                <a:spcPts val="300"/>
+              </a:spcAft>
+            </a:pPr>
+            <a:r>
+              <a:rPr sz="1700" b="1">
+                <a:solidFill>
+                  <a:srgbClr val="E8EDF5"/>
+                </a:solidFill>
+                <a:latin typeface="Arial"/>
+              </a:rPr>
+              <a:t>The team requesting the source</a:t>
+            </a:r>
+          </a:p>
+          <a:p>
+            <a:pPr>
+              <a:spcAft>
+                <a:spcPts val="1600"/>
+              </a:spcAft>
+            </a:pPr>
+            <a:r>
+              <a:rPr sz="1450" b="0">
+                <a:solidFill>
+                  <a:srgbClr val="8896B0"/>
+                </a:solidFill>
+                <a:latin typeface="Arial"/>
+              </a:rPr>
+              <a:t>Self-service. They describe what they need in their own words instead of writing a ticket and waiting in a queue — and they find out in the same session if their request is missing something.</a:t>
+            </a:r>
+          </a:p>
+          <a:p>
+            <a:pPr>
+              <a:spcAft>
+                <a:spcPts val="300"/>
+              </a:spcAft>
+            </a:pPr>
+            <a:r>
+              <a:rPr sz="1700" b="1">
+                <a:solidFill>
+                  <a:srgbClr val="E8EDF5"/>
+                </a:solidFill>
+                <a:latin typeface="Arial"/>
+              </a:rPr>
+              <a:t>Data engineering</a:t>
+            </a:r>
+          </a:p>
+          <a:p>
+            <a:pPr>
+              <a:spcAft>
+                <a:spcPts val="1600"/>
+              </a:spcAft>
+            </a:pPr>
+            <a:r>
+              <a:rPr sz="1450" b="0">
+                <a:solidFill>
+                  <a:srgbClr val="8896B0"/>
+                </a:solidFill>
+                <a:latin typeface="Arial"/>
+              </a:rPr>
+              <a:t>The repetitive half of the job disappears; the judgement half remains. Reviewing a generated connector against a spec is faster and more reliable than writing one from scratch, and the review is about fit, not style.</a:t>
+            </a:r>
+          </a:p>
+          <a:p>
+            <a:pPr>
+              <a:spcAft>
+                <a:spcPts val="300"/>
+              </a:spcAft>
+            </a:pPr>
+            <a:r>
+              <a:rPr sz="1700" b="1">
+                <a:solidFill>
+                  <a:srgbClr val="E8EDF5"/>
+                </a:solidFill>
+                <a:latin typeface="Arial"/>
+              </a:rPr>
+              <a:t>Security and compliance</a:t>
+            </a:r>
+          </a:p>
+          <a:p>
+            <a:pPr>
+              <a:spcAft>
+                <a:spcPts val="1600"/>
+              </a:spcAft>
+            </a:pPr>
+            <a:r>
+              <a:rPr sz="1450" b="0">
+                <a:solidFill>
+                  <a:srgbClr val="8896B0"/>
+                </a:solidFill>
+                <a:latin typeface="Arial"/>
+              </a:rPr>
+              <a:t>Credentials cannot reach the code — two checks make that a rejection rather than a review comment. Read-only is the default. Every artifact records which environment variables it needs, by name only.</a:t>
+            </a:r>
+          </a:p>
+          <a:p>
+            <a:pPr>
+              <a:spcAft>
+                <a:spcPts val="300"/>
+              </a:spcAft>
+            </a:pPr>
+            <a:r>
+              <a:rPr sz="1700" b="1">
+                <a:solidFill>
+                  <a:srgbClr val="E8EDF5"/>
+                </a:solidFill>
+                <a:latin typeface="Arial"/>
+              </a:rPr>
+              <a:t>Platform and audit</a:t>
+            </a:r>
+          </a:p>
+          <a:p>
+            <a:pPr>
+              <a:spcAft>
+                <a:spcPts val="1600"/>
+              </a:spcAft>
+            </a:pPr>
+            <a:r>
+              <a:rPr sz="1450" b="0">
+                <a:solidFill>
+                  <a:srgbClr val="8896B0"/>
+                </a:solidFill>
+                <a:latin typeface="Arial"/>
+              </a:rPr>
+              <a:t>Every connector in production is traceable to the sentence that requested it, the template version that rendered it, and the checksum of exactly what shipped. That turns a six-month-later question into a lookup.</a:t>
+            </a:r>
+          </a:p>
+        </p:txBody>
+      </p:sp>
+      <p:sp>
+        <p:nvSpPr>
+          <p:cNvPr id="7" name="TextBox 6"/>
           <p:cNvSpPr txBox="1"/>
           <p:nvPr/>
         </p:nvSpPr>
         <p:spPr>
           <a:xfrm>
-            <a:off x="868680" y="2743200"/>
-            <a:ext cx="1631289" cy="457200"/>
+            <a:off x="685800" y="5989320"/>
+            <a:ext cx="10789920" cy="548640"/>
           </a:xfrm>
           <a:prstGeom prst="rect">
             <a:avLst/>
@@ -9538,988 +10816,13 @@
               </a:spcAft>
             </a:pPr>
             <a:r>
-              <a:rPr sz="1600" b="1">
-                <a:solidFill>
-                  <a:srgbClr val="E8EDF5"/>
-                </a:solidFill>
-                <a:latin typeface="Arial"/>
-              </a:rPr>
-              <a:t>Extract</a:t>
-            </a:r>
-          </a:p>
-        </p:txBody>
-      </p:sp>
-      <p:sp>
-        <p:nvSpPr>
-          <p:cNvPr id="9" name="TextBox 8"/>
-          <p:cNvSpPr txBox="1"/>
-          <p:nvPr/>
-        </p:nvSpPr>
-        <p:spPr>
-          <a:xfrm>
-            <a:off x="868680" y="3154680"/>
-            <a:ext cx="1631289" cy="914400"/>
-          </a:xfrm>
-          <a:prstGeom prst="rect">
-            <a:avLst/>
-          </a:prstGeom>
-          <a:noFill/>
-        </p:spPr>
-        <p:txBody>
-          <a:bodyPr wrap="square" lIns="0" rIns="0" tIns="0" bIns="0">
-            <a:spAutoFit/>
-          </a:bodyPr>
-          <a:lstStyle/>
-          <a:p>
-            <a:pPr>
-              <a:spcAft>
-                <a:spcPts val="600"/>
-              </a:spcAft>
-            </a:pPr>
-            <a:r>
-              <a:rPr sz="1100" b="0">
+              <a:rPr sz="1250" b="0">
                 <a:solidFill>
                   <a:srgbClr val="8896B0"/>
                 </a:solidFill>
                 <a:latin typeface="Courier New"/>
               </a:rPr>
-              <a:t>SpecExtractor</a:t>
-            </a:r>
-            <a:br/>
-            <a:r>
-              <a:rPr sz="1100" b="0">
-                <a:solidFill>
-                  <a:srgbClr val="8896B0"/>
-                </a:solidFill>
-                <a:latin typeface="Courier New"/>
-              </a:rPr>
-              <a:t>.extract()</a:t>
-            </a:r>
-          </a:p>
-        </p:txBody>
-      </p:sp>
-      <p:sp>
-        <p:nvSpPr>
-          <p:cNvPr id="10" name="TextBox 9"/>
-          <p:cNvSpPr txBox="1"/>
-          <p:nvPr/>
-        </p:nvSpPr>
-        <p:spPr>
-          <a:xfrm>
-            <a:off x="868680" y="3858768"/>
-            <a:ext cx="1631289" cy="274320"/>
-          </a:xfrm>
-          <a:prstGeom prst="rect">
-            <a:avLst/>
-          </a:prstGeom>
-          <a:noFill/>
-        </p:spPr>
-        <p:txBody>
-          <a:bodyPr wrap="square" lIns="0" rIns="0" tIns="0" bIns="0">
-            <a:spAutoFit/>
-          </a:bodyPr>
-          <a:lstStyle/>
-          <a:p>
-            <a:pPr>
-              <a:spcAft>
-                <a:spcPts val="600"/>
-              </a:spcAft>
-            </a:pPr>
-            <a:r>
-              <a:rPr sz="950" b="1">
-                <a:solidFill>
-                  <a:srgbClr val="60A5FA"/>
-                </a:solidFill>
-                <a:latin typeface="Courier New"/>
-              </a:rPr>
-              <a:t>1 model call</a:t>
-            </a:r>
-          </a:p>
-        </p:txBody>
-      </p:sp>
-      <p:sp>
-        <p:nvSpPr>
-          <p:cNvPr id="11" name="Rectangle 10"/>
-          <p:cNvSpPr/>
-          <p:nvPr/>
-        </p:nvSpPr>
-        <p:spPr>
-          <a:xfrm>
-            <a:off x="2884017" y="2194560"/>
-            <a:ext cx="1997049" cy="2057400"/>
-          </a:xfrm>
-          <a:prstGeom prst="rect">
-            <a:avLst/>
-          </a:prstGeom>
-          <a:solidFill>
-            <a:srgbClr val="111827"/>
-          </a:solidFill>
-          <a:ln w="15875">
-            <a:solidFill>
-              <a:srgbClr val="34D399"/>
-            </a:solidFill>
-          </a:ln>
-          <a:effectLst/>
-        </p:spPr>
-        <p:style>
-          <a:lnRef idx="1">
-            <a:schemeClr val="accent1"/>
-          </a:lnRef>
-          <a:fillRef idx="3">
-            <a:schemeClr val="accent1"/>
-          </a:fillRef>
-          <a:effectRef idx="2">
-            <a:schemeClr val="accent1"/>
-          </a:effectRef>
-          <a:fontRef idx="minor">
-            <a:schemeClr val="lt1"/>
-          </a:fontRef>
-        </p:style>
-        <p:txBody>
-          <a:bodyPr rtlCol="0" anchor="ctr"/>
-          <a:lstStyle/>
-          <a:p>
-            <a:pPr algn="ctr"/>
-          </a:p>
-        </p:txBody>
-      </p:sp>
-      <p:sp>
-        <p:nvSpPr>
-          <p:cNvPr id="12" name="TextBox 11"/>
-          <p:cNvSpPr txBox="1"/>
-          <p:nvPr/>
-        </p:nvSpPr>
-        <p:spPr>
-          <a:xfrm>
-            <a:off x="3066897" y="2395728"/>
-            <a:ext cx="1631289" cy="457200"/>
-          </a:xfrm>
-          <a:prstGeom prst="rect">
-            <a:avLst/>
-          </a:prstGeom>
-          <a:noFill/>
-        </p:spPr>
-        <p:txBody>
-          <a:bodyPr wrap="square" lIns="0" rIns="0" tIns="0" bIns="0">
-            <a:spAutoFit/>
-          </a:bodyPr>
-          <a:lstStyle/>
-          <a:p>
-            <a:pPr>
-              <a:spcAft>
-                <a:spcPts val="600"/>
-              </a:spcAft>
-            </a:pPr>
-            <a:r>
-              <a:rPr sz="1200" b="1">
-                <a:solidFill>
-                  <a:srgbClr val="34D399"/>
-                </a:solidFill>
-                <a:latin typeface="Courier New"/>
-              </a:rPr>
-              <a:t>2</a:t>
-            </a:r>
-          </a:p>
-        </p:txBody>
-      </p:sp>
-      <p:sp>
-        <p:nvSpPr>
-          <p:cNvPr id="13" name="TextBox 12"/>
-          <p:cNvSpPr txBox="1"/>
-          <p:nvPr/>
-        </p:nvSpPr>
-        <p:spPr>
-          <a:xfrm>
-            <a:off x="3066897" y="2743200"/>
-            <a:ext cx="1631289" cy="457200"/>
-          </a:xfrm>
-          <a:prstGeom prst="rect">
-            <a:avLst/>
-          </a:prstGeom>
-          <a:noFill/>
-        </p:spPr>
-        <p:txBody>
-          <a:bodyPr wrap="square" lIns="0" rIns="0" tIns="0" bIns="0">
-            <a:spAutoFit/>
-          </a:bodyPr>
-          <a:lstStyle/>
-          <a:p>
-            <a:pPr>
-              <a:spcAft>
-                <a:spcPts val="600"/>
-              </a:spcAft>
-            </a:pPr>
-            <a:r>
-              <a:rPr sz="1600" b="1">
-                <a:solidFill>
-                  <a:srgbClr val="E8EDF5"/>
-                </a:solidFill>
-                <a:latin typeface="Arial"/>
-              </a:rPr>
-              <a:t>Refine</a:t>
-            </a:r>
-          </a:p>
-        </p:txBody>
-      </p:sp>
-      <p:sp>
-        <p:nvSpPr>
-          <p:cNvPr id="14" name="TextBox 13"/>
-          <p:cNvSpPr txBox="1"/>
-          <p:nvPr/>
-        </p:nvSpPr>
-        <p:spPr>
-          <a:xfrm>
-            <a:off x="3066897" y="3154680"/>
-            <a:ext cx="1631289" cy="914400"/>
-          </a:xfrm>
-          <a:prstGeom prst="rect">
-            <a:avLst/>
-          </a:prstGeom>
-          <a:noFill/>
-        </p:spPr>
-        <p:txBody>
-          <a:bodyPr wrap="square" lIns="0" rIns="0" tIns="0" bIns="0">
-            <a:spAutoFit/>
-          </a:bodyPr>
-          <a:lstStyle/>
-          <a:p>
-            <a:pPr>
-              <a:spcAft>
-                <a:spcPts val="600"/>
-              </a:spcAft>
-            </a:pPr>
-            <a:r>
-              <a:rPr sz="1100" b="0">
-                <a:solidFill>
-                  <a:srgbClr val="8896B0"/>
-                </a:solidFill>
-                <a:latin typeface="Courier New"/>
-              </a:rPr>
-              <a:t>SpecExtractor</a:t>
-            </a:r>
-            <a:br/>
-            <a:r>
-              <a:rPr sz="1100" b="0">
-                <a:solidFill>
-                  <a:srgbClr val="8896B0"/>
-                </a:solidFill>
-                <a:latin typeface="Courier New"/>
-              </a:rPr>
-              <a:t>.refine()</a:t>
-            </a:r>
-          </a:p>
-        </p:txBody>
-      </p:sp>
-      <p:sp>
-        <p:nvSpPr>
-          <p:cNvPr id="15" name="TextBox 14"/>
-          <p:cNvSpPr txBox="1"/>
-          <p:nvPr/>
-        </p:nvSpPr>
-        <p:spPr>
-          <a:xfrm>
-            <a:off x="3066897" y="3858768"/>
-            <a:ext cx="1631289" cy="274320"/>
-          </a:xfrm>
-          <a:prstGeom prst="rect">
-            <a:avLst/>
-          </a:prstGeom>
-          <a:noFill/>
-        </p:spPr>
-        <p:txBody>
-          <a:bodyPr wrap="square" lIns="0" rIns="0" tIns="0" bIns="0">
-            <a:spAutoFit/>
-          </a:bodyPr>
-          <a:lstStyle/>
-          <a:p>
-            <a:pPr>
-              <a:spcAft>
-                <a:spcPts val="600"/>
-              </a:spcAft>
-            </a:pPr>
-            <a:r>
-              <a:rPr sz="950" b="1">
-                <a:solidFill>
-                  <a:srgbClr val="34D399"/>
-                </a:solidFill>
-                <a:latin typeface="Courier New"/>
-              </a:rPr>
-              <a:t>no model call</a:t>
-            </a:r>
-          </a:p>
-        </p:txBody>
-      </p:sp>
-      <p:sp>
-        <p:nvSpPr>
-          <p:cNvPr id="16" name="Rectangle 15"/>
-          <p:cNvSpPr/>
-          <p:nvPr/>
-        </p:nvSpPr>
-        <p:spPr>
-          <a:xfrm>
-            <a:off x="5082234" y="2194560"/>
-            <a:ext cx="1997049" cy="2057400"/>
-          </a:xfrm>
-          <a:prstGeom prst="rect">
-            <a:avLst/>
-          </a:prstGeom>
-          <a:solidFill>
-            <a:srgbClr val="111827"/>
-          </a:solidFill>
-          <a:ln w="15875">
-            <a:solidFill>
-              <a:srgbClr val="FBBF24"/>
-            </a:solidFill>
-          </a:ln>
-          <a:effectLst/>
-        </p:spPr>
-        <p:style>
-          <a:lnRef idx="1">
-            <a:schemeClr val="accent1"/>
-          </a:lnRef>
-          <a:fillRef idx="3">
-            <a:schemeClr val="accent1"/>
-          </a:fillRef>
-          <a:effectRef idx="2">
-            <a:schemeClr val="accent1"/>
-          </a:effectRef>
-          <a:fontRef idx="minor">
-            <a:schemeClr val="lt1"/>
-          </a:fontRef>
-        </p:style>
-        <p:txBody>
-          <a:bodyPr rtlCol="0" anchor="ctr"/>
-          <a:lstStyle/>
-          <a:p>
-            <a:pPr algn="ctr"/>
-          </a:p>
-        </p:txBody>
-      </p:sp>
-      <p:sp>
-        <p:nvSpPr>
-          <p:cNvPr id="17" name="TextBox 16"/>
-          <p:cNvSpPr txBox="1"/>
-          <p:nvPr/>
-        </p:nvSpPr>
-        <p:spPr>
-          <a:xfrm>
-            <a:off x="5265114" y="2395728"/>
-            <a:ext cx="1631289" cy="457200"/>
-          </a:xfrm>
-          <a:prstGeom prst="rect">
-            <a:avLst/>
-          </a:prstGeom>
-          <a:noFill/>
-        </p:spPr>
-        <p:txBody>
-          <a:bodyPr wrap="square" lIns="0" rIns="0" tIns="0" bIns="0">
-            <a:spAutoFit/>
-          </a:bodyPr>
-          <a:lstStyle/>
-          <a:p>
-            <a:pPr>
-              <a:spcAft>
-                <a:spcPts val="600"/>
-              </a:spcAft>
-            </a:pPr>
-            <a:r>
-              <a:rPr sz="1200" b="1">
-                <a:solidFill>
-                  <a:srgbClr val="FBBF24"/>
-                </a:solidFill>
-                <a:latin typeface="Courier New"/>
-              </a:rPr>
-              <a:t>3</a:t>
-            </a:r>
-          </a:p>
-        </p:txBody>
-      </p:sp>
-      <p:sp>
-        <p:nvSpPr>
-          <p:cNvPr id="18" name="TextBox 17"/>
-          <p:cNvSpPr txBox="1"/>
-          <p:nvPr/>
-        </p:nvSpPr>
-        <p:spPr>
-          <a:xfrm>
-            <a:off x="5265114" y="2743200"/>
-            <a:ext cx="1631289" cy="457200"/>
-          </a:xfrm>
-          <a:prstGeom prst="rect">
-            <a:avLst/>
-          </a:prstGeom>
-          <a:noFill/>
-        </p:spPr>
-        <p:txBody>
-          <a:bodyPr wrap="square" lIns="0" rIns="0" tIns="0" bIns="0">
-            <a:spAutoFit/>
-          </a:bodyPr>
-          <a:lstStyle/>
-          <a:p>
-            <a:pPr>
-              <a:spcAft>
-                <a:spcPts val="600"/>
-              </a:spcAft>
-            </a:pPr>
-            <a:r>
-              <a:rPr sz="1600" b="1">
-                <a:solidFill>
-                  <a:srgbClr val="E8EDF5"/>
-                </a:solidFill>
-                <a:latin typeface="Arial"/>
-              </a:rPr>
-              <a:t>Generate</a:t>
-            </a:r>
-          </a:p>
-        </p:txBody>
-      </p:sp>
-      <p:sp>
-        <p:nvSpPr>
-          <p:cNvPr id="19" name="TextBox 18"/>
-          <p:cNvSpPr txBox="1"/>
-          <p:nvPr/>
-        </p:nvSpPr>
-        <p:spPr>
-          <a:xfrm>
-            <a:off x="5265114" y="3154680"/>
-            <a:ext cx="1631289" cy="914400"/>
-          </a:xfrm>
-          <a:prstGeom prst="rect">
-            <a:avLst/>
-          </a:prstGeom>
-          <a:noFill/>
-        </p:spPr>
-        <p:txBody>
-          <a:bodyPr wrap="square" lIns="0" rIns="0" tIns="0" bIns="0">
-            <a:spAutoFit/>
-          </a:bodyPr>
-          <a:lstStyle/>
-          <a:p>
-            <a:pPr>
-              <a:spcAft>
-                <a:spcPts val="600"/>
-              </a:spcAft>
-            </a:pPr>
-            <a:r>
-              <a:rPr sz="1100" b="0">
-                <a:solidFill>
-                  <a:srgbClr val="8896B0"/>
-                </a:solidFill>
-                <a:latin typeface="Courier New"/>
-              </a:rPr>
-              <a:t>ConnectorGenerator</a:t>
-            </a:r>
-            <a:br/>
-            <a:r>
-              <a:rPr sz="1100" b="0">
-                <a:solidFill>
-                  <a:srgbClr val="8896B0"/>
-                </a:solidFill>
-                <a:latin typeface="Courier New"/>
-              </a:rPr>
-              <a:t>.generate()</a:t>
-            </a:r>
-          </a:p>
-        </p:txBody>
-      </p:sp>
-      <p:sp>
-        <p:nvSpPr>
-          <p:cNvPr id="20" name="TextBox 19"/>
-          <p:cNvSpPr txBox="1"/>
-          <p:nvPr/>
-        </p:nvSpPr>
-        <p:spPr>
-          <a:xfrm>
-            <a:off x="5265114" y="3858768"/>
-            <a:ext cx="1631289" cy="274320"/>
-          </a:xfrm>
-          <a:prstGeom prst="rect">
-            <a:avLst/>
-          </a:prstGeom>
-          <a:noFill/>
-        </p:spPr>
-        <p:txBody>
-          <a:bodyPr wrap="square" lIns="0" rIns="0" tIns="0" bIns="0">
-            <a:spAutoFit/>
-          </a:bodyPr>
-          <a:lstStyle/>
-          <a:p>
-            <a:pPr>
-              <a:spcAft>
-                <a:spcPts val="600"/>
-              </a:spcAft>
-            </a:pPr>
-            <a:r>
-              <a:rPr sz="950" b="1">
-                <a:solidFill>
-                  <a:srgbClr val="FBBF24"/>
-                </a:solidFill>
-                <a:latin typeface="Courier New"/>
-              </a:rPr>
-              <a:t>model on repair</a:t>
-            </a:r>
-          </a:p>
-        </p:txBody>
-      </p:sp>
-      <p:sp>
-        <p:nvSpPr>
-          <p:cNvPr id="21" name="Rectangle 20"/>
-          <p:cNvSpPr/>
-          <p:nvPr/>
-        </p:nvSpPr>
-        <p:spPr>
-          <a:xfrm>
-            <a:off x="7280451" y="2194560"/>
-            <a:ext cx="1997049" cy="2057400"/>
-          </a:xfrm>
-          <a:prstGeom prst="rect">
-            <a:avLst/>
-          </a:prstGeom>
-          <a:solidFill>
-            <a:srgbClr val="111827"/>
-          </a:solidFill>
-          <a:ln w="15875">
-            <a:solidFill>
-              <a:srgbClr val="FBBF24"/>
-            </a:solidFill>
-          </a:ln>
-          <a:effectLst/>
-        </p:spPr>
-        <p:style>
-          <a:lnRef idx="1">
-            <a:schemeClr val="accent1"/>
-          </a:lnRef>
-          <a:fillRef idx="3">
-            <a:schemeClr val="accent1"/>
-          </a:fillRef>
-          <a:effectRef idx="2">
-            <a:schemeClr val="accent1"/>
-          </a:effectRef>
-          <a:fontRef idx="minor">
-            <a:schemeClr val="lt1"/>
-          </a:fontRef>
-        </p:style>
-        <p:txBody>
-          <a:bodyPr rtlCol="0" anchor="ctr"/>
-          <a:lstStyle/>
-          <a:p>
-            <a:pPr algn="ctr"/>
-          </a:p>
-        </p:txBody>
-      </p:sp>
-      <p:sp>
-        <p:nvSpPr>
-          <p:cNvPr id="22" name="TextBox 21"/>
-          <p:cNvSpPr txBox="1"/>
-          <p:nvPr/>
-        </p:nvSpPr>
-        <p:spPr>
-          <a:xfrm>
-            <a:off x="7463331" y="2395728"/>
-            <a:ext cx="1631289" cy="457200"/>
-          </a:xfrm>
-          <a:prstGeom prst="rect">
-            <a:avLst/>
-          </a:prstGeom>
-          <a:noFill/>
-        </p:spPr>
-        <p:txBody>
-          <a:bodyPr wrap="square" lIns="0" rIns="0" tIns="0" bIns="0">
-            <a:spAutoFit/>
-          </a:bodyPr>
-          <a:lstStyle/>
-          <a:p>
-            <a:pPr>
-              <a:spcAft>
-                <a:spcPts val="600"/>
-              </a:spcAft>
-            </a:pPr>
-            <a:r>
-              <a:rPr sz="1200" b="1">
-                <a:solidFill>
-                  <a:srgbClr val="FBBF24"/>
-                </a:solidFill>
-                <a:latin typeface="Courier New"/>
-              </a:rPr>
-              <a:t>4</a:t>
-            </a:r>
-          </a:p>
-        </p:txBody>
-      </p:sp>
-      <p:sp>
-        <p:nvSpPr>
-          <p:cNvPr id="23" name="TextBox 22"/>
-          <p:cNvSpPr txBox="1"/>
-          <p:nvPr/>
-        </p:nvSpPr>
-        <p:spPr>
-          <a:xfrm>
-            <a:off x="7463331" y="2743200"/>
-            <a:ext cx="1631289" cy="457200"/>
-          </a:xfrm>
-          <a:prstGeom prst="rect">
-            <a:avLst/>
-          </a:prstGeom>
-          <a:noFill/>
-        </p:spPr>
-        <p:txBody>
-          <a:bodyPr wrap="square" lIns="0" rIns="0" tIns="0" bIns="0">
-            <a:spAutoFit/>
-          </a:bodyPr>
-          <a:lstStyle/>
-          <a:p>
-            <a:pPr>
-              <a:spcAft>
-                <a:spcPts val="600"/>
-              </a:spcAft>
-            </a:pPr>
-            <a:r>
-              <a:rPr sz="1600" b="1">
-                <a:solidFill>
-                  <a:srgbClr val="E8EDF5"/>
-                </a:solidFill>
-                <a:latin typeface="Arial"/>
-              </a:rPr>
-              <a:t>Test</a:t>
-            </a:r>
-          </a:p>
-        </p:txBody>
-      </p:sp>
-      <p:sp>
-        <p:nvSpPr>
-          <p:cNvPr id="24" name="TextBox 23"/>
-          <p:cNvSpPr txBox="1"/>
-          <p:nvPr/>
-        </p:nvSpPr>
-        <p:spPr>
-          <a:xfrm>
-            <a:off x="7463331" y="3154680"/>
-            <a:ext cx="1631289" cy="914400"/>
-          </a:xfrm>
-          <a:prstGeom prst="rect">
-            <a:avLst/>
-          </a:prstGeom>
-          <a:noFill/>
-        </p:spPr>
-        <p:txBody>
-          <a:bodyPr wrap="square" lIns="0" rIns="0" tIns="0" bIns="0">
-            <a:spAutoFit/>
-          </a:bodyPr>
-          <a:lstStyle/>
-          <a:p>
-            <a:pPr>
-              <a:spcAft>
-                <a:spcPts val="600"/>
-              </a:spcAft>
-            </a:pPr>
-            <a:r>
-              <a:rPr sz="1100" b="0">
-                <a:solidFill>
-                  <a:srgbClr val="8896B0"/>
-                </a:solidFill>
-                <a:latin typeface="Courier New"/>
-              </a:rPr>
-              <a:t>ConnectionSandbox</a:t>
-            </a:r>
-            <a:br/>
-            <a:r>
-              <a:rPr sz="1100" b="0">
-                <a:solidFill>
-                  <a:srgbClr val="8896B0"/>
-                </a:solidFill>
-                <a:latin typeface="Courier New"/>
-              </a:rPr>
-              <a:t>.run()</a:t>
-            </a:r>
-          </a:p>
-        </p:txBody>
-      </p:sp>
-      <p:sp>
-        <p:nvSpPr>
-          <p:cNvPr id="25" name="TextBox 24"/>
-          <p:cNvSpPr txBox="1"/>
-          <p:nvPr/>
-        </p:nvSpPr>
-        <p:spPr>
-          <a:xfrm>
-            <a:off x="7463331" y="3858768"/>
-            <a:ext cx="1631289" cy="274320"/>
-          </a:xfrm>
-          <a:prstGeom prst="rect">
-            <a:avLst/>
-          </a:prstGeom>
-          <a:noFill/>
-        </p:spPr>
-        <p:txBody>
-          <a:bodyPr wrap="square" lIns="0" rIns="0" tIns="0" bIns="0">
-            <a:spAutoFit/>
-          </a:bodyPr>
-          <a:lstStyle/>
-          <a:p>
-            <a:pPr>
-              <a:spcAft>
-                <a:spcPts val="600"/>
-              </a:spcAft>
-            </a:pPr>
-            <a:r>
-              <a:rPr sz="950" b="1">
-                <a:solidFill>
-                  <a:srgbClr val="FBBF24"/>
-                </a:solidFill>
-                <a:latin typeface="Courier New"/>
-              </a:rPr>
-              <a:t>subprocess</a:t>
-            </a:r>
-          </a:p>
-        </p:txBody>
-      </p:sp>
-      <p:sp>
-        <p:nvSpPr>
-          <p:cNvPr id="26" name="Rectangle 25"/>
-          <p:cNvSpPr/>
-          <p:nvPr/>
-        </p:nvSpPr>
-        <p:spPr>
-          <a:xfrm>
-            <a:off x="9478668" y="2194560"/>
-            <a:ext cx="1997049" cy="2057400"/>
-          </a:xfrm>
-          <a:prstGeom prst="rect">
-            <a:avLst/>
-          </a:prstGeom>
-          <a:solidFill>
-            <a:srgbClr val="111827"/>
-          </a:solidFill>
-          <a:ln w="15875">
-            <a:solidFill>
-              <a:srgbClr val="34D399"/>
-            </a:solidFill>
-          </a:ln>
-          <a:effectLst/>
-        </p:spPr>
-        <p:style>
-          <a:lnRef idx="1">
-            <a:schemeClr val="accent1"/>
-          </a:lnRef>
-          <a:fillRef idx="3">
-            <a:schemeClr val="accent1"/>
-          </a:fillRef>
-          <a:effectRef idx="2">
-            <a:schemeClr val="accent1"/>
-          </a:effectRef>
-          <a:fontRef idx="minor">
-            <a:schemeClr val="lt1"/>
-          </a:fontRef>
-        </p:style>
-        <p:txBody>
-          <a:bodyPr rtlCol="0" anchor="ctr"/>
-          <a:lstStyle/>
-          <a:p>
-            <a:pPr algn="ctr"/>
-          </a:p>
-        </p:txBody>
-      </p:sp>
-      <p:sp>
-        <p:nvSpPr>
-          <p:cNvPr id="27" name="TextBox 26"/>
-          <p:cNvSpPr txBox="1"/>
-          <p:nvPr/>
-        </p:nvSpPr>
-        <p:spPr>
-          <a:xfrm>
-            <a:off x="9661548" y="2395728"/>
-            <a:ext cx="1631289" cy="457200"/>
-          </a:xfrm>
-          <a:prstGeom prst="rect">
-            <a:avLst/>
-          </a:prstGeom>
-          <a:noFill/>
-        </p:spPr>
-        <p:txBody>
-          <a:bodyPr wrap="square" lIns="0" rIns="0" tIns="0" bIns="0">
-            <a:spAutoFit/>
-          </a:bodyPr>
-          <a:lstStyle/>
-          <a:p>
-            <a:pPr>
-              <a:spcAft>
-                <a:spcPts val="600"/>
-              </a:spcAft>
-            </a:pPr>
-            <a:r>
-              <a:rPr sz="1200" b="1">
-                <a:solidFill>
-                  <a:srgbClr val="34D399"/>
-                </a:solidFill>
-                <a:latin typeface="Courier New"/>
-              </a:rPr>
-              <a:t>5</a:t>
-            </a:r>
-          </a:p>
-        </p:txBody>
-      </p:sp>
-      <p:sp>
-        <p:nvSpPr>
-          <p:cNvPr id="28" name="TextBox 27"/>
-          <p:cNvSpPr txBox="1"/>
-          <p:nvPr/>
-        </p:nvSpPr>
-        <p:spPr>
-          <a:xfrm>
-            <a:off x="9661548" y="2743200"/>
-            <a:ext cx="1631289" cy="457200"/>
-          </a:xfrm>
-          <a:prstGeom prst="rect">
-            <a:avLst/>
-          </a:prstGeom>
-          <a:noFill/>
-        </p:spPr>
-        <p:txBody>
-          <a:bodyPr wrap="square" lIns="0" rIns="0" tIns="0" bIns="0">
-            <a:spAutoFit/>
-          </a:bodyPr>
-          <a:lstStyle/>
-          <a:p>
-            <a:pPr>
-              <a:spcAft>
-                <a:spcPts val="600"/>
-              </a:spcAft>
-            </a:pPr>
-            <a:r>
-              <a:rPr sz="1600" b="1">
-                <a:solidFill>
-                  <a:srgbClr val="E8EDF5"/>
-                </a:solidFill>
-                <a:latin typeface="Arial"/>
-              </a:rPr>
-              <a:t>Deliver</a:t>
-            </a:r>
-          </a:p>
-        </p:txBody>
-      </p:sp>
-      <p:sp>
-        <p:nvSpPr>
-          <p:cNvPr id="29" name="TextBox 28"/>
-          <p:cNvSpPr txBox="1"/>
-          <p:nvPr/>
-        </p:nvSpPr>
-        <p:spPr>
-          <a:xfrm>
-            <a:off x="9661548" y="3154680"/>
-            <a:ext cx="1631289" cy="914400"/>
-          </a:xfrm>
-          <a:prstGeom prst="rect">
-            <a:avLst/>
-          </a:prstGeom>
-          <a:noFill/>
-        </p:spPr>
-        <p:txBody>
-          <a:bodyPr wrap="square" lIns="0" rIns="0" tIns="0" bIns="0">
-            <a:spAutoFit/>
-          </a:bodyPr>
-          <a:lstStyle/>
-          <a:p>
-            <a:pPr>
-              <a:spcAft>
-                <a:spcPts val="600"/>
-              </a:spcAft>
-            </a:pPr>
-            <a:r>
-              <a:rPr sz="1100" b="0">
-                <a:solidFill>
-                  <a:srgbClr val="8896B0"/>
-                </a:solidFill>
-                <a:latin typeface="Courier New"/>
-              </a:rPr>
-              <a:t>Artifact</a:t>
-            </a:r>
-            <a:br/>
-            <a:r>
-              <a:rPr sz="1100" b="0">
-                <a:solidFill>
-                  <a:srgbClr val="8896B0"/>
-                </a:solidFill>
-                <a:latin typeface="Courier New"/>
-              </a:rPr>
-              <a:t>.to_zip()</a:t>
-            </a:r>
-          </a:p>
-        </p:txBody>
-      </p:sp>
-      <p:sp>
-        <p:nvSpPr>
-          <p:cNvPr id="30" name="TextBox 29"/>
-          <p:cNvSpPr txBox="1"/>
-          <p:nvPr/>
-        </p:nvSpPr>
-        <p:spPr>
-          <a:xfrm>
-            <a:off x="9661548" y="3858768"/>
-            <a:ext cx="1631289" cy="274320"/>
-          </a:xfrm>
-          <a:prstGeom prst="rect">
-            <a:avLst/>
-          </a:prstGeom>
-          <a:noFill/>
-        </p:spPr>
-        <p:txBody>
-          <a:bodyPr wrap="square" lIns="0" rIns="0" tIns="0" bIns="0">
-            <a:spAutoFit/>
-          </a:bodyPr>
-          <a:lstStyle/>
-          <a:p>
-            <a:pPr>
-              <a:spcAft>
-                <a:spcPts val="600"/>
-              </a:spcAft>
-            </a:pPr>
-            <a:r>
-              <a:rPr sz="950" b="1">
-                <a:solidFill>
-                  <a:srgbClr val="34D399"/>
-                </a:solidFill>
-                <a:latin typeface="Courier New"/>
-              </a:rPr>
-              <a:t>deterministic</a:t>
-            </a:r>
-          </a:p>
-        </p:txBody>
-      </p:sp>
-      <p:sp>
-        <p:nvSpPr>
-          <p:cNvPr id="31" name="TextBox 30"/>
-          <p:cNvSpPr txBox="1"/>
-          <p:nvPr/>
-        </p:nvSpPr>
-        <p:spPr>
-          <a:xfrm>
-            <a:off x="685800" y="4709160"/>
-            <a:ext cx="10789920" cy="1463040"/>
-          </a:xfrm>
-          <a:prstGeom prst="rect">
-            <a:avLst/>
-          </a:prstGeom>
-          <a:noFill/>
-        </p:spPr>
-        <p:txBody>
-          <a:bodyPr wrap="square" lIns="0" rIns="0" tIns="0" bIns="0">
-            <a:spAutoFit/>
-          </a:bodyPr>
-          <a:lstStyle/>
-          <a:p>
-            <a:pPr>
-              <a:spcAft>
-                <a:spcPts val="600"/>
-              </a:spcAft>
-            </a:pPr>
-            <a:r>
-              <a:rPr sz="1500" b="0">
-                <a:solidFill>
-                  <a:srgbClr val="8896B0"/>
-                </a:solidFill>
-                <a:latin typeface="Arial"/>
-              </a:rPr>
-              <a:t>Only three stages can call the model, and two of those only when something has already failed. Answering a clarifying question is pure arithmetic — the answers map onto known fields, so a second extraction can never re-misread what you already settled.</a:t>
+              <a:t>Adding a new SQL dialect is a config entry, not a project.</a:t>
             </a:r>
           </a:p>
         </p:txBody>
@@ -10594,7 +10897,7 @@
         </p:nvSpPr>
         <p:spPr>
           <a:xfrm>
-            <a:off x="685800" y="384048"/>
+            <a:off x="685800" y="457200"/>
             <a:ext cx="10058400" cy="274320"/>
           </a:xfrm>
           <a:prstGeom prst="rect">
@@ -10620,7 +10923,7 @@
                 </a:solidFill>
                 <a:latin typeface="Courier New"/>
               </a:rPr>
-              <a:t>THE PRODUCT · 1 OF 6</a:t>
+              <a:t>THE CORE IDEA</a:t>
             </a:r>
           </a:p>
         </p:txBody>
@@ -10633,8 +10936,8 @@
         </p:nvSpPr>
         <p:spPr>
           <a:xfrm>
-            <a:off x="685800" y="658368"/>
-            <a:ext cx="10789920" cy="457200"/>
+            <a:off x="685800" y="777240"/>
+            <a:ext cx="10789920" cy="914400"/>
           </a:xfrm>
           <a:prstGeom prst="rect">
             <a:avLst/>
@@ -10653,41 +10956,61 @@
               </a:spcAft>
             </a:pPr>
             <a:r>
-              <a:rPr sz="2400" b="1">
+              <a:rPr sz="3000" b="1">
                 <a:solidFill>
                   <a:srgbClr val="E8EDF5"/>
                 </a:solidFill>
                 <a:latin typeface="Arial"/>
               </a:rPr>
-              <a:t>Describe the source in plain English</a:t>
-            </a:r>
-          </a:p>
-        </p:txBody>
-      </p:sp>
-      <p:pic>
-        <p:nvPicPr>
-          <p:cNvPr id="5" name="Picture 4" descr="01-welcome.png"/>
-          <p:cNvPicPr>
-            <a:picLocks noChangeAspect="1"/>
-          </p:cNvPicPr>
-          <p:nvPr/>
-        </p:nvPicPr>
-        <p:blipFill>
-          <a:blip r:embed="rId2"/>
-          <a:stretch>
-            <a:fillRect/>
-          </a:stretch>
-        </p:blipFill>
-        <p:spPr>
-          <a:xfrm>
-            <a:off x="1853031" y="1188720"/>
-            <a:ext cx="8485632" cy="4773168"/>
-          </a:xfrm>
-          <a:prstGeom prst="rect">
-            <a:avLst/>
-          </a:prstGeom>
-        </p:spPr>
-      </p:pic>
+              <a:t>The tension — and how it is resolved</a:t>
+            </a:r>
+          </a:p>
+        </p:txBody>
+      </p:sp>
+      <p:sp>
+        <p:nvSpPr>
+          <p:cNvPr id="5" name="Rectangle 4"/>
+          <p:cNvSpPr/>
+          <p:nvPr/>
+        </p:nvSpPr>
+        <p:spPr>
+          <a:xfrm>
+            <a:off x="685800" y="1691640"/>
+            <a:ext cx="10789920" cy="9525"/>
+          </a:xfrm>
+          <a:prstGeom prst="rect">
+            <a:avLst/>
+          </a:prstGeom>
+          <a:solidFill>
+            <a:srgbClr val="1F2A40"/>
+          </a:solidFill>
+          <a:ln>
+            <a:noFill/>
+          </a:ln>
+          <a:effectLst/>
+        </p:spPr>
+        <p:style>
+          <a:lnRef idx="1">
+            <a:schemeClr val="accent1"/>
+          </a:lnRef>
+          <a:fillRef idx="3">
+            <a:schemeClr val="accent1"/>
+          </a:fillRef>
+          <a:effectRef idx="2">
+            <a:schemeClr val="accent1"/>
+          </a:effectRef>
+          <a:fontRef idx="minor">
+            <a:schemeClr val="lt1"/>
+          </a:fontRef>
+        </p:style>
+        <p:txBody>
+          <a:bodyPr rtlCol="0" anchor="ctr"/>
+          <a:lstStyle/>
+          <a:p>
+            <a:pPr algn="ctr"/>
+          </a:p>
+        </p:txBody>
+      </p:sp>
       <p:sp>
         <p:nvSpPr>
           <p:cNvPr id="6" name="TextBox 5"/>
@@ -10696,8 +11019,8 @@
         </p:nvSpPr>
         <p:spPr>
           <a:xfrm>
-            <a:off x="685800" y="6108192"/>
-            <a:ext cx="10789920" cy="502920"/>
+            <a:off x="685800" y="1965960"/>
+            <a:ext cx="10789920" cy="4023360"/>
           </a:xfrm>
           <a:prstGeom prst="rect">
             <a:avLst/>
@@ -10712,17 +11035,136 @@
           <a:p>
             <a:pPr>
               <a:spcAft>
+                <a:spcPts val="300"/>
+              </a:spcAft>
+            </a:pPr>
+            <a:r>
+              <a:rPr sz="1700" b="1">
+                <a:solidFill>
+                  <a:srgbClr val="E8EDF5"/>
+                </a:solidFill>
+                <a:latin typeface="Arial"/>
+              </a:rPr>
+              <a:t>The tension</a:t>
+            </a:r>
+          </a:p>
+          <a:p>
+            <a:pPr>
+              <a:spcAft>
+                <a:spcPts val="1600"/>
+              </a:spcAft>
+            </a:pPr>
+            <a:r>
+              <a:rPr sz="1450" b="0">
+                <a:solidFill>
+                  <a:srgbClr val="8896B0"/>
+                </a:solidFill>
+                <a:latin typeface="Arial"/>
+              </a:rPr>
+              <a:t>Free-form English is unpredictable. Production code must be guaranteed. Letting a language model write the connector puts an unreliable component in the one place reliability is non-negotiable.</a:t>
+            </a:r>
+          </a:p>
+          <a:p>
+            <a:pPr>
+              <a:spcAft>
+                <a:spcPts val="300"/>
+              </a:spcAft>
+            </a:pPr>
+            <a:r>
+              <a:rPr sz="1700" b="1">
+                <a:solidFill>
+                  <a:srgbClr val="E8EDF5"/>
+                </a:solidFill>
+                <a:latin typeface="Arial"/>
+              </a:rPr>
+              <a:t>The resolution: the model never writes the code</a:t>
+            </a:r>
+          </a:p>
+          <a:p>
+            <a:pPr>
+              <a:spcAft>
+                <a:spcPts val="1600"/>
+              </a:spcAft>
+            </a:pPr>
+            <a:r>
+              <a:rPr sz="1450" b="0">
+                <a:solidFill>
+                  <a:srgbClr val="8896B0"/>
+                </a:solidFill>
+                <a:latin typeface="Arial"/>
+              </a:rPr>
+              <a:t>It fills in a structured spec — schema-enforced, so it selects from closed sets rather than inventing strings. A Jinja2 template renders the code, deterministically. Same spec in, same bytes out.</a:t>
+            </a:r>
+          </a:p>
+          <a:p>
+            <a:pPr>
+              <a:spcAft>
+                <a:spcPts val="300"/>
+              </a:spcAft>
+            </a:pPr>
+            <a:r>
+              <a:rPr sz="1700" b="1">
+                <a:solidFill>
+                  <a:srgbClr val="E8EDF5"/>
+                </a:solidFill>
+                <a:latin typeface="Arial"/>
+              </a:rPr>
+              <a:t>Reliability comes from constraint, not from prompting</a:t>
+            </a:r>
+          </a:p>
+          <a:p>
+            <a:pPr>
+              <a:spcAft>
+                <a:spcPts val="1600"/>
+              </a:spcAft>
+            </a:pPr>
+            <a:r>
+              <a:rPr sz="1450" b="0">
+                <a:solidFill>
+                  <a:srgbClr val="8896B0"/>
+                </a:solidFill>
+                <a:latin typeface="Arial"/>
+              </a:rPr>
+              <a:t>The model does what models are good at — reading intent from messy language. The template does what templates are good at — producing exactly the same thing every time.</a:t>
+            </a:r>
+          </a:p>
+        </p:txBody>
+      </p:sp>
+      <p:sp>
+        <p:nvSpPr>
+          <p:cNvPr id="7" name="TextBox 6"/>
+          <p:cNvSpPr txBox="1"/>
+          <p:nvPr/>
+        </p:nvSpPr>
+        <p:spPr>
+          <a:xfrm>
+            <a:off x="685800" y="5989320"/>
+            <a:ext cx="10789920" cy="548640"/>
+          </a:xfrm>
+          <a:prstGeom prst="rect">
+            <a:avLst/>
+          </a:prstGeom>
+          <a:noFill/>
+        </p:spPr>
+        <p:txBody>
+          <a:bodyPr wrap="square" lIns="0" rIns="0" tIns="0" bIns="0">
+            <a:spAutoFit/>
+          </a:bodyPr>
+          <a:lstStyle/>
+          <a:p>
+            <a:pPr>
+              <a:spcAft>
                 <a:spcPts val="600"/>
               </a:spcAft>
             </a:pPr>
             <a:r>
-              <a:rPr sz="1300" b="0">
+              <a:rPr sz="1250" b="0">
                 <a:solidFill>
                   <a:srgbClr val="8896B0"/>
                 </a:solidFill>
-                <a:latin typeface="Arial"/>
-              </a:rPr>
-              <a:t>No forms, no connection wizard. Three worked examples are built in for a cold start.</a:t>
+                <a:latin typeface="Courier New"/>
+              </a:rPr>
+              <a:t>This is the single design decision the rest of the project follows from.</a:t>
             </a:r>
           </a:p>
         </p:txBody>
@@ -10797,7 +11239,7 @@
         </p:nvSpPr>
         <p:spPr>
           <a:xfrm>
-            <a:off x="685800" y="384048"/>
+            <a:off x="685800" y="457200"/>
             <a:ext cx="10058400" cy="274320"/>
           </a:xfrm>
           <a:prstGeom prst="rect">
@@ -10823,7 +11265,7 @@
                 </a:solidFill>
                 <a:latin typeface="Courier New"/>
               </a:rPr>
-              <a:t>THE PRODUCT · 2 OF 6</a:t>
+              <a:t>ARCHITECTURE</a:t>
             </a:r>
           </a:p>
         </p:txBody>
@@ -10836,8 +11278,8 @@
         </p:nvSpPr>
         <p:spPr>
           <a:xfrm>
-            <a:off x="685800" y="658368"/>
-            <a:ext cx="10789920" cy="457200"/>
+            <a:off x="685800" y="777240"/>
+            <a:ext cx="10789920" cy="914400"/>
           </a:xfrm>
           <a:prstGeom prst="rect">
             <a:avLst/>
@@ -10856,51 +11298,27 @@
               </a:spcAft>
             </a:pPr>
             <a:r>
-              <a:rPr sz="2400" b="1">
+              <a:rPr sz="2800" b="1">
                 <a:solidFill>
                   <a:srgbClr val="E8EDF5"/>
                 </a:solidFill>
                 <a:latin typeface="Arial"/>
               </a:rPr>
-              <a:t>When the request is incomplete, the agent asks</a:t>
-            </a:r>
-          </a:p>
-        </p:txBody>
-      </p:sp>
-      <p:pic>
-        <p:nvPicPr>
-          <p:cNvPr id="5" name="Picture 4" descr="02-clarification.png"/>
-          <p:cNvPicPr>
-            <a:picLocks noChangeAspect="1"/>
-          </p:cNvPicPr>
-          <p:nvPr/>
-        </p:nvPicPr>
-        <p:blipFill>
-          <a:blip r:embed="rId2"/>
-          <a:stretch>
-            <a:fillRect/>
-          </a:stretch>
-        </p:blipFill>
-        <p:spPr>
-          <a:xfrm>
-            <a:off x="1853031" y="1188720"/>
-            <a:ext cx="8485632" cy="4773168"/>
-          </a:xfrm>
-          <a:prstGeom prst="rect">
-            <a:avLst/>
-          </a:prstGeom>
-        </p:spPr>
-      </p:pic>
-      <p:sp>
-        <p:nvSpPr>
-          <p:cNvPr id="6" name="TextBox 5"/>
+              <a:t>One request, five stages</a:t>
+            </a:r>
+          </a:p>
+        </p:txBody>
+      </p:sp>
+      <p:sp>
+        <p:nvSpPr>
+          <p:cNvPr id="5" name="TextBox 4"/>
           <p:cNvSpPr txBox="1"/>
           <p:nvPr/>
         </p:nvSpPr>
         <p:spPr>
           <a:xfrm>
-            <a:off x="685800" y="6108192"/>
-            <a:ext cx="10789920" cy="502920"/>
+            <a:off x="795528" y="1847088"/>
+            <a:ext cx="1792224" cy="274320"/>
           </a:xfrm>
           <a:prstGeom prst="rect">
             <a:avLst/>
@@ -10919,13 +11337,1973 @@
               </a:spcAft>
             </a:pPr>
             <a:r>
-              <a:rPr sz="1300" b="0">
+              <a:rPr sz="1050" b="0">
+                <a:solidFill>
+                  <a:srgbClr val="4B5975"/>
+                </a:solidFill>
+                <a:latin typeface="Courier New"/>
+              </a:rPr>
+              <a:t>POST /api/requests</a:t>
+            </a:r>
+          </a:p>
+        </p:txBody>
+      </p:sp>
+      <p:sp>
+        <p:nvSpPr>
+          <p:cNvPr id="6" name="Rectangle 5"/>
+          <p:cNvSpPr/>
+          <p:nvPr/>
+        </p:nvSpPr>
+        <p:spPr>
+          <a:xfrm>
+            <a:off x="685800" y="2249424"/>
+            <a:ext cx="2011680" cy="1170432"/>
+          </a:xfrm>
+          <a:prstGeom prst="rect">
+            <a:avLst/>
+          </a:prstGeom>
+          <a:solidFill>
+            <a:srgbClr val="111827"/>
+          </a:solidFill>
+          <a:ln w="15875">
+            <a:solidFill>
+              <a:srgbClr val="1F2A40"/>
+            </a:solidFill>
+          </a:ln>
+          <a:effectLst/>
+        </p:spPr>
+        <p:style>
+          <a:lnRef idx="1">
+            <a:schemeClr val="accent1"/>
+          </a:lnRef>
+          <a:fillRef idx="3">
+            <a:schemeClr val="accent1"/>
+          </a:fillRef>
+          <a:effectRef idx="2">
+            <a:schemeClr val="accent1"/>
+          </a:effectRef>
+          <a:fontRef idx="minor">
+            <a:schemeClr val="lt1"/>
+          </a:fontRef>
+        </p:style>
+        <p:txBody>
+          <a:bodyPr rtlCol="0" anchor="ctr"/>
+          <a:lstStyle/>
+          <a:p>
+            <a:pPr algn="ctr"/>
+          </a:p>
+        </p:txBody>
+      </p:sp>
+      <p:sp>
+        <p:nvSpPr>
+          <p:cNvPr id="7" name="TextBox 6"/>
+          <p:cNvSpPr txBox="1"/>
+          <p:nvPr/>
+        </p:nvSpPr>
+        <p:spPr>
+          <a:xfrm>
+            <a:off x="795528" y="2377440"/>
+            <a:ext cx="1792224" cy="310896"/>
+          </a:xfrm>
+          <a:prstGeom prst="rect">
+            <a:avLst/>
+          </a:prstGeom>
+          <a:noFill/>
+        </p:spPr>
+        <p:txBody>
+          <a:bodyPr wrap="square" lIns="0" rIns="0" tIns="0" bIns="0">
+            <a:spAutoFit/>
+          </a:bodyPr>
+          <a:lstStyle/>
+          <a:p>
+            <a:pPr algn="ctr">
+              <a:spcAft>
+                <a:spcPts val="600"/>
+              </a:spcAft>
+            </a:pPr>
+            <a:r>
+              <a:rPr sz="1700" b="1">
+                <a:solidFill>
+                  <a:srgbClr val="E8EDF5"/>
+                </a:solidFill>
+                <a:latin typeface="Arial"/>
+              </a:rPr>
+              <a:t>Extract</a:t>
+            </a:r>
+          </a:p>
+        </p:txBody>
+      </p:sp>
+      <p:sp>
+        <p:nvSpPr>
+          <p:cNvPr id="8" name="TextBox 7"/>
+          <p:cNvSpPr txBox="1"/>
+          <p:nvPr/>
+        </p:nvSpPr>
+        <p:spPr>
+          <a:xfrm>
+            <a:off x="795528" y="2743200"/>
+            <a:ext cx="1792224" cy="548640"/>
+          </a:xfrm>
+          <a:prstGeom prst="rect">
+            <a:avLst/>
+          </a:prstGeom>
+          <a:noFill/>
+        </p:spPr>
+        <p:txBody>
+          <a:bodyPr wrap="square" lIns="0" rIns="0" tIns="0" bIns="0">
+            <a:spAutoFit/>
+          </a:bodyPr>
+          <a:lstStyle/>
+          <a:p>
+            <a:pPr algn="ctr">
+              <a:spcAft>
+                <a:spcPts val="600"/>
+              </a:spcAft>
+            </a:pPr>
+            <a:r>
+              <a:rPr sz="1050" b="0">
                 <a:solidFill>
                   <a:srgbClr val="8896B0"/>
                 </a:solidFill>
+                <a:latin typeface="Courier New"/>
+              </a:rPr>
+              <a:t>SpecExtractor</a:t>
+            </a:r>
+          </a:p>
+          <a:p>
+            <a:pPr algn="ctr">
+              <a:spcAft>
+                <a:spcPts val="0"/>
+              </a:spcAft>
+            </a:pPr>
+            <a:r>
+              <a:rPr sz="1050" b="0">
+                <a:solidFill>
+                  <a:srgbClr val="8896B0"/>
+                </a:solidFill>
+                <a:latin typeface="Courier New"/>
+              </a:rPr>
+              <a:t>.extract()</a:t>
+            </a:r>
+          </a:p>
+        </p:txBody>
+      </p:sp>
+      <p:sp>
+        <p:nvSpPr>
+          <p:cNvPr id="9" name="TextBox 8"/>
+          <p:cNvSpPr txBox="1"/>
+          <p:nvPr/>
+        </p:nvSpPr>
+        <p:spPr>
+          <a:xfrm>
+            <a:off x="795528" y="3547872"/>
+            <a:ext cx="1792224" cy="292608"/>
+          </a:xfrm>
+          <a:prstGeom prst="rect">
+            <a:avLst/>
+          </a:prstGeom>
+          <a:noFill/>
+        </p:spPr>
+        <p:txBody>
+          <a:bodyPr wrap="square" lIns="0" rIns="0" tIns="0" bIns="0">
+            <a:spAutoFit/>
+          </a:bodyPr>
+          <a:lstStyle/>
+          <a:p>
+            <a:pPr algn="ctr">
+              <a:spcAft>
+                <a:spcPts val="600"/>
+              </a:spcAft>
+            </a:pPr>
+            <a:r>
+              <a:rPr sz="1050" b="0">
+                <a:solidFill>
+                  <a:srgbClr val="4B5975"/>
+                </a:solidFill>
+                <a:latin typeface="Courier New"/>
+              </a:rPr>
+              <a:t>SpecDraft + questions</a:t>
+            </a:r>
+          </a:p>
+        </p:txBody>
+      </p:sp>
+      <p:cxnSp>
+        <p:nvCxnSpPr>
+          <p:cNvPr id="10" name="Connector 9"/>
+          <p:cNvCxnSpPr/>
+          <p:nvPr/>
+        </p:nvCxnSpPr>
+        <p:spPr>
+          <a:xfrm>
+            <a:off x="2715768" y="2834640"/>
+            <a:ext cx="146304" cy="0"/>
+          </a:xfrm>
+          <a:prstGeom prst="line">
+            <a:avLst/>
+          </a:prstGeom>
+          <a:ln w="19050">
+            <a:solidFill>
+              <a:srgbClr val="8896B0"/>
+            </a:solidFill>
+            <a:tailEnd type="triangle" w="med" len="med"/>
+          </a:ln>
+        </p:spPr>
+        <p:style>
+          <a:lnRef idx="2">
+            <a:schemeClr val="accent1"/>
+          </a:lnRef>
+          <a:fillRef idx="0">
+            <a:schemeClr val="accent1"/>
+          </a:fillRef>
+          <a:effectRef idx="1">
+            <a:schemeClr val="accent1"/>
+          </a:effectRef>
+          <a:fontRef idx="minor">
+            <a:schemeClr val="tx1"/>
+          </a:fontRef>
+        </p:style>
+      </p:cxnSp>
+      <p:cxnSp>
+        <p:nvCxnSpPr>
+          <p:cNvPr id="11" name="Connector 10"/>
+          <p:cNvCxnSpPr/>
+          <p:nvPr/>
+        </p:nvCxnSpPr>
+        <p:spPr>
+          <a:xfrm>
+            <a:off x="1691640" y="3895344"/>
+            <a:ext cx="0" cy="676656"/>
+          </a:xfrm>
+          <a:prstGeom prst="line">
+            <a:avLst/>
+          </a:prstGeom>
+          <a:ln w="12700">
+            <a:solidFill>
+              <a:srgbClr val="1F2A40"/>
+            </a:solidFill>
+            <a:prstDash val="sysDot"/>
+          </a:ln>
+        </p:spPr>
+        <p:style>
+          <a:lnRef idx="2">
+            <a:schemeClr val="accent1"/>
+          </a:lnRef>
+          <a:fillRef idx="0">
+            <a:schemeClr val="accent1"/>
+          </a:fillRef>
+          <a:effectRef idx="1">
+            <a:schemeClr val="accent1"/>
+          </a:effectRef>
+          <a:fontRef idx="minor">
+            <a:schemeClr val="tx1"/>
+          </a:fontRef>
+        </p:style>
+      </p:cxnSp>
+      <p:sp>
+        <p:nvSpPr>
+          <p:cNvPr id="12" name="Rounded Rectangle 11"/>
+          <p:cNvSpPr/>
+          <p:nvPr/>
+        </p:nvSpPr>
+        <p:spPr>
+          <a:xfrm>
+            <a:off x="685800" y="4572000"/>
+            <a:ext cx="2011680" cy="566928"/>
+          </a:xfrm>
+          <a:prstGeom prst="roundRect">
+            <a:avLst>
+              <a:gd name="adj" fmla="val 18000"/>
+            </a:avLst>
+          </a:prstGeom>
+          <a:noFill/>
+          <a:ln w="19050">
+            <a:solidFill>
+              <a:srgbClr val="60A5FA"/>
+            </a:solidFill>
+          </a:ln>
+          <a:effectLst/>
+        </p:spPr>
+        <p:style>
+          <a:lnRef idx="1">
+            <a:schemeClr val="accent1"/>
+          </a:lnRef>
+          <a:fillRef idx="3">
+            <a:schemeClr val="accent1"/>
+          </a:fillRef>
+          <a:effectRef idx="2">
+            <a:schemeClr val="accent1"/>
+          </a:effectRef>
+          <a:fontRef idx="minor">
+            <a:schemeClr val="lt1"/>
+          </a:fontRef>
+        </p:style>
+        <p:txBody>
+          <a:bodyPr rtlCol="0" anchor="ctr" wrap="square" lIns="0" rIns="0"/>
+          <a:lstStyle/>
+          <a:p>
+            <a:pPr algn="ctr">
+              <a:spcAft>
+                <a:spcPts val="600"/>
+              </a:spcAft>
+            </a:pPr>
+            <a:r>
+              <a:rPr sz="1200" b="1">
+                <a:solidFill>
+                  <a:srgbClr val="60A5FA"/>
+                </a:solidFill>
                 <a:latin typeface="Arial"/>
               </a:rPr>
-              <a:t>Host was never stated, so it is not invented. Confidence drops to 55%, the missing field isnamed, and the question carries an example — a templated question, not model-authored prose.</a:t>
+              <a:t>always — 1 call</a:t>
+            </a:r>
+          </a:p>
+        </p:txBody>
+      </p:sp>
+      <p:sp>
+        <p:nvSpPr>
+          <p:cNvPr id="13" name="TextBox 12"/>
+          <p:cNvSpPr txBox="1"/>
+          <p:nvPr/>
+        </p:nvSpPr>
+        <p:spPr>
+          <a:xfrm>
+            <a:off x="2990088" y="1847088"/>
+            <a:ext cx="1792224" cy="274320"/>
+          </a:xfrm>
+          <a:prstGeom prst="rect">
+            <a:avLst/>
+          </a:prstGeom>
+          <a:noFill/>
+        </p:spPr>
+        <p:txBody>
+          <a:bodyPr wrap="square" lIns="0" rIns="0" tIns="0" bIns="0">
+            <a:spAutoFit/>
+          </a:bodyPr>
+          <a:lstStyle/>
+          <a:p>
+            <a:pPr>
+              <a:spcAft>
+                <a:spcPts val="600"/>
+              </a:spcAft>
+            </a:pPr>
+            <a:r>
+              <a:rPr sz="1050" b="0">
+                <a:solidFill>
+                  <a:srgbClr val="4B5975"/>
+                </a:solidFill>
+                <a:latin typeface="Courier New"/>
+              </a:rPr>
+              <a:t>POST …/answers</a:t>
+            </a:r>
+          </a:p>
+        </p:txBody>
+      </p:sp>
+      <p:sp>
+        <p:nvSpPr>
+          <p:cNvPr id="14" name="Rectangle 13"/>
+          <p:cNvSpPr/>
+          <p:nvPr/>
+        </p:nvSpPr>
+        <p:spPr>
+          <a:xfrm>
+            <a:off x="2880360" y="2249424"/>
+            <a:ext cx="2011680" cy="1170432"/>
+          </a:xfrm>
+          <a:prstGeom prst="rect">
+            <a:avLst/>
+          </a:prstGeom>
+          <a:solidFill>
+            <a:srgbClr val="111827"/>
+          </a:solidFill>
+          <a:ln w="15875">
+            <a:solidFill>
+              <a:srgbClr val="1F2A40"/>
+            </a:solidFill>
+          </a:ln>
+          <a:effectLst/>
+        </p:spPr>
+        <p:style>
+          <a:lnRef idx="1">
+            <a:schemeClr val="accent1"/>
+          </a:lnRef>
+          <a:fillRef idx="3">
+            <a:schemeClr val="accent1"/>
+          </a:fillRef>
+          <a:effectRef idx="2">
+            <a:schemeClr val="accent1"/>
+          </a:effectRef>
+          <a:fontRef idx="minor">
+            <a:schemeClr val="lt1"/>
+          </a:fontRef>
+        </p:style>
+        <p:txBody>
+          <a:bodyPr rtlCol="0" anchor="ctr"/>
+          <a:lstStyle/>
+          <a:p>
+            <a:pPr algn="ctr"/>
+          </a:p>
+        </p:txBody>
+      </p:sp>
+      <p:sp>
+        <p:nvSpPr>
+          <p:cNvPr id="15" name="TextBox 14"/>
+          <p:cNvSpPr txBox="1"/>
+          <p:nvPr/>
+        </p:nvSpPr>
+        <p:spPr>
+          <a:xfrm>
+            <a:off x="2990088" y="2377440"/>
+            <a:ext cx="1792224" cy="310896"/>
+          </a:xfrm>
+          <a:prstGeom prst="rect">
+            <a:avLst/>
+          </a:prstGeom>
+          <a:noFill/>
+        </p:spPr>
+        <p:txBody>
+          <a:bodyPr wrap="square" lIns="0" rIns="0" tIns="0" bIns="0">
+            <a:spAutoFit/>
+          </a:bodyPr>
+          <a:lstStyle/>
+          <a:p>
+            <a:pPr algn="ctr">
+              <a:spcAft>
+                <a:spcPts val="600"/>
+              </a:spcAft>
+            </a:pPr>
+            <a:r>
+              <a:rPr sz="1700" b="1">
+                <a:solidFill>
+                  <a:srgbClr val="E8EDF5"/>
+                </a:solidFill>
+                <a:latin typeface="Arial"/>
+              </a:rPr>
+              <a:t>Refine</a:t>
+            </a:r>
+          </a:p>
+        </p:txBody>
+      </p:sp>
+      <p:sp>
+        <p:nvSpPr>
+          <p:cNvPr id="16" name="TextBox 15"/>
+          <p:cNvSpPr txBox="1"/>
+          <p:nvPr/>
+        </p:nvSpPr>
+        <p:spPr>
+          <a:xfrm>
+            <a:off x="2990088" y="2743200"/>
+            <a:ext cx="1792224" cy="548640"/>
+          </a:xfrm>
+          <a:prstGeom prst="rect">
+            <a:avLst/>
+          </a:prstGeom>
+          <a:noFill/>
+        </p:spPr>
+        <p:txBody>
+          <a:bodyPr wrap="square" lIns="0" rIns="0" tIns="0" bIns="0">
+            <a:spAutoFit/>
+          </a:bodyPr>
+          <a:lstStyle/>
+          <a:p>
+            <a:pPr algn="ctr">
+              <a:spcAft>
+                <a:spcPts val="600"/>
+              </a:spcAft>
+            </a:pPr>
+            <a:r>
+              <a:rPr sz="1050" b="0">
+                <a:solidFill>
+                  <a:srgbClr val="8896B0"/>
+                </a:solidFill>
+                <a:latin typeface="Courier New"/>
+              </a:rPr>
+              <a:t>SpecExtractor</a:t>
+            </a:r>
+          </a:p>
+          <a:p>
+            <a:pPr algn="ctr">
+              <a:spcAft>
+                <a:spcPts val="0"/>
+              </a:spcAft>
+            </a:pPr>
+            <a:r>
+              <a:rPr sz="1050" b="0">
+                <a:solidFill>
+                  <a:srgbClr val="8896B0"/>
+                </a:solidFill>
+                <a:latin typeface="Courier New"/>
+              </a:rPr>
+              <a:t>.refine()</a:t>
+            </a:r>
+          </a:p>
+        </p:txBody>
+      </p:sp>
+      <p:sp>
+        <p:nvSpPr>
+          <p:cNvPr id="17" name="TextBox 16"/>
+          <p:cNvSpPr txBox="1"/>
+          <p:nvPr/>
+        </p:nvSpPr>
+        <p:spPr>
+          <a:xfrm>
+            <a:off x="2990088" y="3547872"/>
+            <a:ext cx="1792224" cy="292608"/>
+          </a:xfrm>
+          <a:prstGeom prst="rect">
+            <a:avLst/>
+          </a:prstGeom>
+          <a:noFill/>
+        </p:spPr>
+        <p:txBody>
+          <a:bodyPr wrap="square" lIns="0" rIns="0" tIns="0" bIns="0">
+            <a:spAutoFit/>
+          </a:bodyPr>
+          <a:lstStyle/>
+          <a:p>
+            <a:pPr algn="ctr">
+              <a:spcAft>
+                <a:spcPts val="600"/>
+              </a:spcAft>
+            </a:pPr>
+            <a:r>
+              <a:rPr sz="1050" b="0">
+                <a:solidFill>
+                  <a:srgbClr val="4B5975"/>
+                </a:solidFill>
+                <a:latin typeface="Courier New"/>
+              </a:rPr>
+              <a:t>SpecDraft (complete)</a:t>
+            </a:r>
+          </a:p>
+        </p:txBody>
+      </p:sp>
+      <p:cxnSp>
+        <p:nvCxnSpPr>
+          <p:cNvPr id="18" name="Connector 17"/>
+          <p:cNvCxnSpPr/>
+          <p:nvPr/>
+        </p:nvCxnSpPr>
+        <p:spPr>
+          <a:xfrm>
+            <a:off x="4910328" y="2834640"/>
+            <a:ext cx="146304" cy="0"/>
+          </a:xfrm>
+          <a:prstGeom prst="line">
+            <a:avLst/>
+          </a:prstGeom>
+          <a:ln w="19050">
+            <a:solidFill>
+              <a:srgbClr val="8896B0"/>
+            </a:solidFill>
+            <a:tailEnd type="triangle" w="med" len="med"/>
+          </a:ln>
+        </p:spPr>
+        <p:style>
+          <a:lnRef idx="2">
+            <a:schemeClr val="accent1"/>
+          </a:lnRef>
+          <a:fillRef idx="0">
+            <a:schemeClr val="accent1"/>
+          </a:fillRef>
+          <a:effectRef idx="1">
+            <a:schemeClr val="accent1"/>
+          </a:effectRef>
+          <a:fontRef idx="minor">
+            <a:schemeClr val="tx1"/>
+          </a:fontRef>
+        </p:style>
+      </p:cxnSp>
+      <p:cxnSp>
+        <p:nvCxnSpPr>
+          <p:cNvPr id="19" name="Connector 18"/>
+          <p:cNvCxnSpPr/>
+          <p:nvPr/>
+        </p:nvCxnSpPr>
+        <p:spPr>
+          <a:xfrm>
+            <a:off x="3886200" y="3895344"/>
+            <a:ext cx="0" cy="676656"/>
+          </a:xfrm>
+          <a:prstGeom prst="line">
+            <a:avLst/>
+          </a:prstGeom>
+          <a:ln w="12700">
+            <a:solidFill>
+              <a:srgbClr val="1F2A40"/>
+            </a:solidFill>
+            <a:prstDash val="sysDot"/>
+          </a:ln>
+        </p:spPr>
+        <p:style>
+          <a:lnRef idx="2">
+            <a:schemeClr val="accent1"/>
+          </a:lnRef>
+          <a:fillRef idx="0">
+            <a:schemeClr val="accent1"/>
+          </a:fillRef>
+          <a:effectRef idx="1">
+            <a:schemeClr val="accent1"/>
+          </a:effectRef>
+          <a:fontRef idx="minor">
+            <a:schemeClr val="tx1"/>
+          </a:fontRef>
+        </p:style>
+      </p:cxnSp>
+      <p:sp>
+        <p:nvSpPr>
+          <p:cNvPr id="20" name="Rounded Rectangle 19"/>
+          <p:cNvSpPr/>
+          <p:nvPr/>
+        </p:nvSpPr>
+        <p:spPr>
+          <a:xfrm>
+            <a:off x="2880360" y="4572000"/>
+            <a:ext cx="2011680" cy="566928"/>
+          </a:xfrm>
+          <a:prstGeom prst="roundRect">
+            <a:avLst>
+              <a:gd name="adj" fmla="val 18000"/>
+            </a:avLst>
+          </a:prstGeom>
+          <a:noFill/>
+          <a:ln w="12700">
+            <a:solidFill>
+              <a:srgbClr val="4B5975"/>
+            </a:solidFill>
+            <a:prstDash val="dash"/>
+          </a:ln>
+          <a:effectLst/>
+        </p:spPr>
+        <p:style>
+          <a:lnRef idx="1">
+            <a:schemeClr val="accent1"/>
+          </a:lnRef>
+          <a:fillRef idx="3">
+            <a:schemeClr val="accent1"/>
+          </a:fillRef>
+          <a:effectRef idx="2">
+            <a:schemeClr val="accent1"/>
+          </a:effectRef>
+          <a:fontRef idx="minor">
+            <a:schemeClr val="lt1"/>
+          </a:fontRef>
+        </p:style>
+        <p:txBody>
+          <a:bodyPr rtlCol="0" anchor="ctr" wrap="square" lIns="0" rIns="0"/>
+          <a:lstStyle/>
+          <a:p>
+            <a:pPr algn="ctr">
+              <a:spcAft>
+                <a:spcPts val="600"/>
+              </a:spcAft>
+            </a:pPr>
+            <a:r>
+              <a:rPr sz="1200" b="0">
+                <a:solidFill>
+                  <a:srgbClr val="4B5975"/>
+                </a:solidFill>
+                <a:latin typeface="Arial"/>
+              </a:rPr>
+              <a:t>never</a:t>
+            </a:r>
+          </a:p>
+        </p:txBody>
+      </p:sp>
+      <p:sp>
+        <p:nvSpPr>
+          <p:cNvPr id="21" name="TextBox 20"/>
+          <p:cNvSpPr txBox="1"/>
+          <p:nvPr/>
+        </p:nvSpPr>
+        <p:spPr>
+          <a:xfrm>
+            <a:off x="5184648" y="1847088"/>
+            <a:ext cx="1792224" cy="274320"/>
+          </a:xfrm>
+          <a:prstGeom prst="rect">
+            <a:avLst/>
+          </a:prstGeom>
+          <a:noFill/>
+        </p:spPr>
+        <p:txBody>
+          <a:bodyPr wrap="square" lIns="0" rIns="0" tIns="0" bIns="0">
+            <a:spAutoFit/>
+          </a:bodyPr>
+          <a:lstStyle/>
+          <a:p>
+            <a:pPr>
+              <a:spcAft>
+                <a:spcPts val="600"/>
+              </a:spcAft>
+            </a:pPr>
+            <a:r>
+              <a:rPr sz="1050" b="0">
+                <a:solidFill>
+                  <a:srgbClr val="4B5975"/>
+                </a:solidFill>
+                <a:latin typeface="Courier New"/>
+              </a:rPr>
+              <a:t>POST …/generate</a:t>
+            </a:r>
+          </a:p>
+        </p:txBody>
+      </p:sp>
+      <p:sp>
+        <p:nvSpPr>
+          <p:cNvPr id="22" name="Rectangle 21"/>
+          <p:cNvSpPr/>
+          <p:nvPr/>
+        </p:nvSpPr>
+        <p:spPr>
+          <a:xfrm>
+            <a:off x="5074920" y="2249424"/>
+            <a:ext cx="2011680" cy="1170432"/>
+          </a:xfrm>
+          <a:prstGeom prst="rect">
+            <a:avLst/>
+          </a:prstGeom>
+          <a:solidFill>
+            <a:srgbClr val="111827"/>
+          </a:solidFill>
+          <a:ln w="15875">
+            <a:solidFill>
+              <a:srgbClr val="1F2A40"/>
+            </a:solidFill>
+          </a:ln>
+          <a:effectLst/>
+        </p:spPr>
+        <p:style>
+          <a:lnRef idx="1">
+            <a:schemeClr val="accent1"/>
+          </a:lnRef>
+          <a:fillRef idx="3">
+            <a:schemeClr val="accent1"/>
+          </a:fillRef>
+          <a:effectRef idx="2">
+            <a:schemeClr val="accent1"/>
+          </a:effectRef>
+          <a:fontRef idx="minor">
+            <a:schemeClr val="lt1"/>
+          </a:fontRef>
+        </p:style>
+        <p:txBody>
+          <a:bodyPr rtlCol="0" anchor="ctr"/>
+          <a:lstStyle/>
+          <a:p>
+            <a:pPr algn="ctr"/>
+          </a:p>
+        </p:txBody>
+      </p:sp>
+      <p:sp>
+        <p:nvSpPr>
+          <p:cNvPr id="23" name="TextBox 22"/>
+          <p:cNvSpPr txBox="1"/>
+          <p:nvPr/>
+        </p:nvSpPr>
+        <p:spPr>
+          <a:xfrm>
+            <a:off x="5184648" y="2377440"/>
+            <a:ext cx="1792224" cy="310896"/>
+          </a:xfrm>
+          <a:prstGeom prst="rect">
+            <a:avLst/>
+          </a:prstGeom>
+          <a:noFill/>
+        </p:spPr>
+        <p:txBody>
+          <a:bodyPr wrap="square" lIns="0" rIns="0" tIns="0" bIns="0">
+            <a:spAutoFit/>
+          </a:bodyPr>
+          <a:lstStyle/>
+          <a:p>
+            <a:pPr algn="ctr">
+              <a:spcAft>
+                <a:spcPts val="600"/>
+              </a:spcAft>
+            </a:pPr>
+            <a:r>
+              <a:rPr sz="1700" b="1">
+                <a:solidFill>
+                  <a:srgbClr val="E8EDF5"/>
+                </a:solidFill>
+                <a:latin typeface="Arial"/>
+              </a:rPr>
+              <a:t>Generate</a:t>
+            </a:r>
+          </a:p>
+        </p:txBody>
+      </p:sp>
+      <p:sp>
+        <p:nvSpPr>
+          <p:cNvPr id="24" name="TextBox 23"/>
+          <p:cNvSpPr txBox="1"/>
+          <p:nvPr/>
+        </p:nvSpPr>
+        <p:spPr>
+          <a:xfrm>
+            <a:off x="5184648" y="2743200"/>
+            <a:ext cx="1792224" cy="548640"/>
+          </a:xfrm>
+          <a:prstGeom prst="rect">
+            <a:avLst/>
+          </a:prstGeom>
+          <a:noFill/>
+        </p:spPr>
+        <p:txBody>
+          <a:bodyPr wrap="square" lIns="0" rIns="0" tIns="0" bIns="0">
+            <a:spAutoFit/>
+          </a:bodyPr>
+          <a:lstStyle/>
+          <a:p>
+            <a:pPr algn="ctr">
+              <a:spcAft>
+                <a:spcPts val="600"/>
+              </a:spcAft>
+            </a:pPr>
+            <a:r>
+              <a:rPr sz="1050" b="0">
+                <a:solidFill>
+                  <a:srgbClr val="8896B0"/>
+                </a:solidFill>
+                <a:latin typeface="Courier New"/>
+              </a:rPr>
+              <a:t>ConnectorGenerator</a:t>
+            </a:r>
+          </a:p>
+          <a:p>
+            <a:pPr algn="ctr">
+              <a:spcAft>
+                <a:spcPts val="0"/>
+              </a:spcAft>
+            </a:pPr>
+            <a:r>
+              <a:rPr sz="1050" b="0">
+                <a:solidFill>
+                  <a:srgbClr val="8896B0"/>
+                </a:solidFill>
+                <a:latin typeface="Courier New"/>
+              </a:rPr>
+              <a:t>.generate()</a:t>
+            </a:r>
+          </a:p>
+        </p:txBody>
+      </p:sp>
+      <p:sp>
+        <p:nvSpPr>
+          <p:cNvPr id="25" name="TextBox 24"/>
+          <p:cNvSpPr txBox="1"/>
+          <p:nvPr/>
+        </p:nvSpPr>
+        <p:spPr>
+          <a:xfrm>
+            <a:off x="5184648" y="3547872"/>
+            <a:ext cx="1792224" cy="292608"/>
+          </a:xfrm>
+          <a:prstGeom prst="rect">
+            <a:avLst/>
+          </a:prstGeom>
+          <a:noFill/>
+        </p:spPr>
+        <p:txBody>
+          <a:bodyPr wrap="square" lIns="0" rIns="0" tIns="0" bIns="0">
+            <a:spAutoFit/>
+          </a:bodyPr>
+          <a:lstStyle/>
+          <a:p>
+            <a:pPr algn="ctr">
+              <a:spcAft>
+                <a:spcPts val="600"/>
+              </a:spcAft>
+            </a:pPr>
+            <a:r>
+              <a:rPr sz="1050" b="0">
+                <a:solidFill>
+                  <a:srgbClr val="4B5975"/>
+                </a:solidFill>
+                <a:latin typeface="Courier New"/>
+              </a:rPr>
+              <a:t>GeneratedConnector</a:t>
+            </a:r>
+          </a:p>
+        </p:txBody>
+      </p:sp>
+      <p:cxnSp>
+        <p:nvCxnSpPr>
+          <p:cNvPr id="26" name="Connector 25"/>
+          <p:cNvCxnSpPr/>
+          <p:nvPr/>
+        </p:nvCxnSpPr>
+        <p:spPr>
+          <a:xfrm>
+            <a:off x="7104888" y="2834640"/>
+            <a:ext cx="146304" cy="0"/>
+          </a:xfrm>
+          <a:prstGeom prst="line">
+            <a:avLst/>
+          </a:prstGeom>
+          <a:ln w="19050">
+            <a:solidFill>
+              <a:srgbClr val="8896B0"/>
+            </a:solidFill>
+            <a:tailEnd type="triangle" w="med" len="med"/>
+          </a:ln>
+        </p:spPr>
+        <p:style>
+          <a:lnRef idx="2">
+            <a:schemeClr val="accent1"/>
+          </a:lnRef>
+          <a:fillRef idx="0">
+            <a:schemeClr val="accent1"/>
+          </a:fillRef>
+          <a:effectRef idx="1">
+            <a:schemeClr val="accent1"/>
+          </a:effectRef>
+          <a:fontRef idx="minor">
+            <a:schemeClr val="tx1"/>
+          </a:fontRef>
+        </p:style>
+      </p:cxnSp>
+      <p:cxnSp>
+        <p:nvCxnSpPr>
+          <p:cNvPr id="27" name="Connector 26"/>
+          <p:cNvCxnSpPr/>
+          <p:nvPr/>
+        </p:nvCxnSpPr>
+        <p:spPr>
+          <a:xfrm>
+            <a:off x="6080760" y="3895344"/>
+            <a:ext cx="0" cy="676656"/>
+          </a:xfrm>
+          <a:prstGeom prst="line">
+            <a:avLst/>
+          </a:prstGeom>
+          <a:ln w="12700">
+            <a:solidFill>
+              <a:srgbClr val="1F2A40"/>
+            </a:solidFill>
+            <a:prstDash val="sysDot"/>
+          </a:ln>
+        </p:spPr>
+        <p:style>
+          <a:lnRef idx="2">
+            <a:schemeClr val="accent1"/>
+          </a:lnRef>
+          <a:fillRef idx="0">
+            <a:schemeClr val="accent1"/>
+          </a:fillRef>
+          <a:effectRef idx="1">
+            <a:schemeClr val="accent1"/>
+          </a:effectRef>
+          <a:fontRef idx="minor">
+            <a:schemeClr val="tx1"/>
+          </a:fontRef>
+        </p:style>
+      </p:cxnSp>
+      <p:sp>
+        <p:nvSpPr>
+          <p:cNvPr id="28" name="Rounded Rectangle 27"/>
+          <p:cNvSpPr/>
+          <p:nvPr/>
+        </p:nvSpPr>
+        <p:spPr>
+          <a:xfrm>
+            <a:off x="5074920" y="4572000"/>
+            <a:ext cx="2011680" cy="566928"/>
+          </a:xfrm>
+          <a:prstGeom prst="roundRect">
+            <a:avLst>
+              <a:gd name="adj" fmla="val 18000"/>
+            </a:avLst>
+          </a:prstGeom>
+          <a:noFill/>
+          <a:ln w="19050">
+            <a:solidFill>
+              <a:srgbClr val="60A5FA"/>
+            </a:solidFill>
+          </a:ln>
+          <a:effectLst/>
+        </p:spPr>
+        <p:style>
+          <a:lnRef idx="1">
+            <a:schemeClr val="accent1"/>
+          </a:lnRef>
+          <a:fillRef idx="3">
+            <a:schemeClr val="accent1"/>
+          </a:fillRef>
+          <a:effectRef idx="2">
+            <a:schemeClr val="accent1"/>
+          </a:effectRef>
+          <a:fontRef idx="minor">
+            <a:schemeClr val="lt1"/>
+          </a:fontRef>
+        </p:style>
+        <p:txBody>
+          <a:bodyPr rtlCol="0" anchor="ctr" wrap="square" lIns="0" rIns="0"/>
+          <a:lstStyle/>
+          <a:p>
+            <a:pPr algn="ctr">
+              <a:spcAft>
+                <a:spcPts val="600"/>
+              </a:spcAft>
+            </a:pPr>
+            <a:r>
+              <a:rPr sz="1200" b="1">
+                <a:solidFill>
+                  <a:srgbClr val="60A5FA"/>
+                </a:solidFill>
+                <a:latin typeface="Arial"/>
+              </a:rPr>
+              <a:t>only on failure / docs</a:t>
+            </a:r>
+          </a:p>
+        </p:txBody>
+      </p:sp>
+      <p:sp>
+        <p:nvSpPr>
+          <p:cNvPr id="29" name="TextBox 28"/>
+          <p:cNvSpPr txBox="1"/>
+          <p:nvPr/>
+        </p:nvSpPr>
+        <p:spPr>
+          <a:xfrm>
+            <a:off x="7379208" y="1847088"/>
+            <a:ext cx="1792224" cy="274320"/>
+          </a:xfrm>
+          <a:prstGeom prst="rect">
+            <a:avLst/>
+          </a:prstGeom>
+          <a:noFill/>
+        </p:spPr>
+        <p:txBody>
+          <a:bodyPr wrap="square" lIns="0" rIns="0" tIns="0" bIns="0">
+            <a:spAutoFit/>
+          </a:bodyPr>
+          <a:lstStyle/>
+          <a:p>
+            <a:pPr>
+              <a:spcAft>
+                <a:spcPts val="600"/>
+              </a:spcAft>
+            </a:pPr>
+            <a:r>
+              <a:rPr sz="1050" b="0">
+                <a:solidFill>
+                  <a:srgbClr val="4B5975"/>
+                </a:solidFill>
+                <a:latin typeface="Courier New"/>
+              </a:rPr>
+              <a:t>POST …/test</a:t>
+            </a:r>
+          </a:p>
+        </p:txBody>
+      </p:sp>
+      <p:sp>
+        <p:nvSpPr>
+          <p:cNvPr id="30" name="Rectangle 29"/>
+          <p:cNvSpPr/>
+          <p:nvPr/>
+        </p:nvSpPr>
+        <p:spPr>
+          <a:xfrm>
+            <a:off x="7269480" y="2249424"/>
+            <a:ext cx="2011680" cy="1170432"/>
+          </a:xfrm>
+          <a:prstGeom prst="rect">
+            <a:avLst/>
+          </a:prstGeom>
+          <a:solidFill>
+            <a:srgbClr val="111827"/>
+          </a:solidFill>
+          <a:ln w="15875">
+            <a:solidFill>
+              <a:srgbClr val="1F2A40"/>
+            </a:solidFill>
+          </a:ln>
+          <a:effectLst/>
+        </p:spPr>
+        <p:style>
+          <a:lnRef idx="1">
+            <a:schemeClr val="accent1"/>
+          </a:lnRef>
+          <a:fillRef idx="3">
+            <a:schemeClr val="accent1"/>
+          </a:fillRef>
+          <a:effectRef idx="2">
+            <a:schemeClr val="accent1"/>
+          </a:effectRef>
+          <a:fontRef idx="minor">
+            <a:schemeClr val="lt1"/>
+          </a:fontRef>
+        </p:style>
+        <p:txBody>
+          <a:bodyPr rtlCol="0" anchor="ctr"/>
+          <a:lstStyle/>
+          <a:p>
+            <a:pPr algn="ctr"/>
+          </a:p>
+        </p:txBody>
+      </p:sp>
+      <p:sp>
+        <p:nvSpPr>
+          <p:cNvPr id="31" name="TextBox 30"/>
+          <p:cNvSpPr txBox="1"/>
+          <p:nvPr/>
+        </p:nvSpPr>
+        <p:spPr>
+          <a:xfrm>
+            <a:off x="7379208" y="2377440"/>
+            <a:ext cx="1792224" cy="310896"/>
+          </a:xfrm>
+          <a:prstGeom prst="rect">
+            <a:avLst/>
+          </a:prstGeom>
+          <a:noFill/>
+        </p:spPr>
+        <p:txBody>
+          <a:bodyPr wrap="square" lIns="0" rIns="0" tIns="0" bIns="0">
+            <a:spAutoFit/>
+          </a:bodyPr>
+          <a:lstStyle/>
+          <a:p>
+            <a:pPr algn="ctr">
+              <a:spcAft>
+                <a:spcPts val="600"/>
+              </a:spcAft>
+            </a:pPr>
+            <a:r>
+              <a:rPr sz="1700" b="1">
+                <a:solidFill>
+                  <a:srgbClr val="E8EDF5"/>
+                </a:solidFill>
+                <a:latin typeface="Arial"/>
+              </a:rPr>
+              <a:t>Test</a:t>
+            </a:r>
+          </a:p>
+        </p:txBody>
+      </p:sp>
+      <p:sp>
+        <p:nvSpPr>
+          <p:cNvPr id="32" name="TextBox 31"/>
+          <p:cNvSpPr txBox="1"/>
+          <p:nvPr/>
+        </p:nvSpPr>
+        <p:spPr>
+          <a:xfrm>
+            <a:off x="7379208" y="2743200"/>
+            <a:ext cx="1792224" cy="548640"/>
+          </a:xfrm>
+          <a:prstGeom prst="rect">
+            <a:avLst/>
+          </a:prstGeom>
+          <a:noFill/>
+        </p:spPr>
+        <p:txBody>
+          <a:bodyPr wrap="square" lIns="0" rIns="0" tIns="0" bIns="0">
+            <a:spAutoFit/>
+          </a:bodyPr>
+          <a:lstStyle/>
+          <a:p>
+            <a:pPr algn="ctr">
+              <a:spcAft>
+                <a:spcPts val="600"/>
+              </a:spcAft>
+            </a:pPr>
+            <a:r>
+              <a:rPr sz="1050" b="0">
+                <a:solidFill>
+                  <a:srgbClr val="8896B0"/>
+                </a:solidFill>
+                <a:latin typeface="Courier New"/>
+              </a:rPr>
+              <a:t>ConnectionSandbox</a:t>
+            </a:r>
+          </a:p>
+          <a:p>
+            <a:pPr algn="ctr">
+              <a:spcAft>
+                <a:spcPts val="0"/>
+              </a:spcAft>
+            </a:pPr>
+            <a:r>
+              <a:rPr sz="1050" b="0">
+                <a:solidFill>
+                  <a:srgbClr val="8896B0"/>
+                </a:solidFill>
+                <a:latin typeface="Courier New"/>
+              </a:rPr>
+              <a:t>.run()</a:t>
+            </a:r>
+          </a:p>
+        </p:txBody>
+      </p:sp>
+      <p:sp>
+        <p:nvSpPr>
+          <p:cNvPr id="33" name="TextBox 32"/>
+          <p:cNvSpPr txBox="1"/>
+          <p:nvPr/>
+        </p:nvSpPr>
+        <p:spPr>
+          <a:xfrm>
+            <a:off x="7379208" y="3547872"/>
+            <a:ext cx="1792224" cy="292608"/>
+          </a:xfrm>
+          <a:prstGeom prst="rect">
+            <a:avLst/>
+          </a:prstGeom>
+          <a:noFill/>
+        </p:spPr>
+        <p:txBody>
+          <a:bodyPr wrap="square" lIns="0" rIns="0" tIns="0" bIns="0">
+            <a:spAutoFit/>
+          </a:bodyPr>
+          <a:lstStyle/>
+          <a:p>
+            <a:pPr algn="ctr">
+              <a:spcAft>
+                <a:spcPts val="600"/>
+              </a:spcAft>
+            </a:pPr>
+            <a:r>
+              <a:rPr sz="1050" b="0">
+                <a:solidFill>
+                  <a:srgbClr val="4B5975"/>
+                </a:solidFill>
+                <a:latin typeface="Courier New"/>
+              </a:rPr>
+              <a:t>SandboxResult</a:t>
+            </a:r>
+          </a:p>
+        </p:txBody>
+      </p:sp>
+      <p:cxnSp>
+        <p:nvCxnSpPr>
+          <p:cNvPr id="34" name="Connector 33"/>
+          <p:cNvCxnSpPr/>
+          <p:nvPr/>
+        </p:nvCxnSpPr>
+        <p:spPr>
+          <a:xfrm>
+            <a:off x="9299448" y="2834640"/>
+            <a:ext cx="146304" cy="0"/>
+          </a:xfrm>
+          <a:prstGeom prst="line">
+            <a:avLst/>
+          </a:prstGeom>
+          <a:ln w="19050">
+            <a:solidFill>
+              <a:srgbClr val="8896B0"/>
+            </a:solidFill>
+            <a:tailEnd type="triangle" w="med" len="med"/>
+          </a:ln>
+        </p:spPr>
+        <p:style>
+          <a:lnRef idx="2">
+            <a:schemeClr val="accent1"/>
+          </a:lnRef>
+          <a:fillRef idx="0">
+            <a:schemeClr val="accent1"/>
+          </a:fillRef>
+          <a:effectRef idx="1">
+            <a:schemeClr val="accent1"/>
+          </a:effectRef>
+          <a:fontRef idx="minor">
+            <a:schemeClr val="tx1"/>
+          </a:fontRef>
+        </p:style>
+      </p:cxnSp>
+      <p:cxnSp>
+        <p:nvCxnSpPr>
+          <p:cNvPr id="35" name="Connector 34"/>
+          <p:cNvCxnSpPr/>
+          <p:nvPr/>
+        </p:nvCxnSpPr>
+        <p:spPr>
+          <a:xfrm>
+            <a:off x="8275320" y="3895344"/>
+            <a:ext cx="0" cy="676656"/>
+          </a:xfrm>
+          <a:prstGeom prst="line">
+            <a:avLst/>
+          </a:prstGeom>
+          <a:ln w="12700">
+            <a:solidFill>
+              <a:srgbClr val="1F2A40"/>
+            </a:solidFill>
+            <a:prstDash val="sysDot"/>
+          </a:ln>
+        </p:spPr>
+        <p:style>
+          <a:lnRef idx="2">
+            <a:schemeClr val="accent1"/>
+          </a:lnRef>
+          <a:fillRef idx="0">
+            <a:schemeClr val="accent1"/>
+          </a:fillRef>
+          <a:effectRef idx="1">
+            <a:schemeClr val="accent1"/>
+          </a:effectRef>
+          <a:fontRef idx="minor">
+            <a:schemeClr val="tx1"/>
+          </a:fontRef>
+        </p:style>
+      </p:cxnSp>
+      <p:sp>
+        <p:nvSpPr>
+          <p:cNvPr id="36" name="Rounded Rectangle 35"/>
+          <p:cNvSpPr/>
+          <p:nvPr/>
+        </p:nvSpPr>
+        <p:spPr>
+          <a:xfrm>
+            <a:off x="7269480" y="4572000"/>
+            <a:ext cx="2011680" cy="566928"/>
+          </a:xfrm>
+          <a:prstGeom prst="roundRect">
+            <a:avLst>
+              <a:gd name="adj" fmla="val 18000"/>
+            </a:avLst>
+          </a:prstGeom>
+          <a:noFill/>
+          <a:ln w="19050">
+            <a:solidFill>
+              <a:srgbClr val="60A5FA"/>
+            </a:solidFill>
+          </a:ln>
+          <a:effectLst/>
+        </p:spPr>
+        <p:style>
+          <a:lnRef idx="1">
+            <a:schemeClr val="accent1"/>
+          </a:lnRef>
+          <a:fillRef idx="3">
+            <a:schemeClr val="accent1"/>
+          </a:fillRef>
+          <a:effectRef idx="2">
+            <a:schemeClr val="accent1"/>
+          </a:effectRef>
+          <a:fontRef idx="minor">
+            <a:schemeClr val="lt1"/>
+          </a:fontRef>
+        </p:style>
+        <p:txBody>
+          <a:bodyPr rtlCol="0" anchor="ctr" wrap="square" lIns="0" rIns="0"/>
+          <a:lstStyle/>
+          <a:p>
+            <a:pPr algn="ctr">
+              <a:spcAft>
+                <a:spcPts val="600"/>
+              </a:spcAft>
+            </a:pPr>
+            <a:r>
+              <a:rPr sz="1200" b="1">
+                <a:solidFill>
+                  <a:srgbClr val="60A5FA"/>
+                </a:solidFill>
+                <a:latin typeface="Arial"/>
+              </a:rPr>
+              <a:t>only on failure</a:t>
+            </a:r>
+          </a:p>
+        </p:txBody>
+      </p:sp>
+      <p:sp>
+        <p:nvSpPr>
+          <p:cNvPr id="37" name="TextBox 36"/>
+          <p:cNvSpPr txBox="1"/>
+          <p:nvPr/>
+        </p:nvSpPr>
+        <p:spPr>
+          <a:xfrm>
+            <a:off x="9573768" y="1847088"/>
+            <a:ext cx="1792224" cy="274320"/>
+          </a:xfrm>
+          <a:prstGeom prst="rect">
+            <a:avLst/>
+          </a:prstGeom>
+          <a:noFill/>
+        </p:spPr>
+        <p:txBody>
+          <a:bodyPr wrap="square" lIns="0" rIns="0" tIns="0" bIns="0">
+            <a:spAutoFit/>
+          </a:bodyPr>
+          <a:lstStyle/>
+          <a:p>
+            <a:pPr>
+              <a:spcAft>
+                <a:spcPts val="600"/>
+              </a:spcAft>
+            </a:pPr>
+            <a:r>
+              <a:rPr sz="1050" b="0">
+                <a:solidFill>
+                  <a:srgbClr val="4B5975"/>
+                </a:solidFill>
+                <a:latin typeface="Courier New"/>
+              </a:rPr>
+              <a:t>GET …/download</a:t>
+            </a:r>
+          </a:p>
+        </p:txBody>
+      </p:sp>
+      <p:sp>
+        <p:nvSpPr>
+          <p:cNvPr id="38" name="Rectangle 37"/>
+          <p:cNvSpPr/>
+          <p:nvPr/>
+        </p:nvSpPr>
+        <p:spPr>
+          <a:xfrm>
+            <a:off x="9464040" y="2249424"/>
+            <a:ext cx="2011680" cy="1170432"/>
+          </a:xfrm>
+          <a:prstGeom prst="rect">
+            <a:avLst/>
+          </a:prstGeom>
+          <a:solidFill>
+            <a:srgbClr val="111827"/>
+          </a:solidFill>
+          <a:ln w="15875">
+            <a:solidFill>
+              <a:srgbClr val="1F2A40"/>
+            </a:solidFill>
+          </a:ln>
+          <a:effectLst/>
+        </p:spPr>
+        <p:style>
+          <a:lnRef idx="1">
+            <a:schemeClr val="accent1"/>
+          </a:lnRef>
+          <a:fillRef idx="3">
+            <a:schemeClr val="accent1"/>
+          </a:fillRef>
+          <a:effectRef idx="2">
+            <a:schemeClr val="accent1"/>
+          </a:effectRef>
+          <a:fontRef idx="minor">
+            <a:schemeClr val="lt1"/>
+          </a:fontRef>
+        </p:style>
+        <p:txBody>
+          <a:bodyPr rtlCol="0" anchor="ctr"/>
+          <a:lstStyle/>
+          <a:p>
+            <a:pPr algn="ctr"/>
+          </a:p>
+        </p:txBody>
+      </p:sp>
+      <p:sp>
+        <p:nvSpPr>
+          <p:cNvPr id="39" name="TextBox 38"/>
+          <p:cNvSpPr txBox="1"/>
+          <p:nvPr/>
+        </p:nvSpPr>
+        <p:spPr>
+          <a:xfrm>
+            <a:off x="9573768" y="2377440"/>
+            <a:ext cx="1792224" cy="310896"/>
+          </a:xfrm>
+          <a:prstGeom prst="rect">
+            <a:avLst/>
+          </a:prstGeom>
+          <a:noFill/>
+        </p:spPr>
+        <p:txBody>
+          <a:bodyPr wrap="square" lIns="0" rIns="0" tIns="0" bIns="0">
+            <a:spAutoFit/>
+          </a:bodyPr>
+          <a:lstStyle/>
+          <a:p>
+            <a:pPr algn="ctr">
+              <a:spcAft>
+                <a:spcPts val="600"/>
+              </a:spcAft>
+            </a:pPr>
+            <a:r>
+              <a:rPr sz="1700" b="1">
+                <a:solidFill>
+                  <a:srgbClr val="E8EDF5"/>
+                </a:solidFill>
+                <a:latin typeface="Arial"/>
+              </a:rPr>
+              <a:t>Deliver</a:t>
+            </a:r>
+          </a:p>
+        </p:txBody>
+      </p:sp>
+      <p:sp>
+        <p:nvSpPr>
+          <p:cNvPr id="40" name="TextBox 39"/>
+          <p:cNvSpPr txBox="1"/>
+          <p:nvPr/>
+        </p:nvSpPr>
+        <p:spPr>
+          <a:xfrm>
+            <a:off x="9573768" y="2743200"/>
+            <a:ext cx="1792224" cy="548640"/>
+          </a:xfrm>
+          <a:prstGeom prst="rect">
+            <a:avLst/>
+          </a:prstGeom>
+          <a:noFill/>
+        </p:spPr>
+        <p:txBody>
+          <a:bodyPr wrap="square" lIns="0" rIns="0" tIns="0" bIns="0">
+            <a:spAutoFit/>
+          </a:bodyPr>
+          <a:lstStyle/>
+          <a:p>
+            <a:pPr algn="ctr">
+              <a:spcAft>
+                <a:spcPts val="600"/>
+              </a:spcAft>
+            </a:pPr>
+            <a:r>
+              <a:rPr sz="1050" b="0">
+                <a:solidFill>
+                  <a:srgbClr val="8896B0"/>
+                </a:solidFill>
+                <a:latin typeface="Courier New"/>
+              </a:rPr>
+              <a:t>Artifact</a:t>
+            </a:r>
+          </a:p>
+          <a:p>
+            <a:pPr algn="ctr">
+              <a:spcAft>
+                <a:spcPts val="0"/>
+              </a:spcAft>
+            </a:pPr>
+            <a:r>
+              <a:rPr sz="1050" b="0">
+                <a:solidFill>
+                  <a:srgbClr val="8896B0"/>
+                </a:solidFill>
+                <a:latin typeface="Courier New"/>
+              </a:rPr>
+              <a:t>.to_zip()</a:t>
+            </a:r>
+          </a:p>
+        </p:txBody>
+      </p:sp>
+      <p:sp>
+        <p:nvSpPr>
+          <p:cNvPr id="41" name="TextBox 40"/>
+          <p:cNvSpPr txBox="1"/>
+          <p:nvPr/>
+        </p:nvSpPr>
+        <p:spPr>
+          <a:xfrm>
+            <a:off x="9573768" y="3547872"/>
+            <a:ext cx="1792224" cy="292608"/>
+          </a:xfrm>
+          <a:prstGeom prst="rect">
+            <a:avLst/>
+          </a:prstGeom>
+          <a:noFill/>
+        </p:spPr>
+        <p:txBody>
+          <a:bodyPr wrap="square" lIns="0" rIns="0" tIns="0" bIns="0">
+            <a:spAutoFit/>
+          </a:bodyPr>
+          <a:lstStyle/>
+          <a:p>
+            <a:pPr algn="ctr">
+              <a:spcAft>
+                <a:spcPts val="600"/>
+              </a:spcAft>
+            </a:pPr>
+            <a:r>
+              <a:rPr sz="1050" b="0">
+                <a:solidFill>
+                  <a:srgbClr val="4B5975"/>
+                </a:solidFill>
+                <a:latin typeface="Courier New"/>
+              </a:rPr>
+              <a:t>bytes</a:t>
+            </a:r>
+          </a:p>
+        </p:txBody>
+      </p:sp>
+      <p:cxnSp>
+        <p:nvCxnSpPr>
+          <p:cNvPr id="42" name="Connector 41"/>
+          <p:cNvCxnSpPr/>
+          <p:nvPr/>
+        </p:nvCxnSpPr>
+        <p:spPr>
+          <a:xfrm>
+            <a:off x="10469880" y="3895344"/>
+            <a:ext cx="0" cy="676656"/>
+          </a:xfrm>
+          <a:prstGeom prst="line">
+            <a:avLst/>
+          </a:prstGeom>
+          <a:ln w="12700">
+            <a:solidFill>
+              <a:srgbClr val="1F2A40"/>
+            </a:solidFill>
+            <a:prstDash val="sysDot"/>
+          </a:ln>
+        </p:spPr>
+        <p:style>
+          <a:lnRef idx="2">
+            <a:schemeClr val="accent1"/>
+          </a:lnRef>
+          <a:fillRef idx="0">
+            <a:schemeClr val="accent1"/>
+          </a:fillRef>
+          <a:effectRef idx="1">
+            <a:schemeClr val="accent1"/>
+          </a:effectRef>
+          <a:fontRef idx="minor">
+            <a:schemeClr val="tx1"/>
+          </a:fontRef>
+        </p:style>
+      </p:cxnSp>
+      <p:sp>
+        <p:nvSpPr>
+          <p:cNvPr id="43" name="Rounded Rectangle 42"/>
+          <p:cNvSpPr/>
+          <p:nvPr/>
+        </p:nvSpPr>
+        <p:spPr>
+          <a:xfrm>
+            <a:off x="9464040" y="4572000"/>
+            <a:ext cx="2011680" cy="566928"/>
+          </a:xfrm>
+          <a:prstGeom prst="roundRect">
+            <a:avLst>
+              <a:gd name="adj" fmla="val 18000"/>
+            </a:avLst>
+          </a:prstGeom>
+          <a:noFill/>
+          <a:ln w="12700">
+            <a:solidFill>
+              <a:srgbClr val="4B5975"/>
+            </a:solidFill>
+            <a:prstDash val="dash"/>
+          </a:ln>
+          <a:effectLst/>
+        </p:spPr>
+        <p:style>
+          <a:lnRef idx="1">
+            <a:schemeClr val="accent1"/>
+          </a:lnRef>
+          <a:fillRef idx="3">
+            <a:schemeClr val="accent1"/>
+          </a:fillRef>
+          <a:effectRef idx="2">
+            <a:schemeClr val="accent1"/>
+          </a:effectRef>
+          <a:fontRef idx="minor">
+            <a:schemeClr val="lt1"/>
+          </a:fontRef>
+        </p:style>
+        <p:txBody>
+          <a:bodyPr rtlCol="0" anchor="ctr" wrap="square" lIns="0" rIns="0"/>
+          <a:lstStyle/>
+          <a:p>
+            <a:pPr algn="ctr">
+              <a:spcAft>
+                <a:spcPts val="600"/>
+              </a:spcAft>
+            </a:pPr>
+            <a:r>
+              <a:rPr sz="1200" b="0">
+                <a:solidFill>
+                  <a:srgbClr val="4B5975"/>
+                </a:solidFill>
+                <a:latin typeface="Arial"/>
+              </a:rPr>
+              <a:t>never</a:t>
+            </a:r>
+          </a:p>
+        </p:txBody>
+      </p:sp>
+      <p:sp>
+        <p:nvSpPr>
+          <p:cNvPr id="44" name="Freeform 43"/>
+          <p:cNvSpPr/>
+          <p:nvPr/>
+        </p:nvSpPr>
+        <p:spPr>
+          <a:xfrm>
+            <a:off x="3363163" y="1975104"/>
+            <a:ext cx="1046073" cy="274320"/>
+          </a:xfrm>
+          <a:custGeom>
+            <a:avLst/>
+            <a:gdLst/>
+            <a:ahLst/>
+            <a:cxnLst/>
+            <a:rect l="l" t="t" r="r" b="b"/>
+            <a:pathLst>
+              <a:path w="1046073" h="274320">
+                <a:moveTo>
+                  <a:pt x="1046073" y="274320"/>
+                </a:moveTo>
+                <a:lnTo>
+                  <a:pt x="1041599" y="238514"/>
+                </a:lnTo>
+                <a:lnTo>
+                  <a:pt x="1028251" y="203320"/>
+                </a:lnTo>
+                <a:lnTo>
+                  <a:pt x="1006259" y="169342"/>
+                </a:lnTo>
+                <a:lnTo>
+                  <a:pt x="976000" y="137160"/>
+                </a:lnTo>
+                <a:lnTo>
+                  <a:pt x="937989" y="107324"/>
+                </a:lnTo>
+                <a:lnTo>
+                  <a:pt x="892879" y="80346"/>
+                </a:lnTo>
+                <a:lnTo>
+                  <a:pt x="841441" y="56687"/>
+                </a:lnTo>
+                <a:lnTo>
+                  <a:pt x="784555" y="36751"/>
+                </a:lnTo>
+                <a:lnTo>
+                  <a:pt x="723194" y="20881"/>
+                </a:lnTo>
+                <a:lnTo>
+                  <a:pt x="658408" y="9347"/>
+                </a:lnTo>
+                <a:lnTo>
+                  <a:pt x="591307" y="2346"/>
+                </a:lnTo>
+                <a:lnTo>
+                  <a:pt x="523037" y="0"/>
+                </a:lnTo>
+                <a:lnTo>
+                  <a:pt x="454766" y="2346"/>
+                </a:lnTo>
+                <a:lnTo>
+                  <a:pt x="387665" y="9347"/>
+                </a:lnTo>
+                <a:lnTo>
+                  <a:pt x="322879" y="20881"/>
+                </a:lnTo>
+                <a:lnTo>
+                  <a:pt x="261518" y="36751"/>
+                </a:lnTo>
+                <a:lnTo>
+                  <a:pt x="204632" y="56687"/>
+                </a:lnTo>
+                <a:lnTo>
+                  <a:pt x="153194" y="80346"/>
+                </a:lnTo>
+                <a:lnTo>
+                  <a:pt x="108084" y="107324"/>
+                </a:lnTo>
+                <a:lnTo>
+                  <a:pt x="70073" y="137160"/>
+                </a:lnTo>
+                <a:lnTo>
+                  <a:pt x="39814" y="169342"/>
+                </a:lnTo>
+                <a:lnTo>
+                  <a:pt x="17822" y="203320"/>
+                </a:lnTo>
+                <a:lnTo>
+                  <a:pt x="4474" y="238514"/>
+                </a:lnTo>
+                <a:lnTo>
+                  <a:pt x="0" y="274320"/>
+                </a:lnTo>
+              </a:path>
+            </a:pathLst>
+          </a:custGeom>
+          <a:noFill/>
+          <a:ln w="15875">
+            <a:solidFill>
+              <a:srgbClr val="8896B0"/>
+            </a:solidFill>
+            <a:tailEnd type="triangle" w="med" len="med"/>
+          </a:ln>
+        </p:spPr>
+        <p:style>
+          <a:lnRef idx="1">
+            <a:schemeClr val="accent1"/>
+          </a:lnRef>
+          <a:fillRef idx="3">
+            <a:schemeClr val="accent1"/>
+          </a:fillRef>
+          <a:effectRef idx="2">
+            <a:schemeClr val="accent1"/>
+          </a:effectRef>
+          <a:fontRef idx="minor">
+            <a:schemeClr val="lt1"/>
+          </a:fontRef>
+        </p:style>
+        <p:txBody>
+          <a:bodyPr rtlCol="0" anchor="ctr"/>
+          <a:lstStyle/>
+          <a:p>
+            <a:pPr algn="ctr"/>
+          </a:p>
+        </p:txBody>
+      </p:sp>
+      <p:sp>
+        <p:nvSpPr>
+          <p:cNvPr id="45" name="TextBox 44"/>
+          <p:cNvSpPr txBox="1"/>
+          <p:nvPr/>
+        </p:nvSpPr>
+        <p:spPr>
+          <a:xfrm>
+            <a:off x="2331720" y="1444752"/>
+            <a:ext cx="3017520" cy="274320"/>
+          </a:xfrm>
+          <a:prstGeom prst="rect">
+            <a:avLst/>
+          </a:prstGeom>
+          <a:noFill/>
+        </p:spPr>
+        <p:txBody>
+          <a:bodyPr wrap="square" lIns="0" rIns="0" tIns="0" bIns="0">
+            <a:spAutoFit/>
+          </a:bodyPr>
+          <a:lstStyle/>
+          <a:p>
+            <a:pPr algn="ctr">
+              <a:spcAft>
+                <a:spcPts val="600"/>
+              </a:spcAft>
+            </a:pPr>
+            <a:r>
+              <a:rPr sz="1050" b="0">
+                <a:solidFill>
+                  <a:srgbClr val="8896B0"/>
+                </a:solidFill>
+                <a:latin typeface="Arial"/>
+              </a:rPr>
+              <a:t>until no questions remain</a:t>
+            </a:r>
+          </a:p>
+        </p:txBody>
+      </p:sp>
+      <p:sp>
+        <p:nvSpPr>
+          <p:cNvPr id="46" name="Rectangle 45"/>
+          <p:cNvSpPr/>
+          <p:nvPr/>
+        </p:nvSpPr>
+        <p:spPr>
+          <a:xfrm>
+            <a:off x="685800" y="4242816"/>
+            <a:ext cx="10789920" cy="9525"/>
+          </a:xfrm>
+          <a:prstGeom prst="rect">
+            <a:avLst/>
+          </a:prstGeom>
+          <a:solidFill>
+            <a:srgbClr val="1F2A40"/>
+          </a:solidFill>
+          <a:ln>
+            <a:noFill/>
+          </a:ln>
+          <a:effectLst/>
+        </p:spPr>
+        <p:style>
+          <a:lnRef idx="1">
+            <a:schemeClr val="accent1"/>
+          </a:lnRef>
+          <a:fillRef idx="3">
+            <a:schemeClr val="accent1"/>
+          </a:fillRef>
+          <a:effectRef idx="2">
+            <a:schemeClr val="accent1"/>
+          </a:effectRef>
+          <a:fontRef idx="minor">
+            <a:schemeClr val="lt1"/>
+          </a:fontRef>
+        </p:style>
+        <p:txBody>
+          <a:bodyPr rtlCol="0" anchor="ctr"/>
+          <a:lstStyle/>
+          <a:p>
+            <a:pPr algn="ctr"/>
+          </a:p>
+        </p:txBody>
+      </p:sp>
+      <p:sp>
+        <p:nvSpPr>
+          <p:cNvPr id="47" name="TextBox 46"/>
+          <p:cNvSpPr txBox="1"/>
+          <p:nvPr/>
+        </p:nvSpPr>
+        <p:spPr>
+          <a:xfrm>
+            <a:off x="685800" y="4306824"/>
+            <a:ext cx="5486400" cy="274320"/>
+          </a:xfrm>
+          <a:prstGeom prst="rect">
+            <a:avLst/>
+          </a:prstGeom>
+          <a:noFill/>
+        </p:spPr>
+        <p:txBody>
+          <a:bodyPr wrap="square" lIns="0" rIns="0" tIns="0" bIns="0">
+            <a:spAutoFit/>
+          </a:bodyPr>
+          <a:lstStyle/>
+          <a:p>
+            <a:pPr>
+              <a:spcAft>
+                <a:spcPts val="600"/>
+              </a:spcAft>
+            </a:pPr>
+            <a:r>
+              <a:rPr sz="1050" b="0">
+                <a:solidFill>
+                  <a:srgbClr val="4B5975"/>
+                </a:solidFill>
+                <a:latin typeface="Courier New"/>
+              </a:rPr>
+              <a:t>WHERE THE MODEL IS CALLED</a:t>
+            </a:r>
+          </a:p>
+        </p:txBody>
+      </p:sp>
+      <p:sp>
+        <p:nvSpPr>
+          <p:cNvPr id="48" name="TextBox 47"/>
+          <p:cNvSpPr txBox="1"/>
+          <p:nvPr/>
+        </p:nvSpPr>
+        <p:spPr>
+          <a:xfrm>
+            <a:off x="685800" y="5431536"/>
+            <a:ext cx="10789920" cy="914400"/>
+          </a:xfrm>
+          <a:prstGeom prst="rect">
+            <a:avLst/>
+          </a:prstGeom>
+          <a:noFill/>
+        </p:spPr>
+        <p:txBody>
+          <a:bodyPr wrap="square" lIns="0" rIns="0" tIns="0" bIns="0">
+            <a:spAutoFit/>
+          </a:bodyPr>
+          <a:lstStyle/>
+          <a:p>
+            <a:pPr>
+              <a:spcAft>
+                <a:spcPts val="600"/>
+              </a:spcAft>
+            </a:pPr>
+            <a:r>
+              <a:rPr sz="1350" b="0">
+                <a:solidFill>
+                  <a:srgbClr val="8896B0"/>
+                </a:solidFill>
+                <a:latin typeface="Arial"/>
+              </a:rPr>
+              <a:t>Answering a clarifying question is deterministic — the answers map onto known fields, so no second extraction can misread what you already settled.</a:t>
             </a:r>
           </a:p>
         </p:txBody>
@@ -11026,7 +13404,7 @@
                 </a:solidFill>
                 <a:latin typeface="Courier New"/>
               </a:rPr>
-              <a:t>THE PRODUCT · 3 OF 6</a:t>
+              <a:t>THE PRODUCT · 1 OF 6</a:t>
             </a:r>
           </a:p>
         </p:txBody>
@@ -11065,14 +13443,14 @@
                 </a:solidFill>
                 <a:latin typeface="Arial"/>
               </a:rPr>
-              <a:t>Extraction, generation, and the standards gate</a:t>
+              <a:t>Describe the source in plain English</a:t>
             </a:r>
           </a:p>
         </p:txBody>
       </p:sp>
       <p:pic>
         <p:nvPicPr>
-          <p:cNvPr id="5" name="Picture 4" descr="04-standards.png"/>
+          <p:cNvPr id="5" name="Picture 4" descr="01-welcome.png"/>
           <p:cNvPicPr>
             <a:picLocks noChangeAspect="1"/>
           </p:cNvPicPr>
@@ -11128,7 +13506,7 @@
                 </a:solidFill>
                 <a:latin typeface="Arial"/>
               </a:rPr>
-              <a:t>Everything the agent understood is shown for review — including what it assumed. 13 of 13 checks pass, so the artifact is accepted.</a:t>
+              <a:t>No forms, no connection wizard. Three worked examples are built in for a cold start.</a:t>
             </a:r>
           </a:p>
         </p:txBody>
@@ -11229,7 +13607,7 @@
                 </a:solidFill>
                 <a:latin typeface="Courier New"/>
               </a:rPr>
-              <a:t>THE PRODUCT · 4 OF 6</a:t>
+              <a:t>THE PRODUCT · 2 OF 6</a:t>
             </a:r>
           </a:p>
         </p:txBody>
@@ -11268,14 +13646,14 @@
                 </a:solidFill>
                 <a:latin typeface="Arial"/>
               </a:rPr>
-              <a:t>The generated connector</a:t>
+              <a:t>When the request is incomplete, the agent asks</a:t>
             </a:r>
           </a:p>
         </p:txBody>
       </p:sp>
       <p:pic>
         <p:nvPicPr>
-          <p:cNvPr id="5" name="Picture 4" descr="05-code.png"/>
+          <p:cNvPr id="5" name="Picture 4" descr="02-clarification.png"/>
           <p:cNvPicPr>
             <a:picLocks noChangeAspect="1"/>
           </p:cNvPicPr>
@@ -11331,7 +13709,7 @@
                 </a:solidFill>
                 <a:latin typeface="Arial"/>
               </a:rPr>
-              <a:t>Provenance above the code: template version, spec checksum, code checksum, repair count. Written by a template, never by the model.</a:t>
+              <a:t>Host was never stated, so it is not invented. Confidence drops to 55%, the missing field isnamed, and the question carries an example — a templated question, not model-authored prose.</a:t>
             </a:r>
           </a:p>
         </p:txBody>

--- a/docs/Data-Source-Onboarding-Agent.pptx
+++ b/docs/Data-Source-Onboarding-Agent.pptx
@@ -16,16 +16,6 @@
     <p:sldId id="264" r:id="rId15"/>
     <p:sldId id="265" r:id="rId16"/>
     <p:sldId id="266" r:id="rId17"/>
-    <p:sldId id="267" r:id="rId18"/>
-    <p:sldId id="268" r:id="rId19"/>
-    <p:sldId id="269" r:id="rId20"/>
-    <p:sldId id="270" r:id="rId21"/>
-    <p:sldId id="271" r:id="rId22"/>
-    <p:sldId id="272" r:id="rId23"/>
-    <p:sldId id="273" r:id="rId24"/>
-    <p:sldId id="274" r:id="rId25"/>
-    <p:sldId id="275" r:id="rId26"/>
-    <p:sldId id="276" r:id="rId27"/>
   </p:sldIdLst>
   <p:sldSz cx="12191695" cy="6858000" type="screen4x3"/>
   <p:notesSz cx="6858000" cy="9144000"/>
@@ -3285,7 +3275,7 @@
                 </a:solidFill>
                 <a:latin typeface="Courier New"/>
               </a:rPr>
-              <a:t>Natural language → spec → generated code → machine-checked → proven against a live database</a:t>
+              <a:t>natural language → spec → generated code → machine-checked → proven against a live database</a:t>
             </a:r>
           </a:p>
         </p:txBody>
@@ -3386,7 +3376,7 @@
                 </a:solidFill>
                 <a:latin typeface="Courier New"/>
               </a:rPr>
-              <a:t>THE PRODUCT · 3 OF 6</a:t>
+              <a:t>THE PRODUCT · 5 OF 6</a:t>
             </a:r>
           </a:p>
         </p:txBody>
@@ -3425,14 +3415,14 @@
                 </a:solidFill>
                 <a:latin typeface="Arial"/>
               </a:rPr>
-              <a:t>Extraction, generation, and the standards gate</a:t>
+              <a:t>Proven against a real database, not just compiled</a:t>
             </a:r>
           </a:p>
         </p:txBody>
       </p:sp>
       <p:pic>
         <p:nvPicPr>
-          <p:cNvPr id="5" name="Picture 4" descr="04-standards.png"/>
+          <p:cNvPr id="5" name="Picture 4" descr="06-connection.png"/>
           <p:cNvPicPr>
             <a:picLocks noChangeAspect="1"/>
           </p:cNvPicPr>
@@ -3488,7 +3478,7 @@
                 </a:solidFill>
                 <a:latin typeface="Arial"/>
               </a:rPr>
-              <a:t>Everything the agent understood is shown for review — including what it assumed. 13 of 13 checks pass, so the artifact is accepted.</a:t>
+              <a:t>Executed in a sandboxed subprocess against live PostgreSQL. Three tables discovered with their primary keys. Credentials are sent once and never stored, logged, or written to the artifact.</a:t>
             </a:r>
           </a:p>
         </p:txBody>
@@ -3589,7 +3579,7 @@
                 </a:solidFill>
                 <a:latin typeface="Courier New"/>
               </a:rPr>
-              <a:t>THE PRODUCT · 4 OF 6</a:t>
+              <a:t>THE PRODUCT · 6 OF 6</a:t>
             </a:r>
           </a:p>
         </p:txBody>
@@ -3628,14 +3618,14 @@
                 </a:solidFill>
                 <a:latin typeface="Arial"/>
               </a:rPr>
-              <a:t>The generated connector</a:t>
+              <a:t>The handover artifact</a:t>
             </a:r>
           </a:p>
         </p:txBody>
       </p:sp>
       <p:pic>
         <p:nvPicPr>
-          <p:cNvPr id="5" name="Picture 4" descr="05-code.png"/>
+          <p:cNvPr id="5" name="Picture 4" descr="07-artifact.png"/>
           <p:cNvPicPr>
             <a:picLocks noChangeAspect="1"/>
           </p:cNvPicPr>
@@ -3691,4176 +3681,7 @@
                 </a:solidFill>
                 <a:latin typeface="Arial"/>
               </a:rPr>
-              <a:t>Provenance above the code: template version, spec checksum, code checksum, repair count. Written by a template, never by the model.</a:t>
-            </a:r>
-          </a:p>
-        </p:txBody>
-      </p:sp>
-    </p:spTree>
-  </p:cSld>
-  <p:clrMapOvr>
-    <a:masterClrMapping/>
-  </p:clrMapOvr>
-</p:sld>
-</file>
-
-<file path=ppt/slides/slide12.xml><?xml version="1.0" encoding="utf-8"?>
-<p:sld xmlns:a="http://schemas.openxmlformats.org/drawingml/2006/main" xmlns:p="http://schemas.openxmlformats.org/presentationml/2006/main" xmlns:r="http://schemas.openxmlformats.org/officeDocument/2006/relationships">
-  <p:cSld>
-    <p:spTree>
-      <p:nvGrpSpPr>
-        <p:cNvPr id="1" name=""/>
-        <p:cNvGrpSpPr/>
-        <p:nvPr/>
-      </p:nvGrpSpPr>
-      <p:grpSpPr/>
-      <p:sp>
-        <p:nvSpPr>
-          <p:cNvPr id="2" name="Rectangle 1"/>
-          <p:cNvSpPr/>
-          <p:nvPr/>
-        </p:nvSpPr>
-        <p:spPr>
-          <a:xfrm>
-            <a:off x="0" y="0"/>
-            <a:ext cx="12191695" cy="6858000"/>
-          </a:xfrm>
-          <a:prstGeom prst="rect">
-            <a:avLst/>
-          </a:prstGeom>
-          <a:solidFill>
-            <a:srgbClr val="0A0F1C"/>
-          </a:solidFill>
-          <a:ln>
-            <a:noFill/>
-          </a:ln>
-          <a:effectLst/>
-        </p:spPr>
-        <p:style>
-          <a:lnRef idx="1">
-            <a:schemeClr val="accent1"/>
-          </a:lnRef>
-          <a:fillRef idx="3">
-            <a:schemeClr val="accent1"/>
-          </a:fillRef>
-          <a:effectRef idx="2">
-            <a:schemeClr val="accent1"/>
-          </a:effectRef>
-          <a:fontRef idx="minor">
-            <a:schemeClr val="lt1"/>
-          </a:fontRef>
-        </p:style>
-        <p:txBody>
-          <a:bodyPr rtlCol="0" anchor="ctr"/>
-          <a:lstStyle/>
-          <a:p>
-            <a:pPr algn="ctr"/>
-          </a:p>
-        </p:txBody>
-      </p:sp>
-      <p:sp>
-        <p:nvSpPr>
-          <p:cNvPr id="3" name="TextBox 2"/>
-          <p:cNvSpPr txBox="1"/>
-          <p:nvPr/>
-        </p:nvSpPr>
-        <p:spPr>
-          <a:xfrm>
-            <a:off x="685800" y="384048"/>
-            <a:ext cx="10058400" cy="274320"/>
-          </a:xfrm>
-          <a:prstGeom prst="rect">
-            <a:avLst/>
-          </a:prstGeom>
-          <a:noFill/>
-        </p:spPr>
-        <p:txBody>
-          <a:bodyPr wrap="square" lIns="0" rIns="0" tIns="0" bIns="0">
-            <a:spAutoFit/>
-          </a:bodyPr>
-          <a:lstStyle/>
-          <a:p>
-            <a:pPr>
-              <a:spcAft>
-                <a:spcPts val="600"/>
-              </a:spcAft>
-            </a:pPr>
-            <a:r>
-              <a:rPr sz="1100" b="1">
-                <a:solidFill>
-                  <a:srgbClr val="4B5975"/>
-                </a:solidFill>
-                <a:latin typeface="Courier New"/>
-              </a:rPr>
-              <a:t>THE PRODUCT · 5 OF 6</a:t>
-            </a:r>
-          </a:p>
-        </p:txBody>
-      </p:sp>
-      <p:sp>
-        <p:nvSpPr>
-          <p:cNvPr id="4" name="TextBox 3"/>
-          <p:cNvSpPr txBox="1"/>
-          <p:nvPr/>
-        </p:nvSpPr>
-        <p:spPr>
-          <a:xfrm>
-            <a:off x="685800" y="658368"/>
-            <a:ext cx="10789920" cy="457200"/>
-          </a:xfrm>
-          <a:prstGeom prst="rect">
-            <a:avLst/>
-          </a:prstGeom>
-          <a:noFill/>
-        </p:spPr>
-        <p:txBody>
-          <a:bodyPr wrap="square" lIns="0" rIns="0" tIns="0" bIns="0">
-            <a:spAutoFit/>
-          </a:bodyPr>
-          <a:lstStyle/>
-          <a:p>
-            <a:pPr>
-              <a:spcAft>
-                <a:spcPts val="600"/>
-              </a:spcAft>
-            </a:pPr>
-            <a:r>
-              <a:rPr sz="2400" b="1">
-                <a:solidFill>
-                  <a:srgbClr val="E8EDF5"/>
-                </a:solidFill>
-                <a:latin typeface="Arial"/>
-              </a:rPr>
-              <a:t>Proven against a real database, not just compiled</a:t>
-            </a:r>
-          </a:p>
-        </p:txBody>
-      </p:sp>
-      <p:pic>
-        <p:nvPicPr>
-          <p:cNvPr id="5" name="Picture 4" descr="06-connection.png"/>
-          <p:cNvPicPr>
-            <a:picLocks noChangeAspect="1"/>
-          </p:cNvPicPr>
-          <p:nvPr/>
-        </p:nvPicPr>
-        <p:blipFill>
-          <a:blip r:embed="rId2"/>
-          <a:stretch>
-            <a:fillRect/>
-          </a:stretch>
-        </p:blipFill>
-        <p:spPr>
-          <a:xfrm>
-            <a:off x="1853031" y="1188720"/>
-            <a:ext cx="8485632" cy="4773168"/>
-          </a:xfrm>
-          <a:prstGeom prst="rect">
-            <a:avLst/>
-          </a:prstGeom>
-        </p:spPr>
-      </p:pic>
-      <p:sp>
-        <p:nvSpPr>
-          <p:cNvPr id="6" name="TextBox 5"/>
-          <p:cNvSpPr txBox="1"/>
-          <p:nvPr/>
-        </p:nvSpPr>
-        <p:spPr>
-          <a:xfrm>
-            <a:off x="685800" y="6108192"/>
-            <a:ext cx="10789920" cy="502920"/>
-          </a:xfrm>
-          <a:prstGeom prst="rect">
-            <a:avLst/>
-          </a:prstGeom>
-          <a:noFill/>
-        </p:spPr>
-        <p:txBody>
-          <a:bodyPr wrap="square" lIns="0" rIns="0" tIns="0" bIns="0">
-            <a:spAutoFit/>
-          </a:bodyPr>
-          <a:lstStyle/>
-          <a:p>
-            <a:pPr>
-              <a:spcAft>
-                <a:spcPts val="600"/>
-              </a:spcAft>
-            </a:pPr>
-            <a:r>
-              <a:rPr sz="1300" b="0">
-                <a:solidFill>
-                  <a:srgbClr val="8896B0"/>
-                </a:solidFill>
-                <a:latin typeface="Arial"/>
-              </a:rPr>
-              <a:t>Executed in a sandboxed subprocess against live PostgreSQL. Three tables discovered with their primary keys. Credentials are sent once and never stored, logged, or written to the artifact.</a:t>
-            </a:r>
-          </a:p>
-        </p:txBody>
-      </p:sp>
-    </p:spTree>
-  </p:cSld>
-  <p:clrMapOvr>
-    <a:masterClrMapping/>
-  </p:clrMapOvr>
-</p:sld>
-</file>
-
-<file path=ppt/slides/slide13.xml><?xml version="1.0" encoding="utf-8"?>
-<p:sld xmlns:a="http://schemas.openxmlformats.org/drawingml/2006/main" xmlns:p="http://schemas.openxmlformats.org/presentationml/2006/main" xmlns:r="http://schemas.openxmlformats.org/officeDocument/2006/relationships">
-  <p:cSld>
-    <p:spTree>
-      <p:nvGrpSpPr>
-        <p:cNvPr id="1" name=""/>
-        <p:cNvGrpSpPr/>
-        <p:nvPr/>
-      </p:nvGrpSpPr>
-      <p:grpSpPr/>
-      <p:sp>
-        <p:nvSpPr>
-          <p:cNvPr id="2" name="Rectangle 1"/>
-          <p:cNvSpPr/>
-          <p:nvPr/>
-        </p:nvSpPr>
-        <p:spPr>
-          <a:xfrm>
-            <a:off x="0" y="0"/>
-            <a:ext cx="12191695" cy="6858000"/>
-          </a:xfrm>
-          <a:prstGeom prst="rect">
-            <a:avLst/>
-          </a:prstGeom>
-          <a:solidFill>
-            <a:srgbClr val="0A0F1C"/>
-          </a:solidFill>
-          <a:ln>
-            <a:noFill/>
-          </a:ln>
-          <a:effectLst/>
-        </p:spPr>
-        <p:style>
-          <a:lnRef idx="1">
-            <a:schemeClr val="accent1"/>
-          </a:lnRef>
-          <a:fillRef idx="3">
-            <a:schemeClr val="accent1"/>
-          </a:fillRef>
-          <a:effectRef idx="2">
-            <a:schemeClr val="accent1"/>
-          </a:effectRef>
-          <a:fontRef idx="minor">
-            <a:schemeClr val="lt1"/>
-          </a:fontRef>
-        </p:style>
-        <p:txBody>
-          <a:bodyPr rtlCol="0" anchor="ctr"/>
-          <a:lstStyle/>
-          <a:p>
-            <a:pPr algn="ctr"/>
-          </a:p>
-        </p:txBody>
-      </p:sp>
-      <p:sp>
-        <p:nvSpPr>
-          <p:cNvPr id="3" name="TextBox 2"/>
-          <p:cNvSpPr txBox="1"/>
-          <p:nvPr/>
-        </p:nvSpPr>
-        <p:spPr>
-          <a:xfrm>
-            <a:off x="685800" y="384048"/>
-            <a:ext cx="10058400" cy="274320"/>
-          </a:xfrm>
-          <a:prstGeom prst="rect">
-            <a:avLst/>
-          </a:prstGeom>
-          <a:noFill/>
-        </p:spPr>
-        <p:txBody>
-          <a:bodyPr wrap="square" lIns="0" rIns="0" tIns="0" bIns="0">
-            <a:spAutoFit/>
-          </a:bodyPr>
-          <a:lstStyle/>
-          <a:p>
-            <a:pPr>
-              <a:spcAft>
-                <a:spcPts val="600"/>
-              </a:spcAft>
-            </a:pPr>
-            <a:r>
-              <a:rPr sz="1100" b="1">
-                <a:solidFill>
-                  <a:srgbClr val="4B5975"/>
-                </a:solidFill>
-                <a:latin typeface="Courier New"/>
-              </a:rPr>
-              <a:t>THE PRODUCT · 6 OF 6</a:t>
-            </a:r>
-          </a:p>
-        </p:txBody>
-      </p:sp>
-      <p:sp>
-        <p:nvSpPr>
-          <p:cNvPr id="4" name="TextBox 3"/>
-          <p:cNvSpPr txBox="1"/>
-          <p:nvPr/>
-        </p:nvSpPr>
-        <p:spPr>
-          <a:xfrm>
-            <a:off x="685800" y="658368"/>
-            <a:ext cx="10789920" cy="457200"/>
-          </a:xfrm>
-          <a:prstGeom prst="rect">
-            <a:avLst/>
-          </a:prstGeom>
-          <a:noFill/>
-        </p:spPr>
-        <p:txBody>
-          <a:bodyPr wrap="square" lIns="0" rIns="0" tIns="0" bIns="0">
-            <a:spAutoFit/>
-          </a:bodyPr>
-          <a:lstStyle/>
-          <a:p>
-            <a:pPr>
-              <a:spcAft>
-                <a:spcPts val="600"/>
-              </a:spcAft>
-            </a:pPr>
-            <a:r>
-              <a:rPr sz="2400" b="1">
-                <a:solidFill>
-                  <a:srgbClr val="E8EDF5"/>
-                </a:solidFill>
-                <a:latin typeface="Arial"/>
-              </a:rPr>
-              <a:t>The handover artifact</a:t>
-            </a:r>
-          </a:p>
-        </p:txBody>
-      </p:sp>
-      <p:pic>
-        <p:nvPicPr>
-          <p:cNvPr id="5" name="Picture 4" descr="07-artifact.png"/>
-          <p:cNvPicPr>
-            <a:picLocks noChangeAspect="1"/>
-          </p:cNvPicPr>
-          <p:nvPr/>
-        </p:nvPicPr>
-        <p:blipFill>
-          <a:blip r:embed="rId2"/>
-          <a:stretch>
-            <a:fillRect/>
-          </a:stretch>
-        </p:blipFill>
-        <p:spPr>
-          <a:xfrm>
-            <a:off x="1853031" y="1188720"/>
-            <a:ext cx="8485632" cy="4773168"/>
-          </a:xfrm>
-          <a:prstGeom prst="rect">
-            <a:avLst/>
-          </a:prstGeom>
-        </p:spPr>
-      </p:pic>
-      <p:sp>
-        <p:nvSpPr>
-          <p:cNvPr id="6" name="TextBox 5"/>
-          <p:cNvSpPr txBox="1"/>
-          <p:nvPr/>
-        </p:nvSpPr>
-        <p:spPr>
-          <a:xfrm>
-            <a:off x="685800" y="6108192"/>
-            <a:ext cx="10789920" cy="502920"/>
-          </a:xfrm>
-          <a:prstGeom prst="rect">
-            <a:avLst/>
-          </a:prstGeom>
-          <a:noFill/>
-        </p:spPr>
-        <p:txBody>
-          <a:bodyPr wrap="square" lIns="0" rIns="0" tIns="0" bIns="0">
-            <a:spAutoFit/>
-          </a:bodyPr>
-          <a:lstStyle/>
-          <a:p>
-            <a:pPr>
-              <a:spcAft>
-                <a:spcPts val="600"/>
-              </a:spcAft>
-            </a:pPr>
-            <a:r>
-              <a:rPr sz="1300" b="0">
-                <a:solidFill>
-                  <a:srgbClr val="8896B0"/>
-                </a:solidFill>
-                <a:latin typeface="Arial"/>
-              </a:rPr>
-              <a:t>Connector, README, requirements, explanation and a manifest — packaged as a versioned zip with a checksum over the whole bundle.</a:t>
-            </a:r>
-          </a:p>
-        </p:txBody>
-      </p:sp>
-    </p:spTree>
-  </p:cSld>
-  <p:clrMapOvr>
-    <a:masterClrMapping/>
-  </p:clrMapOvr>
-</p:sld>
-</file>
-
-<file path=ppt/slides/slide14.xml><?xml version="1.0" encoding="utf-8"?>
-<p:sld xmlns:a="http://schemas.openxmlformats.org/drawingml/2006/main" xmlns:p="http://schemas.openxmlformats.org/presentationml/2006/main" xmlns:r="http://schemas.openxmlformats.org/officeDocument/2006/relationships">
-  <p:cSld>
-    <p:spTree>
-      <p:nvGrpSpPr>
-        <p:cNvPr id="1" name=""/>
-        <p:cNvGrpSpPr/>
-        <p:nvPr/>
-      </p:nvGrpSpPr>
-      <p:grpSpPr/>
-      <p:sp>
-        <p:nvSpPr>
-          <p:cNvPr id="2" name="Rectangle 1"/>
-          <p:cNvSpPr/>
-          <p:nvPr/>
-        </p:nvSpPr>
-        <p:spPr>
-          <a:xfrm>
-            <a:off x="0" y="0"/>
-            <a:ext cx="12191695" cy="6858000"/>
-          </a:xfrm>
-          <a:prstGeom prst="rect">
-            <a:avLst/>
-          </a:prstGeom>
-          <a:solidFill>
-            <a:srgbClr val="0A0F1C"/>
-          </a:solidFill>
-          <a:ln>
-            <a:noFill/>
-          </a:ln>
-          <a:effectLst/>
-        </p:spPr>
-        <p:style>
-          <a:lnRef idx="1">
-            <a:schemeClr val="accent1"/>
-          </a:lnRef>
-          <a:fillRef idx="3">
-            <a:schemeClr val="accent1"/>
-          </a:fillRef>
-          <a:effectRef idx="2">
-            <a:schemeClr val="accent1"/>
-          </a:effectRef>
-          <a:fontRef idx="minor">
-            <a:schemeClr val="lt1"/>
-          </a:fontRef>
-        </p:style>
-        <p:txBody>
-          <a:bodyPr rtlCol="0" anchor="ctr"/>
-          <a:lstStyle/>
-          <a:p>
-            <a:pPr algn="ctr"/>
-          </a:p>
-        </p:txBody>
-      </p:sp>
-      <p:sp>
-        <p:nvSpPr>
-          <p:cNvPr id="3" name="TextBox 2"/>
-          <p:cNvSpPr txBox="1"/>
-          <p:nvPr/>
-        </p:nvSpPr>
-        <p:spPr>
-          <a:xfrm>
-            <a:off x="685800" y="457200"/>
-            <a:ext cx="10058400" cy="274320"/>
-          </a:xfrm>
-          <a:prstGeom prst="rect">
-            <a:avLst/>
-          </a:prstGeom>
-          <a:noFill/>
-        </p:spPr>
-        <p:txBody>
-          <a:bodyPr wrap="square" lIns="0" rIns="0" tIns="0" bIns="0">
-            <a:spAutoFit/>
-          </a:bodyPr>
-          <a:lstStyle/>
-          <a:p>
-            <a:pPr>
-              <a:spcAft>
-                <a:spcPts val="600"/>
-              </a:spcAft>
-            </a:pPr>
-            <a:r>
-              <a:rPr sz="1100" b="1">
-                <a:solidFill>
-                  <a:srgbClr val="4B5975"/>
-                </a:solidFill>
-                <a:latin typeface="Courier New"/>
-              </a:rPr>
-              <a:t>TECHNOLOGY</a:t>
-            </a:r>
-          </a:p>
-        </p:txBody>
-      </p:sp>
-      <p:sp>
-        <p:nvSpPr>
-          <p:cNvPr id="4" name="TextBox 3"/>
-          <p:cNvSpPr txBox="1"/>
-          <p:nvPr/>
-        </p:nvSpPr>
-        <p:spPr>
-          <a:xfrm>
-            <a:off x="685800" y="777240"/>
-            <a:ext cx="10789920" cy="914400"/>
-          </a:xfrm>
-          <a:prstGeom prst="rect">
-            <a:avLst/>
-          </a:prstGeom>
-          <a:noFill/>
-        </p:spPr>
-        <p:txBody>
-          <a:bodyPr wrap="square" lIns="0" rIns="0" tIns="0" bIns="0">
-            <a:spAutoFit/>
-          </a:bodyPr>
-          <a:lstStyle/>
-          <a:p>
-            <a:pPr>
-              <a:spcAft>
-                <a:spcPts val="600"/>
-              </a:spcAft>
-            </a:pPr>
-            <a:r>
-              <a:rPr sz="3000" b="1">
-                <a:solidFill>
-                  <a:srgbClr val="E8EDF5"/>
-                </a:solidFill>
-                <a:latin typeface="Arial"/>
-              </a:rPr>
-              <a:t>The stack, and why each piece is there</a:t>
-            </a:r>
-          </a:p>
-        </p:txBody>
-      </p:sp>
-      <p:sp>
-        <p:nvSpPr>
-          <p:cNvPr id="5" name="Rectangle 4"/>
-          <p:cNvSpPr/>
-          <p:nvPr/>
-        </p:nvSpPr>
-        <p:spPr>
-          <a:xfrm>
-            <a:off x="685800" y="1691640"/>
-            <a:ext cx="10789920" cy="9525"/>
-          </a:xfrm>
-          <a:prstGeom prst="rect">
-            <a:avLst/>
-          </a:prstGeom>
-          <a:solidFill>
-            <a:srgbClr val="1F2A40"/>
-          </a:solidFill>
-          <a:ln>
-            <a:noFill/>
-          </a:ln>
-          <a:effectLst/>
-        </p:spPr>
-        <p:style>
-          <a:lnRef idx="1">
-            <a:schemeClr val="accent1"/>
-          </a:lnRef>
-          <a:fillRef idx="3">
-            <a:schemeClr val="accent1"/>
-          </a:fillRef>
-          <a:effectRef idx="2">
-            <a:schemeClr val="accent1"/>
-          </a:effectRef>
-          <a:fontRef idx="minor">
-            <a:schemeClr val="lt1"/>
-          </a:fontRef>
-        </p:style>
-        <p:txBody>
-          <a:bodyPr rtlCol="0" anchor="ctr"/>
-          <a:lstStyle/>
-          <a:p>
-            <a:pPr algn="ctr"/>
-          </a:p>
-        </p:txBody>
-      </p:sp>
-      <p:graphicFrame>
-        <p:nvGraphicFramePr>
-          <p:cNvPr id="6" name="Table 5"/>
-          <p:cNvGraphicFramePr>
-            <a:graphicFrameLocks noGrp="1"/>
-          </p:cNvGraphicFramePr>
-          <p:nvPr/>
-        </p:nvGraphicFramePr>
-        <p:xfrm>
-          <a:off x="685800" y="2011680"/>
-          <a:ext cx="10789920" cy="365760"/>
-        </p:xfrm>
-        <a:graphic>
-          <a:graphicData uri="http://schemas.openxmlformats.org/drawingml/2006/table">
-            <a:tbl>
-              <a:tblPr firstRow="1" bandRow="1">
-                <a:tableStyleId>{5C22544A-7EE6-4342-B048-85BDC9FD1C3A}</a:tableStyleId>
-              </a:tblPr>
-              <a:tblGrid>
-                <a:gridCol w="3596640"/>
-                <a:gridCol w="3596640"/>
-                <a:gridCol w="3596640"/>
-              </a:tblGrid>
-              <a:tr h="40640">
-                <a:tc>
-                  <a:txBody>
-                    <a:bodyPr/>
-                    <a:lstStyle/>
-                    <a:p>
-                      <a:r>
-                        <a:rPr sz="1200" b="1">
-                          <a:solidFill>
-                            <a:srgbClr val="8896B0"/>
-                          </a:solidFill>
-                          <a:latin typeface="Courier New"/>
-                        </a:rPr>
-                        <a:t>Layer</a:t>
-                      </a:r>
-                    </a:p>
-                  </a:txBody>
-                  <a:tcPr anchor="ctr">
-                    <a:solidFill>
-                      <a:srgbClr val="111827"/>
-                    </a:solidFill>
-                    <a:lnL w="12700" cap="flat">
-                      <a:solidFill>
-                        <a:srgbClr val="1F2A40"/>
-                      </a:solidFill>
-                    </a:lnL>
-                    <a:lnR w="12700" cap="flat">
-                      <a:solidFill>
-                        <a:srgbClr val="1F2A40"/>
-                      </a:solidFill>
-                    </a:lnR>
-                    <a:lnT w="12700" cap="flat">
-                      <a:solidFill>
-                        <a:srgbClr val="1F2A40"/>
-                      </a:solidFill>
-                    </a:lnT>
-                    <a:lnB w="12700" cap="flat">
-                      <a:solidFill>
-                        <a:srgbClr val="1F2A40"/>
-                      </a:solidFill>
-                    </a:lnB>
-                  </a:tcPr>
-                </a:tc>
-                <a:tc>
-                  <a:txBody>
-                    <a:bodyPr/>
-                    <a:lstStyle/>
-                    <a:p>
-                      <a:r>
-                        <a:rPr sz="1200" b="1">
-                          <a:solidFill>
-                            <a:srgbClr val="8896B0"/>
-                          </a:solidFill>
-                          <a:latin typeface="Courier New"/>
-                        </a:rPr>
-                        <a:t>Choice</a:t>
-                      </a:r>
-                    </a:p>
-                  </a:txBody>
-                  <a:tcPr anchor="ctr">
-                    <a:solidFill>
-                      <a:srgbClr val="111827"/>
-                    </a:solidFill>
-                    <a:lnL w="12700" cap="flat">
-                      <a:solidFill>
-                        <a:srgbClr val="1F2A40"/>
-                      </a:solidFill>
-                    </a:lnL>
-                    <a:lnR w="12700" cap="flat">
-                      <a:solidFill>
-                        <a:srgbClr val="1F2A40"/>
-                      </a:solidFill>
-                    </a:lnR>
-                    <a:lnT w="12700" cap="flat">
-                      <a:solidFill>
-                        <a:srgbClr val="1F2A40"/>
-                      </a:solidFill>
-                    </a:lnT>
-                    <a:lnB w="12700" cap="flat">
-                      <a:solidFill>
-                        <a:srgbClr val="1F2A40"/>
-                      </a:solidFill>
-                    </a:lnB>
-                  </a:tcPr>
-                </a:tc>
-                <a:tc>
-                  <a:txBody>
-                    <a:bodyPr/>
-                    <a:lstStyle/>
-                    <a:p>
-                      <a:r>
-                        <a:rPr sz="1200" b="1">
-                          <a:solidFill>
-                            <a:srgbClr val="8896B0"/>
-                          </a:solidFill>
-                          <a:latin typeface="Courier New"/>
-                        </a:rPr>
-                        <a:t>Why this one</a:t>
-                      </a:r>
-                    </a:p>
-                  </a:txBody>
-                  <a:tcPr anchor="ctr">
-                    <a:solidFill>
-                      <a:srgbClr val="111827"/>
-                    </a:solidFill>
-                    <a:lnL w="12700" cap="flat">
-                      <a:solidFill>
-                        <a:srgbClr val="1F2A40"/>
-                      </a:solidFill>
-                    </a:lnL>
-                    <a:lnR w="12700" cap="flat">
-                      <a:solidFill>
-                        <a:srgbClr val="1F2A40"/>
-                      </a:solidFill>
-                    </a:lnR>
-                    <a:lnT w="12700" cap="flat">
-                      <a:solidFill>
-                        <a:srgbClr val="1F2A40"/>
-                      </a:solidFill>
-                    </a:lnT>
-                    <a:lnB w="12700" cap="flat">
-                      <a:solidFill>
-                        <a:srgbClr val="1F2A40"/>
-                      </a:solidFill>
-                    </a:lnB>
-                  </a:tcPr>
-                </a:tc>
-              </a:tr>
-              <a:tr h="40640">
-                <a:tc>
-                  <a:txBody>
-                    <a:bodyPr/>
-                    <a:lstStyle/>
-                    <a:p>
-                      <a:r>
-                        <a:rPr sz="1300" b="1">
-                          <a:solidFill>
-                            <a:srgbClr val="E8EDF5"/>
-                          </a:solidFill>
-                          <a:latin typeface="Arial"/>
-                        </a:rPr>
-                        <a:t>API</a:t>
-                      </a:r>
-                    </a:p>
-                  </a:txBody>
-                  <a:tcPr anchor="ctr">
-                    <a:solidFill>
-                      <a:srgbClr val="0A0F1C"/>
-                    </a:solidFill>
-                    <a:lnL w="12700" cap="flat">
-                      <a:solidFill>
-                        <a:srgbClr val="1F2A40"/>
-                      </a:solidFill>
-                    </a:lnL>
-                    <a:lnR w="12700" cap="flat">
-                      <a:solidFill>
-                        <a:srgbClr val="1F2A40"/>
-                      </a:solidFill>
-                    </a:lnR>
-                    <a:lnT w="12700" cap="flat">
-                      <a:solidFill>
-                        <a:srgbClr val="1F2A40"/>
-                      </a:solidFill>
-                    </a:lnT>
-                    <a:lnB w="12700" cap="flat">
-                      <a:solidFill>
-                        <a:srgbClr val="1F2A40"/>
-                      </a:solidFill>
-                    </a:lnB>
-                  </a:tcPr>
-                </a:tc>
-                <a:tc>
-                  <a:txBody>
-                    <a:bodyPr/>
-                    <a:lstStyle/>
-                    <a:p>
-                      <a:r>
-                        <a:rPr sz="1300" b="0">
-                          <a:solidFill>
-                            <a:srgbClr val="8896B0"/>
-                          </a:solidFill>
-                          <a:latin typeface="Arial"/>
-                        </a:rPr>
-                        <a:t>FastAPI + Pydantic v2</a:t>
-                      </a:r>
-                    </a:p>
-                  </a:txBody>
-                  <a:tcPr anchor="ctr">
-                    <a:solidFill>
-                      <a:srgbClr val="0A0F1C"/>
-                    </a:solidFill>
-                    <a:lnL w="12700" cap="flat">
-                      <a:solidFill>
-                        <a:srgbClr val="1F2A40"/>
-                      </a:solidFill>
-                    </a:lnL>
-                    <a:lnR w="12700" cap="flat">
-                      <a:solidFill>
-                        <a:srgbClr val="1F2A40"/>
-                      </a:solidFill>
-                    </a:lnR>
-                    <a:lnT w="12700" cap="flat">
-                      <a:solidFill>
-                        <a:srgbClr val="1F2A40"/>
-                      </a:solidFill>
-                    </a:lnT>
-                    <a:lnB w="12700" cap="flat">
-                      <a:solidFill>
-                        <a:srgbClr val="1F2A40"/>
-                      </a:solidFill>
-                    </a:lnB>
-                  </a:tcPr>
-                </a:tc>
-                <a:tc>
-                  <a:txBody>
-                    <a:bodyPr/>
-                    <a:lstStyle/>
-                    <a:p>
-                      <a:r>
-                        <a:rPr sz="1300" b="0">
-                          <a:solidFill>
-                            <a:srgbClr val="8896B0"/>
-                          </a:solidFill>
-                          <a:latin typeface="Arial"/>
-                        </a:rPr>
-                        <a:t>Schema validation at the boundary, not in the handlers</a:t>
-                      </a:r>
-                    </a:p>
-                  </a:txBody>
-                  <a:tcPr anchor="ctr">
-                    <a:solidFill>
-                      <a:srgbClr val="0A0F1C"/>
-                    </a:solidFill>
-                    <a:lnL w="12700" cap="flat">
-                      <a:solidFill>
-                        <a:srgbClr val="1F2A40"/>
-                      </a:solidFill>
-                    </a:lnL>
-                    <a:lnR w="12700" cap="flat">
-                      <a:solidFill>
-                        <a:srgbClr val="1F2A40"/>
-                      </a:solidFill>
-                    </a:lnR>
-                    <a:lnT w="12700" cap="flat">
-                      <a:solidFill>
-                        <a:srgbClr val="1F2A40"/>
-                      </a:solidFill>
-                    </a:lnT>
-                    <a:lnB w="12700" cap="flat">
-                      <a:solidFill>
-                        <a:srgbClr val="1F2A40"/>
-                      </a:solidFill>
-                    </a:lnB>
-                  </a:tcPr>
-                </a:tc>
-              </a:tr>
-              <a:tr h="40640">
-                <a:tc>
-                  <a:txBody>
-                    <a:bodyPr/>
-                    <a:lstStyle/>
-                    <a:p>
-                      <a:r>
-                        <a:rPr sz="1300" b="1">
-                          <a:solidFill>
-                            <a:srgbClr val="E8EDF5"/>
-                          </a:solidFill>
-                          <a:latin typeface="Arial"/>
-                        </a:rPr>
-                        <a:t>Spec</a:t>
-                      </a:r>
-                    </a:p>
-                  </a:txBody>
-                  <a:tcPr anchor="ctr">
-                    <a:solidFill>
-                      <a:srgbClr val="0A0F1C"/>
-                    </a:solidFill>
-                    <a:lnL w="12700" cap="flat">
-                      <a:solidFill>
-                        <a:srgbClr val="1F2A40"/>
-                      </a:solidFill>
-                    </a:lnL>
-                    <a:lnR w="12700" cap="flat">
-                      <a:solidFill>
-                        <a:srgbClr val="1F2A40"/>
-                      </a:solidFill>
-                    </a:lnR>
-                    <a:lnT w="12700" cap="flat">
-                      <a:solidFill>
-                        <a:srgbClr val="1F2A40"/>
-                      </a:solidFill>
-                    </a:lnT>
-                    <a:lnB w="12700" cap="flat">
-                      <a:solidFill>
-                        <a:srgbClr val="1F2A40"/>
-                      </a:solidFill>
-                    </a:lnB>
-                  </a:tcPr>
-                </a:tc>
-                <a:tc>
-                  <a:txBody>
-                    <a:bodyPr/>
-                    <a:lstStyle/>
-                    <a:p>
-                      <a:r>
-                        <a:rPr sz="1300" b="0">
-                          <a:solidFill>
-                            <a:srgbClr val="8896B0"/>
-                          </a:solidFill>
-                          <a:latin typeface="Arial"/>
-                        </a:rPr>
-                        <a:t>Pydantic models</a:t>
-                      </a:r>
-                    </a:p>
-                  </a:txBody>
-                  <a:tcPr anchor="ctr">
-                    <a:solidFill>
-                      <a:srgbClr val="0A0F1C"/>
-                    </a:solidFill>
-                    <a:lnL w="12700" cap="flat">
-                      <a:solidFill>
-                        <a:srgbClr val="1F2A40"/>
-                      </a:solidFill>
-                    </a:lnL>
-                    <a:lnR w="12700" cap="flat">
-                      <a:solidFill>
-                        <a:srgbClr val="1F2A40"/>
-                      </a:solidFill>
-                    </a:lnR>
-                    <a:lnT w="12700" cap="flat">
-                      <a:solidFill>
-                        <a:srgbClr val="1F2A40"/>
-                      </a:solidFill>
-                    </a:lnT>
-                    <a:lnB w="12700" cap="flat">
-                      <a:solidFill>
-                        <a:srgbClr val="1F2A40"/>
-                      </a:solidFill>
-                    </a:lnB>
-                  </a:tcPr>
-                </a:tc>
-                <a:tc>
-                  <a:txBody>
-                    <a:bodyPr/>
-                    <a:lstStyle/>
-                    <a:p>
-                      <a:r>
-                        <a:rPr sz="1300" b="0">
-                          <a:solidFill>
-                            <a:srgbClr val="8896B0"/>
-                          </a:solidFill>
-                          <a:latin typeface="Arial"/>
-                        </a:rPr>
-                        <a:t>Permissive draft, then promotion to a strict spec</a:t>
-                      </a:r>
-                    </a:p>
-                  </a:txBody>
-                  <a:tcPr anchor="ctr">
-                    <a:solidFill>
-                      <a:srgbClr val="0A0F1C"/>
-                    </a:solidFill>
-                    <a:lnL w="12700" cap="flat">
-                      <a:solidFill>
-                        <a:srgbClr val="1F2A40"/>
-                      </a:solidFill>
-                    </a:lnL>
-                    <a:lnR w="12700" cap="flat">
-                      <a:solidFill>
-                        <a:srgbClr val="1F2A40"/>
-                      </a:solidFill>
-                    </a:lnR>
-                    <a:lnT w="12700" cap="flat">
-                      <a:solidFill>
-                        <a:srgbClr val="1F2A40"/>
-                      </a:solidFill>
-                    </a:lnT>
-                    <a:lnB w="12700" cap="flat">
-                      <a:solidFill>
-                        <a:srgbClr val="1F2A40"/>
-                      </a:solidFill>
-                    </a:lnB>
-                  </a:tcPr>
-                </a:tc>
-              </a:tr>
-              <a:tr h="40640">
-                <a:tc>
-                  <a:txBody>
-                    <a:bodyPr/>
-                    <a:lstStyle/>
-                    <a:p>
-                      <a:r>
-                        <a:rPr sz="1300" b="1">
-                          <a:solidFill>
-                            <a:srgbClr val="E8EDF5"/>
-                          </a:solidFill>
-                          <a:latin typeface="Arial"/>
-                        </a:rPr>
-                        <a:t>Codegen</a:t>
-                      </a:r>
-                    </a:p>
-                  </a:txBody>
-                  <a:tcPr anchor="ctr">
-                    <a:solidFill>
-                      <a:srgbClr val="0A0F1C"/>
-                    </a:solidFill>
-                    <a:lnL w="12700" cap="flat">
-                      <a:solidFill>
-                        <a:srgbClr val="1F2A40"/>
-                      </a:solidFill>
-                    </a:lnL>
-                    <a:lnR w="12700" cap="flat">
-                      <a:solidFill>
-                        <a:srgbClr val="1F2A40"/>
-                      </a:solidFill>
-                    </a:lnR>
-                    <a:lnT w="12700" cap="flat">
-                      <a:solidFill>
-                        <a:srgbClr val="1F2A40"/>
-                      </a:solidFill>
-                    </a:lnT>
-                    <a:lnB w="12700" cap="flat">
-                      <a:solidFill>
-                        <a:srgbClr val="1F2A40"/>
-                      </a:solidFill>
-                    </a:lnB>
-                  </a:tcPr>
-                </a:tc>
-                <a:tc>
-                  <a:txBody>
-                    <a:bodyPr/>
-                    <a:lstStyle/>
-                    <a:p>
-                      <a:r>
-                        <a:rPr sz="1300" b="0">
-                          <a:solidFill>
-                            <a:srgbClr val="8896B0"/>
-                          </a:solidFill>
-                          <a:latin typeface="Arial"/>
-                        </a:rPr>
-                        <a:t>Jinja2</a:t>
-                      </a:r>
-                    </a:p>
-                  </a:txBody>
-                  <a:tcPr anchor="ctr">
-                    <a:solidFill>
-                      <a:srgbClr val="0A0F1C"/>
-                    </a:solidFill>
-                    <a:lnL w="12700" cap="flat">
-                      <a:solidFill>
-                        <a:srgbClr val="1F2A40"/>
-                      </a:solidFill>
-                    </a:lnL>
-                    <a:lnR w="12700" cap="flat">
-                      <a:solidFill>
-                        <a:srgbClr val="1F2A40"/>
-                      </a:solidFill>
-                    </a:lnR>
-                    <a:lnT w="12700" cap="flat">
-                      <a:solidFill>
-                        <a:srgbClr val="1F2A40"/>
-                      </a:solidFill>
-                    </a:lnT>
-                    <a:lnB w="12700" cap="flat">
-                      <a:solidFill>
-                        <a:srgbClr val="1F2A40"/>
-                      </a:solidFill>
-                    </a:lnB>
-                  </a:tcPr>
-                </a:tc>
-                <a:tc>
-                  <a:txBody>
-                    <a:bodyPr/>
-                    <a:lstStyle/>
-                    <a:p>
-                      <a:r>
-                        <a:rPr sz="1300" b="0">
-                          <a:solidFill>
-                            <a:srgbClr val="8896B0"/>
-                          </a:solidFill>
-                          <a:latin typeface="Arial"/>
-                        </a:rPr>
-                        <a:t>Deterministic. The reason the standards guarantee holds</a:t>
-                      </a:r>
-                    </a:p>
-                  </a:txBody>
-                  <a:tcPr anchor="ctr">
-                    <a:solidFill>
-                      <a:srgbClr val="0A0F1C"/>
-                    </a:solidFill>
-                    <a:lnL w="12700" cap="flat">
-                      <a:solidFill>
-                        <a:srgbClr val="1F2A40"/>
-                      </a:solidFill>
-                    </a:lnL>
-                    <a:lnR w="12700" cap="flat">
-                      <a:solidFill>
-                        <a:srgbClr val="1F2A40"/>
-                      </a:solidFill>
-                    </a:lnR>
-                    <a:lnT w="12700" cap="flat">
-                      <a:solidFill>
-                        <a:srgbClr val="1F2A40"/>
-                      </a:solidFill>
-                    </a:lnT>
-                    <a:lnB w="12700" cap="flat">
-                      <a:solidFill>
-                        <a:srgbClr val="1F2A40"/>
-                      </a:solidFill>
-                    </a:lnB>
-                  </a:tcPr>
-                </a:tc>
-              </a:tr>
-              <a:tr h="40640">
-                <a:tc>
-                  <a:txBody>
-                    <a:bodyPr/>
-                    <a:lstStyle/>
-                    <a:p>
-                      <a:r>
-                        <a:rPr sz="1300" b="1">
-                          <a:solidFill>
-                            <a:srgbClr val="E8EDF5"/>
-                          </a:solidFill>
-                          <a:latin typeface="Arial"/>
-                        </a:rPr>
-                        <a:t>Validation</a:t>
-                      </a:r>
-                    </a:p>
-                  </a:txBody>
-                  <a:tcPr anchor="ctr">
-                    <a:solidFill>
-                      <a:srgbClr val="0A0F1C"/>
-                    </a:solidFill>
-                    <a:lnL w="12700" cap="flat">
-                      <a:solidFill>
-                        <a:srgbClr val="1F2A40"/>
-                      </a:solidFill>
-                    </a:lnL>
-                    <a:lnR w="12700" cap="flat">
-                      <a:solidFill>
-                        <a:srgbClr val="1F2A40"/>
-                      </a:solidFill>
-                    </a:lnR>
-                    <a:lnT w="12700" cap="flat">
-                      <a:solidFill>
-                        <a:srgbClr val="1F2A40"/>
-                      </a:solidFill>
-                    </a:lnT>
-                    <a:lnB w="12700" cap="flat">
-                      <a:solidFill>
-                        <a:srgbClr val="1F2A40"/>
-                      </a:solidFill>
-                    </a:lnB>
-                  </a:tcPr>
-                </a:tc>
-                <a:tc>
-                  <a:txBody>
-                    <a:bodyPr/>
-                    <a:lstStyle/>
-                    <a:p>
-                      <a:r>
-                        <a:rPr sz="1300" b="0">
-                          <a:solidFill>
-                            <a:srgbClr val="8896B0"/>
-                          </a:solidFill>
-                          <a:latin typeface="Arial"/>
-                        </a:rPr>
-                        <a:t>ast + ruff + black + bandit</a:t>
-                      </a:r>
-                    </a:p>
-                  </a:txBody>
-                  <a:tcPr anchor="ctr">
-                    <a:solidFill>
-                      <a:srgbClr val="0A0F1C"/>
-                    </a:solidFill>
-                    <a:lnL w="12700" cap="flat">
-                      <a:solidFill>
-                        <a:srgbClr val="1F2A40"/>
-                      </a:solidFill>
-                    </a:lnL>
-                    <a:lnR w="12700" cap="flat">
-                      <a:solidFill>
-                        <a:srgbClr val="1F2A40"/>
-                      </a:solidFill>
-                    </a:lnR>
-                    <a:lnT w="12700" cap="flat">
-                      <a:solidFill>
-                        <a:srgbClr val="1F2A40"/>
-                      </a:solidFill>
-                    </a:lnT>
-                    <a:lnB w="12700" cap="flat">
-                      <a:solidFill>
-                        <a:srgbClr val="1F2A40"/>
-                      </a:solidFill>
-                    </a:lnB>
-                  </a:tcPr>
-                </a:tc>
-                <a:tc>
-                  <a:txBody>
-                    <a:bodyPr/>
-                    <a:lstStyle/>
-                    <a:p>
-                      <a:r>
-                        <a:rPr sz="1300" b="0">
-                          <a:solidFill>
-                            <a:srgbClr val="8896B0"/>
-                          </a:solidFill>
-                          <a:latin typeface="Arial"/>
-                        </a:rPr>
-                        <a:t>Parsed, never imported — importing runs it</a:t>
-                      </a:r>
-                    </a:p>
-                  </a:txBody>
-                  <a:tcPr anchor="ctr">
-                    <a:solidFill>
-                      <a:srgbClr val="0A0F1C"/>
-                    </a:solidFill>
-                    <a:lnL w="12700" cap="flat">
-                      <a:solidFill>
-                        <a:srgbClr val="1F2A40"/>
-                      </a:solidFill>
-                    </a:lnL>
-                    <a:lnR w="12700" cap="flat">
-                      <a:solidFill>
-                        <a:srgbClr val="1F2A40"/>
-                      </a:solidFill>
-                    </a:lnR>
-                    <a:lnT w="12700" cap="flat">
-                      <a:solidFill>
-                        <a:srgbClr val="1F2A40"/>
-                      </a:solidFill>
-                    </a:lnT>
-                    <a:lnB w="12700" cap="flat">
-                      <a:solidFill>
-                        <a:srgbClr val="1F2A40"/>
-                      </a:solidFill>
-                    </a:lnB>
-                  </a:tcPr>
-                </a:tc>
-              </a:tr>
-              <a:tr h="40640">
-                <a:tc>
-                  <a:txBody>
-                    <a:bodyPr/>
-                    <a:lstStyle/>
-                    <a:p>
-                      <a:r>
-                        <a:rPr sz="1300" b="1">
-                          <a:solidFill>
-                            <a:srgbClr val="E8EDF5"/>
-                          </a:solidFill>
-                          <a:latin typeface="Arial"/>
-                        </a:rPr>
-                        <a:t>Database</a:t>
-                      </a:r>
-                    </a:p>
-                  </a:txBody>
-                  <a:tcPr anchor="ctr">
-                    <a:solidFill>
-                      <a:srgbClr val="0A0F1C"/>
-                    </a:solidFill>
-                    <a:lnL w="12700" cap="flat">
-                      <a:solidFill>
-                        <a:srgbClr val="1F2A40"/>
-                      </a:solidFill>
-                    </a:lnL>
-                    <a:lnR w="12700" cap="flat">
-                      <a:solidFill>
-                        <a:srgbClr val="1F2A40"/>
-                      </a:solidFill>
-                    </a:lnR>
-                    <a:lnT w="12700" cap="flat">
-                      <a:solidFill>
-                        <a:srgbClr val="1F2A40"/>
-                      </a:solidFill>
-                    </a:lnT>
-                    <a:lnB w="12700" cap="flat">
-                      <a:solidFill>
-                        <a:srgbClr val="1F2A40"/>
-                      </a:solidFill>
-                    </a:lnB>
-                  </a:tcPr>
-                </a:tc>
-                <a:tc>
-                  <a:txBody>
-                    <a:bodyPr/>
-                    <a:lstStyle/>
-                    <a:p>
-                      <a:r>
-                        <a:rPr sz="1300" b="0">
-                          <a:solidFill>
-                            <a:srgbClr val="8896B0"/>
-                          </a:solidFill>
-                          <a:latin typeface="Arial"/>
-                        </a:rPr>
-                        <a:t>SQLAlchemy 2.0</a:t>
-                      </a:r>
-                    </a:p>
-                  </a:txBody>
-                  <a:tcPr anchor="ctr">
-                    <a:solidFill>
-                      <a:srgbClr val="0A0F1C"/>
-                    </a:solidFill>
-                    <a:lnL w="12700" cap="flat">
-                      <a:solidFill>
-                        <a:srgbClr val="1F2A40"/>
-                      </a:solidFill>
-                    </a:lnL>
-                    <a:lnR w="12700" cap="flat">
-                      <a:solidFill>
-                        <a:srgbClr val="1F2A40"/>
-                      </a:solidFill>
-                    </a:lnR>
-                    <a:lnT w="12700" cap="flat">
-                      <a:solidFill>
-                        <a:srgbClr val="1F2A40"/>
-                      </a:solidFill>
-                    </a:lnT>
-                    <a:lnB w="12700" cap="flat">
-                      <a:solidFill>
-                        <a:srgbClr val="1F2A40"/>
-                      </a:solidFill>
-                    </a:lnB>
-                  </a:tcPr>
-                </a:tc>
-                <a:tc>
-                  <a:txBody>
-                    <a:bodyPr/>
-                    <a:lstStyle/>
-                    <a:p>
-                      <a:r>
-                        <a:rPr sz="1300" b="0">
-                          <a:solidFill>
-                            <a:srgbClr val="8896B0"/>
-                          </a:solidFill>
-                          <a:latin typeface="Arial"/>
-                        </a:rPr>
-                        <a:t>One connector shape across three SQL dialects</a:t>
-                      </a:r>
-                    </a:p>
-                  </a:txBody>
-                  <a:tcPr anchor="ctr">
-                    <a:solidFill>
-                      <a:srgbClr val="0A0F1C"/>
-                    </a:solidFill>
-                    <a:lnL w="12700" cap="flat">
-                      <a:solidFill>
-                        <a:srgbClr val="1F2A40"/>
-                      </a:solidFill>
-                    </a:lnL>
-                    <a:lnR w="12700" cap="flat">
-                      <a:solidFill>
-                        <a:srgbClr val="1F2A40"/>
-                      </a:solidFill>
-                    </a:lnR>
-                    <a:lnT w="12700" cap="flat">
-                      <a:solidFill>
-                        <a:srgbClr val="1F2A40"/>
-                      </a:solidFill>
-                    </a:lnT>
-                    <a:lnB w="12700" cap="flat">
-                      <a:solidFill>
-                        <a:srgbClr val="1F2A40"/>
-                      </a:solidFill>
-                    </a:lnB>
-                  </a:tcPr>
-                </a:tc>
-              </a:tr>
-              <a:tr h="40640">
-                <a:tc>
-                  <a:txBody>
-                    <a:bodyPr/>
-                    <a:lstStyle/>
-                    <a:p>
-                      <a:r>
-                        <a:rPr sz="1300" b="1">
-                          <a:solidFill>
-                            <a:srgbClr val="E8EDF5"/>
-                          </a:solidFill>
-                          <a:latin typeface="Arial"/>
-                        </a:rPr>
-                        <a:t>Sandbox</a:t>
-                      </a:r>
-                    </a:p>
-                  </a:txBody>
-                  <a:tcPr anchor="ctr">
-                    <a:solidFill>
-                      <a:srgbClr val="0A0F1C"/>
-                    </a:solidFill>
-                    <a:lnL w="12700" cap="flat">
-                      <a:solidFill>
-                        <a:srgbClr val="1F2A40"/>
-                      </a:solidFill>
-                    </a:lnL>
-                    <a:lnR w="12700" cap="flat">
-                      <a:solidFill>
-                        <a:srgbClr val="1F2A40"/>
-                      </a:solidFill>
-                    </a:lnR>
-                    <a:lnT w="12700" cap="flat">
-                      <a:solidFill>
-                        <a:srgbClr val="1F2A40"/>
-                      </a:solidFill>
-                    </a:lnT>
-                    <a:lnB w="12700" cap="flat">
-                      <a:solidFill>
-                        <a:srgbClr val="1F2A40"/>
-                      </a:solidFill>
-                    </a:lnB>
-                  </a:tcPr>
-                </a:tc>
-                <a:tc>
-                  <a:txBody>
-                    <a:bodyPr/>
-                    <a:lstStyle/>
-                    <a:p>
-                      <a:r>
-                        <a:rPr sz="1300" b="0">
-                          <a:solidFill>
-                            <a:srgbClr val="8896B0"/>
-                          </a:solidFill>
-                          <a:latin typeface="Arial"/>
-                        </a:rPr>
-                        <a:t>subprocess + rlimits</a:t>
-                      </a:r>
-                    </a:p>
-                  </a:txBody>
-                  <a:tcPr anchor="ctr">
-                    <a:solidFill>
-                      <a:srgbClr val="0A0F1C"/>
-                    </a:solidFill>
-                    <a:lnL w="12700" cap="flat">
-                      <a:solidFill>
-                        <a:srgbClr val="1F2A40"/>
-                      </a:solidFill>
-                    </a:lnL>
-                    <a:lnR w="12700" cap="flat">
-                      <a:solidFill>
-                        <a:srgbClr val="1F2A40"/>
-                      </a:solidFill>
-                    </a:lnR>
-                    <a:lnT w="12700" cap="flat">
-                      <a:solidFill>
-                        <a:srgbClr val="1F2A40"/>
-                      </a:solidFill>
-                    </a:lnT>
-                    <a:lnB w="12700" cap="flat">
-                      <a:solidFill>
-                        <a:srgbClr val="1F2A40"/>
-                      </a:solidFill>
-                    </a:lnB>
-                  </a:tcPr>
-                </a:tc>
-                <a:tc>
-                  <a:txBody>
-                    <a:bodyPr/>
-                    <a:lstStyle/>
-                    <a:p>
-                      <a:r>
-                        <a:rPr sz="1300" b="0">
-                          <a:solidFill>
-                            <a:srgbClr val="8896B0"/>
-                          </a:solidFill>
-                          <a:latin typeface="Arial"/>
-                        </a:rPr>
-                        <a:t>Timeout, memory cap, allowlisted environment</a:t>
-                      </a:r>
-                    </a:p>
-                  </a:txBody>
-                  <a:tcPr anchor="ctr">
-                    <a:solidFill>
-                      <a:srgbClr val="0A0F1C"/>
-                    </a:solidFill>
-                    <a:lnL w="12700" cap="flat">
-                      <a:solidFill>
-                        <a:srgbClr val="1F2A40"/>
-                      </a:solidFill>
-                    </a:lnL>
-                    <a:lnR w="12700" cap="flat">
-                      <a:solidFill>
-                        <a:srgbClr val="1F2A40"/>
-                      </a:solidFill>
-                    </a:lnR>
-                    <a:lnT w="12700" cap="flat">
-                      <a:solidFill>
-                        <a:srgbClr val="1F2A40"/>
-                      </a:solidFill>
-                    </a:lnT>
-                    <a:lnB w="12700" cap="flat">
-                      <a:solidFill>
-                        <a:srgbClr val="1F2A40"/>
-                      </a:solidFill>
-                    </a:lnB>
-                  </a:tcPr>
-                </a:tc>
-              </a:tr>
-              <a:tr h="40640">
-                <a:tc>
-                  <a:txBody>
-                    <a:bodyPr/>
-                    <a:lstStyle/>
-                    <a:p>
-                      <a:r>
-                        <a:rPr sz="1300" b="1">
-                          <a:solidFill>
-                            <a:srgbClr val="E8EDF5"/>
-                          </a:solidFill>
-                          <a:latin typeface="Arial"/>
-                        </a:rPr>
-                        <a:t>Front end</a:t>
-                      </a:r>
-                    </a:p>
-                  </a:txBody>
-                  <a:tcPr anchor="ctr">
-                    <a:solidFill>
-                      <a:srgbClr val="0A0F1C"/>
-                    </a:solidFill>
-                    <a:lnL w="12700" cap="flat">
-                      <a:solidFill>
-                        <a:srgbClr val="1F2A40"/>
-                      </a:solidFill>
-                    </a:lnL>
-                    <a:lnR w="12700" cap="flat">
-                      <a:solidFill>
-                        <a:srgbClr val="1F2A40"/>
-                      </a:solidFill>
-                    </a:lnR>
-                    <a:lnT w="12700" cap="flat">
-                      <a:solidFill>
-                        <a:srgbClr val="1F2A40"/>
-                      </a:solidFill>
-                    </a:lnT>
-                    <a:lnB w="12700" cap="flat">
-                      <a:solidFill>
-                        <a:srgbClr val="1F2A40"/>
-                      </a:solidFill>
-                    </a:lnB>
-                  </a:tcPr>
-                </a:tc>
-                <a:tc>
-                  <a:txBody>
-                    <a:bodyPr/>
-                    <a:lstStyle/>
-                    <a:p>
-                      <a:r>
-                        <a:rPr sz="1300" b="0">
-                          <a:solidFill>
-                            <a:srgbClr val="8896B0"/>
-                          </a:solidFill>
-                          <a:latin typeface="Arial"/>
-                        </a:rPr>
-                        <a:t>React 18 + TypeScript + Vite</a:t>
-                      </a:r>
-                    </a:p>
-                  </a:txBody>
-                  <a:tcPr anchor="ctr">
-                    <a:solidFill>
-                      <a:srgbClr val="0A0F1C"/>
-                    </a:solidFill>
-                    <a:lnL w="12700" cap="flat">
-                      <a:solidFill>
-                        <a:srgbClr val="1F2A40"/>
-                      </a:solidFill>
-                    </a:lnL>
-                    <a:lnR w="12700" cap="flat">
-                      <a:solidFill>
-                        <a:srgbClr val="1F2A40"/>
-                      </a:solidFill>
-                    </a:lnR>
-                    <a:lnT w="12700" cap="flat">
-                      <a:solidFill>
-                        <a:srgbClr val="1F2A40"/>
-                      </a:solidFill>
-                    </a:lnT>
-                    <a:lnB w="12700" cap="flat">
-                      <a:solidFill>
-                        <a:srgbClr val="1F2A40"/>
-                      </a:solidFill>
-                    </a:lnB>
-                  </a:tcPr>
-                </a:tc>
-                <a:tc>
-                  <a:txBody>
-                    <a:bodyPr/>
-                    <a:lstStyle/>
-                    <a:p>
-                      <a:r>
-                        <a:rPr sz="1300" b="0">
-                          <a:solidFill>
-                            <a:srgbClr val="8896B0"/>
-                          </a:solidFill>
-                          <a:latin typeface="Arial"/>
-                        </a:rPr>
-                        <a:t>Built to static files, served by the same process</a:t>
-                      </a:r>
-                    </a:p>
-                  </a:txBody>
-                  <a:tcPr anchor="ctr">
-                    <a:solidFill>
-                      <a:srgbClr val="0A0F1C"/>
-                    </a:solidFill>
-                    <a:lnL w="12700" cap="flat">
-                      <a:solidFill>
-                        <a:srgbClr val="1F2A40"/>
-                      </a:solidFill>
-                    </a:lnL>
-                    <a:lnR w="12700" cap="flat">
-                      <a:solidFill>
-                        <a:srgbClr val="1F2A40"/>
-                      </a:solidFill>
-                    </a:lnR>
-                    <a:lnT w="12700" cap="flat">
-                      <a:solidFill>
-                        <a:srgbClr val="1F2A40"/>
-                      </a:solidFill>
-                    </a:lnT>
-                    <a:lnB w="12700" cap="flat">
-                      <a:solidFill>
-                        <a:srgbClr val="1F2A40"/>
-                      </a:solidFill>
-                    </a:lnB>
-                  </a:tcPr>
-                </a:tc>
-              </a:tr>
-              <a:tr h="40640">
-                <a:tc>
-                  <a:txBody>
-                    <a:bodyPr/>
-                    <a:lstStyle/>
-                    <a:p>
-                      <a:r>
-                        <a:rPr sz="1300" b="1">
-                          <a:solidFill>
-                            <a:srgbClr val="E8EDF5"/>
-                          </a:solidFill>
-                          <a:latin typeface="Arial"/>
-                        </a:rPr>
-                        <a:t>Tests</a:t>
-                      </a:r>
-                    </a:p>
-                  </a:txBody>
-                  <a:tcPr anchor="ctr">
-                    <a:solidFill>
-                      <a:srgbClr val="0A0F1C"/>
-                    </a:solidFill>
-                    <a:lnL w="12700" cap="flat">
-                      <a:solidFill>
-                        <a:srgbClr val="1F2A40"/>
-                      </a:solidFill>
-                    </a:lnL>
-                    <a:lnR w="12700" cap="flat">
-                      <a:solidFill>
-                        <a:srgbClr val="1F2A40"/>
-                      </a:solidFill>
-                    </a:lnR>
-                    <a:lnT w="12700" cap="flat">
-                      <a:solidFill>
-                        <a:srgbClr val="1F2A40"/>
-                      </a:solidFill>
-                    </a:lnT>
-                    <a:lnB w="12700" cap="flat">
-                      <a:solidFill>
-                        <a:srgbClr val="1F2A40"/>
-                      </a:solidFill>
-                    </a:lnB>
-                  </a:tcPr>
-                </a:tc>
-                <a:tc>
-                  <a:txBody>
-                    <a:bodyPr/>
-                    <a:lstStyle/>
-                    <a:p>
-                      <a:r>
-                        <a:rPr sz="1300" b="0">
-                          <a:solidFill>
-                            <a:srgbClr val="8896B0"/>
-                          </a:solidFill>
-                          <a:latin typeface="Arial"/>
-                        </a:rPr>
-                        <a:t>pytest — 280 of them</a:t>
-                      </a:r>
-                    </a:p>
-                  </a:txBody>
-                  <a:tcPr anchor="ctr">
-                    <a:solidFill>
-                      <a:srgbClr val="0A0F1C"/>
-                    </a:solidFill>
-                    <a:lnL w="12700" cap="flat">
-                      <a:solidFill>
-                        <a:srgbClr val="1F2A40"/>
-                      </a:solidFill>
-                    </a:lnL>
-                    <a:lnR w="12700" cap="flat">
-                      <a:solidFill>
-                        <a:srgbClr val="1F2A40"/>
-                      </a:solidFill>
-                    </a:lnR>
-                    <a:lnT w="12700" cap="flat">
-                      <a:solidFill>
-                        <a:srgbClr val="1F2A40"/>
-                      </a:solidFill>
-                    </a:lnT>
-                    <a:lnB w="12700" cap="flat">
-                      <a:solidFill>
-                        <a:srgbClr val="1F2A40"/>
-                      </a:solidFill>
-                    </a:lnB>
-                  </a:tcPr>
-                </a:tc>
-                <a:tc>
-                  <a:txBody>
-                    <a:bodyPr/>
-                    <a:lstStyle/>
-                    <a:p>
-                      <a:r>
-                        <a:rPr sz="1300" b="0">
-                          <a:solidFill>
-                            <a:srgbClr val="8896B0"/>
-                          </a:solidFill>
-                          <a:latin typeface="Arial"/>
-                        </a:rPr>
-                        <a:t>Including deliberate fault injection</a:t>
-                      </a:r>
-                    </a:p>
-                  </a:txBody>
-                  <a:tcPr anchor="ctr">
-                    <a:solidFill>
-                      <a:srgbClr val="0A0F1C"/>
-                    </a:solidFill>
-                    <a:lnL w="12700" cap="flat">
-                      <a:solidFill>
-                        <a:srgbClr val="1F2A40"/>
-                      </a:solidFill>
-                    </a:lnL>
-                    <a:lnR w="12700" cap="flat">
-                      <a:solidFill>
-                        <a:srgbClr val="1F2A40"/>
-                      </a:solidFill>
-                    </a:lnR>
-                    <a:lnT w="12700" cap="flat">
-                      <a:solidFill>
-                        <a:srgbClr val="1F2A40"/>
-                      </a:solidFill>
-                    </a:lnT>
-                    <a:lnB w="12700" cap="flat">
-                      <a:solidFill>
-                        <a:srgbClr val="1F2A40"/>
-                      </a:solidFill>
-                    </a:lnB>
-                  </a:tcPr>
-                </a:tc>
-              </a:tr>
-            </a:tbl>
-          </a:graphicData>
-        </a:graphic>
-      </p:graphicFrame>
-      <p:sp>
-        <p:nvSpPr>
-          <p:cNvPr id="7" name="TextBox 6"/>
-          <p:cNvSpPr txBox="1"/>
-          <p:nvPr/>
-        </p:nvSpPr>
-        <p:spPr>
-          <a:xfrm>
-            <a:off x="685800" y="5943600"/>
-            <a:ext cx="10789920" cy="548640"/>
-          </a:xfrm>
-          <a:prstGeom prst="rect">
-            <a:avLst/>
-          </a:prstGeom>
-          <a:noFill/>
-        </p:spPr>
-        <p:txBody>
-          <a:bodyPr wrap="square" lIns="0" rIns="0" tIns="0" bIns="0">
-            <a:spAutoFit/>
-          </a:bodyPr>
-          <a:lstStyle/>
-          <a:p>
-            <a:pPr>
-              <a:spcAft>
-                <a:spcPts val="600"/>
-              </a:spcAft>
-            </a:pPr>
-            <a:r>
-              <a:rPr sz="1250" b="0">
-                <a:solidFill>
-                  <a:srgbClr val="8896B0"/>
-                </a:solidFill>
-                <a:latin typeface="Courier New"/>
-              </a:rPr>
-              <a:t>No orchestration framework. The pipeline is six modules and a function call chain.</a:t>
-            </a:r>
-          </a:p>
-        </p:txBody>
-      </p:sp>
-    </p:spTree>
-  </p:cSld>
-  <p:clrMapOvr>
-    <a:masterClrMapping/>
-  </p:clrMapOvr>
-</p:sld>
-</file>
-
-<file path=ppt/slides/slide15.xml><?xml version="1.0" encoding="utf-8"?>
-<p:sld xmlns:a="http://schemas.openxmlformats.org/drawingml/2006/main" xmlns:p="http://schemas.openxmlformats.org/presentationml/2006/main" xmlns:r="http://schemas.openxmlformats.org/officeDocument/2006/relationships">
-  <p:cSld>
-    <p:spTree>
-      <p:nvGrpSpPr>
-        <p:cNvPr id="1" name=""/>
-        <p:cNvGrpSpPr/>
-        <p:nvPr/>
-      </p:nvGrpSpPr>
-      <p:grpSpPr/>
-      <p:sp>
-        <p:nvSpPr>
-          <p:cNvPr id="2" name="Rectangle 1"/>
-          <p:cNvSpPr/>
-          <p:nvPr/>
-        </p:nvSpPr>
-        <p:spPr>
-          <a:xfrm>
-            <a:off x="0" y="0"/>
-            <a:ext cx="12191695" cy="6858000"/>
-          </a:xfrm>
-          <a:prstGeom prst="rect">
-            <a:avLst/>
-          </a:prstGeom>
-          <a:solidFill>
-            <a:srgbClr val="0A0F1C"/>
-          </a:solidFill>
-          <a:ln>
-            <a:noFill/>
-          </a:ln>
-          <a:effectLst/>
-        </p:spPr>
-        <p:style>
-          <a:lnRef idx="1">
-            <a:schemeClr val="accent1"/>
-          </a:lnRef>
-          <a:fillRef idx="3">
-            <a:schemeClr val="accent1"/>
-          </a:fillRef>
-          <a:effectRef idx="2">
-            <a:schemeClr val="accent1"/>
-          </a:effectRef>
-          <a:fontRef idx="minor">
-            <a:schemeClr val="lt1"/>
-          </a:fontRef>
-        </p:style>
-        <p:txBody>
-          <a:bodyPr rtlCol="0" anchor="ctr"/>
-          <a:lstStyle/>
-          <a:p>
-            <a:pPr algn="ctr"/>
-          </a:p>
-        </p:txBody>
-      </p:sp>
-      <p:sp>
-        <p:nvSpPr>
-          <p:cNvPr id="3" name="TextBox 2"/>
-          <p:cNvSpPr txBox="1"/>
-          <p:nvPr/>
-        </p:nvSpPr>
-        <p:spPr>
-          <a:xfrm>
-            <a:off x="685800" y="457200"/>
-            <a:ext cx="10058400" cy="274320"/>
-          </a:xfrm>
-          <a:prstGeom prst="rect">
-            <a:avLst/>
-          </a:prstGeom>
-          <a:noFill/>
-        </p:spPr>
-        <p:txBody>
-          <a:bodyPr wrap="square" lIns="0" rIns="0" tIns="0" bIns="0">
-            <a:spAutoFit/>
-          </a:bodyPr>
-          <a:lstStyle/>
-          <a:p>
-            <a:pPr>
-              <a:spcAft>
-                <a:spcPts val="600"/>
-              </a:spcAft>
-            </a:pPr>
-            <a:r>
-              <a:rPr sz="1100" b="1">
-                <a:solidFill>
-                  <a:srgbClr val="4B5975"/>
-                </a:solidFill>
-                <a:latin typeface="Courier New"/>
-              </a:rPr>
-              <a:t>DESIGN · QUALITY</a:t>
-            </a:r>
-          </a:p>
-        </p:txBody>
-      </p:sp>
-      <p:sp>
-        <p:nvSpPr>
-          <p:cNvPr id="4" name="TextBox 3"/>
-          <p:cNvSpPr txBox="1"/>
-          <p:nvPr/>
-        </p:nvSpPr>
-        <p:spPr>
-          <a:xfrm>
-            <a:off x="685800" y="777240"/>
-            <a:ext cx="10789920" cy="914400"/>
-          </a:xfrm>
-          <a:prstGeom prst="rect">
-            <a:avLst/>
-          </a:prstGeom>
-          <a:noFill/>
-        </p:spPr>
-        <p:txBody>
-          <a:bodyPr wrap="square" lIns="0" rIns="0" tIns="0" bIns="0">
-            <a:spAutoFit/>
-          </a:bodyPr>
-          <a:lstStyle/>
-          <a:p>
-            <a:pPr>
-              <a:spcAft>
-                <a:spcPts val="600"/>
-              </a:spcAft>
-            </a:pPr>
-            <a:r>
-              <a:rPr sz="3000" b="1">
-                <a:solidFill>
-                  <a:srgbClr val="E8EDF5"/>
-                </a:solidFill>
-                <a:latin typeface="Arial"/>
-              </a:rPr>
-              <a:t>What happens when generation goes wrong</a:t>
-            </a:r>
-          </a:p>
-        </p:txBody>
-      </p:sp>
-      <p:sp>
-        <p:nvSpPr>
-          <p:cNvPr id="5" name="Rectangle 4"/>
-          <p:cNvSpPr/>
-          <p:nvPr/>
-        </p:nvSpPr>
-        <p:spPr>
-          <a:xfrm>
-            <a:off x="685800" y="1691640"/>
-            <a:ext cx="10789920" cy="9525"/>
-          </a:xfrm>
-          <a:prstGeom prst="rect">
-            <a:avLst/>
-          </a:prstGeom>
-          <a:solidFill>
-            <a:srgbClr val="1F2A40"/>
-          </a:solidFill>
-          <a:ln>
-            <a:noFill/>
-          </a:ln>
-          <a:effectLst/>
-        </p:spPr>
-        <p:style>
-          <a:lnRef idx="1">
-            <a:schemeClr val="accent1"/>
-          </a:lnRef>
-          <a:fillRef idx="3">
-            <a:schemeClr val="accent1"/>
-          </a:fillRef>
-          <a:effectRef idx="2">
-            <a:schemeClr val="accent1"/>
-          </a:effectRef>
-          <a:fontRef idx="minor">
-            <a:schemeClr val="lt1"/>
-          </a:fontRef>
-        </p:style>
-        <p:txBody>
-          <a:bodyPr rtlCol="0" anchor="ctr"/>
-          <a:lstStyle/>
-          <a:p>
-            <a:pPr algn="ctr"/>
-          </a:p>
-        </p:txBody>
-      </p:sp>
-      <p:sp>
-        <p:nvSpPr>
-          <p:cNvPr id="6" name="TextBox 5"/>
-          <p:cNvSpPr txBox="1"/>
-          <p:nvPr/>
-        </p:nvSpPr>
-        <p:spPr>
-          <a:xfrm>
-            <a:off x="685800" y="1965960"/>
-            <a:ext cx="10789920" cy="4023360"/>
-          </a:xfrm>
-          <a:prstGeom prst="rect">
-            <a:avLst/>
-          </a:prstGeom>
-          <a:noFill/>
-        </p:spPr>
-        <p:txBody>
-          <a:bodyPr wrap="square" lIns="0" rIns="0" tIns="0" bIns="0">
-            <a:spAutoFit/>
-          </a:bodyPr>
-          <a:lstStyle/>
-          <a:p>
-            <a:pPr>
-              <a:spcAft>
-                <a:spcPts val="300"/>
-              </a:spcAft>
-            </a:pPr>
-            <a:r>
-              <a:rPr sz="1700" b="1">
-                <a:solidFill>
-                  <a:srgbClr val="E8EDF5"/>
-                </a:solidFill>
-                <a:latin typeface="Arial"/>
-              </a:rPr>
-              <a:t>13 AST checks, run on parsed source</a:t>
-            </a:r>
-          </a:p>
-          <a:p>
-            <a:pPr>
-              <a:spcAft>
-                <a:spcPts val="1600"/>
-              </a:spcAft>
-            </a:pPr>
-            <a:r>
-              <a:rPr sz="1450" b="0">
-                <a:solidFill>
-                  <a:srgbClr val="8896B0"/>
-                </a:solidFill>
-                <a:latin typeface="Arial"/>
-              </a:rPr>
-              <a:t>no-hardcoded-credentials · no-dynamic-sql · env-for-secrets · no-dangerous-calls ·type-hints · docstrings · and seven more. The code is never imported to be checked.</a:t>
-            </a:r>
-          </a:p>
-          <a:p>
-            <a:pPr>
-              <a:spcAft>
-                <a:spcPts val="300"/>
-              </a:spcAft>
-            </a:pPr>
-            <a:r>
-              <a:rPr sz="1700" b="1">
-                <a:solidFill>
-                  <a:srgbClr val="E8EDF5"/>
-                </a:solidFill>
-                <a:latin typeface="Arial"/>
-              </a:rPr>
-              <a:t>A bounded repair loop with a regression guard</a:t>
-            </a:r>
-          </a:p>
-          <a:p>
-            <a:pPr>
-              <a:spcAft>
-                <a:spcPts val="1600"/>
-              </a:spcAft>
-            </a:pPr>
-            <a:r>
-              <a:rPr sz="1450" b="0">
-                <a:solidFill>
-                  <a:srgbClr val="8896B0"/>
-                </a:solidFill>
-                <a:latin typeface="Arial"/>
-              </a:rPr>
-              <a:t>At most three attempts, and a candidate is adopted only if it strictly reduces theerror count. The returned code is never worse than the input.</a:t>
-            </a:r>
-          </a:p>
-          <a:p>
-            <a:pPr>
-              <a:spcAft>
-                <a:spcPts val="300"/>
-              </a:spcAft>
-            </a:pPr>
-            <a:r>
-              <a:rPr sz="1700" b="1">
-                <a:solidFill>
-                  <a:srgbClr val="E8EDF5"/>
-                </a:solidFill>
-                <a:latin typeface="Arial"/>
-              </a:rPr>
-              <a:t>Rejection is a rendered outcome, not a crash</a:t>
-            </a:r>
-          </a:p>
-          <a:p>
-            <a:pPr>
-              <a:spcAft>
-                <a:spcPts val="1600"/>
-              </a:spcAft>
-            </a:pPr>
-            <a:r>
-              <a:rPr sz="1450" b="0">
-                <a:solidFill>
-                  <a:srgbClr val="8896B0"/>
-                </a:solidFill>
-                <a:latin typeface="Arial"/>
-              </a:rPr>
-              <a:t>A failing connector still comes back, with its findings, so a reviewer can see exactly what went wrong.</a:t>
-            </a:r>
-          </a:p>
-          <a:p>
-            <a:pPr>
-              <a:spcAft>
-                <a:spcPts val="300"/>
-              </a:spcAft>
-            </a:pPr>
-            <a:r>
-              <a:rPr sz="1700" b="1">
-                <a:solidFill>
-                  <a:srgbClr val="E8EDF5"/>
-                </a:solidFill>
-                <a:latin typeface="Arial"/>
-              </a:rPr>
-              <a:t>The checker is tested against bad input</a:t>
-            </a:r>
-          </a:p>
-          <a:p>
-            <a:pPr>
-              <a:spcAft>
-                <a:spcPts val="1600"/>
-              </a:spcAft>
-            </a:pPr>
-            <a:r>
-              <a:rPr sz="1450" b="0">
-                <a:solidFill>
-                  <a:srgbClr val="8896B0"/>
-                </a:solidFill>
-                <a:latin typeface="Arial"/>
-              </a:rPr>
-              <a:t>npm run generate:faults injects a hardcoded password, an eval(), an f-string SQL query. A checker that has only seen good input has demonstrated nothing.</a:t>
-            </a:r>
-          </a:p>
-        </p:txBody>
-      </p:sp>
-    </p:spTree>
-  </p:cSld>
-  <p:clrMapOvr>
-    <a:masterClrMapping/>
-  </p:clrMapOvr>
-</p:sld>
-</file>
-
-<file path=ppt/slides/slide16.xml><?xml version="1.0" encoding="utf-8"?>
-<p:sld xmlns:a="http://schemas.openxmlformats.org/drawingml/2006/main" xmlns:p="http://schemas.openxmlformats.org/presentationml/2006/main" xmlns:r="http://schemas.openxmlformats.org/officeDocument/2006/relationships">
-  <p:cSld>
-    <p:spTree>
-      <p:nvGrpSpPr>
-        <p:cNvPr id="1" name=""/>
-        <p:cNvGrpSpPr/>
-        <p:nvPr/>
-      </p:nvGrpSpPr>
-      <p:grpSpPr/>
-      <p:sp>
-        <p:nvSpPr>
-          <p:cNvPr id="2" name="Rectangle 1"/>
-          <p:cNvSpPr/>
-          <p:nvPr/>
-        </p:nvSpPr>
-        <p:spPr>
-          <a:xfrm>
-            <a:off x="0" y="0"/>
-            <a:ext cx="12191695" cy="6858000"/>
-          </a:xfrm>
-          <a:prstGeom prst="rect">
-            <a:avLst/>
-          </a:prstGeom>
-          <a:solidFill>
-            <a:srgbClr val="0A0F1C"/>
-          </a:solidFill>
-          <a:ln>
-            <a:noFill/>
-          </a:ln>
-          <a:effectLst/>
-        </p:spPr>
-        <p:style>
-          <a:lnRef idx="1">
-            <a:schemeClr val="accent1"/>
-          </a:lnRef>
-          <a:fillRef idx="3">
-            <a:schemeClr val="accent1"/>
-          </a:fillRef>
-          <a:effectRef idx="2">
-            <a:schemeClr val="accent1"/>
-          </a:effectRef>
-          <a:fontRef idx="minor">
-            <a:schemeClr val="lt1"/>
-          </a:fontRef>
-        </p:style>
-        <p:txBody>
-          <a:bodyPr rtlCol="0" anchor="ctr"/>
-          <a:lstStyle/>
-          <a:p>
-            <a:pPr algn="ctr"/>
-          </a:p>
-        </p:txBody>
-      </p:sp>
-      <p:sp>
-        <p:nvSpPr>
-          <p:cNvPr id="3" name="TextBox 2"/>
-          <p:cNvSpPr txBox="1"/>
-          <p:nvPr/>
-        </p:nvSpPr>
-        <p:spPr>
-          <a:xfrm>
-            <a:off x="685800" y="457200"/>
-            <a:ext cx="10058400" cy="274320"/>
-          </a:xfrm>
-          <a:prstGeom prst="rect">
-            <a:avLst/>
-          </a:prstGeom>
-          <a:noFill/>
-        </p:spPr>
-        <p:txBody>
-          <a:bodyPr wrap="square" lIns="0" rIns="0" tIns="0" bIns="0">
-            <a:spAutoFit/>
-          </a:bodyPr>
-          <a:lstStyle/>
-          <a:p>
-            <a:pPr>
-              <a:spcAft>
-                <a:spcPts val="600"/>
-              </a:spcAft>
-            </a:pPr>
-            <a:r>
-              <a:rPr sz="1100" b="1">
-                <a:solidFill>
-                  <a:srgbClr val="4B5975"/>
-                </a:solidFill>
-                <a:latin typeface="Courier New"/>
-              </a:rPr>
-              <a:t>DESIGN · SECURITY</a:t>
-            </a:r>
-          </a:p>
-        </p:txBody>
-      </p:sp>
-      <p:sp>
-        <p:nvSpPr>
-          <p:cNvPr id="4" name="TextBox 3"/>
-          <p:cNvSpPr txBox="1"/>
-          <p:nvPr/>
-        </p:nvSpPr>
-        <p:spPr>
-          <a:xfrm>
-            <a:off x="685800" y="777240"/>
-            <a:ext cx="10789920" cy="914400"/>
-          </a:xfrm>
-          <a:prstGeom prst="rect">
-            <a:avLst/>
-          </a:prstGeom>
-          <a:noFill/>
-        </p:spPr>
-        <p:txBody>
-          <a:bodyPr wrap="square" lIns="0" rIns="0" tIns="0" bIns="0">
-            <a:spAutoFit/>
-          </a:bodyPr>
-          <a:lstStyle/>
-          <a:p>
-            <a:pPr>
-              <a:spcAft>
-                <a:spcPts val="600"/>
-              </a:spcAft>
-            </a:pPr>
-            <a:r>
-              <a:rPr sz="3000" b="1">
-                <a:solidFill>
-                  <a:srgbClr val="E8EDF5"/>
-                </a:solidFill>
-                <a:latin typeface="Arial"/>
-              </a:rPr>
-              <a:t>Secrets never touch the artifact</a:t>
-            </a:r>
-          </a:p>
-        </p:txBody>
-      </p:sp>
-      <p:sp>
-        <p:nvSpPr>
-          <p:cNvPr id="5" name="Rectangle 4"/>
-          <p:cNvSpPr/>
-          <p:nvPr/>
-        </p:nvSpPr>
-        <p:spPr>
-          <a:xfrm>
-            <a:off x="685800" y="1691640"/>
-            <a:ext cx="10789920" cy="9525"/>
-          </a:xfrm>
-          <a:prstGeom prst="rect">
-            <a:avLst/>
-          </a:prstGeom>
-          <a:solidFill>
-            <a:srgbClr val="1F2A40"/>
-          </a:solidFill>
-          <a:ln>
-            <a:noFill/>
-          </a:ln>
-          <a:effectLst/>
-        </p:spPr>
-        <p:style>
-          <a:lnRef idx="1">
-            <a:schemeClr val="accent1"/>
-          </a:lnRef>
-          <a:fillRef idx="3">
-            <a:schemeClr val="accent1"/>
-          </a:fillRef>
-          <a:effectRef idx="2">
-            <a:schemeClr val="accent1"/>
-          </a:effectRef>
-          <a:fontRef idx="minor">
-            <a:schemeClr val="lt1"/>
-          </a:fontRef>
-        </p:style>
-        <p:txBody>
-          <a:bodyPr rtlCol="0" anchor="ctr"/>
-          <a:lstStyle/>
-          <a:p>
-            <a:pPr algn="ctr"/>
-          </a:p>
-        </p:txBody>
-      </p:sp>
-      <p:sp>
-        <p:nvSpPr>
-          <p:cNvPr id="6" name="TextBox 5"/>
-          <p:cNvSpPr txBox="1"/>
-          <p:nvPr/>
-        </p:nvSpPr>
-        <p:spPr>
-          <a:xfrm>
-            <a:off x="685800" y="1965960"/>
-            <a:ext cx="10789920" cy="4023360"/>
-          </a:xfrm>
-          <a:prstGeom prst="rect">
-            <a:avLst/>
-          </a:prstGeom>
-          <a:noFill/>
-        </p:spPr>
-        <p:txBody>
-          <a:bodyPr wrap="square" lIns="0" rIns="0" tIns="0" bIns="0">
-            <a:spAutoFit/>
-          </a:bodyPr>
-          <a:lstStyle/>
-          <a:p>
-            <a:pPr>
-              <a:spcAft>
-                <a:spcPts val="300"/>
-              </a:spcAft>
-            </a:pPr>
-            <a:r>
-              <a:rPr sz="1700" b="1">
-                <a:solidFill>
-                  <a:srgbClr val="E8EDF5"/>
-                </a:solidFill>
-                <a:latin typeface="Arial"/>
-              </a:rPr>
-              <a:t>Scrubbed at input</a:t>
-            </a:r>
-          </a:p>
-          <a:p>
-            <a:pPr>
-              <a:spcAft>
-                <a:spcPts val="1600"/>
-              </a:spcAft>
-            </a:pPr>
-            <a:r>
-              <a:rPr sz="1450" b="0">
-                <a:solidFill>
-                  <a:srgbClr val="8896B0"/>
-                </a:solidFill>
-                <a:latin typeface="Arial"/>
-              </a:rPr>
-              <a:t>Credentials are redacted before the prompt reaches the model, and the stored record holds the scrubbed copy — so a pasted password cannot resurface in a later response.</a:t>
-            </a:r>
-          </a:p>
-          <a:p>
-            <a:pPr>
-              <a:spcAft>
-                <a:spcPts val="300"/>
-              </a:spcAft>
-            </a:pPr>
-            <a:r>
-              <a:rPr sz="1700" b="1">
-                <a:solidFill>
-                  <a:srgbClr val="E8EDF5"/>
-                </a:solidFill>
-                <a:latin typeface="Arial"/>
-              </a:rPr>
-              <a:t>Structurally impossible in the output</a:t>
-            </a:r>
-          </a:p>
-          <a:p>
-            <a:pPr>
-              <a:spcAft>
-                <a:spcPts val="1600"/>
-              </a:spcAft>
-            </a:pPr>
-            <a:r>
-              <a:rPr sz="1450" b="0">
-                <a:solidFill>
-                  <a:srgbClr val="8896B0"/>
-                </a:solidFill>
-                <a:latin typeface="Arial"/>
-              </a:rPr>
-              <a:t>Two AST checks make a literal credential a rejection rather than a review comment.</a:t>
-            </a:r>
-          </a:p>
-          <a:p>
-            <a:pPr>
-              <a:spcAft>
-                <a:spcPts val="300"/>
-              </a:spcAft>
-            </a:pPr>
-            <a:r>
-              <a:rPr sz="1700" b="1">
-                <a:solidFill>
-                  <a:srgbClr val="E8EDF5"/>
-                </a:solidFill>
-                <a:latin typeface="Arial"/>
-              </a:rPr>
-              <a:t>Names only in the manifest</a:t>
-            </a:r>
-          </a:p>
-          <a:p>
-            <a:pPr>
-              <a:spcAft>
-                <a:spcPts val="1600"/>
-              </a:spcAft>
-            </a:pPr>
-            <a:r>
-              <a:rPr sz="1450" b="0">
-                <a:solidFill>
-                  <a:srgbClr val="8896B0"/>
-                </a:solidFill>
-                <a:latin typeface="Arial"/>
-              </a:rPr>
-              <a:t>The bundle records which environment variables are required, never their values.</a:t>
-            </a:r>
-          </a:p>
-          <a:p>
-            <a:pPr>
-              <a:spcAft>
-                <a:spcPts val="300"/>
-              </a:spcAft>
-            </a:pPr>
-            <a:r>
-              <a:rPr sz="1700" b="1">
-                <a:solidFill>
-                  <a:srgbClr val="E8EDF5"/>
-                </a:solidFill>
-                <a:latin typeface="Arial"/>
-              </a:rPr>
-              <a:t>Transient at test time</a:t>
-            </a:r>
-          </a:p>
-          <a:p>
-            <a:pPr>
-              <a:spcAft>
-                <a:spcPts val="1600"/>
-              </a:spcAft>
-            </a:pPr>
-            <a:r>
-              <a:rPr sz="1450" b="0">
-                <a:solidFill>
-                  <a:srgbClr val="8896B0"/>
-                </a:solidFill>
-                <a:latin typeface="Arial"/>
-              </a:rPr>
-              <a:t>The sandbox child gets an allowlisted environment — not a denylist, because a denylist exposes every newly added secret until someone remembers to update it.</a:t>
-            </a:r>
-          </a:p>
-        </p:txBody>
-      </p:sp>
-    </p:spTree>
-  </p:cSld>
-  <p:clrMapOvr>
-    <a:masterClrMapping/>
-  </p:clrMapOvr>
-</p:sld>
-</file>
-
-<file path=ppt/slides/slide17.xml><?xml version="1.0" encoding="utf-8"?>
-<p:sld xmlns:a="http://schemas.openxmlformats.org/drawingml/2006/main" xmlns:p="http://schemas.openxmlformats.org/presentationml/2006/main" xmlns:r="http://schemas.openxmlformats.org/officeDocument/2006/relationships">
-  <p:cSld>
-    <p:spTree>
-      <p:nvGrpSpPr>
-        <p:cNvPr id="1" name=""/>
-        <p:cNvGrpSpPr/>
-        <p:nvPr/>
-      </p:nvGrpSpPr>
-      <p:grpSpPr/>
-      <p:sp>
-        <p:nvSpPr>
-          <p:cNvPr id="2" name="Rectangle 1"/>
-          <p:cNvSpPr/>
-          <p:nvPr/>
-        </p:nvSpPr>
-        <p:spPr>
-          <a:xfrm>
-            <a:off x="0" y="0"/>
-            <a:ext cx="12191695" cy="6858000"/>
-          </a:xfrm>
-          <a:prstGeom prst="rect">
-            <a:avLst/>
-          </a:prstGeom>
-          <a:solidFill>
-            <a:srgbClr val="0A0F1C"/>
-          </a:solidFill>
-          <a:ln>
-            <a:noFill/>
-          </a:ln>
-          <a:effectLst/>
-        </p:spPr>
-        <p:style>
-          <a:lnRef idx="1">
-            <a:schemeClr val="accent1"/>
-          </a:lnRef>
-          <a:fillRef idx="3">
-            <a:schemeClr val="accent1"/>
-          </a:fillRef>
-          <a:effectRef idx="2">
-            <a:schemeClr val="accent1"/>
-          </a:effectRef>
-          <a:fontRef idx="minor">
-            <a:schemeClr val="lt1"/>
-          </a:fontRef>
-        </p:style>
-        <p:txBody>
-          <a:bodyPr rtlCol="0" anchor="ctr"/>
-          <a:lstStyle/>
-          <a:p>
-            <a:pPr algn="ctr"/>
-          </a:p>
-        </p:txBody>
-      </p:sp>
-      <p:sp>
-        <p:nvSpPr>
-          <p:cNvPr id="3" name="TextBox 2"/>
-          <p:cNvSpPr txBox="1"/>
-          <p:nvPr/>
-        </p:nvSpPr>
-        <p:spPr>
-          <a:xfrm>
-            <a:off x="685800" y="384048"/>
-            <a:ext cx="10058400" cy="274320"/>
-          </a:xfrm>
-          <a:prstGeom prst="rect">
-            <a:avLst/>
-          </a:prstGeom>
-          <a:noFill/>
-        </p:spPr>
-        <p:txBody>
-          <a:bodyPr wrap="square" lIns="0" rIns="0" tIns="0" bIns="0">
-            <a:spAutoFit/>
-          </a:bodyPr>
-          <a:lstStyle/>
-          <a:p>
-            <a:pPr>
-              <a:spcAft>
-                <a:spcPts val="600"/>
-              </a:spcAft>
-            </a:pPr>
-            <a:r>
-              <a:rPr sz="1100" b="1">
-                <a:solidFill>
-                  <a:srgbClr val="4B5975"/>
-                </a:solidFill>
-                <a:latin typeface="Courier New"/>
-              </a:rPr>
-              <a:t>DESIGN · PROVENANCE</a:t>
-            </a:r>
-          </a:p>
-        </p:txBody>
-      </p:sp>
-      <p:sp>
-        <p:nvSpPr>
-          <p:cNvPr id="4" name="TextBox 3"/>
-          <p:cNvSpPr txBox="1"/>
-          <p:nvPr/>
-        </p:nvSpPr>
-        <p:spPr>
-          <a:xfrm>
-            <a:off x="685800" y="658368"/>
-            <a:ext cx="10789920" cy="457200"/>
-          </a:xfrm>
-          <a:prstGeom prst="rect">
-            <a:avLst/>
-          </a:prstGeom>
-          <a:noFill/>
-        </p:spPr>
-        <p:txBody>
-          <a:bodyPr wrap="square" lIns="0" rIns="0" tIns="0" bIns="0">
-            <a:spAutoFit/>
-          </a:bodyPr>
-          <a:lstStyle/>
-          <a:p>
-            <a:pPr>
-              <a:spcAft>
-                <a:spcPts val="600"/>
-              </a:spcAft>
-            </a:pPr>
-            <a:r>
-              <a:rPr sz="2400" b="1">
-                <a:solidFill>
-                  <a:srgbClr val="E8EDF5"/>
-                </a:solidFill>
-                <a:latin typeface="Arial"/>
-              </a:rPr>
-              <a:t>Every artifact answers 'where did this come from?'</a:t>
-            </a:r>
-          </a:p>
-        </p:txBody>
-      </p:sp>
-      <p:pic>
-        <p:nvPicPr>
-          <p:cNvPr id="5" name="Picture 4" descr="08-manifest.png"/>
-          <p:cNvPicPr>
-            <a:picLocks noChangeAspect="1"/>
-          </p:cNvPicPr>
-          <p:nvPr/>
-        </p:nvPicPr>
-        <p:blipFill>
-          <a:blip r:embed="rId2"/>
-          <a:stretch>
-            <a:fillRect/>
-          </a:stretch>
-        </p:blipFill>
-        <p:spPr>
-          <a:xfrm>
-            <a:off x="1853031" y="1188720"/>
-            <a:ext cx="8485632" cy="4773168"/>
-          </a:xfrm>
-          <a:prstGeom prst="rect">
-            <a:avLst/>
-          </a:prstGeom>
-        </p:spPr>
-      </p:pic>
-      <p:sp>
-        <p:nvSpPr>
-          <p:cNvPr id="6" name="TextBox 5"/>
-          <p:cNvSpPr txBox="1"/>
-          <p:nvPr/>
-        </p:nvSpPr>
-        <p:spPr>
-          <a:xfrm>
-            <a:off x="685800" y="6108192"/>
-            <a:ext cx="10789920" cy="502920"/>
-          </a:xfrm>
-          <a:prstGeom prst="rect">
-            <a:avLst/>
-          </a:prstGeom>
-          <a:noFill/>
-        </p:spPr>
-        <p:txBody>
-          <a:bodyPr wrap="square" lIns="0" rIns="0" tIns="0" bIns="0">
-            <a:spAutoFit/>
-          </a:bodyPr>
-          <a:lstStyle/>
-          <a:p>
-            <a:pPr>
-              <a:spcAft>
-                <a:spcPts val="600"/>
-              </a:spcAft>
-            </a:pPr>
-            <a:r>
-              <a:rPr sz="1300" b="0">
-                <a:solidFill>
-                  <a:srgbClr val="8896B0"/>
-                </a:solidFill>
-                <a:latin typeface="Arial"/>
-              </a:rPr>
-              <a:t>Request → spec checksum → template version → code checksum → artifact version. Packaging is byte-reproducible: the zip uses a fixed timestamp, not the clock.</a:t>
-            </a:r>
-          </a:p>
-        </p:txBody>
-      </p:sp>
-    </p:spTree>
-  </p:cSld>
-  <p:clrMapOvr>
-    <a:masterClrMapping/>
-  </p:clrMapOvr>
-</p:sld>
-</file>
-
-<file path=ppt/slides/slide18.xml><?xml version="1.0" encoding="utf-8"?>
-<p:sld xmlns:a="http://schemas.openxmlformats.org/drawingml/2006/main" xmlns:p="http://schemas.openxmlformats.org/presentationml/2006/main" xmlns:r="http://schemas.openxmlformats.org/officeDocument/2006/relationships">
-  <p:cSld>
-    <p:spTree>
-      <p:nvGrpSpPr>
-        <p:cNvPr id="1" name=""/>
-        <p:cNvGrpSpPr/>
-        <p:nvPr/>
-      </p:nvGrpSpPr>
-      <p:grpSpPr/>
-      <p:sp>
-        <p:nvSpPr>
-          <p:cNvPr id="2" name="Rectangle 1"/>
-          <p:cNvSpPr/>
-          <p:nvPr/>
-        </p:nvSpPr>
-        <p:spPr>
-          <a:xfrm>
-            <a:off x="0" y="0"/>
-            <a:ext cx="12191695" cy="6858000"/>
-          </a:xfrm>
-          <a:prstGeom prst="rect">
-            <a:avLst/>
-          </a:prstGeom>
-          <a:solidFill>
-            <a:srgbClr val="0A0F1C"/>
-          </a:solidFill>
-          <a:ln>
-            <a:noFill/>
-          </a:ln>
-          <a:effectLst/>
-        </p:spPr>
-        <p:style>
-          <a:lnRef idx="1">
-            <a:schemeClr val="accent1"/>
-          </a:lnRef>
-          <a:fillRef idx="3">
-            <a:schemeClr val="accent1"/>
-          </a:fillRef>
-          <a:effectRef idx="2">
-            <a:schemeClr val="accent1"/>
-          </a:effectRef>
-          <a:fontRef idx="minor">
-            <a:schemeClr val="lt1"/>
-          </a:fontRef>
-        </p:style>
-        <p:txBody>
-          <a:bodyPr rtlCol="0" anchor="ctr"/>
-          <a:lstStyle/>
-          <a:p>
-            <a:pPr algn="ctr"/>
-          </a:p>
-        </p:txBody>
-      </p:sp>
-      <p:sp>
-        <p:nvSpPr>
-          <p:cNvPr id="3" name="TextBox 2"/>
-          <p:cNvSpPr txBox="1"/>
-          <p:nvPr/>
-        </p:nvSpPr>
-        <p:spPr>
-          <a:xfrm>
-            <a:off x="685800" y="457200"/>
-            <a:ext cx="10058400" cy="274320"/>
-          </a:xfrm>
-          <a:prstGeom prst="rect">
-            <a:avLst/>
-          </a:prstGeom>
-          <a:noFill/>
-        </p:spPr>
-        <p:txBody>
-          <a:bodyPr wrap="square" lIns="0" rIns="0" tIns="0" bIns="0">
-            <a:spAutoFit/>
-          </a:bodyPr>
-          <a:lstStyle/>
-          <a:p>
-            <a:pPr>
-              <a:spcAft>
-                <a:spcPts val="600"/>
-              </a:spcAft>
-            </a:pPr>
-            <a:r>
-              <a:rPr sz="1100" b="1">
-                <a:solidFill>
-                  <a:srgbClr val="4B5975"/>
-                </a:solidFill>
-                <a:latin typeface="Courier New"/>
-              </a:rPr>
-              <a:t>DESIGN · INTERFACE</a:t>
-            </a:r>
-          </a:p>
-        </p:txBody>
-      </p:sp>
-      <p:sp>
-        <p:nvSpPr>
-          <p:cNvPr id="4" name="TextBox 3"/>
-          <p:cNvSpPr txBox="1"/>
-          <p:nvPr/>
-        </p:nvSpPr>
-        <p:spPr>
-          <a:xfrm>
-            <a:off x="685800" y="777240"/>
-            <a:ext cx="10789920" cy="914400"/>
-          </a:xfrm>
-          <a:prstGeom prst="rect">
-            <a:avLst/>
-          </a:prstGeom>
-          <a:noFill/>
-        </p:spPr>
-        <p:txBody>
-          <a:bodyPr wrap="square" lIns="0" rIns="0" tIns="0" bIns="0">
-            <a:spAutoFit/>
-          </a:bodyPr>
-          <a:lstStyle/>
-          <a:p>
-            <a:pPr>
-              <a:spcAft>
-                <a:spcPts val="600"/>
-              </a:spcAft>
-            </a:pPr>
-            <a:r>
-              <a:rPr sz="3000" b="1">
-                <a:solidFill>
-                  <a:srgbClr val="E8EDF5"/>
-                </a:solidFill>
-                <a:latin typeface="Arial"/>
-              </a:rPr>
-              <a:t>Why the UI looks like a conversation</a:t>
-            </a:r>
-          </a:p>
-        </p:txBody>
-      </p:sp>
-      <p:sp>
-        <p:nvSpPr>
-          <p:cNvPr id="5" name="Rectangle 4"/>
-          <p:cNvSpPr/>
-          <p:nvPr/>
-        </p:nvSpPr>
-        <p:spPr>
-          <a:xfrm>
-            <a:off x="685800" y="1691640"/>
-            <a:ext cx="10789920" cy="9525"/>
-          </a:xfrm>
-          <a:prstGeom prst="rect">
-            <a:avLst/>
-          </a:prstGeom>
-          <a:solidFill>
-            <a:srgbClr val="1F2A40"/>
-          </a:solidFill>
-          <a:ln>
-            <a:noFill/>
-          </a:ln>
-          <a:effectLst/>
-        </p:spPr>
-        <p:style>
-          <a:lnRef idx="1">
-            <a:schemeClr val="accent1"/>
-          </a:lnRef>
-          <a:fillRef idx="3">
-            <a:schemeClr val="accent1"/>
-          </a:fillRef>
-          <a:effectRef idx="2">
-            <a:schemeClr val="accent1"/>
-          </a:effectRef>
-          <a:fontRef idx="minor">
-            <a:schemeClr val="lt1"/>
-          </a:fontRef>
-        </p:style>
-        <p:txBody>
-          <a:bodyPr rtlCol="0" anchor="ctr"/>
-          <a:lstStyle/>
-          <a:p>
-            <a:pPr algn="ctr"/>
-          </a:p>
-        </p:txBody>
-      </p:sp>
-      <p:sp>
-        <p:nvSpPr>
-          <p:cNvPr id="6" name="TextBox 5"/>
-          <p:cNvSpPr txBox="1"/>
-          <p:nvPr/>
-        </p:nvSpPr>
-        <p:spPr>
-          <a:xfrm>
-            <a:off x="685800" y="1965960"/>
-            <a:ext cx="10789920" cy="4023360"/>
-          </a:xfrm>
-          <a:prstGeom prst="rect">
-            <a:avLst/>
-          </a:prstGeom>
-          <a:noFill/>
-        </p:spPr>
-        <p:txBody>
-          <a:bodyPr wrap="square" lIns="0" rIns="0" tIns="0" bIns="0">
-            <a:spAutoFit/>
-          </a:bodyPr>
-          <a:lstStyle/>
-          <a:p>
-            <a:pPr>
-              <a:spcAft>
-                <a:spcPts val="300"/>
-              </a:spcAft>
-            </a:pPr>
-            <a:r>
-              <a:rPr sz="1700" b="1">
-                <a:solidFill>
-                  <a:srgbClr val="E8EDF5"/>
-                </a:solidFill>
-                <a:latin typeface="Arial"/>
-              </a:rPr>
-              <a:t>The interaction is a dialogue, so the interface is one</a:t>
-            </a:r>
-          </a:p>
-          <a:p>
-            <a:pPr>
-              <a:spcAft>
-                <a:spcPts val="1600"/>
-              </a:spcAft>
-            </a:pPr>
-            <a:r>
-              <a:rPr sz="1450" b="0">
-                <a:solidFill>
-                  <a:srgbClr val="8896B0"/>
-                </a:solidFill>
-                <a:latin typeface="Arial"/>
-              </a:rPr>
-              <a:t>The agent asks when it is unsure. A form cannot do that; a thread can.</a:t>
-            </a:r>
-          </a:p>
-          <a:p>
-            <a:pPr>
-              <a:spcAft>
-                <a:spcPts val="300"/>
-              </a:spcAft>
-            </a:pPr>
-            <a:r>
-              <a:rPr sz="1700" b="1">
-                <a:solidFill>
-                  <a:srgbClr val="E8EDF5"/>
-                </a:solidFill>
-                <a:latin typeface="Arial"/>
-              </a:rPr>
-              <a:t>Evidence sits beside the conversation, not inside it</a:t>
-            </a:r>
-          </a:p>
-          <a:p>
-            <a:pPr>
-              <a:spcAft>
-                <a:spcPts val="1600"/>
-              </a:spcAft>
-            </a:pPr>
-            <a:r>
-              <a:rPr sz="1450" b="0">
-                <a:solidFill>
-                  <a:srgbClr val="8896B0"/>
-                </a:solidFill>
-                <a:latin typeface="Arial"/>
-              </a:rPr>
-              <a:t>Standards, code, connection and artifact live in a persistent right-hand panel, so a reviewer can check the output without losing the thread.</a:t>
-            </a:r>
-          </a:p>
-          <a:p>
-            <a:pPr>
-              <a:spcAft>
-                <a:spcPts val="300"/>
-              </a:spcAft>
-            </a:pPr>
-            <a:r>
-              <a:rPr sz="1700" b="1">
-                <a:solidFill>
-                  <a:srgbClr val="E8EDF5"/>
-                </a:solidFill>
-                <a:latin typeface="Arial"/>
-              </a:rPr>
-              <a:t>The server owns state; the thread is a log of how it was reached</a:t>
-            </a:r>
-          </a:p>
-          <a:p>
-            <a:pPr>
-              <a:spcAft>
-                <a:spcPts val="1600"/>
-              </a:spcAft>
-            </a:pPr>
-            <a:r>
-              <a:rPr sz="1450" b="0">
-                <a:solidFill>
-                  <a:srgbClr val="8896B0"/>
-                </a:solidFill>
-                <a:latin typeface="Arial"/>
-              </a:rPr>
-              <a:t>Reopening a request replays it from stored state rather than a saved transcript — the backend stores state, not conversation, and pretending otherwise would drift.</a:t>
-            </a:r>
-          </a:p>
-        </p:txBody>
-      </p:sp>
-      <p:sp>
-        <p:nvSpPr>
-          <p:cNvPr id="7" name="TextBox 6"/>
-          <p:cNvSpPr txBox="1"/>
-          <p:nvPr/>
-        </p:nvSpPr>
-        <p:spPr>
-          <a:xfrm>
-            <a:off x="685800" y="5989320"/>
-            <a:ext cx="10789920" cy="548640"/>
-          </a:xfrm>
-          <a:prstGeom prst="rect">
-            <a:avLst/>
-          </a:prstGeom>
-          <a:noFill/>
-        </p:spPr>
-        <p:txBody>
-          <a:bodyPr wrap="square" lIns="0" rIns="0" tIns="0" bIns="0">
-            <a:spAutoFit/>
-          </a:bodyPr>
-          <a:lstStyle/>
-          <a:p>
-            <a:pPr>
-              <a:spcAft>
-                <a:spcPts val="600"/>
-              </a:spcAft>
-            </a:pPr>
-            <a:r>
-              <a:rPr sz="1250" b="0">
-                <a:solidFill>
-                  <a:srgbClr val="8896B0"/>
-                </a:solidFill>
-                <a:latin typeface="Courier New"/>
-              </a:rPr>
-              <a:t>React 18 + TypeScript · built to static files · served by the API process · no CORS anywhere</a:t>
-            </a:r>
-          </a:p>
-        </p:txBody>
-      </p:sp>
-    </p:spTree>
-  </p:cSld>
-  <p:clrMapOvr>
-    <a:masterClrMapping/>
-  </p:clrMapOvr>
-</p:sld>
-</file>
-
-<file path=ppt/slides/slide19.xml><?xml version="1.0" encoding="utf-8"?>
-<p:sld xmlns:a="http://schemas.openxmlformats.org/drawingml/2006/main" xmlns:p="http://schemas.openxmlformats.org/presentationml/2006/main" xmlns:r="http://schemas.openxmlformats.org/officeDocument/2006/relationships">
-  <p:cSld>
-    <p:spTree>
-      <p:nvGrpSpPr>
-        <p:cNvPr id="1" name=""/>
-        <p:cNvGrpSpPr/>
-        <p:nvPr/>
-      </p:nvGrpSpPr>
-      <p:grpSpPr/>
-      <p:sp>
-        <p:nvSpPr>
-          <p:cNvPr id="2" name="Rectangle 1"/>
-          <p:cNvSpPr/>
-          <p:nvPr/>
-        </p:nvSpPr>
-        <p:spPr>
-          <a:xfrm>
-            <a:off x="0" y="0"/>
-            <a:ext cx="12191695" cy="6858000"/>
-          </a:xfrm>
-          <a:prstGeom prst="rect">
-            <a:avLst/>
-          </a:prstGeom>
-          <a:solidFill>
-            <a:srgbClr val="0A0F1C"/>
-          </a:solidFill>
-          <a:ln>
-            <a:noFill/>
-          </a:ln>
-          <a:effectLst/>
-        </p:spPr>
-        <p:style>
-          <a:lnRef idx="1">
-            <a:schemeClr val="accent1"/>
-          </a:lnRef>
-          <a:fillRef idx="3">
-            <a:schemeClr val="accent1"/>
-          </a:fillRef>
-          <a:effectRef idx="2">
-            <a:schemeClr val="accent1"/>
-          </a:effectRef>
-          <a:fontRef idx="minor">
-            <a:schemeClr val="lt1"/>
-          </a:fontRef>
-        </p:style>
-        <p:txBody>
-          <a:bodyPr rtlCol="0" anchor="ctr"/>
-          <a:lstStyle/>
-          <a:p>
-            <a:pPr algn="ctr"/>
-          </a:p>
-        </p:txBody>
-      </p:sp>
-      <p:sp>
-        <p:nvSpPr>
-          <p:cNvPr id="3" name="TextBox 2"/>
-          <p:cNvSpPr txBox="1"/>
-          <p:nvPr/>
-        </p:nvSpPr>
-        <p:spPr>
-          <a:xfrm>
-            <a:off x="685800" y="457200"/>
-            <a:ext cx="10058400" cy="274320"/>
-          </a:xfrm>
-          <a:prstGeom prst="rect">
-            <a:avLst/>
-          </a:prstGeom>
-          <a:noFill/>
-        </p:spPr>
-        <p:txBody>
-          <a:bodyPr wrap="square" lIns="0" rIns="0" tIns="0" bIns="0">
-            <a:spAutoFit/>
-          </a:bodyPr>
-          <a:lstStyle/>
-          <a:p>
-            <a:pPr>
-              <a:spcAft>
-                <a:spcPts val="600"/>
-              </a:spcAft>
-            </a:pPr>
-            <a:r>
-              <a:rPr sz="1100" b="1">
-                <a:solidFill>
-                  <a:srgbClr val="4B5975"/>
-                </a:solidFill>
-                <a:latin typeface="Courier New"/>
-              </a:rPr>
-              <a:t>HONEST ASSESSMENT</a:t>
-            </a:r>
-          </a:p>
-        </p:txBody>
-      </p:sp>
-      <p:sp>
-        <p:nvSpPr>
-          <p:cNvPr id="4" name="TextBox 3"/>
-          <p:cNvSpPr txBox="1"/>
-          <p:nvPr/>
-        </p:nvSpPr>
-        <p:spPr>
-          <a:xfrm>
-            <a:off x="685800" y="777240"/>
-            <a:ext cx="10789920" cy="914400"/>
-          </a:xfrm>
-          <a:prstGeom prst="rect">
-            <a:avLst/>
-          </a:prstGeom>
-          <a:noFill/>
-        </p:spPr>
-        <p:txBody>
-          <a:bodyPr wrap="square" lIns="0" rIns="0" tIns="0" bIns="0">
-            <a:spAutoFit/>
-          </a:bodyPr>
-          <a:lstStyle/>
-          <a:p>
-            <a:pPr>
-              <a:spcAft>
-                <a:spcPts val="600"/>
-              </a:spcAft>
-            </a:pPr>
-            <a:r>
-              <a:rPr sz="3000" b="1">
-                <a:solidFill>
-                  <a:srgbClr val="E8EDF5"/>
-                </a:solidFill>
-                <a:latin typeface="Arial"/>
-              </a:rPr>
-              <a:t>What is deliberately not built yet</a:t>
-            </a:r>
-          </a:p>
-        </p:txBody>
-      </p:sp>
-      <p:sp>
-        <p:nvSpPr>
-          <p:cNvPr id="5" name="Rectangle 4"/>
-          <p:cNvSpPr/>
-          <p:nvPr/>
-        </p:nvSpPr>
-        <p:spPr>
-          <a:xfrm>
-            <a:off x="685800" y="1691640"/>
-            <a:ext cx="10789920" cy="9525"/>
-          </a:xfrm>
-          <a:prstGeom prst="rect">
-            <a:avLst/>
-          </a:prstGeom>
-          <a:solidFill>
-            <a:srgbClr val="1F2A40"/>
-          </a:solidFill>
-          <a:ln>
-            <a:noFill/>
-          </a:ln>
-          <a:effectLst/>
-        </p:spPr>
-        <p:style>
-          <a:lnRef idx="1">
-            <a:schemeClr val="accent1"/>
-          </a:lnRef>
-          <a:fillRef idx="3">
-            <a:schemeClr val="accent1"/>
-          </a:fillRef>
-          <a:effectRef idx="2">
-            <a:schemeClr val="accent1"/>
-          </a:effectRef>
-          <a:fontRef idx="minor">
-            <a:schemeClr val="lt1"/>
-          </a:fontRef>
-        </p:style>
-        <p:txBody>
-          <a:bodyPr rtlCol="0" anchor="ctr"/>
-          <a:lstStyle/>
-          <a:p>
-            <a:pPr algn="ctr"/>
-          </a:p>
-        </p:txBody>
-      </p:sp>
-      <p:graphicFrame>
-        <p:nvGraphicFramePr>
-          <p:cNvPr id="6" name="Table 5"/>
-          <p:cNvGraphicFramePr>
-            <a:graphicFrameLocks noGrp="1"/>
-          </p:cNvGraphicFramePr>
-          <p:nvPr/>
-        </p:nvGraphicFramePr>
-        <p:xfrm>
-          <a:off x="685800" y="2011680"/>
-          <a:ext cx="10789920" cy="365760"/>
-        </p:xfrm>
-        <a:graphic>
-          <a:graphicData uri="http://schemas.openxmlformats.org/drawingml/2006/table">
-            <a:tbl>
-              <a:tblPr firstRow="1" bandRow="1">
-                <a:tableStyleId>{5C22544A-7EE6-4342-B048-85BDC9FD1C3A}</a:tableStyleId>
-              </a:tblPr>
-              <a:tblGrid>
-                <a:gridCol w="3596640"/>
-                <a:gridCol w="3596640"/>
-                <a:gridCol w="3596640"/>
-              </a:tblGrid>
-              <a:tr h="52251">
-                <a:tc>
-                  <a:txBody>
-                    <a:bodyPr/>
-                    <a:lstStyle/>
-                    <a:p>
-                      <a:r>
-                        <a:rPr sz="1200" b="1">
-                          <a:solidFill>
-                            <a:srgbClr val="8896B0"/>
-                          </a:solidFill>
-                          <a:latin typeface="Courier New"/>
-                        </a:rPr>
-                        <a:t>Gap</a:t>
-                      </a:r>
-                    </a:p>
-                  </a:txBody>
-                  <a:tcPr anchor="ctr">
-                    <a:solidFill>
-                      <a:srgbClr val="111827"/>
-                    </a:solidFill>
-                    <a:lnL w="12700" cap="flat">
-                      <a:solidFill>
-                        <a:srgbClr val="1F2A40"/>
-                      </a:solidFill>
-                    </a:lnL>
-                    <a:lnR w="12700" cap="flat">
-                      <a:solidFill>
-                        <a:srgbClr val="1F2A40"/>
-                      </a:solidFill>
-                    </a:lnR>
-                    <a:lnT w="12700" cap="flat">
-                      <a:solidFill>
-                        <a:srgbClr val="1F2A40"/>
-                      </a:solidFill>
-                    </a:lnT>
-                    <a:lnB w="12700" cap="flat">
-                      <a:solidFill>
-                        <a:srgbClr val="1F2A40"/>
-                      </a:solidFill>
-                    </a:lnB>
-                  </a:tcPr>
-                </a:tc>
-                <a:tc>
-                  <a:txBody>
-                    <a:bodyPr/>
-                    <a:lstStyle/>
-                    <a:p>
-                      <a:r>
-                        <a:rPr sz="1200" b="1">
-                          <a:solidFill>
-                            <a:srgbClr val="8896B0"/>
-                          </a:solidFill>
-                          <a:latin typeface="Courier New"/>
-                        </a:rPr>
-                        <a:t>Current state</a:t>
-                      </a:r>
-                    </a:p>
-                  </a:txBody>
-                  <a:tcPr anchor="ctr">
-                    <a:solidFill>
-                      <a:srgbClr val="111827"/>
-                    </a:solidFill>
-                    <a:lnL w="12700" cap="flat">
-                      <a:solidFill>
-                        <a:srgbClr val="1F2A40"/>
-                      </a:solidFill>
-                    </a:lnL>
-                    <a:lnR w="12700" cap="flat">
-                      <a:solidFill>
-                        <a:srgbClr val="1F2A40"/>
-                      </a:solidFill>
-                    </a:lnR>
-                    <a:lnT w="12700" cap="flat">
-                      <a:solidFill>
-                        <a:srgbClr val="1F2A40"/>
-                      </a:solidFill>
-                    </a:lnT>
-                    <a:lnB w="12700" cap="flat">
-                      <a:solidFill>
-                        <a:srgbClr val="1F2A40"/>
-                      </a:solidFill>
-                    </a:lnB>
-                  </a:tcPr>
-                </a:tc>
-                <a:tc>
-                  <a:txBody>
-                    <a:bodyPr/>
-                    <a:lstStyle/>
-                    <a:p>
-                      <a:r>
-                        <a:rPr sz="1200" b="1">
-                          <a:solidFill>
-                            <a:srgbClr val="8896B0"/>
-                          </a:solidFill>
-                          <a:latin typeface="Courier New"/>
-                        </a:rPr>
-                        <a:t>What it needs</a:t>
-                      </a:r>
-                    </a:p>
-                  </a:txBody>
-                  <a:tcPr anchor="ctr">
-                    <a:solidFill>
-                      <a:srgbClr val="111827"/>
-                    </a:solidFill>
-                    <a:lnL w="12700" cap="flat">
-                      <a:solidFill>
-                        <a:srgbClr val="1F2A40"/>
-                      </a:solidFill>
-                    </a:lnL>
-                    <a:lnR w="12700" cap="flat">
-                      <a:solidFill>
-                        <a:srgbClr val="1F2A40"/>
-                      </a:solidFill>
-                    </a:lnR>
-                    <a:lnT w="12700" cap="flat">
-                      <a:solidFill>
-                        <a:srgbClr val="1F2A40"/>
-                      </a:solidFill>
-                    </a:lnT>
-                    <a:lnB w="12700" cap="flat">
-                      <a:solidFill>
-                        <a:srgbClr val="1F2A40"/>
-                      </a:solidFill>
-                    </a:lnB>
-                  </a:tcPr>
-                </a:tc>
-              </a:tr>
-              <a:tr h="52251">
-                <a:tc>
-                  <a:txBody>
-                    <a:bodyPr/>
-                    <a:lstStyle/>
-                    <a:p>
-                      <a:r>
-                        <a:rPr sz="1300" b="1">
-                          <a:solidFill>
-                            <a:srgbClr val="E8EDF5"/>
-                          </a:solidFill>
-                          <a:latin typeface="Arial"/>
-                        </a:rPr>
-                        <a:t>Authentication</a:t>
-                      </a:r>
-                    </a:p>
-                  </a:txBody>
-                  <a:tcPr anchor="ctr">
-                    <a:solidFill>
-                      <a:srgbClr val="0A0F1C"/>
-                    </a:solidFill>
-                    <a:lnL w="12700" cap="flat">
-                      <a:solidFill>
-                        <a:srgbClr val="1F2A40"/>
-                      </a:solidFill>
-                    </a:lnL>
-                    <a:lnR w="12700" cap="flat">
-                      <a:solidFill>
-                        <a:srgbClr val="1F2A40"/>
-                      </a:solidFill>
-                    </a:lnR>
-                    <a:lnT w="12700" cap="flat">
-                      <a:solidFill>
-                        <a:srgbClr val="1F2A40"/>
-                      </a:solidFill>
-                    </a:lnT>
-                    <a:lnB w="12700" cap="flat">
-                      <a:solidFill>
-                        <a:srgbClr val="1F2A40"/>
-                      </a:solidFill>
-                    </a:lnB>
-                  </a:tcPr>
-                </a:tc>
-                <a:tc>
-                  <a:txBody>
-                    <a:bodyPr/>
-                    <a:lstStyle/>
-                    <a:p>
-                      <a:r>
-                        <a:rPr sz="1300" b="0">
-                          <a:solidFill>
-                            <a:srgbClr val="8896B0"/>
-                          </a:solidFill>
-                          <a:latin typeface="Arial"/>
-                        </a:rPr>
-                        <a:t>None on the API</a:t>
-                      </a:r>
-                    </a:p>
-                  </a:txBody>
-                  <a:tcPr anchor="ctr">
-                    <a:solidFill>
-                      <a:srgbClr val="0A0F1C"/>
-                    </a:solidFill>
-                    <a:lnL w="12700" cap="flat">
-                      <a:solidFill>
-                        <a:srgbClr val="1F2A40"/>
-                      </a:solidFill>
-                    </a:lnL>
-                    <a:lnR w="12700" cap="flat">
-                      <a:solidFill>
-                        <a:srgbClr val="1F2A40"/>
-                      </a:solidFill>
-                    </a:lnR>
-                    <a:lnT w="12700" cap="flat">
-                      <a:solidFill>
-                        <a:srgbClr val="1F2A40"/>
-                      </a:solidFill>
-                    </a:lnT>
-                    <a:lnB w="12700" cap="flat">
-                      <a:solidFill>
-                        <a:srgbClr val="1F2A40"/>
-                      </a:solidFill>
-                    </a:lnB>
-                  </a:tcPr>
-                </a:tc>
-                <a:tc>
-                  <a:txBody>
-                    <a:bodyPr/>
-                    <a:lstStyle/>
-                    <a:p>
-                      <a:r>
-                        <a:rPr sz="1300" b="0">
-                          <a:solidFill>
-                            <a:srgbClr val="8896B0"/>
-                          </a:solidFill>
-                          <a:latin typeface="Arial"/>
-                        </a:rPr>
-                        <a:t>Anyone reaching the port can generate and test</a:t>
-                      </a:r>
-                    </a:p>
-                  </a:txBody>
-                  <a:tcPr anchor="ctr">
-                    <a:solidFill>
-                      <a:srgbClr val="0A0F1C"/>
-                    </a:solidFill>
-                    <a:lnL w="12700" cap="flat">
-                      <a:solidFill>
-                        <a:srgbClr val="1F2A40"/>
-                      </a:solidFill>
-                    </a:lnL>
-                    <a:lnR w="12700" cap="flat">
-                      <a:solidFill>
-                        <a:srgbClr val="1F2A40"/>
-                      </a:solidFill>
-                    </a:lnR>
-                    <a:lnT w="12700" cap="flat">
-                      <a:solidFill>
-                        <a:srgbClr val="1F2A40"/>
-                      </a:solidFill>
-                    </a:lnT>
-                    <a:lnB w="12700" cap="flat">
-                      <a:solidFill>
-                        <a:srgbClr val="1F2A40"/>
-                      </a:solidFill>
-                    </a:lnB>
-                  </a:tcPr>
-                </a:tc>
-              </a:tr>
-              <a:tr h="52251">
-                <a:tc>
-                  <a:txBody>
-                    <a:bodyPr/>
-                    <a:lstStyle/>
-                    <a:p>
-                      <a:r>
-                        <a:rPr sz="1300" b="1">
-                          <a:solidFill>
-                            <a:srgbClr val="E8EDF5"/>
-                          </a:solidFill>
-                          <a:latin typeface="Arial"/>
-                        </a:rPr>
-                        <a:t>Persistence</a:t>
-                      </a:r>
-                    </a:p>
-                  </a:txBody>
-                  <a:tcPr anchor="ctr">
-                    <a:solidFill>
-                      <a:srgbClr val="0A0F1C"/>
-                    </a:solidFill>
-                    <a:lnL w="12700" cap="flat">
-                      <a:solidFill>
-                        <a:srgbClr val="1F2A40"/>
-                      </a:solidFill>
-                    </a:lnL>
-                    <a:lnR w="12700" cap="flat">
-                      <a:solidFill>
-                        <a:srgbClr val="1F2A40"/>
-                      </a:solidFill>
-                    </a:lnR>
-                    <a:lnT w="12700" cap="flat">
-                      <a:solidFill>
-                        <a:srgbClr val="1F2A40"/>
-                      </a:solidFill>
-                    </a:lnT>
-                    <a:lnB w="12700" cap="flat">
-                      <a:solidFill>
-                        <a:srgbClr val="1F2A40"/>
-                      </a:solidFill>
-                    </a:lnB>
-                  </a:tcPr>
-                </a:tc>
-                <a:tc>
-                  <a:txBody>
-                    <a:bodyPr/>
-                    <a:lstStyle/>
-                    <a:p>
-                      <a:r>
-                        <a:rPr sz="1300" b="0">
-                          <a:solidFill>
-                            <a:srgbClr val="8896B0"/>
-                          </a:solidFill>
-                          <a:latin typeface="Arial"/>
-                        </a:rPr>
-                        <a:t>In-memory dict</a:t>
-                      </a:r>
-                    </a:p>
-                  </a:txBody>
-                  <a:tcPr anchor="ctr">
-                    <a:solidFill>
-                      <a:srgbClr val="0A0F1C"/>
-                    </a:solidFill>
-                    <a:lnL w="12700" cap="flat">
-                      <a:solidFill>
-                        <a:srgbClr val="1F2A40"/>
-                      </a:solidFill>
-                    </a:lnL>
-                    <a:lnR w="12700" cap="flat">
-                      <a:solidFill>
-                        <a:srgbClr val="1F2A40"/>
-                      </a:solidFill>
-                    </a:lnR>
-                    <a:lnT w="12700" cap="flat">
-                      <a:solidFill>
-                        <a:srgbClr val="1F2A40"/>
-                      </a:solidFill>
-                    </a:lnT>
-                    <a:lnB w="12700" cap="flat">
-                      <a:solidFill>
-                        <a:srgbClr val="1F2A40"/>
-                      </a:solidFill>
-                    </a:lnB>
-                  </a:tcPr>
-                </a:tc>
-                <a:tc>
-                  <a:txBody>
-                    <a:bodyPr/>
-                    <a:lstStyle/>
-                    <a:p>
-                      <a:r>
-                        <a:rPr sz="1300" b="0">
-                          <a:solidFill>
-                            <a:srgbClr val="8896B0"/>
-                          </a:solidFill>
-                          <a:latin typeface="Arial"/>
-                        </a:rPr>
-                        <a:t>Object storage keyed by code checksum + Postgres metadata</a:t>
-                      </a:r>
-                    </a:p>
-                  </a:txBody>
-                  <a:tcPr anchor="ctr">
-                    <a:solidFill>
-                      <a:srgbClr val="0A0F1C"/>
-                    </a:solidFill>
-                    <a:lnL w="12700" cap="flat">
-                      <a:solidFill>
-                        <a:srgbClr val="1F2A40"/>
-                      </a:solidFill>
-                    </a:lnL>
-                    <a:lnR w="12700" cap="flat">
-                      <a:solidFill>
-                        <a:srgbClr val="1F2A40"/>
-                      </a:solidFill>
-                    </a:lnR>
-                    <a:lnT w="12700" cap="flat">
-                      <a:solidFill>
-                        <a:srgbClr val="1F2A40"/>
-                      </a:solidFill>
-                    </a:lnT>
-                    <a:lnB w="12700" cap="flat">
-                      <a:solidFill>
-                        <a:srgbClr val="1F2A40"/>
-                      </a:solidFill>
-                    </a:lnB>
-                  </a:tcPr>
-                </a:tc>
-              </a:tr>
-              <a:tr h="52251">
-                <a:tc>
-                  <a:txBody>
-                    <a:bodyPr/>
-                    <a:lstStyle/>
-                    <a:p>
-                      <a:r>
-                        <a:rPr sz="1300" b="1">
-                          <a:solidFill>
-                            <a:srgbClr val="E8EDF5"/>
-                          </a:solidFill>
-                          <a:latin typeface="Arial"/>
-                        </a:rPr>
-                        <a:t>Audit trail</a:t>
-                      </a:r>
-                    </a:p>
-                  </a:txBody>
-                  <a:tcPr anchor="ctr">
-                    <a:solidFill>
-                      <a:srgbClr val="0A0F1C"/>
-                    </a:solidFill>
-                    <a:lnL w="12700" cap="flat">
-                      <a:solidFill>
-                        <a:srgbClr val="1F2A40"/>
-                      </a:solidFill>
-                    </a:lnL>
-                    <a:lnR w="12700" cap="flat">
-                      <a:solidFill>
-                        <a:srgbClr val="1F2A40"/>
-                      </a:solidFill>
-                    </a:lnR>
-                    <a:lnT w="12700" cap="flat">
-                      <a:solidFill>
-                        <a:srgbClr val="1F2A40"/>
-                      </a:solidFill>
-                    </a:lnT>
-                    <a:lnB w="12700" cap="flat">
-                      <a:solidFill>
-                        <a:srgbClr val="1F2A40"/>
-                      </a:solidFill>
-                    </a:lnB>
-                  </a:tcPr>
-                </a:tc>
-                <a:tc>
-                  <a:txBody>
-                    <a:bodyPr/>
-                    <a:lstStyle/>
-                    <a:p>
-                      <a:r>
-                        <a:rPr sz="1300" b="0">
-                          <a:solidFill>
-                            <a:srgbClr val="8896B0"/>
-                          </a:solidFill>
-                          <a:latin typeface="Arial"/>
-                        </a:rPr>
-                        <a:t>Per-request activity log</a:t>
-                      </a:r>
-                    </a:p>
-                  </a:txBody>
-                  <a:tcPr anchor="ctr">
-                    <a:solidFill>
-                      <a:srgbClr val="0A0F1C"/>
-                    </a:solidFill>
-                    <a:lnL w="12700" cap="flat">
-                      <a:solidFill>
-                        <a:srgbClr val="1F2A40"/>
-                      </a:solidFill>
-                    </a:lnL>
-                    <a:lnR w="12700" cap="flat">
-                      <a:solidFill>
-                        <a:srgbClr val="1F2A40"/>
-                      </a:solidFill>
-                    </a:lnR>
-                    <a:lnT w="12700" cap="flat">
-                      <a:solidFill>
-                        <a:srgbClr val="1F2A40"/>
-                      </a:solidFill>
-                    </a:lnT>
-                    <a:lnB w="12700" cap="flat">
-                      <a:solidFill>
-                        <a:srgbClr val="1F2A40"/>
-                      </a:solidFill>
-                    </a:lnB>
-                  </a:tcPr>
-                </a:tc>
-                <a:tc>
-                  <a:txBody>
-                    <a:bodyPr/>
-                    <a:lstStyle/>
-                    <a:p>
-                      <a:r>
-                        <a:rPr sz="1300" b="0">
-                          <a:solidFill>
-                            <a:srgbClr val="8896B0"/>
-                          </a:solidFill>
-                          <a:latin typeface="Arial"/>
-                        </a:rPr>
-                        <a:t>Who tested which target, durably</a:t>
-                      </a:r>
-                    </a:p>
-                  </a:txBody>
-                  <a:tcPr anchor="ctr">
-                    <a:solidFill>
-                      <a:srgbClr val="0A0F1C"/>
-                    </a:solidFill>
-                    <a:lnL w="12700" cap="flat">
-                      <a:solidFill>
-                        <a:srgbClr val="1F2A40"/>
-                      </a:solidFill>
-                    </a:lnL>
-                    <a:lnR w="12700" cap="flat">
-                      <a:solidFill>
-                        <a:srgbClr val="1F2A40"/>
-                      </a:solidFill>
-                    </a:lnR>
-                    <a:lnT w="12700" cap="flat">
-                      <a:solidFill>
-                        <a:srgbClr val="1F2A40"/>
-                      </a:solidFill>
-                    </a:lnT>
-                    <a:lnB w="12700" cap="flat">
-                      <a:solidFill>
-                        <a:srgbClr val="1F2A40"/>
-                      </a:solidFill>
-                    </a:lnB>
-                  </a:tcPr>
-                </a:tc>
-              </a:tr>
-              <a:tr h="52251">
-                <a:tc>
-                  <a:txBody>
-                    <a:bodyPr/>
-                    <a:lstStyle/>
-                    <a:p>
-                      <a:r>
-                        <a:rPr sz="1300" b="1">
-                          <a:solidFill>
-                            <a:srgbClr val="E8EDF5"/>
-                          </a:solidFill>
-                          <a:latin typeface="Arial"/>
-                        </a:rPr>
-                        <a:t>Egress control</a:t>
-                      </a:r>
-                    </a:p>
-                  </a:txBody>
-                  <a:tcPr anchor="ctr">
-                    <a:solidFill>
-                      <a:srgbClr val="0A0F1C"/>
-                    </a:solidFill>
-                    <a:lnL w="12700" cap="flat">
-                      <a:solidFill>
-                        <a:srgbClr val="1F2A40"/>
-                      </a:solidFill>
-                    </a:lnL>
-                    <a:lnR w="12700" cap="flat">
-                      <a:solidFill>
-                        <a:srgbClr val="1F2A40"/>
-                      </a:solidFill>
-                    </a:lnR>
-                    <a:lnT w="12700" cap="flat">
-                      <a:solidFill>
-                        <a:srgbClr val="1F2A40"/>
-                      </a:solidFill>
-                    </a:lnT>
-                    <a:lnB w="12700" cap="flat">
-                      <a:solidFill>
-                        <a:srgbClr val="1F2A40"/>
-                      </a:solidFill>
-                    </a:lnB>
-                  </a:tcPr>
-                </a:tc>
-                <a:tc>
-                  <a:txBody>
-                    <a:bodyPr/>
-                    <a:lstStyle/>
-                    <a:p>
-                      <a:r>
-                        <a:rPr sz="1300" b="0">
-                          <a:solidFill>
-                            <a:srgbClr val="8896B0"/>
-                          </a:solidFill>
-                          <a:latin typeface="Arial"/>
-                        </a:rPr>
-                        <a:t>Unrestricted</a:t>
-                      </a:r>
-                    </a:p>
-                  </a:txBody>
-                  <a:tcPr anchor="ctr">
-                    <a:solidFill>
-                      <a:srgbClr val="0A0F1C"/>
-                    </a:solidFill>
-                    <a:lnL w="12700" cap="flat">
-                      <a:solidFill>
-                        <a:srgbClr val="1F2A40"/>
-                      </a:solidFill>
-                    </a:lnL>
-                    <a:lnR w="12700" cap="flat">
-                      <a:solidFill>
-                        <a:srgbClr val="1F2A40"/>
-                      </a:solidFill>
-                    </a:lnR>
-                    <a:lnT w="12700" cap="flat">
-                      <a:solidFill>
-                        <a:srgbClr val="1F2A40"/>
-                      </a:solidFill>
-                    </a:lnT>
-                    <a:lnB w="12700" cap="flat">
-                      <a:solidFill>
-                        <a:srgbClr val="1F2A40"/>
-                      </a:solidFill>
-                    </a:lnB>
-                  </a:tcPr>
-                </a:tc>
-                <a:tc>
-                  <a:txBody>
-                    <a:bodyPr/>
-                    <a:lstStyle/>
-                    <a:p>
-                      <a:r>
-                        <a:rPr sz="1300" b="0">
-                          <a:solidFill>
-                            <a:srgbClr val="8896B0"/>
-                          </a:solidFill>
-                          <a:latin typeface="Arial"/>
-                        </a:rPr>
-                        <a:t>The same sandbox inside a container, allowlisted</a:t>
-                      </a:r>
-                    </a:p>
-                  </a:txBody>
-                  <a:tcPr anchor="ctr">
-                    <a:solidFill>
-                      <a:srgbClr val="0A0F1C"/>
-                    </a:solidFill>
-                    <a:lnL w="12700" cap="flat">
-                      <a:solidFill>
-                        <a:srgbClr val="1F2A40"/>
-                      </a:solidFill>
-                    </a:lnL>
-                    <a:lnR w="12700" cap="flat">
-                      <a:solidFill>
-                        <a:srgbClr val="1F2A40"/>
-                      </a:solidFill>
-                    </a:lnR>
-                    <a:lnT w="12700" cap="flat">
-                      <a:solidFill>
-                        <a:srgbClr val="1F2A40"/>
-                      </a:solidFill>
-                    </a:lnT>
-                    <a:lnB w="12700" cap="flat">
-                      <a:solidFill>
-                        <a:srgbClr val="1F2A40"/>
-                      </a:solidFill>
-                    </a:lnB>
-                  </a:tcPr>
-                </a:tc>
-              </a:tr>
-              <a:tr h="52251">
-                <a:tc>
-                  <a:txBody>
-                    <a:bodyPr/>
-                    <a:lstStyle/>
-                    <a:p>
-                      <a:r>
-                        <a:rPr sz="1300" b="1">
-                          <a:solidFill>
-                            <a:srgbClr val="E8EDF5"/>
-                          </a:solidFill>
-                          <a:latin typeface="Arial"/>
-                        </a:rPr>
-                        <a:t>Auth methods</a:t>
-                      </a:r>
-                    </a:p>
-                  </a:txBody>
-                  <a:tcPr anchor="ctr">
-                    <a:solidFill>
-                      <a:srgbClr val="0A0F1C"/>
-                    </a:solidFill>
-                    <a:lnL w="12700" cap="flat">
-                      <a:solidFill>
-                        <a:srgbClr val="1F2A40"/>
-                      </a:solidFill>
-                    </a:lnL>
-                    <a:lnR w="12700" cap="flat">
-                      <a:solidFill>
-                        <a:srgbClr val="1F2A40"/>
-                      </a:solidFill>
-                    </a:lnR>
-                    <a:lnT w="12700" cap="flat">
-                      <a:solidFill>
-                        <a:srgbClr val="1F2A40"/>
-                      </a:solidFill>
-                    </a:lnT>
-                    <a:lnB w="12700" cap="flat">
-                      <a:solidFill>
-                        <a:srgbClr val="1F2A40"/>
-                      </a:solidFill>
-                    </a:lnB>
-                  </a:tcPr>
-                </a:tc>
-                <a:tc>
-                  <a:txBody>
-                    <a:bodyPr/>
-                    <a:lstStyle/>
-                    <a:p>
-                      <a:r>
-                        <a:rPr sz="1300" b="0">
-                          <a:solidFill>
-                            <a:srgbClr val="8896B0"/>
-                          </a:solidFill>
-                          <a:latin typeface="Arial"/>
-                        </a:rPr>
-                        <a:t>2 of 6 have templates</a:t>
-                      </a:r>
-                    </a:p>
-                  </a:txBody>
-                  <a:tcPr anchor="ctr">
-                    <a:solidFill>
-                      <a:srgbClr val="0A0F1C"/>
-                    </a:solidFill>
-                    <a:lnL w="12700" cap="flat">
-                      <a:solidFill>
-                        <a:srgbClr val="1F2A40"/>
-                      </a:solidFill>
-                    </a:lnL>
-                    <a:lnR w="12700" cap="flat">
-                      <a:solidFill>
-                        <a:srgbClr val="1F2A40"/>
-                      </a:solidFill>
-                    </a:lnR>
-                    <a:lnT w="12700" cap="flat">
-                      <a:solidFill>
-                        <a:srgbClr val="1F2A40"/>
-                      </a:solidFill>
-                    </a:lnT>
-                    <a:lnB w="12700" cap="flat">
-                      <a:solidFill>
-                        <a:srgbClr val="1F2A40"/>
-                      </a:solidFill>
-                    </a:lnB>
-                  </a:tcPr>
-                </a:tc>
-                <a:tc>
-                  <a:txBody>
-                    <a:bodyPr/>
-                    <a:lstStyle/>
-                    <a:p>
-                      <a:r>
-                        <a:rPr sz="1300" b="0">
-                          <a:solidFill>
-                            <a:srgbClr val="8896B0"/>
-                          </a:solidFill>
-                          <a:latin typeface="Arial"/>
-                        </a:rPr>
-                        <a:t>OAuth2 needs token caching the shape lacks</a:t>
-                      </a:r>
-                    </a:p>
-                  </a:txBody>
-                  <a:tcPr anchor="ctr">
-                    <a:solidFill>
-                      <a:srgbClr val="0A0F1C"/>
-                    </a:solidFill>
-                    <a:lnL w="12700" cap="flat">
-                      <a:solidFill>
-                        <a:srgbClr val="1F2A40"/>
-                      </a:solidFill>
-                    </a:lnL>
-                    <a:lnR w="12700" cap="flat">
-                      <a:solidFill>
-                        <a:srgbClr val="1F2A40"/>
-                      </a:solidFill>
-                    </a:lnR>
-                    <a:lnT w="12700" cap="flat">
-                      <a:solidFill>
-                        <a:srgbClr val="1F2A40"/>
-                      </a:solidFill>
-                    </a:lnT>
-                    <a:lnB w="12700" cap="flat">
-                      <a:solidFill>
-                        <a:srgbClr val="1F2A40"/>
-                      </a:solidFill>
-                    </a:lnB>
-                  </a:tcPr>
-                </a:tc>
-              </a:tr>
-              <a:tr h="52254">
-                <a:tc>
-                  <a:txBody>
-                    <a:bodyPr/>
-                    <a:lstStyle/>
-                    <a:p>
-                      <a:r>
-                        <a:rPr sz="1300" b="1">
-                          <a:solidFill>
-                            <a:srgbClr val="E8EDF5"/>
-                          </a:solidFill>
-                          <a:latin typeface="Arial"/>
-                        </a:rPr>
-                        <a:t>Concurrency</a:t>
-                      </a:r>
-                    </a:p>
-                  </a:txBody>
-                  <a:tcPr anchor="ctr">
-                    <a:solidFill>
-                      <a:srgbClr val="0A0F1C"/>
-                    </a:solidFill>
-                    <a:lnL w="12700" cap="flat">
-                      <a:solidFill>
-                        <a:srgbClr val="1F2A40"/>
-                      </a:solidFill>
-                    </a:lnL>
-                    <a:lnR w="12700" cap="flat">
-                      <a:solidFill>
-                        <a:srgbClr val="1F2A40"/>
-                      </a:solidFill>
-                    </a:lnR>
-                    <a:lnT w="12700" cap="flat">
-                      <a:solidFill>
-                        <a:srgbClr val="1F2A40"/>
-                      </a:solidFill>
-                    </a:lnT>
-                    <a:lnB w="12700" cap="flat">
-                      <a:solidFill>
-                        <a:srgbClr val="1F2A40"/>
-                      </a:solidFill>
-                    </a:lnB>
-                  </a:tcPr>
-                </a:tc>
-                <a:tc>
-                  <a:txBody>
-                    <a:bodyPr/>
-                    <a:lstStyle/>
-                    <a:p>
-                      <a:r>
-                        <a:rPr sz="1300" b="0">
-                          <a:solidFill>
-                            <a:srgbClr val="8896B0"/>
-                          </a:solidFill>
-                          <a:latin typeface="Arial"/>
-                        </a:rPr>
-                        <a:t>Single worker</a:t>
-                      </a:r>
-                    </a:p>
-                  </a:txBody>
-                  <a:tcPr anchor="ctr">
-                    <a:solidFill>
-                      <a:srgbClr val="0A0F1C"/>
-                    </a:solidFill>
-                    <a:lnL w="12700" cap="flat">
-                      <a:solidFill>
-                        <a:srgbClr val="1F2A40"/>
-                      </a:solidFill>
-                    </a:lnL>
-                    <a:lnR w="12700" cap="flat">
-                      <a:solidFill>
-                        <a:srgbClr val="1F2A40"/>
-                      </a:solidFill>
-                    </a:lnR>
-                    <a:lnT w="12700" cap="flat">
-                      <a:solidFill>
-                        <a:srgbClr val="1F2A40"/>
-                      </a:solidFill>
-                    </a:lnT>
-                    <a:lnB w="12700" cap="flat">
-                      <a:solidFill>
-                        <a:srgbClr val="1F2A40"/>
-                      </a:solidFill>
-                    </a:lnB>
-                  </a:tcPr>
-                </a:tc>
-                <a:tc>
-                  <a:txBody>
-                    <a:bodyPr/>
-                    <a:lstStyle/>
-                    <a:p>
-                      <a:r>
-                        <a:rPr sz="1300" b="0">
-                          <a:solidFill>
-                            <a:srgbClr val="8896B0"/>
-                          </a:solidFill>
-                          <a:latin typeface="Arial"/>
-                        </a:rPr>
-                        <a:t>Falls out of the persistence work</a:t>
-                      </a:r>
-                    </a:p>
-                  </a:txBody>
-                  <a:tcPr anchor="ctr">
-                    <a:solidFill>
-                      <a:srgbClr val="0A0F1C"/>
-                    </a:solidFill>
-                    <a:lnL w="12700" cap="flat">
-                      <a:solidFill>
-                        <a:srgbClr val="1F2A40"/>
-                      </a:solidFill>
-                    </a:lnL>
-                    <a:lnR w="12700" cap="flat">
-                      <a:solidFill>
-                        <a:srgbClr val="1F2A40"/>
-                      </a:solidFill>
-                    </a:lnR>
-                    <a:lnT w="12700" cap="flat">
-                      <a:solidFill>
-                        <a:srgbClr val="1F2A40"/>
-                      </a:solidFill>
-                    </a:lnT>
-                    <a:lnB w="12700" cap="flat">
-                      <a:solidFill>
-                        <a:srgbClr val="1F2A40"/>
-                      </a:solidFill>
-                    </a:lnB>
-                  </a:tcPr>
-                </a:tc>
-              </a:tr>
-            </a:tbl>
-          </a:graphicData>
-        </a:graphic>
-      </p:graphicFrame>
-      <p:sp>
-        <p:nvSpPr>
-          <p:cNvPr id="7" name="TextBox 6"/>
-          <p:cNvSpPr txBox="1"/>
-          <p:nvPr/>
-        </p:nvSpPr>
-        <p:spPr>
-          <a:xfrm>
-            <a:off x="685800" y="5943600"/>
-            <a:ext cx="10789920" cy="548640"/>
-          </a:xfrm>
-          <a:prstGeom prst="rect">
-            <a:avLst/>
-          </a:prstGeom>
-          <a:noFill/>
-        </p:spPr>
-        <p:txBody>
-          <a:bodyPr wrap="square" lIns="0" rIns="0" tIns="0" bIns="0">
-            <a:spAutoFit/>
-          </a:bodyPr>
-          <a:lstStyle/>
-          <a:p>
-            <a:pPr>
-              <a:spcAft>
-                <a:spcPts val="600"/>
-              </a:spcAft>
-            </a:pPr>
-            <a:r>
-              <a:rPr sz="1250" b="0">
-                <a:solidFill>
-                  <a:srgbClr val="8896B0"/>
-                </a:solidFill>
-                <a:latin typeface="Courier New"/>
-              </a:rPr>
-              <a:t>A design note that lists only strengths is a sales sheet.</a:t>
+              <a:t>Connector, README, requirements, explanation and a manifest, packaged as a versioned zip. The model reads intent; the template writes the code; the checker decides what ships.</a:t>
             </a:r>
           </a:p>
         </p:txBody>
@@ -7994,681 +3815,13 @@
               </a:spcAft>
             </a:pPr>
             <a:r>
-              <a:rPr sz="3000" b="1">
+              <a:rPr sz="2700" b="1">
                 <a:solidFill>
                   <a:srgbClr val="E8EDF5"/>
                 </a:solidFill>
                 <a:latin typeface="Arial"/>
               </a:rPr>
-              <a:t>Onboarding a data source is slow, and the cost is repetition</a:t>
-            </a:r>
-          </a:p>
-        </p:txBody>
-      </p:sp>
-      <p:sp>
-        <p:nvSpPr>
-          <p:cNvPr id="5" name="Rectangle 4"/>
-          <p:cNvSpPr/>
-          <p:nvPr/>
-        </p:nvSpPr>
-        <p:spPr>
-          <a:xfrm>
-            <a:off x="685800" y="1691640"/>
-            <a:ext cx="10789920" cy="9525"/>
-          </a:xfrm>
-          <a:prstGeom prst="rect">
-            <a:avLst/>
-          </a:prstGeom>
-          <a:solidFill>
-            <a:srgbClr val="1F2A40"/>
-          </a:solidFill>
-          <a:ln>
-            <a:noFill/>
-          </a:ln>
-          <a:effectLst/>
-        </p:spPr>
-        <p:style>
-          <a:lnRef idx="1">
-            <a:schemeClr val="accent1"/>
-          </a:lnRef>
-          <a:fillRef idx="3">
-            <a:schemeClr val="accent1"/>
-          </a:fillRef>
-          <a:effectRef idx="2">
-            <a:schemeClr val="accent1"/>
-          </a:effectRef>
-          <a:fontRef idx="minor">
-            <a:schemeClr val="lt1"/>
-          </a:fontRef>
-        </p:style>
-        <p:txBody>
-          <a:bodyPr rtlCol="0" anchor="ctr"/>
-          <a:lstStyle/>
-          <a:p>
-            <a:pPr algn="ctr"/>
-          </a:p>
-        </p:txBody>
-      </p:sp>
-      <p:sp>
-        <p:nvSpPr>
-          <p:cNvPr id="6" name="TextBox 5"/>
-          <p:cNvSpPr txBox="1"/>
-          <p:nvPr/>
-        </p:nvSpPr>
-        <p:spPr>
-          <a:xfrm>
-            <a:off x="685800" y="1965960"/>
-            <a:ext cx="10789920" cy="4023360"/>
-          </a:xfrm>
-          <a:prstGeom prst="rect">
-            <a:avLst/>
-          </a:prstGeom>
-          <a:noFill/>
-        </p:spPr>
-        <p:txBody>
-          <a:bodyPr wrap="square" lIns="0" rIns="0" tIns="0" bIns="0">
-            <a:spAutoFit/>
-          </a:bodyPr>
-          <a:lstStyle/>
-          <a:p>
-            <a:pPr>
-              <a:spcAft>
-                <a:spcPts val="300"/>
-              </a:spcAft>
-            </a:pPr>
-            <a:r>
-              <a:rPr sz="1700" b="1">
-                <a:solidFill>
-                  <a:srgbClr val="E8EDF5"/>
-                </a:solidFill>
-                <a:latin typeface="Arial"/>
-              </a:rPr>
-              <a:t>Every new source is hand-written work</a:t>
-            </a:r>
-          </a:p>
-          <a:p>
-            <a:pPr>
-              <a:spcAft>
-                <a:spcPts val="1600"/>
-              </a:spcAft>
-            </a:pPr>
-            <a:r>
-              <a:rPr sz="1450" b="0">
-                <a:solidFill>
-                  <a:srgbClr val="8896B0"/>
-                </a:solidFill>
-                <a:latin typeface="Arial"/>
-              </a:rPr>
-              <a:t>A data engineer writes connection handling, retries, schema introspection and docsagain — the same five methods, slightly differently each time.</a:t>
-            </a:r>
-          </a:p>
-          <a:p>
-            <a:pPr>
-              <a:spcAft>
-                <a:spcPts val="300"/>
-              </a:spcAft>
-            </a:pPr>
-            <a:r>
-              <a:rPr sz="1700" b="1">
-                <a:solidFill>
-                  <a:srgbClr val="E8EDF5"/>
-                </a:solidFill>
-                <a:latin typeface="Arial"/>
-              </a:rPr>
-              <a:t>Consistency decays with headcount</a:t>
-            </a:r>
-          </a:p>
-          <a:p>
-            <a:pPr>
-              <a:spcAft>
-                <a:spcPts val="1600"/>
-              </a:spcAft>
-            </a:pPr>
-            <a:r>
-              <a:rPr sz="1450" b="0">
-                <a:solidFill>
-                  <a:srgbClr val="8896B0"/>
-                </a:solidFill>
-                <a:latin typeface="Arial"/>
-              </a:rPr>
-              <a:t>Ten engineers produce ten interpretations of 'read-only' and 'secrets from the environment'. Review catches some of it, some of the time.</a:t>
-            </a:r>
-          </a:p>
-          <a:p>
-            <a:pPr>
-              <a:spcAft>
-                <a:spcPts val="300"/>
-              </a:spcAft>
-            </a:pPr>
-            <a:r>
-              <a:rPr sz="1700" b="1">
-                <a:solidFill>
-                  <a:srgbClr val="E8EDF5"/>
-                </a:solidFill>
-                <a:latin typeface="Arial"/>
-              </a:rPr>
-              <a:t>The standards are real, and unevenly applied</a:t>
-            </a:r>
-          </a:p>
-          <a:p>
-            <a:pPr>
-              <a:spcAft>
-                <a:spcPts val="1600"/>
-              </a:spcAft>
-            </a:pPr>
-            <a:r>
-              <a:rPr sz="1450" b="0">
-                <a:solidFill>
-                  <a:srgbClr val="8896B0"/>
-                </a:solidFill>
-                <a:latin typeface="Arial"/>
-              </a:rPr>
-              <a:t>No hardcoded credentials, no dynamic SQL, typed, documented. Everyone agrees; nothing enforces it until code review, which is a person having a bad afternoon.</a:t>
-            </a:r>
-          </a:p>
-        </p:txBody>
-      </p:sp>
-    </p:spTree>
-  </p:cSld>
-  <p:clrMapOvr>
-    <a:masterClrMapping/>
-  </p:clrMapOvr>
-</p:sld>
-</file>
-
-<file path=ppt/slides/slide20.xml><?xml version="1.0" encoding="utf-8"?>
-<p:sld xmlns:a="http://schemas.openxmlformats.org/drawingml/2006/main" xmlns:p="http://schemas.openxmlformats.org/presentationml/2006/main" xmlns:r="http://schemas.openxmlformats.org/officeDocument/2006/relationships">
-  <p:cSld>
-    <p:spTree>
-      <p:nvGrpSpPr>
-        <p:cNvPr id="1" name=""/>
-        <p:cNvGrpSpPr/>
-        <p:nvPr/>
-      </p:nvGrpSpPr>
-      <p:grpSpPr/>
-      <p:sp>
-        <p:nvSpPr>
-          <p:cNvPr id="2" name="Rectangle 1"/>
-          <p:cNvSpPr/>
-          <p:nvPr/>
-        </p:nvSpPr>
-        <p:spPr>
-          <a:xfrm>
-            <a:off x="0" y="0"/>
-            <a:ext cx="12191695" cy="6858000"/>
-          </a:xfrm>
-          <a:prstGeom prst="rect">
-            <a:avLst/>
-          </a:prstGeom>
-          <a:solidFill>
-            <a:srgbClr val="0A0F1C"/>
-          </a:solidFill>
-          <a:ln>
-            <a:noFill/>
-          </a:ln>
-          <a:effectLst/>
-        </p:spPr>
-        <p:style>
-          <a:lnRef idx="1">
-            <a:schemeClr val="accent1"/>
-          </a:lnRef>
-          <a:fillRef idx="3">
-            <a:schemeClr val="accent1"/>
-          </a:fillRef>
-          <a:effectRef idx="2">
-            <a:schemeClr val="accent1"/>
-          </a:effectRef>
-          <a:fontRef idx="minor">
-            <a:schemeClr val="lt1"/>
-          </a:fontRef>
-        </p:style>
-        <p:txBody>
-          <a:bodyPr rtlCol="0" anchor="ctr"/>
-          <a:lstStyle/>
-          <a:p>
-            <a:pPr algn="ctr"/>
-          </a:p>
-        </p:txBody>
-      </p:sp>
-      <p:sp>
-        <p:nvSpPr>
-          <p:cNvPr id="3" name="TextBox 2"/>
-          <p:cNvSpPr txBox="1"/>
-          <p:nvPr/>
-        </p:nvSpPr>
-        <p:spPr>
-          <a:xfrm>
-            <a:off x="685800" y="457200"/>
-            <a:ext cx="10058400" cy="274320"/>
-          </a:xfrm>
-          <a:prstGeom prst="rect">
-            <a:avLst/>
-          </a:prstGeom>
-          <a:noFill/>
-        </p:spPr>
-        <p:txBody>
-          <a:bodyPr wrap="square" lIns="0" rIns="0" tIns="0" bIns="0">
-            <a:spAutoFit/>
-          </a:bodyPr>
-          <a:lstStyle/>
-          <a:p>
-            <a:pPr>
-              <a:spcAft>
-                <a:spcPts val="600"/>
-              </a:spcAft>
-            </a:pPr>
-            <a:r>
-              <a:rPr sz="1100" b="1">
-                <a:solidFill>
-                  <a:srgbClr val="4B5975"/>
-                </a:solidFill>
-                <a:latin typeface="Courier New"/>
-              </a:rPr>
-              <a:t>ROADMAP</a:t>
-            </a:r>
-          </a:p>
-        </p:txBody>
-      </p:sp>
-      <p:sp>
-        <p:nvSpPr>
-          <p:cNvPr id="4" name="TextBox 3"/>
-          <p:cNvSpPr txBox="1"/>
-          <p:nvPr/>
-        </p:nvSpPr>
-        <p:spPr>
-          <a:xfrm>
-            <a:off x="685800" y="777240"/>
-            <a:ext cx="10789920" cy="914400"/>
-          </a:xfrm>
-          <a:prstGeom prst="rect">
-            <a:avLst/>
-          </a:prstGeom>
-          <a:noFill/>
-        </p:spPr>
-        <p:txBody>
-          <a:bodyPr wrap="square" lIns="0" rIns="0" tIns="0" bIns="0">
-            <a:spAutoFit/>
-          </a:bodyPr>
-          <a:lstStyle/>
-          <a:p>
-            <a:pPr>
-              <a:spcAft>
-                <a:spcPts val="600"/>
-              </a:spcAft>
-            </a:pPr>
-            <a:r>
-              <a:rPr sz="3000" b="1">
-                <a:solidFill>
-                  <a:srgbClr val="E8EDF5"/>
-                </a:solidFill>
-                <a:latin typeface="Arial"/>
-              </a:rPr>
-              <a:t>The next phase: generate MCP servers, not just connectors</a:t>
-            </a:r>
-          </a:p>
-        </p:txBody>
-      </p:sp>
-      <p:sp>
-        <p:nvSpPr>
-          <p:cNvPr id="5" name="Rectangle 4"/>
-          <p:cNvSpPr/>
-          <p:nvPr/>
-        </p:nvSpPr>
-        <p:spPr>
-          <a:xfrm>
-            <a:off x="685800" y="1691640"/>
-            <a:ext cx="10789920" cy="9525"/>
-          </a:xfrm>
-          <a:prstGeom prst="rect">
-            <a:avLst/>
-          </a:prstGeom>
-          <a:solidFill>
-            <a:srgbClr val="1F2A40"/>
-          </a:solidFill>
-          <a:ln>
-            <a:noFill/>
-          </a:ln>
-          <a:effectLst/>
-        </p:spPr>
-        <p:style>
-          <a:lnRef idx="1">
-            <a:schemeClr val="accent1"/>
-          </a:lnRef>
-          <a:fillRef idx="3">
-            <a:schemeClr val="accent1"/>
-          </a:fillRef>
-          <a:effectRef idx="2">
-            <a:schemeClr val="accent1"/>
-          </a:effectRef>
-          <a:fontRef idx="minor">
-            <a:schemeClr val="lt1"/>
-          </a:fontRef>
-        </p:style>
-        <p:txBody>
-          <a:bodyPr rtlCol="0" anchor="ctr"/>
-          <a:lstStyle/>
-          <a:p>
-            <a:pPr algn="ctr"/>
-          </a:p>
-        </p:txBody>
-      </p:sp>
-      <p:sp>
-        <p:nvSpPr>
-          <p:cNvPr id="6" name="TextBox 5"/>
-          <p:cNvSpPr txBox="1"/>
-          <p:nvPr/>
-        </p:nvSpPr>
-        <p:spPr>
-          <a:xfrm>
-            <a:off x="685800" y="1965960"/>
-            <a:ext cx="10789920" cy="4023360"/>
-          </a:xfrm>
-          <a:prstGeom prst="rect">
-            <a:avLst/>
-          </a:prstGeom>
-          <a:noFill/>
-        </p:spPr>
-        <p:txBody>
-          <a:bodyPr wrap="square" lIns="0" rIns="0" tIns="0" bIns="0">
-            <a:spAutoFit/>
-          </a:bodyPr>
-          <a:lstStyle/>
-          <a:p>
-            <a:pPr>
-              <a:spcAft>
-                <a:spcPts val="300"/>
-              </a:spcAft>
-            </a:pPr>
-            <a:r>
-              <a:rPr sz="1700" b="1">
-                <a:solidFill>
-                  <a:srgbClr val="E8EDF5"/>
-                </a:solidFill>
-                <a:latin typeface="Arial"/>
-              </a:rPr>
-              <a:t>Same sentence, second output target</a:t>
-            </a:r>
-          </a:p>
-          <a:p>
-            <a:pPr>
-              <a:spcAft>
-                <a:spcPts val="1600"/>
-              </a:spcAft>
-            </a:pPr>
-            <a:r>
-              <a:rPr sz="1450" b="0">
-                <a:solidFill>
-                  <a:srgbClr val="8896B0"/>
-                </a:solidFill>
-                <a:latin typeface="Arial"/>
-              </a:rPr>
-              <a:t>Describe a database in English; receive a read-only MCP server that any AI client can query — gated by the same standards pipeline.</a:t>
-            </a:r>
-          </a:p>
-          <a:p>
-            <a:pPr>
-              <a:spcAft>
-                <a:spcPts val="300"/>
-              </a:spcAft>
-            </a:pPr>
-            <a:r>
-              <a:rPr sz="1700" b="1">
-                <a:solidFill>
-                  <a:srgbClr val="E8EDF5"/>
-                </a:solidFill>
-                <a:latin typeface="Arial"/>
-              </a:rPr>
-              <a:t>The architecture already fits</a:t>
-            </a:r>
-          </a:p>
-          <a:p>
-            <a:pPr>
-              <a:spcAft>
-                <a:spcPts val="1600"/>
-              </a:spcAft>
-            </a:pPr>
-            <a:r>
-              <a:rPr sz="1450" b="0">
-                <a:solidFill>
-                  <a:srgbClr val="8896B0"/>
-                </a:solidFill>
-                <a:latin typeface="Arial"/>
-              </a:rPr>
-              <a:t>The registry is versioned and pluggable, the checks are a list, and the sandbox already spawns a subprocess and parses structured JSON from its stdout — which is most of what speaking MCP over stdio requires.</a:t>
-            </a:r>
-          </a:p>
-          <a:p>
-            <a:pPr>
-              <a:spcAft>
-                <a:spcPts val="300"/>
-              </a:spcAft>
-            </a:pPr>
-            <a:r>
-              <a:rPr sz="1700" b="1">
-                <a:solidFill>
-                  <a:srgbClr val="E8EDF5"/>
-                </a:solidFill>
-                <a:latin typeface="Arial"/>
-              </a:rPr>
-              <a:t>It needs checks a connector does not</a:t>
-            </a:r>
-          </a:p>
-          <a:p>
-            <a:pPr>
-              <a:spcAft>
-                <a:spcPts val="1600"/>
-              </a:spcAft>
-            </a:pPr>
-            <a:r>
-              <a:rPr sz="1450" b="0">
-                <a:solidFill>
-                  <a:srgbClr val="8896B0"/>
-                </a:solidFill>
-                <a:latin typeface="Arial"/>
-              </a:rPr>
-              <a:t>A tool's docstring is the description the model reads. An unbounded SELECT fills acontext window rather than crashing. A query(sql) tool hands arbitrary SQL to a model.</a:t>
-            </a:r>
-          </a:p>
-        </p:txBody>
-      </p:sp>
-      <p:sp>
-        <p:nvSpPr>
-          <p:cNvPr id="7" name="TextBox 6"/>
-          <p:cNvSpPr txBox="1"/>
-          <p:nvPr/>
-        </p:nvSpPr>
-        <p:spPr>
-          <a:xfrm>
-            <a:off x="685800" y="5989320"/>
-            <a:ext cx="10789920" cy="548640"/>
-          </a:xfrm>
-          <a:prstGeom prst="rect">
-            <a:avLst/>
-          </a:prstGeom>
-          <a:noFill/>
-        </p:spPr>
-        <p:txBody>
-          <a:bodyPr wrap="square" lIns="0" rIns="0" tIns="0" bIns="0">
-            <a:spAutoFit/>
-          </a:bodyPr>
-          <a:lstStyle/>
-          <a:p>
-            <a:pPr>
-              <a:spcAft>
-                <a:spcPts val="600"/>
-              </a:spcAft>
-            </a:pPr>
-            <a:r>
-              <a:rPr sz="1250" b="0">
-                <a:solidFill>
-                  <a:srgbClr val="8896B0"/>
-                </a:solidFill>
-                <a:latin typeface="Courier New"/>
-              </a:rPr>
-              <a:t>Estimated 8–12 days, starting with a half-day spike that makes the rest refutable.</a:t>
-            </a:r>
-          </a:p>
-        </p:txBody>
-      </p:sp>
-    </p:spTree>
-  </p:cSld>
-  <p:clrMapOvr>
-    <a:masterClrMapping/>
-  </p:clrMapOvr>
-</p:sld>
-</file>
-
-<file path=ppt/slides/slide21.xml><?xml version="1.0" encoding="utf-8"?>
-<p:sld xmlns:a="http://schemas.openxmlformats.org/drawingml/2006/main" xmlns:p="http://schemas.openxmlformats.org/presentationml/2006/main" xmlns:r="http://schemas.openxmlformats.org/officeDocument/2006/relationships">
-  <p:cSld>
-    <p:spTree>
-      <p:nvGrpSpPr>
-        <p:cNvPr id="1" name=""/>
-        <p:cNvGrpSpPr/>
-        <p:nvPr/>
-      </p:nvGrpSpPr>
-      <p:grpSpPr/>
-      <p:sp>
-        <p:nvSpPr>
-          <p:cNvPr id="2" name="Rectangle 1"/>
-          <p:cNvSpPr/>
-          <p:nvPr/>
-        </p:nvSpPr>
-        <p:spPr>
-          <a:xfrm>
-            <a:off x="0" y="0"/>
-            <a:ext cx="12191695" cy="6858000"/>
-          </a:xfrm>
-          <a:prstGeom prst="rect">
-            <a:avLst/>
-          </a:prstGeom>
-          <a:solidFill>
-            <a:srgbClr val="0A0F1C"/>
-          </a:solidFill>
-          <a:ln>
-            <a:noFill/>
-          </a:ln>
-          <a:effectLst/>
-        </p:spPr>
-        <p:style>
-          <a:lnRef idx="1">
-            <a:schemeClr val="accent1"/>
-          </a:lnRef>
-          <a:fillRef idx="3">
-            <a:schemeClr val="accent1"/>
-          </a:fillRef>
-          <a:effectRef idx="2">
-            <a:schemeClr val="accent1"/>
-          </a:effectRef>
-          <a:fontRef idx="minor">
-            <a:schemeClr val="lt1"/>
-          </a:fontRef>
-        </p:style>
-        <p:txBody>
-          <a:bodyPr rtlCol="0" anchor="ctr"/>
-          <a:lstStyle/>
-          <a:p>
-            <a:pPr algn="ctr"/>
-          </a:p>
-        </p:txBody>
-      </p:sp>
-      <p:sp>
-        <p:nvSpPr>
-          <p:cNvPr id="3" name="TextBox 2"/>
-          <p:cNvSpPr txBox="1"/>
-          <p:nvPr/>
-        </p:nvSpPr>
-        <p:spPr>
-          <a:xfrm>
-            <a:off x="685800" y="2103120"/>
-            <a:ext cx="10515600" cy="914400"/>
-          </a:xfrm>
-          <a:prstGeom prst="rect">
-            <a:avLst/>
-          </a:prstGeom>
-          <a:noFill/>
-        </p:spPr>
-        <p:txBody>
-          <a:bodyPr wrap="square" lIns="0" rIns="0" tIns="0" bIns="0">
-            <a:spAutoFit/>
-          </a:bodyPr>
-          <a:lstStyle/>
-          <a:p>
-            <a:pPr>
-              <a:spcAft>
-                <a:spcPts val="600"/>
-              </a:spcAft>
-            </a:pPr>
-            <a:r>
-              <a:rPr sz="3800" b="1">
-                <a:solidFill>
-                  <a:srgbClr val="E8EDF5"/>
-                </a:solidFill>
-                <a:latin typeface="Arial"/>
-              </a:rPr>
-              <a:t>The claim, in one line</a:t>
-            </a:r>
-          </a:p>
-        </p:txBody>
-      </p:sp>
-      <p:sp>
-        <p:nvSpPr>
-          <p:cNvPr id="4" name="TextBox 3"/>
-          <p:cNvSpPr txBox="1"/>
-          <p:nvPr/>
-        </p:nvSpPr>
-        <p:spPr>
-          <a:xfrm>
-            <a:off x="685800" y="3108960"/>
-            <a:ext cx="9601200" cy="2377440"/>
-          </a:xfrm>
-          <a:prstGeom prst="rect">
-            <a:avLst/>
-          </a:prstGeom>
-          <a:noFill/>
-        </p:spPr>
-        <p:txBody>
-          <a:bodyPr wrap="square" lIns="0" rIns="0" tIns="0" bIns="0">
-            <a:spAutoFit/>
-          </a:bodyPr>
-          <a:lstStyle/>
-          <a:p>
-            <a:pPr>
-              <a:spcAft>
-                <a:spcPts val="1400"/>
-              </a:spcAft>
-            </a:pPr>
-            <a:r>
-              <a:rPr sz="1700" b="0">
-                <a:solidFill>
-                  <a:srgbClr val="8896B0"/>
-                </a:solidFill>
-                <a:latin typeface="Arial"/>
-              </a:rPr>
-              <a:t>The model reads intent. The template writes the code. The checker decides what ships.</a:t>
-            </a:r>
-          </a:p>
-          <a:p>
-            <a:pPr>
-              <a:spcAft>
-                <a:spcPts val="1400"/>
-              </a:spcAft>
-            </a:pPr>
-          </a:p>
-          <a:p>
-            <a:pPr>
-              <a:spcAft>
-                <a:spcPts val="1400"/>
-              </a:spcAft>
-            </a:pPr>
-            <a:r>
-              <a:rPr sz="1700" b="0">
-                <a:solidFill>
-                  <a:srgbClr val="8896B0"/>
-                </a:solidFill>
-                <a:latin typeface="Arial"/>
-              </a:rPr>
-              <a:t>That separation is what turns a demo into something you could put in front of a review board — and it is why the guarantee holds for the next connector, not just this one.</a:t>
+              <a:t>The repetition is where the risk lives</a:t>
             </a:r>
           </a:p>
         </p:txBody>
@@ -8681,603 +3834,8 @@
         </p:nvSpPr>
         <p:spPr>
           <a:xfrm>
-            <a:off x="685800" y="5943600"/>
-            <a:ext cx="10515600" cy="457200"/>
-          </a:xfrm>
-          <a:prstGeom prst="rect">
-            <a:avLst/>
-          </a:prstGeom>
-          <a:noFill/>
-        </p:spPr>
-        <p:txBody>
-          <a:bodyPr wrap="square" lIns="0" rIns="0" tIns="0" bIns="0">
-            <a:spAutoFit/>
-          </a:bodyPr>
-          <a:lstStyle/>
-          <a:p>
-            <a:pPr>
-              <a:spcAft>
-                <a:spcPts val="600"/>
-              </a:spcAft>
-            </a:pPr>
-            <a:r>
-              <a:rPr sz="1200" b="0">
-                <a:solidFill>
-                  <a:srgbClr val="4B5975"/>
-                </a:solidFill>
-                <a:latin typeface="Courier New"/>
-              </a:rPr>
-              <a:t>280 tests · 13 standards checks · 4 source types · 100% conformance on accepted artifacts</a:t>
-            </a:r>
-          </a:p>
-        </p:txBody>
-      </p:sp>
-    </p:spTree>
-  </p:cSld>
-  <p:clrMapOvr>
-    <a:masterClrMapping/>
-  </p:clrMapOvr>
-</p:sld>
-</file>
-
-<file path=ppt/slides/slide3.xml><?xml version="1.0" encoding="utf-8"?>
-<p:sld xmlns:a="http://schemas.openxmlformats.org/drawingml/2006/main" xmlns:p="http://schemas.openxmlformats.org/presentationml/2006/main" xmlns:r="http://schemas.openxmlformats.org/officeDocument/2006/relationships">
-  <p:cSld>
-    <p:spTree>
-      <p:nvGrpSpPr>
-        <p:cNvPr id="1" name=""/>
-        <p:cNvGrpSpPr/>
-        <p:nvPr/>
-      </p:nvGrpSpPr>
-      <p:grpSpPr/>
-      <p:sp>
-        <p:nvSpPr>
-          <p:cNvPr id="2" name="Rectangle 1"/>
-          <p:cNvSpPr/>
-          <p:nvPr/>
-        </p:nvSpPr>
-        <p:spPr>
-          <a:xfrm>
-            <a:off x="0" y="0"/>
-            <a:ext cx="12191695" cy="6858000"/>
-          </a:xfrm>
-          <a:prstGeom prst="rect">
-            <a:avLst/>
-          </a:prstGeom>
-          <a:solidFill>
-            <a:srgbClr val="0A0F1C"/>
-          </a:solidFill>
-          <a:ln>
-            <a:noFill/>
-          </a:ln>
-          <a:effectLst/>
-        </p:spPr>
-        <p:style>
-          <a:lnRef idx="1">
-            <a:schemeClr val="accent1"/>
-          </a:lnRef>
-          <a:fillRef idx="3">
-            <a:schemeClr val="accent1"/>
-          </a:fillRef>
-          <a:effectRef idx="2">
-            <a:schemeClr val="accent1"/>
-          </a:effectRef>
-          <a:fontRef idx="minor">
-            <a:schemeClr val="lt1"/>
-          </a:fontRef>
-        </p:style>
-        <p:txBody>
-          <a:bodyPr rtlCol="0" anchor="ctr"/>
-          <a:lstStyle/>
-          <a:p>
-            <a:pPr algn="ctr"/>
-          </a:p>
-        </p:txBody>
-      </p:sp>
-      <p:sp>
-        <p:nvSpPr>
-          <p:cNvPr id="3" name="TextBox 2"/>
-          <p:cNvSpPr txBox="1"/>
-          <p:nvPr/>
-        </p:nvSpPr>
-        <p:spPr>
-          <a:xfrm>
-            <a:off x="685800" y="457200"/>
-            <a:ext cx="10058400" cy="274320"/>
-          </a:xfrm>
-          <a:prstGeom prst="rect">
-            <a:avLst/>
-          </a:prstGeom>
-          <a:noFill/>
-        </p:spPr>
-        <p:txBody>
-          <a:bodyPr wrap="square" lIns="0" rIns="0" tIns="0" bIns="0">
-            <a:spAutoFit/>
-          </a:bodyPr>
-          <a:lstStyle/>
-          <a:p>
-            <a:pPr>
-              <a:spcAft>
-                <a:spcPts val="600"/>
-              </a:spcAft>
-            </a:pPr>
-            <a:r>
-              <a:rPr sz="1100" b="1">
-                <a:solidFill>
-                  <a:srgbClr val="4B5975"/>
-                </a:solidFill>
-                <a:latin typeface="Courier New"/>
-              </a:rPr>
-              <a:t>BUSINESS OBJECTIVE</a:t>
-            </a:r>
-          </a:p>
-        </p:txBody>
-      </p:sp>
-      <p:sp>
-        <p:nvSpPr>
-          <p:cNvPr id="4" name="TextBox 3"/>
-          <p:cNvSpPr txBox="1"/>
-          <p:nvPr/>
-        </p:nvSpPr>
-        <p:spPr>
-          <a:xfrm>
-            <a:off x="685800" y="777240"/>
-            <a:ext cx="10789920" cy="914400"/>
-          </a:xfrm>
-          <a:prstGeom prst="rect">
-            <a:avLst/>
-          </a:prstGeom>
-          <a:noFill/>
-        </p:spPr>
-        <p:txBody>
-          <a:bodyPr wrap="square" lIns="0" rIns="0" tIns="0" bIns="0">
-            <a:spAutoFit/>
-          </a:bodyPr>
-          <a:lstStyle/>
-          <a:p>
-            <a:pPr>
-              <a:spcAft>
-                <a:spcPts val="600"/>
-              </a:spcAft>
-            </a:pPr>
-            <a:r>
-              <a:rPr sz="3000" b="1">
-                <a:solidFill>
-                  <a:srgbClr val="E8EDF5"/>
-                </a:solidFill>
-                <a:latin typeface="Arial"/>
-              </a:rPr>
-              <a:t>What this changes</a:t>
-            </a:r>
-          </a:p>
-        </p:txBody>
-      </p:sp>
-      <p:sp>
-        <p:nvSpPr>
-          <p:cNvPr id="5" name="Rectangle 4"/>
-          <p:cNvSpPr/>
-          <p:nvPr/>
-        </p:nvSpPr>
-        <p:spPr>
-          <a:xfrm>
-            <a:off x="685800" y="1691640"/>
-            <a:ext cx="10789920" cy="9525"/>
-          </a:xfrm>
-          <a:prstGeom prst="rect">
-            <a:avLst/>
-          </a:prstGeom>
-          <a:solidFill>
-            <a:srgbClr val="1F2A40"/>
-          </a:solidFill>
-          <a:ln>
-            <a:noFill/>
-          </a:ln>
-          <a:effectLst/>
-        </p:spPr>
-        <p:style>
-          <a:lnRef idx="1">
-            <a:schemeClr val="accent1"/>
-          </a:lnRef>
-          <a:fillRef idx="3">
-            <a:schemeClr val="accent1"/>
-          </a:fillRef>
-          <a:effectRef idx="2">
-            <a:schemeClr val="accent1"/>
-          </a:effectRef>
-          <a:fontRef idx="minor">
-            <a:schemeClr val="lt1"/>
-          </a:fontRef>
-        </p:style>
-        <p:txBody>
-          <a:bodyPr rtlCol="0" anchor="ctr"/>
-          <a:lstStyle/>
-          <a:p>
-            <a:pPr algn="ctr"/>
-          </a:p>
-        </p:txBody>
-      </p:sp>
-      <p:sp>
-        <p:nvSpPr>
-          <p:cNvPr id="6" name="Rectangle 5"/>
-          <p:cNvSpPr/>
-          <p:nvPr/>
-        </p:nvSpPr>
-        <p:spPr>
-          <a:xfrm>
-            <a:off x="685800" y="2148840"/>
-            <a:ext cx="3413760" cy="1828800"/>
-          </a:xfrm>
-          <a:prstGeom prst="rect">
-            <a:avLst/>
-          </a:prstGeom>
-          <a:solidFill>
-            <a:srgbClr val="111827"/>
-          </a:solidFill>
-          <a:ln w="15875">
-            <a:solidFill>
-              <a:srgbClr val="1F2A40"/>
-            </a:solidFill>
-          </a:ln>
-          <a:effectLst/>
-        </p:spPr>
-        <p:style>
-          <a:lnRef idx="1">
-            <a:schemeClr val="accent1"/>
-          </a:lnRef>
-          <a:fillRef idx="3">
-            <a:schemeClr val="accent1"/>
-          </a:fillRef>
-          <a:effectRef idx="2">
-            <a:schemeClr val="accent1"/>
-          </a:effectRef>
-          <a:fontRef idx="minor">
-            <a:schemeClr val="lt1"/>
-          </a:fontRef>
-        </p:style>
-        <p:txBody>
-          <a:bodyPr rtlCol="0" anchor="ctr"/>
-          <a:lstStyle/>
-          <a:p>
-            <a:pPr algn="ctr"/>
-          </a:p>
-        </p:txBody>
-      </p:sp>
-      <p:sp>
-        <p:nvSpPr>
-          <p:cNvPr id="7" name="TextBox 6"/>
-          <p:cNvSpPr txBox="1"/>
-          <p:nvPr/>
-        </p:nvSpPr>
-        <p:spPr>
-          <a:xfrm>
-            <a:off x="941832" y="2468880"/>
-            <a:ext cx="2901696" cy="914400"/>
-          </a:xfrm>
-          <a:prstGeom prst="rect">
-            <a:avLst/>
-          </a:prstGeom>
-          <a:noFill/>
-        </p:spPr>
-        <p:txBody>
-          <a:bodyPr wrap="square" lIns="0" rIns="0" tIns="0" bIns="0">
-            <a:spAutoFit/>
-          </a:bodyPr>
-          <a:lstStyle/>
-          <a:p>
-            <a:pPr>
-              <a:spcAft>
-                <a:spcPts val="600"/>
-              </a:spcAft>
-            </a:pPr>
-            <a:r>
-              <a:rPr sz="4000" b="1">
-                <a:solidFill>
-                  <a:srgbClr val="34D399"/>
-                </a:solidFill>
-                <a:latin typeface="Arial"/>
-              </a:rPr>
-              <a:t>Minutes</a:t>
-            </a:r>
-          </a:p>
-        </p:txBody>
-      </p:sp>
-      <p:sp>
-        <p:nvSpPr>
-          <p:cNvPr id="8" name="TextBox 7"/>
-          <p:cNvSpPr txBox="1"/>
-          <p:nvPr/>
-        </p:nvSpPr>
-        <p:spPr>
-          <a:xfrm>
-            <a:off x="941832" y="3246120"/>
-            <a:ext cx="2901696" cy="640080"/>
-          </a:xfrm>
-          <a:prstGeom prst="rect">
-            <a:avLst/>
-          </a:prstGeom>
-          <a:noFill/>
-        </p:spPr>
-        <p:txBody>
-          <a:bodyPr wrap="square" lIns="0" rIns="0" tIns="0" bIns="0">
-            <a:spAutoFit/>
-          </a:bodyPr>
-          <a:lstStyle/>
-          <a:p>
-            <a:pPr>
-              <a:spcAft>
-                <a:spcPts val="600"/>
-              </a:spcAft>
-            </a:pPr>
-            <a:r>
-              <a:rPr sz="1250" b="0">
-                <a:solidFill>
-                  <a:srgbClr val="8896B0"/>
-                </a:solidFill>
-                <a:latin typeface="Arial"/>
-              </a:rPr>
-              <a:t>from request to reviewed connector, instead of days</a:t>
-            </a:r>
-          </a:p>
-        </p:txBody>
-      </p:sp>
-      <p:sp>
-        <p:nvSpPr>
-          <p:cNvPr id="9" name="Rectangle 8"/>
-          <p:cNvSpPr/>
-          <p:nvPr/>
-        </p:nvSpPr>
-        <p:spPr>
-          <a:xfrm>
-            <a:off x="4373880" y="2148840"/>
-            <a:ext cx="3413760" cy="1828800"/>
-          </a:xfrm>
-          <a:prstGeom prst="rect">
-            <a:avLst/>
-          </a:prstGeom>
-          <a:solidFill>
-            <a:srgbClr val="111827"/>
-          </a:solidFill>
-          <a:ln w="15875">
-            <a:solidFill>
-              <a:srgbClr val="1F2A40"/>
-            </a:solidFill>
-          </a:ln>
-          <a:effectLst/>
-        </p:spPr>
-        <p:style>
-          <a:lnRef idx="1">
-            <a:schemeClr val="accent1"/>
-          </a:lnRef>
-          <a:fillRef idx="3">
-            <a:schemeClr val="accent1"/>
-          </a:fillRef>
-          <a:effectRef idx="2">
-            <a:schemeClr val="accent1"/>
-          </a:effectRef>
-          <a:fontRef idx="minor">
-            <a:schemeClr val="lt1"/>
-          </a:fontRef>
-        </p:style>
-        <p:txBody>
-          <a:bodyPr rtlCol="0" anchor="ctr"/>
-          <a:lstStyle/>
-          <a:p>
-            <a:pPr algn="ctr"/>
-          </a:p>
-        </p:txBody>
-      </p:sp>
-      <p:sp>
-        <p:nvSpPr>
-          <p:cNvPr id="10" name="TextBox 9"/>
-          <p:cNvSpPr txBox="1"/>
-          <p:nvPr/>
-        </p:nvSpPr>
-        <p:spPr>
-          <a:xfrm>
-            <a:off x="4629912" y="2468880"/>
-            <a:ext cx="2901696" cy="914400"/>
-          </a:xfrm>
-          <a:prstGeom prst="rect">
-            <a:avLst/>
-          </a:prstGeom>
-          <a:noFill/>
-        </p:spPr>
-        <p:txBody>
-          <a:bodyPr wrap="square" lIns="0" rIns="0" tIns="0" bIns="0">
-            <a:spAutoFit/>
-          </a:bodyPr>
-          <a:lstStyle/>
-          <a:p>
-            <a:pPr>
-              <a:spcAft>
-                <a:spcPts val="600"/>
-              </a:spcAft>
-            </a:pPr>
-            <a:r>
-              <a:rPr sz="4000" b="1">
-                <a:solidFill>
-                  <a:srgbClr val="60A5FA"/>
-                </a:solidFill>
-                <a:latin typeface="Arial"/>
-              </a:rPr>
-              <a:t>100%</a:t>
-            </a:r>
-          </a:p>
-        </p:txBody>
-      </p:sp>
-      <p:sp>
-        <p:nvSpPr>
-          <p:cNvPr id="11" name="TextBox 10"/>
-          <p:cNvSpPr txBox="1"/>
-          <p:nvPr/>
-        </p:nvSpPr>
-        <p:spPr>
-          <a:xfrm>
-            <a:off x="4629912" y="3246120"/>
-            <a:ext cx="2901696" cy="640080"/>
-          </a:xfrm>
-          <a:prstGeom prst="rect">
-            <a:avLst/>
-          </a:prstGeom>
-          <a:noFill/>
-        </p:spPr>
-        <p:txBody>
-          <a:bodyPr wrap="square" lIns="0" rIns="0" tIns="0" bIns="0">
-            <a:spAutoFit/>
-          </a:bodyPr>
-          <a:lstStyle/>
-          <a:p>
-            <a:pPr>
-              <a:spcAft>
-                <a:spcPts val="600"/>
-              </a:spcAft>
-            </a:pPr>
-            <a:r>
-              <a:rPr sz="1250" b="0">
-                <a:solidFill>
-                  <a:srgbClr val="8896B0"/>
-                </a:solidFill>
-                <a:latin typeface="Arial"/>
-              </a:rPr>
-              <a:t>of generated connectors meet all 13 standards, or are rejected</a:t>
-            </a:r>
-          </a:p>
-        </p:txBody>
-      </p:sp>
-      <p:sp>
-        <p:nvSpPr>
-          <p:cNvPr id="12" name="Rectangle 11"/>
-          <p:cNvSpPr/>
-          <p:nvPr/>
-        </p:nvSpPr>
-        <p:spPr>
-          <a:xfrm>
-            <a:off x="8061960" y="2148840"/>
-            <a:ext cx="3413760" cy="1828800"/>
-          </a:xfrm>
-          <a:prstGeom prst="rect">
-            <a:avLst/>
-          </a:prstGeom>
-          <a:solidFill>
-            <a:srgbClr val="111827"/>
-          </a:solidFill>
-          <a:ln w="15875">
-            <a:solidFill>
-              <a:srgbClr val="1F2A40"/>
-            </a:solidFill>
-          </a:ln>
-          <a:effectLst/>
-        </p:spPr>
-        <p:style>
-          <a:lnRef idx="1">
-            <a:schemeClr val="accent1"/>
-          </a:lnRef>
-          <a:fillRef idx="3">
-            <a:schemeClr val="accent1"/>
-          </a:fillRef>
-          <a:effectRef idx="2">
-            <a:schemeClr val="accent1"/>
-          </a:effectRef>
-          <a:fontRef idx="minor">
-            <a:schemeClr val="lt1"/>
-          </a:fontRef>
-        </p:style>
-        <p:txBody>
-          <a:bodyPr rtlCol="0" anchor="ctr"/>
-          <a:lstStyle/>
-          <a:p>
-            <a:pPr algn="ctr"/>
-          </a:p>
-        </p:txBody>
-      </p:sp>
-      <p:sp>
-        <p:nvSpPr>
-          <p:cNvPr id="13" name="TextBox 12"/>
-          <p:cNvSpPr txBox="1"/>
-          <p:nvPr/>
-        </p:nvSpPr>
-        <p:spPr>
-          <a:xfrm>
-            <a:off x="8317992" y="2468880"/>
-            <a:ext cx="2901696" cy="914400"/>
-          </a:xfrm>
-          <a:prstGeom prst="rect">
-            <a:avLst/>
-          </a:prstGeom>
-          <a:noFill/>
-        </p:spPr>
-        <p:txBody>
-          <a:bodyPr wrap="square" lIns="0" rIns="0" tIns="0" bIns="0">
-            <a:spAutoFit/>
-          </a:bodyPr>
-          <a:lstStyle/>
-          <a:p>
-            <a:pPr>
-              <a:spcAft>
-                <a:spcPts val="600"/>
-              </a:spcAft>
-            </a:pPr>
-            <a:r>
-              <a:rPr sz="4000" b="1">
-                <a:solidFill>
-                  <a:srgbClr val="FBBF24"/>
-                </a:solidFill>
-                <a:latin typeface="Arial"/>
-              </a:rPr>
-              <a:t>Every artifact</a:t>
-            </a:r>
-          </a:p>
-        </p:txBody>
-      </p:sp>
-      <p:sp>
-        <p:nvSpPr>
-          <p:cNvPr id="14" name="TextBox 13"/>
-          <p:cNvSpPr txBox="1"/>
-          <p:nvPr/>
-        </p:nvSpPr>
-        <p:spPr>
-          <a:xfrm>
-            <a:off x="8317992" y="3246120"/>
-            <a:ext cx="2901696" cy="640080"/>
-          </a:xfrm>
-          <a:prstGeom prst="rect">
-            <a:avLst/>
-          </a:prstGeom>
-          <a:noFill/>
-        </p:spPr>
-        <p:txBody>
-          <a:bodyPr wrap="square" lIns="0" rIns="0" tIns="0" bIns="0">
-            <a:spAutoFit/>
-          </a:bodyPr>
-          <a:lstStyle/>
-          <a:p>
-            <a:pPr>
-              <a:spcAft>
-                <a:spcPts val="600"/>
-              </a:spcAft>
-            </a:pPr>
-            <a:r>
-              <a:rPr sz="1250" b="0">
-                <a:solidFill>
-                  <a:srgbClr val="8896B0"/>
-                </a:solidFill>
-                <a:latin typeface="Arial"/>
-              </a:rPr>
-              <a:t>traceable to the request that produced it</a:t>
-            </a:r>
-          </a:p>
-        </p:txBody>
-      </p:sp>
-      <p:sp>
-        <p:nvSpPr>
-          <p:cNvPr id="15" name="TextBox 14"/>
-          <p:cNvSpPr txBox="1"/>
-          <p:nvPr/>
-        </p:nvSpPr>
-        <p:spPr>
-          <a:xfrm>
-            <a:off x="685800" y="4572000"/>
-            <a:ext cx="10789920" cy="1097280"/>
+            <a:off x="685800" y="1481328"/>
+            <a:ext cx="10241280" cy="731520"/>
           </a:xfrm>
           <a:prstGeom prst="rect">
             <a:avLst/>
@@ -9302,192 +3860,8 @@
                 </a:solidFill>
                 <a:latin typeface="Arial"/>
               </a:rPr>
-              <a:t>The goal is not to remove the engineer. It is to remove the part of the job that is identical every time, and to make the standards structural rather than remembered.</a:t>
-            </a:r>
-          </a:p>
-        </p:txBody>
-      </p:sp>
-    </p:spTree>
-  </p:cSld>
-  <p:clrMapOvr>
-    <a:masterClrMapping/>
-  </p:clrMapOvr>
-</p:sld>
-</file>
-
-<file path=ppt/slides/slide4.xml><?xml version="1.0" encoding="utf-8"?>
-<p:sld xmlns:a="http://schemas.openxmlformats.org/drawingml/2006/main" xmlns:p="http://schemas.openxmlformats.org/presentationml/2006/main" xmlns:r="http://schemas.openxmlformats.org/officeDocument/2006/relationships">
-  <p:cSld>
-    <p:spTree>
-      <p:nvGrpSpPr>
-        <p:cNvPr id="1" name=""/>
-        <p:cNvGrpSpPr/>
-        <p:nvPr/>
-      </p:nvGrpSpPr>
-      <p:grpSpPr/>
-      <p:sp>
-        <p:nvSpPr>
-          <p:cNvPr id="2" name="Rectangle 1"/>
-          <p:cNvSpPr/>
-          <p:nvPr/>
-        </p:nvSpPr>
-        <p:spPr>
-          <a:xfrm>
-            <a:off x="0" y="0"/>
-            <a:ext cx="12191695" cy="6858000"/>
-          </a:xfrm>
-          <a:prstGeom prst="rect">
-            <a:avLst/>
-          </a:prstGeom>
-          <a:solidFill>
-            <a:srgbClr val="0A0F1C"/>
-          </a:solidFill>
-          <a:ln>
-            <a:noFill/>
-          </a:ln>
-          <a:effectLst/>
-        </p:spPr>
-        <p:style>
-          <a:lnRef idx="1">
-            <a:schemeClr val="accent1"/>
-          </a:lnRef>
-          <a:fillRef idx="3">
-            <a:schemeClr val="accent1"/>
-          </a:fillRef>
-          <a:effectRef idx="2">
-            <a:schemeClr val="accent1"/>
-          </a:effectRef>
-          <a:fontRef idx="minor">
-            <a:schemeClr val="lt1"/>
-          </a:fontRef>
-        </p:style>
-        <p:txBody>
-          <a:bodyPr rtlCol="0" anchor="ctr"/>
-          <a:lstStyle/>
-          <a:p>
-            <a:pPr algn="ctr"/>
-          </a:p>
-        </p:txBody>
-      </p:sp>
-      <p:sp>
-        <p:nvSpPr>
-          <p:cNvPr id="3" name="TextBox 2"/>
-          <p:cNvSpPr txBox="1"/>
-          <p:nvPr/>
-        </p:nvSpPr>
-        <p:spPr>
-          <a:xfrm>
-            <a:off x="685800" y="457200"/>
-            <a:ext cx="10058400" cy="274320"/>
-          </a:xfrm>
-          <a:prstGeom prst="rect">
-            <a:avLst/>
-          </a:prstGeom>
-          <a:noFill/>
-        </p:spPr>
-        <p:txBody>
-          <a:bodyPr wrap="square" lIns="0" rIns="0" tIns="0" bIns="0">
-            <a:spAutoFit/>
-          </a:bodyPr>
-          <a:lstStyle/>
-          <a:p>
-            <a:pPr>
-              <a:spcAft>
-                <a:spcPts val="600"/>
-              </a:spcAft>
-            </a:pPr>
-            <a:r>
-              <a:rPr sz="1100" b="1">
-                <a:solidFill>
-                  <a:srgbClr val="4B5975"/>
-                </a:solidFill>
-                <a:latin typeface="Courier New"/>
-              </a:rPr>
-              <a:t>BUSINESS OBJECTIVE</a:t>
-            </a:r>
-          </a:p>
-        </p:txBody>
-      </p:sp>
-      <p:sp>
-        <p:nvSpPr>
-          <p:cNvPr id="4" name="TextBox 3"/>
-          <p:cNvSpPr txBox="1"/>
-          <p:nvPr/>
-        </p:nvSpPr>
-        <p:spPr>
-          <a:xfrm>
-            <a:off x="685800" y="777240"/>
-            <a:ext cx="10789920" cy="914400"/>
-          </a:xfrm>
-          <a:prstGeom prst="rect">
-            <a:avLst/>
-          </a:prstGeom>
-          <a:noFill/>
-        </p:spPr>
-        <p:txBody>
-          <a:bodyPr wrap="square" lIns="0" rIns="0" tIns="0" bIns="0">
-            <a:spAutoFit/>
-          </a:bodyPr>
-          <a:lstStyle/>
-          <a:p>
-            <a:pPr>
-              <a:spcAft>
-                <a:spcPts val="600"/>
-              </a:spcAft>
-            </a:pPr>
-            <a:r>
-              <a:rPr sz="3000" b="1">
-                <a:solidFill>
-                  <a:srgbClr val="E8EDF5"/>
-                </a:solidFill>
-                <a:latin typeface="Arial"/>
-              </a:rPr>
-              <a:t>Where the work actually moves</a:t>
-            </a:r>
-          </a:p>
-        </p:txBody>
-      </p:sp>
-      <p:sp>
-        <p:nvSpPr>
-          <p:cNvPr id="5" name="Rectangle 4"/>
-          <p:cNvSpPr/>
-          <p:nvPr/>
-        </p:nvSpPr>
-        <p:spPr>
-          <a:xfrm>
-            <a:off x="685800" y="1691640"/>
-            <a:ext cx="10789920" cy="9525"/>
-          </a:xfrm>
-          <a:prstGeom prst="rect">
-            <a:avLst/>
-          </a:prstGeom>
-          <a:solidFill>
-            <a:srgbClr val="1F2A40"/>
-          </a:solidFill>
-          <a:ln>
-            <a:noFill/>
-          </a:ln>
-          <a:effectLst/>
-        </p:spPr>
-        <p:style>
-          <a:lnRef idx="1">
-            <a:schemeClr val="accent1"/>
-          </a:lnRef>
-          <a:fillRef idx="3">
-            <a:schemeClr val="accent1"/>
-          </a:fillRef>
-          <a:effectRef idx="2">
-            <a:schemeClr val="accent1"/>
-          </a:effectRef>
-          <a:fontRef idx="minor">
-            <a:schemeClr val="lt1"/>
-          </a:fontRef>
-        </p:style>
-        <p:txBody>
-          <a:bodyPr rtlCol="0" anchor="ctr"/>
-          <a:lstStyle/>
-          <a:p>
-            <a:pPr algn="ctr"/>
+              <a:t>The cost is not writing one connector — it is writing the fortieth, where the same five methods get re-derived slightly differently and the standards hold only as well as the reviewer's attention that afternoon.</a:t>
+            </a:r>
           </a:p>
         </p:txBody>
       </p:sp>
@@ -9500,7 +3874,7 @@
           <p:nvPr/>
         </p:nvGraphicFramePr>
         <p:xfrm>
-          <a:off x="685800" y="2011680"/>
+          <a:off x="685800" y="2249424"/>
           <a:ext cx="10789920" cy="365760"/>
         </p:xfrm>
         <a:graphic>
@@ -9514,7 +3888,7 @@
                 <a:gridCol w="3596640"/>
                 <a:gridCol w="3596640"/>
               </a:tblGrid>
-              <a:tr h="52251">
+              <a:tr h="60960">
                 <a:tc>
                   <a:txBody>
                     <a:bodyPr/>
@@ -9642,7 +4016,7 @@
                   </a:tcPr>
                 </a:tc>
               </a:tr>
-              <a:tr h="52251">
+              <a:tr h="60960">
                 <a:tc>
                   <a:txBody>
                     <a:bodyPr/>
@@ -9739,7 +4113,7 @@
                           </a:solidFill>
                           <a:latin typeface="Arial"/>
                         </a:rPr>
-                        <a:t>Plain English, questions answered in the same session</a:t>
+                        <a:t>Plain English; the gaps are asked about in the same session</a:t>
                       </a:r>
                     </a:p>
                   </a:txBody>
@@ -9770,7 +4144,7 @@
                   </a:tcPr>
                 </a:tc>
               </a:tr>
-              <a:tr h="52251">
+              <a:tr h="60960">
                 <a:tc>
                   <a:txBody>
                     <a:bodyPr/>
@@ -9867,7 +4241,7 @@
                           </a:solidFill>
                           <a:latin typeface="Arial"/>
                         </a:rPr>
-                        <a:t>Rendered from a reviewed spec, identical every time</a:t>
+                        <a:t>Rendered from a reviewed spec — identical every time</a:t>
                       </a:r>
                     </a:p>
                   </a:txBody>
@@ -9898,7 +4272,7 @@
                   </a:tcPr>
                 </a:tc>
               </a:tr>
-              <a:tr h="52251">
+              <a:tr h="60960">
                 <a:tc>
                   <a:txBody>
                     <a:bodyPr/>
@@ -9953,7 +4327,7 @@
                           </a:solidFill>
                           <a:latin typeface="Arial"/>
                         </a:rPr>
-                        <a:t>Code review, after the code exists</a:t>
+                        <a:t>Code review, after the code already exists</a:t>
                       </a:r>
                     </a:p>
                   </a:txBody>
@@ -9995,7 +4369,7 @@
                           </a:solidFill>
                           <a:latin typeface="Arial"/>
                         </a:rPr>
-                        <a:t>13 machine checks, before it can be accepted</a:t>
+                        <a:t>13 machine checks, before it can be accepted at all</a:t>
                       </a:r>
                     </a:p>
                   </a:txBody>
@@ -10026,7 +4400,7 @@
                   </a:tcPr>
                 </a:tc>
               </a:tr>
-              <a:tr h="52251">
+              <a:tr h="60960">
                 <a:tc>
                   <a:txBody>
                     <a:bodyPr/>
@@ -10154,135 +4528,7 @@
                   </a:tcPr>
                 </a:tc>
               </a:tr>
-              <a:tr h="52251">
-                <a:tc>
-                  <a:txBody>
-                    <a:bodyPr/>
-                    <a:lstStyle/>
-                    <a:p>
-                      <a:r>
-                        <a:rPr sz="1300" b="1">
-                          <a:solidFill>
-                            <a:srgbClr val="E8EDF5"/>
-                          </a:solidFill>
-                          <a:latin typeface="Arial"/>
-                        </a:rPr>
-                        <a:t>Write the docs</a:t>
-                      </a:r>
-                    </a:p>
-                  </a:txBody>
-                  <a:tcPr anchor="ctr">
-                    <a:solidFill>
-                      <a:srgbClr val="0A0F1C"/>
-                    </a:solidFill>
-                    <a:lnL w="12700" cap="flat">
-                      <a:solidFill>
-                        <a:srgbClr val="1F2A40"/>
-                      </a:solidFill>
-                    </a:lnL>
-                    <a:lnR w="12700" cap="flat">
-                      <a:solidFill>
-                        <a:srgbClr val="1F2A40"/>
-                      </a:solidFill>
-                    </a:lnR>
-                    <a:lnT w="12700" cap="flat">
-                      <a:solidFill>
-                        <a:srgbClr val="1F2A40"/>
-                      </a:solidFill>
-                    </a:lnT>
-                    <a:lnB w="12700" cap="flat">
-                      <a:solidFill>
-                        <a:srgbClr val="1F2A40"/>
-                      </a:solidFill>
-                    </a:lnB>
-                  </a:tcPr>
-                </a:tc>
-                <a:tc>
-                  <a:txBody>
-                    <a:bodyPr/>
-                    <a:lstStyle/>
-                    <a:p>
-                      <a:r>
-                        <a:rPr sz="1300" b="0">
-                          <a:solidFill>
-                            <a:srgbClr val="8896B0"/>
-                          </a:solidFill>
-                          <a:latin typeface="Arial"/>
-                        </a:rPr>
-                        <a:t>Written last, when enthusiasm is lowest</a:t>
-                      </a:r>
-                    </a:p>
-                  </a:txBody>
-                  <a:tcPr anchor="ctr">
-                    <a:solidFill>
-                      <a:srgbClr val="0A0F1C"/>
-                    </a:solidFill>
-                    <a:lnL w="12700" cap="flat">
-                      <a:solidFill>
-                        <a:srgbClr val="1F2A40"/>
-                      </a:solidFill>
-                    </a:lnL>
-                    <a:lnR w="12700" cap="flat">
-                      <a:solidFill>
-                        <a:srgbClr val="1F2A40"/>
-                      </a:solidFill>
-                    </a:lnR>
-                    <a:lnT w="12700" cap="flat">
-                      <a:solidFill>
-                        <a:srgbClr val="1F2A40"/>
-                      </a:solidFill>
-                    </a:lnT>
-                    <a:lnB w="12700" cap="flat">
-                      <a:solidFill>
-                        <a:srgbClr val="1F2A40"/>
-                      </a:solidFill>
-                    </a:lnB>
-                  </a:tcPr>
-                </a:tc>
-                <a:tc>
-                  <a:txBody>
-                    <a:bodyPr/>
-                    <a:lstStyle/>
-                    <a:p>
-                      <a:r>
-                        <a:rPr sz="1300" b="0">
-                          <a:solidFill>
-                            <a:srgbClr val="8896B0"/>
-                          </a:solidFill>
-                          <a:latin typeface="Arial"/>
-                        </a:rPr>
-                        <a:t>Generated with the code, never out of date</a:t>
-                      </a:r>
-                    </a:p>
-                  </a:txBody>
-                  <a:tcPr anchor="ctr">
-                    <a:solidFill>
-                      <a:srgbClr val="0A0F1C"/>
-                    </a:solidFill>
-                    <a:lnL w="12700" cap="flat">
-                      <a:solidFill>
-                        <a:srgbClr val="1F2A40"/>
-                      </a:solidFill>
-                    </a:lnL>
-                    <a:lnR w="12700" cap="flat">
-                      <a:solidFill>
-                        <a:srgbClr val="1F2A40"/>
-                      </a:solidFill>
-                    </a:lnR>
-                    <a:lnT w="12700" cap="flat">
-                      <a:solidFill>
-                        <a:srgbClr val="1F2A40"/>
-                      </a:solidFill>
-                    </a:lnT>
-                    <a:lnB w="12700" cap="flat">
-                      <a:solidFill>
-                        <a:srgbClr val="1F2A40"/>
-                      </a:solidFill>
-                    </a:lnB>
-                  </a:tcPr>
-                </a:tc>
-              </a:tr>
-              <a:tr h="52254">
+              <a:tr h="60960">
                 <a:tc>
                   <a:txBody>
                     <a:bodyPr/>
@@ -10448,7 +4694,7 @@
                 </a:solidFill>
                 <a:latin typeface="Courier New"/>
               </a:rPr>
-              <a:t>The engineer stops writing the same five methods and starts reviewing a diff.</a:t>
+              <a:t>Requesting team: self-service · Engineering: reviews a diff, not a blank file · Security: credentials structurally excluded · Audit: every artifact traceable</a:t>
             </a:r>
           </a:p>
         </p:txBody>
@@ -10461,7 +4707,7 @@
 </p:sld>
 </file>
 
-<file path=ppt/slides/slide5.xml><?xml version="1.0" encoding="utf-8"?>
+<file path=ppt/slides/slide3.xml><?xml version="1.0" encoding="utf-8"?>
 <p:sld xmlns:a="http://schemas.openxmlformats.org/drawingml/2006/main" xmlns:p="http://schemas.openxmlformats.org/presentationml/2006/main" xmlns:r="http://schemas.openxmlformats.org/officeDocument/2006/relationships">
   <p:cSld>
     <p:spTree>
@@ -10549,7 +4795,7 @@
                 </a:solidFill>
                 <a:latin typeface="Courier New"/>
               </a:rPr>
-              <a:t>BUSINESS OBJECTIVE</a:t>
+              <a:t>THE CORE IDEA</a:t>
             </a:r>
           </a:p>
         </p:txBody>
@@ -10588,7 +4834,7 @@
                 </a:solidFill>
                 <a:latin typeface="Arial"/>
               </a:rPr>
-              <a:t>What each stakeholder gets</a:t>
+              <a:t>Reliability comes from constraint, not from prompting</a:t>
             </a:r>
           </a:p>
         </p:txBody>
@@ -10671,7 +4917,7 @@
                 </a:solidFill>
                 <a:latin typeface="Arial"/>
               </a:rPr>
-              <a:t>The team requesting the source</a:t>
+              <a:t>The model never writes the code</a:t>
             </a:r>
           </a:p>
           <a:p>
@@ -10687,7 +4933,7 @@
                 </a:solidFill>
                 <a:latin typeface="Arial"/>
               </a:rPr>
-              <a:t>Self-service. They describe what they need in their own words instead of writing a ticket and waiting in a queue — and they find out in the same session if their request is missing something.</a:t>
+              <a:t>It fills a structured spec — schema-enforced, so it selects from closed sets rather than inventing strings. A Jinja2 template renders the connector, deterministically: same spec in, same bytes out.</a:t>
             </a:r>
           </a:p>
           <a:p>
@@ -10703,7 +4949,7 @@
                 </a:solidFill>
                 <a:latin typeface="Arial"/>
               </a:rPr>
-              <a:t>Data engineering</a:t>
+              <a:t>13 machine checks decide what ships</a:t>
             </a:r>
           </a:p>
           <a:p>
@@ -10719,7 +4965,7 @@
                 </a:solidFill>
                 <a:latin typeface="Arial"/>
               </a:rPr>
-              <a:t>The repetitive half of the job disappears; the judgement half remains. Reviewing a generated connector against a spec is faster and more reliable than writing one from scratch, and the review is about fit, not style.</a:t>
+              <a:t>no-hardcoded-credentials · no-dynamic-sql · env-for-secrets · no-dangerous-calls · type-hints · docstrings, and seven more — read from the parsed syntax tree, never by importing the code, because importing runs it.</a:t>
             </a:r>
           </a:p>
           <a:p>
@@ -10735,7 +4981,7 @@
                 </a:solidFill>
                 <a:latin typeface="Arial"/>
               </a:rPr>
-              <a:t>Security and compliance</a:t>
+              <a:t>Repair is bounded and cannot regress</a:t>
             </a:r>
           </a:p>
           <a:p>
@@ -10751,7 +4997,7 @@
                 </a:solidFill>
                 <a:latin typeface="Arial"/>
               </a:rPr>
-              <a:t>Credentials cannot reach the code — two checks make that a rejection rather than a review comment. Read-only is the default. Every artifact records which environment variables it needs, by name only.</a:t>
+              <a:t>At most three attempts, and a candidate is adopted only if it strictly reduces the error count. A rejected connector is still returned, with its findings, so a reviewer can see exactly what went wrong.</a:t>
             </a:r>
           </a:p>
           <a:p>
@@ -10767,7 +5013,7 @@
                 </a:solidFill>
                 <a:latin typeface="Arial"/>
               </a:rPr>
-              <a:t>Platform and audit</a:t>
+              <a:t>Secrets cannot reach the artifact</a:t>
             </a:r>
           </a:p>
           <a:p>
@@ -10783,7 +5029,7 @@
                 </a:solidFill>
                 <a:latin typeface="Arial"/>
               </a:rPr>
-              <a:t>Every connector in production is traceable to the sentence that requested it, the template version that rendered it, and the checksum of exactly what shipped. That turns a six-month-later question into a lookup.</a:t>
+              <a:t>Credentials are scrubbed from the request before the model sees it, two checks make a literal credential a rejection, and the manifest records the environment variables by name only — never their values.</a:t>
             </a:r>
           </a:p>
         </p:txBody>
@@ -10822,7 +5068,7 @@
                 </a:solidFill>
                 <a:latin typeface="Courier New"/>
               </a:rPr>
-              <a:t>Adding a new SQL dialect is a config entry, not a project.</a:t>
+              <a:t>A checker that has only ever seen good input has demonstrated nothing — so the suite injects faults on purpose.</a:t>
             </a:r>
           </a:p>
         </p:txBody>
@@ -10835,349 +5081,7 @@
 </p:sld>
 </file>
 
-<file path=ppt/slides/slide6.xml><?xml version="1.0" encoding="utf-8"?>
-<p:sld xmlns:a="http://schemas.openxmlformats.org/drawingml/2006/main" xmlns:p="http://schemas.openxmlformats.org/presentationml/2006/main" xmlns:r="http://schemas.openxmlformats.org/officeDocument/2006/relationships">
-  <p:cSld>
-    <p:spTree>
-      <p:nvGrpSpPr>
-        <p:cNvPr id="1" name=""/>
-        <p:cNvGrpSpPr/>
-        <p:nvPr/>
-      </p:nvGrpSpPr>
-      <p:grpSpPr/>
-      <p:sp>
-        <p:nvSpPr>
-          <p:cNvPr id="2" name="Rectangle 1"/>
-          <p:cNvSpPr/>
-          <p:nvPr/>
-        </p:nvSpPr>
-        <p:spPr>
-          <a:xfrm>
-            <a:off x="0" y="0"/>
-            <a:ext cx="12191695" cy="6858000"/>
-          </a:xfrm>
-          <a:prstGeom prst="rect">
-            <a:avLst/>
-          </a:prstGeom>
-          <a:solidFill>
-            <a:srgbClr val="0A0F1C"/>
-          </a:solidFill>
-          <a:ln>
-            <a:noFill/>
-          </a:ln>
-          <a:effectLst/>
-        </p:spPr>
-        <p:style>
-          <a:lnRef idx="1">
-            <a:schemeClr val="accent1"/>
-          </a:lnRef>
-          <a:fillRef idx="3">
-            <a:schemeClr val="accent1"/>
-          </a:fillRef>
-          <a:effectRef idx="2">
-            <a:schemeClr val="accent1"/>
-          </a:effectRef>
-          <a:fontRef idx="minor">
-            <a:schemeClr val="lt1"/>
-          </a:fontRef>
-        </p:style>
-        <p:txBody>
-          <a:bodyPr rtlCol="0" anchor="ctr"/>
-          <a:lstStyle/>
-          <a:p>
-            <a:pPr algn="ctr"/>
-          </a:p>
-        </p:txBody>
-      </p:sp>
-      <p:sp>
-        <p:nvSpPr>
-          <p:cNvPr id="3" name="TextBox 2"/>
-          <p:cNvSpPr txBox="1"/>
-          <p:nvPr/>
-        </p:nvSpPr>
-        <p:spPr>
-          <a:xfrm>
-            <a:off x="685800" y="457200"/>
-            <a:ext cx="10058400" cy="274320"/>
-          </a:xfrm>
-          <a:prstGeom prst="rect">
-            <a:avLst/>
-          </a:prstGeom>
-          <a:noFill/>
-        </p:spPr>
-        <p:txBody>
-          <a:bodyPr wrap="square" lIns="0" rIns="0" tIns="0" bIns="0">
-            <a:spAutoFit/>
-          </a:bodyPr>
-          <a:lstStyle/>
-          <a:p>
-            <a:pPr>
-              <a:spcAft>
-                <a:spcPts val="600"/>
-              </a:spcAft>
-            </a:pPr>
-            <a:r>
-              <a:rPr sz="1100" b="1">
-                <a:solidFill>
-                  <a:srgbClr val="4B5975"/>
-                </a:solidFill>
-                <a:latin typeface="Courier New"/>
-              </a:rPr>
-              <a:t>THE CORE IDEA</a:t>
-            </a:r>
-          </a:p>
-        </p:txBody>
-      </p:sp>
-      <p:sp>
-        <p:nvSpPr>
-          <p:cNvPr id="4" name="TextBox 3"/>
-          <p:cNvSpPr txBox="1"/>
-          <p:nvPr/>
-        </p:nvSpPr>
-        <p:spPr>
-          <a:xfrm>
-            <a:off x="685800" y="777240"/>
-            <a:ext cx="10789920" cy="914400"/>
-          </a:xfrm>
-          <a:prstGeom prst="rect">
-            <a:avLst/>
-          </a:prstGeom>
-          <a:noFill/>
-        </p:spPr>
-        <p:txBody>
-          <a:bodyPr wrap="square" lIns="0" rIns="0" tIns="0" bIns="0">
-            <a:spAutoFit/>
-          </a:bodyPr>
-          <a:lstStyle/>
-          <a:p>
-            <a:pPr>
-              <a:spcAft>
-                <a:spcPts val="600"/>
-              </a:spcAft>
-            </a:pPr>
-            <a:r>
-              <a:rPr sz="3000" b="1">
-                <a:solidFill>
-                  <a:srgbClr val="E8EDF5"/>
-                </a:solidFill>
-                <a:latin typeface="Arial"/>
-              </a:rPr>
-              <a:t>The tension — and how it is resolved</a:t>
-            </a:r>
-          </a:p>
-        </p:txBody>
-      </p:sp>
-      <p:sp>
-        <p:nvSpPr>
-          <p:cNvPr id="5" name="Rectangle 4"/>
-          <p:cNvSpPr/>
-          <p:nvPr/>
-        </p:nvSpPr>
-        <p:spPr>
-          <a:xfrm>
-            <a:off x="685800" y="1691640"/>
-            <a:ext cx="10789920" cy="9525"/>
-          </a:xfrm>
-          <a:prstGeom prst="rect">
-            <a:avLst/>
-          </a:prstGeom>
-          <a:solidFill>
-            <a:srgbClr val="1F2A40"/>
-          </a:solidFill>
-          <a:ln>
-            <a:noFill/>
-          </a:ln>
-          <a:effectLst/>
-        </p:spPr>
-        <p:style>
-          <a:lnRef idx="1">
-            <a:schemeClr val="accent1"/>
-          </a:lnRef>
-          <a:fillRef idx="3">
-            <a:schemeClr val="accent1"/>
-          </a:fillRef>
-          <a:effectRef idx="2">
-            <a:schemeClr val="accent1"/>
-          </a:effectRef>
-          <a:fontRef idx="minor">
-            <a:schemeClr val="lt1"/>
-          </a:fontRef>
-        </p:style>
-        <p:txBody>
-          <a:bodyPr rtlCol="0" anchor="ctr"/>
-          <a:lstStyle/>
-          <a:p>
-            <a:pPr algn="ctr"/>
-          </a:p>
-        </p:txBody>
-      </p:sp>
-      <p:sp>
-        <p:nvSpPr>
-          <p:cNvPr id="6" name="TextBox 5"/>
-          <p:cNvSpPr txBox="1"/>
-          <p:nvPr/>
-        </p:nvSpPr>
-        <p:spPr>
-          <a:xfrm>
-            <a:off x="685800" y="1965960"/>
-            <a:ext cx="10789920" cy="4023360"/>
-          </a:xfrm>
-          <a:prstGeom prst="rect">
-            <a:avLst/>
-          </a:prstGeom>
-          <a:noFill/>
-        </p:spPr>
-        <p:txBody>
-          <a:bodyPr wrap="square" lIns="0" rIns="0" tIns="0" bIns="0">
-            <a:spAutoFit/>
-          </a:bodyPr>
-          <a:lstStyle/>
-          <a:p>
-            <a:pPr>
-              <a:spcAft>
-                <a:spcPts val="300"/>
-              </a:spcAft>
-            </a:pPr>
-            <a:r>
-              <a:rPr sz="1700" b="1">
-                <a:solidFill>
-                  <a:srgbClr val="E8EDF5"/>
-                </a:solidFill>
-                <a:latin typeface="Arial"/>
-              </a:rPr>
-              <a:t>The tension</a:t>
-            </a:r>
-          </a:p>
-          <a:p>
-            <a:pPr>
-              <a:spcAft>
-                <a:spcPts val="1600"/>
-              </a:spcAft>
-            </a:pPr>
-            <a:r>
-              <a:rPr sz="1450" b="0">
-                <a:solidFill>
-                  <a:srgbClr val="8896B0"/>
-                </a:solidFill>
-                <a:latin typeface="Arial"/>
-              </a:rPr>
-              <a:t>Free-form English is unpredictable. Production code must be guaranteed. Letting a language model write the connector puts an unreliable component in the one place reliability is non-negotiable.</a:t>
-            </a:r>
-          </a:p>
-          <a:p>
-            <a:pPr>
-              <a:spcAft>
-                <a:spcPts val="300"/>
-              </a:spcAft>
-            </a:pPr>
-            <a:r>
-              <a:rPr sz="1700" b="1">
-                <a:solidFill>
-                  <a:srgbClr val="E8EDF5"/>
-                </a:solidFill>
-                <a:latin typeface="Arial"/>
-              </a:rPr>
-              <a:t>The resolution: the model never writes the code</a:t>
-            </a:r>
-          </a:p>
-          <a:p>
-            <a:pPr>
-              <a:spcAft>
-                <a:spcPts val="1600"/>
-              </a:spcAft>
-            </a:pPr>
-            <a:r>
-              <a:rPr sz="1450" b="0">
-                <a:solidFill>
-                  <a:srgbClr val="8896B0"/>
-                </a:solidFill>
-                <a:latin typeface="Arial"/>
-              </a:rPr>
-              <a:t>It fills in a structured spec — schema-enforced, so it selects from closed sets rather than inventing strings. A Jinja2 template renders the code, deterministically. Same spec in, same bytes out.</a:t>
-            </a:r>
-          </a:p>
-          <a:p>
-            <a:pPr>
-              <a:spcAft>
-                <a:spcPts val="300"/>
-              </a:spcAft>
-            </a:pPr>
-            <a:r>
-              <a:rPr sz="1700" b="1">
-                <a:solidFill>
-                  <a:srgbClr val="E8EDF5"/>
-                </a:solidFill>
-                <a:latin typeface="Arial"/>
-              </a:rPr>
-              <a:t>Reliability comes from constraint, not from prompting</a:t>
-            </a:r>
-          </a:p>
-          <a:p>
-            <a:pPr>
-              <a:spcAft>
-                <a:spcPts val="1600"/>
-              </a:spcAft>
-            </a:pPr>
-            <a:r>
-              <a:rPr sz="1450" b="0">
-                <a:solidFill>
-                  <a:srgbClr val="8896B0"/>
-                </a:solidFill>
-                <a:latin typeface="Arial"/>
-              </a:rPr>
-              <a:t>The model does what models are good at — reading intent from messy language. The template does what templates are good at — producing exactly the same thing every time.</a:t>
-            </a:r>
-          </a:p>
-        </p:txBody>
-      </p:sp>
-      <p:sp>
-        <p:nvSpPr>
-          <p:cNvPr id="7" name="TextBox 6"/>
-          <p:cNvSpPr txBox="1"/>
-          <p:nvPr/>
-        </p:nvSpPr>
-        <p:spPr>
-          <a:xfrm>
-            <a:off x="685800" y="5989320"/>
-            <a:ext cx="10789920" cy="548640"/>
-          </a:xfrm>
-          <a:prstGeom prst="rect">
-            <a:avLst/>
-          </a:prstGeom>
-          <a:noFill/>
-        </p:spPr>
-        <p:txBody>
-          <a:bodyPr wrap="square" lIns="0" rIns="0" tIns="0" bIns="0">
-            <a:spAutoFit/>
-          </a:bodyPr>
-          <a:lstStyle/>
-          <a:p>
-            <a:pPr>
-              <a:spcAft>
-                <a:spcPts val="600"/>
-              </a:spcAft>
-            </a:pPr>
-            <a:r>
-              <a:rPr sz="1250" b="0">
-                <a:solidFill>
-                  <a:srgbClr val="8896B0"/>
-                </a:solidFill>
-                <a:latin typeface="Courier New"/>
-              </a:rPr>
-              <a:t>This is the single design decision the rest of the project follows from.</a:t>
-            </a:r>
-          </a:p>
-        </p:txBody>
-      </p:sp>
-    </p:spTree>
-  </p:cSld>
-  <p:clrMapOvr>
-    <a:masterClrMapping/>
-  </p:clrMapOvr>
-</p:sld>
-</file>
-
-<file path=ppt/slides/slide7.xml><?xml version="1.0" encoding="utf-8"?>
+<file path=ppt/slides/slide4.xml><?xml version="1.0" encoding="utf-8"?>
 <p:sld xmlns:a="http://schemas.openxmlformats.org/drawingml/2006/main" xmlns:p="http://schemas.openxmlformats.org/presentationml/2006/main" xmlns:r="http://schemas.openxmlformats.org/officeDocument/2006/relationships">
   <p:cSld>
     <p:spTree>
@@ -13316,6 +7220,1814 @@
 </p:sld>
 </file>
 
+<file path=ppt/slides/slide5.xml><?xml version="1.0" encoding="utf-8"?>
+<p:sld xmlns:a="http://schemas.openxmlformats.org/drawingml/2006/main" xmlns:p="http://schemas.openxmlformats.org/presentationml/2006/main" xmlns:r="http://schemas.openxmlformats.org/officeDocument/2006/relationships">
+  <p:cSld>
+    <p:spTree>
+      <p:nvGrpSpPr>
+        <p:cNvPr id="1" name=""/>
+        <p:cNvGrpSpPr/>
+        <p:nvPr/>
+      </p:nvGrpSpPr>
+      <p:grpSpPr/>
+      <p:sp>
+        <p:nvSpPr>
+          <p:cNvPr id="2" name="Rectangle 1"/>
+          <p:cNvSpPr/>
+          <p:nvPr/>
+        </p:nvSpPr>
+        <p:spPr>
+          <a:xfrm>
+            <a:off x="0" y="0"/>
+            <a:ext cx="12191695" cy="6858000"/>
+          </a:xfrm>
+          <a:prstGeom prst="rect">
+            <a:avLst/>
+          </a:prstGeom>
+          <a:solidFill>
+            <a:srgbClr val="0A0F1C"/>
+          </a:solidFill>
+          <a:ln>
+            <a:noFill/>
+          </a:ln>
+          <a:effectLst/>
+        </p:spPr>
+        <p:style>
+          <a:lnRef idx="1">
+            <a:schemeClr val="accent1"/>
+          </a:lnRef>
+          <a:fillRef idx="3">
+            <a:schemeClr val="accent1"/>
+          </a:fillRef>
+          <a:effectRef idx="2">
+            <a:schemeClr val="accent1"/>
+          </a:effectRef>
+          <a:fontRef idx="minor">
+            <a:schemeClr val="lt1"/>
+          </a:fontRef>
+        </p:style>
+        <p:txBody>
+          <a:bodyPr rtlCol="0" anchor="ctr"/>
+          <a:lstStyle/>
+          <a:p>
+            <a:pPr algn="ctr"/>
+          </a:p>
+        </p:txBody>
+      </p:sp>
+      <p:sp>
+        <p:nvSpPr>
+          <p:cNvPr id="3" name="TextBox 2"/>
+          <p:cNvSpPr txBox="1"/>
+          <p:nvPr/>
+        </p:nvSpPr>
+        <p:spPr>
+          <a:xfrm>
+            <a:off x="685800" y="457200"/>
+            <a:ext cx="10058400" cy="274320"/>
+          </a:xfrm>
+          <a:prstGeom prst="rect">
+            <a:avLst/>
+          </a:prstGeom>
+          <a:noFill/>
+        </p:spPr>
+        <p:txBody>
+          <a:bodyPr wrap="square" lIns="0" rIns="0" tIns="0" bIns="0">
+            <a:spAutoFit/>
+          </a:bodyPr>
+          <a:lstStyle/>
+          <a:p>
+            <a:pPr>
+              <a:spcAft>
+                <a:spcPts val="600"/>
+              </a:spcAft>
+            </a:pPr>
+            <a:r>
+              <a:rPr sz="1100" b="1">
+                <a:solidFill>
+                  <a:srgbClr val="4B5975"/>
+                </a:solidFill>
+                <a:latin typeface="Courier New"/>
+              </a:rPr>
+              <a:t>TECHNOLOGY</a:t>
+            </a:r>
+          </a:p>
+        </p:txBody>
+      </p:sp>
+      <p:sp>
+        <p:nvSpPr>
+          <p:cNvPr id="4" name="TextBox 3"/>
+          <p:cNvSpPr txBox="1"/>
+          <p:nvPr/>
+        </p:nvSpPr>
+        <p:spPr>
+          <a:xfrm>
+            <a:off x="685800" y="777240"/>
+            <a:ext cx="10789920" cy="914400"/>
+          </a:xfrm>
+          <a:prstGeom prst="rect">
+            <a:avLst/>
+          </a:prstGeom>
+          <a:noFill/>
+        </p:spPr>
+        <p:txBody>
+          <a:bodyPr wrap="square" lIns="0" rIns="0" tIns="0" bIns="0">
+            <a:spAutoFit/>
+          </a:bodyPr>
+          <a:lstStyle/>
+          <a:p>
+            <a:pPr>
+              <a:spcAft>
+                <a:spcPts val="600"/>
+              </a:spcAft>
+            </a:pPr>
+            <a:r>
+              <a:rPr sz="2700" b="1">
+                <a:solidFill>
+                  <a:srgbClr val="E8EDF5"/>
+                </a:solidFill>
+                <a:latin typeface="Arial"/>
+              </a:rPr>
+              <a:t>The stack, and why each piece is there</a:t>
+            </a:r>
+          </a:p>
+        </p:txBody>
+      </p:sp>
+      <p:sp>
+        <p:nvSpPr>
+          <p:cNvPr id="5" name="Rectangle 4"/>
+          <p:cNvSpPr/>
+          <p:nvPr/>
+        </p:nvSpPr>
+        <p:spPr>
+          <a:xfrm>
+            <a:off x="685800" y="1691640"/>
+            <a:ext cx="10789920" cy="9525"/>
+          </a:xfrm>
+          <a:prstGeom prst="rect">
+            <a:avLst/>
+          </a:prstGeom>
+          <a:solidFill>
+            <a:srgbClr val="1F2A40"/>
+          </a:solidFill>
+          <a:ln>
+            <a:noFill/>
+          </a:ln>
+          <a:effectLst/>
+        </p:spPr>
+        <p:style>
+          <a:lnRef idx="1">
+            <a:schemeClr val="accent1"/>
+          </a:lnRef>
+          <a:fillRef idx="3">
+            <a:schemeClr val="accent1"/>
+          </a:fillRef>
+          <a:effectRef idx="2">
+            <a:schemeClr val="accent1"/>
+          </a:effectRef>
+          <a:fontRef idx="minor">
+            <a:schemeClr val="lt1"/>
+          </a:fontRef>
+        </p:style>
+        <p:txBody>
+          <a:bodyPr rtlCol="0" anchor="ctr"/>
+          <a:lstStyle/>
+          <a:p>
+            <a:pPr algn="ctr"/>
+          </a:p>
+        </p:txBody>
+      </p:sp>
+      <p:graphicFrame>
+        <p:nvGraphicFramePr>
+          <p:cNvPr id="6" name="Table 5"/>
+          <p:cNvGraphicFramePr>
+            <a:graphicFrameLocks noGrp="1"/>
+          </p:cNvGraphicFramePr>
+          <p:nvPr/>
+        </p:nvGraphicFramePr>
+        <p:xfrm>
+          <a:off x="685800" y="2011680"/>
+          <a:ext cx="10789920" cy="365760"/>
+        </p:xfrm>
+        <a:graphic>
+          <a:graphicData uri="http://schemas.openxmlformats.org/drawingml/2006/table">
+            <a:tbl>
+              <a:tblPr firstRow="1" bandRow="1">
+                <a:tableStyleId>{5C22544A-7EE6-4342-B048-85BDC9FD1C3A}</a:tableStyleId>
+              </a:tblPr>
+              <a:tblGrid>
+                <a:gridCol w="3596640"/>
+                <a:gridCol w="3596640"/>
+                <a:gridCol w="3596640"/>
+              </a:tblGrid>
+              <a:tr h="40640">
+                <a:tc>
+                  <a:txBody>
+                    <a:bodyPr/>
+                    <a:lstStyle/>
+                    <a:p>
+                      <a:r>
+                        <a:rPr sz="1200" b="1">
+                          <a:solidFill>
+                            <a:srgbClr val="8896B0"/>
+                          </a:solidFill>
+                          <a:latin typeface="Courier New"/>
+                        </a:rPr>
+                        <a:t>Layer</a:t>
+                      </a:r>
+                    </a:p>
+                  </a:txBody>
+                  <a:tcPr anchor="ctr">
+                    <a:solidFill>
+                      <a:srgbClr val="111827"/>
+                    </a:solidFill>
+                    <a:lnL w="12700" cap="flat">
+                      <a:solidFill>
+                        <a:srgbClr val="1F2A40"/>
+                      </a:solidFill>
+                    </a:lnL>
+                    <a:lnR w="12700" cap="flat">
+                      <a:solidFill>
+                        <a:srgbClr val="1F2A40"/>
+                      </a:solidFill>
+                    </a:lnR>
+                    <a:lnT w="12700" cap="flat">
+                      <a:solidFill>
+                        <a:srgbClr val="1F2A40"/>
+                      </a:solidFill>
+                    </a:lnT>
+                    <a:lnB w="12700" cap="flat">
+                      <a:solidFill>
+                        <a:srgbClr val="1F2A40"/>
+                      </a:solidFill>
+                    </a:lnB>
+                  </a:tcPr>
+                </a:tc>
+                <a:tc>
+                  <a:txBody>
+                    <a:bodyPr/>
+                    <a:lstStyle/>
+                    <a:p>
+                      <a:r>
+                        <a:rPr sz="1200" b="1">
+                          <a:solidFill>
+                            <a:srgbClr val="8896B0"/>
+                          </a:solidFill>
+                          <a:latin typeface="Courier New"/>
+                        </a:rPr>
+                        <a:t>Choice</a:t>
+                      </a:r>
+                    </a:p>
+                  </a:txBody>
+                  <a:tcPr anchor="ctr">
+                    <a:solidFill>
+                      <a:srgbClr val="111827"/>
+                    </a:solidFill>
+                    <a:lnL w="12700" cap="flat">
+                      <a:solidFill>
+                        <a:srgbClr val="1F2A40"/>
+                      </a:solidFill>
+                    </a:lnL>
+                    <a:lnR w="12700" cap="flat">
+                      <a:solidFill>
+                        <a:srgbClr val="1F2A40"/>
+                      </a:solidFill>
+                    </a:lnR>
+                    <a:lnT w="12700" cap="flat">
+                      <a:solidFill>
+                        <a:srgbClr val="1F2A40"/>
+                      </a:solidFill>
+                    </a:lnT>
+                    <a:lnB w="12700" cap="flat">
+                      <a:solidFill>
+                        <a:srgbClr val="1F2A40"/>
+                      </a:solidFill>
+                    </a:lnB>
+                  </a:tcPr>
+                </a:tc>
+                <a:tc>
+                  <a:txBody>
+                    <a:bodyPr/>
+                    <a:lstStyle/>
+                    <a:p>
+                      <a:r>
+                        <a:rPr sz="1200" b="1">
+                          <a:solidFill>
+                            <a:srgbClr val="8896B0"/>
+                          </a:solidFill>
+                          <a:latin typeface="Courier New"/>
+                        </a:rPr>
+                        <a:t>Why this one</a:t>
+                      </a:r>
+                    </a:p>
+                  </a:txBody>
+                  <a:tcPr anchor="ctr">
+                    <a:solidFill>
+                      <a:srgbClr val="111827"/>
+                    </a:solidFill>
+                    <a:lnL w="12700" cap="flat">
+                      <a:solidFill>
+                        <a:srgbClr val="1F2A40"/>
+                      </a:solidFill>
+                    </a:lnL>
+                    <a:lnR w="12700" cap="flat">
+                      <a:solidFill>
+                        <a:srgbClr val="1F2A40"/>
+                      </a:solidFill>
+                    </a:lnR>
+                    <a:lnT w="12700" cap="flat">
+                      <a:solidFill>
+                        <a:srgbClr val="1F2A40"/>
+                      </a:solidFill>
+                    </a:lnT>
+                    <a:lnB w="12700" cap="flat">
+                      <a:solidFill>
+                        <a:srgbClr val="1F2A40"/>
+                      </a:solidFill>
+                    </a:lnB>
+                  </a:tcPr>
+                </a:tc>
+              </a:tr>
+              <a:tr h="40640">
+                <a:tc>
+                  <a:txBody>
+                    <a:bodyPr/>
+                    <a:lstStyle/>
+                    <a:p>
+                      <a:r>
+                        <a:rPr sz="1300" b="1">
+                          <a:solidFill>
+                            <a:srgbClr val="E8EDF5"/>
+                          </a:solidFill>
+                          <a:latin typeface="Arial"/>
+                        </a:rPr>
+                        <a:t>API</a:t>
+                      </a:r>
+                    </a:p>
+                  </a:txBody>
+                  <a:tcPr anchor="ctr">
+                    <a:solidFill>
+                      <a:srgbClr val="0A0F1C"/>
+                    </a:solidFill>
+                    <a:lnL w="12700" cap="flat">
+                      <a:solidFill>
+                        <a:srgbClr val="1F2A40"/>
+                      </a:solidFill>
+                    </a:lnL>
+                    <a:lnR w="12700" cap="flat">
+                      <a:solidFill>
+                        <a:srgbClr val="1F2A40"/>
+                      </a:solidFill>
+                    </a:lnR>
+                    <a:lnT w="12700" cap="flat">
+                      <a:solidFill>
+                        <a:srgbClr val="1F2A40"/>
+                      </a:solidFill>
+                    </a:lnT>
+                    <a:lnB w="12700" cap="flat">
+                      <a:solidFill>
+                        <a:srgbClr val="1F2A40"/>
+                      </a:solidFill>
+                    </a:lnB>
+                  </a:tcPr>
+                </a:tc>
+                <a:tc>
+                  <a:txBody>
+                    <a:bodyPr/>
+                    <a:lstStyle/>
+                    <a:p>
+                      <a:r>
+                        <a:rPr sz="1300" b="0">
+                          <a:solidFill>
+                            <a:srgbClr val="8896B0"/>
+                          </a:solidFill>
+                          <a:latin typeface="Arial"/>
+                        </a:rPr>
+                        <a:t>FastAPI + Pydantic v2</a:t>
+                      </a:r>
+                    </a:p>
+                  </a:txBody>
+                  <a:tcPr anchor="ctr">
+                    <a:solidFill>
+                      <a:srgbClr val="0A0F1C"/>
+                    </a:solidFill>
+                    <a:lnL w="12700" cap="flat">
+                      <a:solidFill>
+                        <a:srgbClr val="1F2A40"/>
+                      </a:solidFill>
+                    </a:lnL>
+                    <a:lnR w="12700" cap="flat">
+                      <a:solidFill>
+                        <a:srgbClr val="1F2A40"/>
+                      </a:solidFill>
+                    </a:lnR>
+                    <a:lnT w="12700" cap="flat">
+                      <a:solidFill>
+                        <a:srgbClr val="1F2A40"/>
+                      </a:solidFill>
+                    </a:lnT>
+                    <a:lnB w="12700" cap="flat">
+                      <a:solidFill>
+                        <a:srgbClr val="1F2A40"/>
+                      </a:solidFill>
+                    </a:lnB>
+                  </a:tcPr>
+                </a:tc>
+                <a:tc>
+                  <a:txBody>
+                    <a:bodyPr/>
+                    <a:lstStyle/>
+                    <a:p>
+                      <a:r>
+                        <a:rPr sz="1300" b="0">
+                          <a:solidFill>
+                            <a:srgbClr val="8896B0"/>
+                          </a:solidFill>
+                          <a:latin typeface="Arial"/>
+                        </a:rPr>
+                        <a:t>Schema validation at the boundary, not in the handlers</a:t>
+                      </a:r>
+                    </a:p>
+                  </a:txBody>
+                  <a:tcPr anchor="ctr">
+                    <a:solidFill>
+                      <a:srgbClr val="0A0F1C"/>
+                    </a:solidFill>
+                    <a:lnL w="12700" cap="flat">
+                      <a:solidFill>
+                        <a:srgbClr val="1F2A40"/>
+                      </a:solidFill>
+                    </a:lnL>
+                    <a:lnR w="12700" cap="flat">
+                      <a:solidFill>
+                        <a:srgbClr val="1F2A40"/>
+                      </a:solidFill>
+                    </a:lnR>
+                    <a:lnT w="12700" cap="flat">
+                      <a:solidFill>
+                        <a:srgbClr val="1F2A40"/>
+                      </a:solidFill>
+                    </a:lnT>
+                    <a:lnB w="12700" cap="flat">
+                      <a:solidFill>
+                        <a:srgbClr val="1F2A40"/>
+                      </a:solidFill>
+                    </a:lnB>
+                  </a:tcPr>
+                </a:tc>
+              </a:tr>
+              <a:tr h="40640">
+                <a:tc>
+                  <a:txBody>
+                    <a:bodyPr/>
+                    <a:lstStyle/>
+                    <a:p>
+                      <a:r>
+                        <a:rPr sz="1300" b="1">
+                          <a:solidFill>
+                            <a:srgbClr val="E8EDF5"/>
+                          </a:solidFill>
+                          <a:latin typeface="Arial"/>
+                        </a:rPr>
+                        <a:t>Spec</a:t>
+                      </a:r>
+                    </a:p>
+                  </a:txBody>
+                  <a:tcPr anchor="ctr">
+                    <a:solidFill>
+                      <a:srgbClr val="0A0F1C"/>
+                    </a:solidFill>
+                    <a:lnL w="12700" cap="flat">
+                      <a:solidFill>
+                        <a:srgbClr val="1F2A40"/>
+                      </a:solidFill>
+                    </a:lnL>
+                    <a:lnR w="12700" cap="flat">
+                      <a:solidFill>
+                        <a:srgbClr val="1F2A40"/>
+                      </a:solidFill>
+                    </a:lnR>
+                    <a:lnT w="12700" cap="flat">
+                      <a:solidFill>
+                        <a:srgbClr val="1F2A40"/>
+                      </a:solidFill>
+                    </a:lnT>
+                    <a:lnB w="12700" cap="flat">
+                      <a:solidFill>
+                        <a:srgbClr val="1F2A40"/>
+                      </a:solidFill>
+                    </a:lnB>
+                  </a:tcPr>
+                </a:tc>
+                <a:tc>
+                  <a:txBody>
+                    <a:bodyPr/>
+                    <a:lstStyle/>
+                    <a:p>
+                      <a:r>
+                        <a:rPr sz="1300" b="0">
+                          <a:solidFill>
+                            <a:srgbClr val="8896B0"/>
+                          </a:solidFill>
+                          <a:latin typeface="Arial"/>
+                        </a:rPr>
+                        <a:t>Pydantic models</a:t>
+                      </a:r>
+                    </a:p>
+                  </a:txBody>
+                  <a:tcPr anchor="ctr">
+                    <a:solidFill>
+                      <a:srgbClr val="0A0F1C"/>
+                    </a:solidFill>
+                    <a:lnL w="12700" cap="flat">
+                      <a:solidFill>
+                        <a:srgbClr val="1F2A40"/>
+                      </a:solidFill>
+                    </a:lnL>
+                    <a:lnR w="12700" cap="flat">
+                      <a:solidFill>
+                        <a:srgbClr val="1F2A40"/>
+                      </a:solidFill>
+                    </a:lnR>
+                    <a:lnT w="12700" cap="flat">
+                      <a:solidFill>
+                        <a:srgbClr val="1F2A40"/>
+                      </a:solidFill>
+                    </a:lnT>
+                    <a:lnB w="12700" cap="flat">
+                      <a:solidFill>
+                        <a:srgbClr val="1F2A40"/>
+                      </a:solidFill>
+                    </a:lnB>
+                  </a:tcPr>
+                </a:tc>
+                <a:tc>
+                  <a:txBody>
+                    <a:bodyPr/>
+                    <a:lstStyle/>
+                    <a:p>
+                      <a:r>
+                        <a:rPr sz="1300" b="0">
+                          <a:solidFill>
+                            <a:srgbClr val="8896B0"/>
+                          </a:solidFill>
+                          <a:latin typeface="Arial"/>
+                        </a:rPr>
+                        <a:t>Permissive draft, then promotion to a strict spec</a:t>
+                      </a:r>
+                    </a:p>
+                  </a:txBody>
+                  <a:tcPr anchor="ctr">
+                    <a:solidFill>
+                      <a:srgbClr val="0A0F1C"/>
+                    </a:solidFill>
+                    <a:lnL w="12700" cap="flat">
+                      <a:solidFill>
+                        <a:srgbClr val="1F2A40"/>
+                      </a:solidFill>
+                    </a:lnL>
+                    <a:lnR w="12700" cap="flat">
+                      <a:solidFill>
+                        <a:srgbClr val="1F2A40"/>
+                      </a:solidFill>
+                    </a:lnR>
+                    <a:lnT w="12700" cap="flat">
+                      <a:solidFill>
+                        <a:srgbClr val="1F2A40"/>
+                      </a:solidFill>
+                    </a:lnT>
+                    <a:lnB w="12700" cap="flat">
+                      <a:solidFill>
+                        <a:srgbClr val="1F2A40"/>
+                      </a:solidFill>
+                    </a:lnB>
+                  </a:tcPr>
+                </a:tc>
+              </a:tr>
+              <a:tr h="40640">
+                <a:tc>
+                  <a:txBody>
+                    <a:bodyPr/>
+                    <a:lstStyle/>
+                    <a:p>
+                      <a:r>
+                        <a:rPr sz="1300" b="1">
+                          <a:solidFill>
+                            <a:srgbClr val="E8EDF5"/>
+                          </a:solidFill>
+                          <a:latin typeface="Arial"/>
+                        </a:rPr>
+                        <a:t>Codegen</a:t>
+                      </a:r>
+                    </a:p>
+                  </a:txBody>
+                  <a:tcPr anchor="ctr">
+                    <a:solidFill>
+                      <a:srgbClr val="0A0F1C"/>
+                    </a:solidFill>
+                    <a:lnL w="12700" cap="flat">
+                      <a:solidFill>
+                        <a:srgbClr val="1F2A40"/>
+                      </a:solidFill>
+                    </a:lnL>
+                    <a:lnR w="12700" cap="flat">
+                      <a:solidFill>
+                        <a:srgbClr val="1F2A40"/>
+                      </a:solidFill>
+                    </a:lnR>
+                    <a:lnT w="12700" cap="flat">
+                      <a:solidFill>
+                        <a:srgbClr val="1F2A40"/>
+                      </a:solidFill>
+                    </a:lnT>
+                    <a:lnB w="12700" cap="flat">
+                      <a:solidFill>
+                        <a:srgbClr val="1F2A40"/>
+                      </a:solidFill>
+                    </a:lnB>
+                  </a:tcPr>
+                </a:tc>
+                <a:tc>
+                  <a:txBody>
+                    <a:bodyPr/>
+                    <a:lstStyle/>
+                    <a:p>
+                      <a:r>
+                        <a:rPr sz="1300" b="0">
+                          <a:solidFill>
+                            <a:srgbClr val="8896B0"/>
+                          </a:solidFill>
+                          <a:latin typeface="Arial"/>
+                        </a:rPr>
+                        <a:t>Jinja2</a:t>
+                      </a:r>
+                    </a:p>
+                  </a:txBody>
+                  <a:tcPr anchor="ctr">
+                    <a:solidFill>
+                      <a:srgbClr val="0A0F1C"/>
+                    </a:solidFill>
+                    <a:lnL w="12700" cap="flat">
+                      <a:solidFill>
+                        <a:srgbClr val="1F2A40"/>
+                      </a:solidFill>
+                    </a:lnL>
+                    <a:lnR w="12700" cap="flat">
+                      <a:solidFill>
+                        <a:srgbClr val="1F2A40"/>
+                      </a:solidFill>
+                    </a:lnR>
+                    <a:lnT w="12700" cap="flat">
+                      <a:solidFill>
+                        <a:srgbClr val="1F2A40"/>
+                      </a:solidFill>
+                    </a:lnT>
+                    <a:lnB w="12700" cap="flat">
+                      <a:solidFill>
+                        <a:srgbClr val="1F2A40"/>
+                      </a:solidFill>
+                    </a:lnB>
+                  </a:tcPr>
+                </a:tc>
+                <a:tc>
+                  <a:txBody>
+                    <a:bodyPr/>
+                    <a:lstStyle/>
+                    <a:p>
+                      <a:r>
+                        <a:rPr sz="1300" b="0">
+                          <a:solidFill>
+                            <a:srgbClr val="8896B0"/>
+                          </a:solidFill>
+                          <a:latin typeface="Arial"/>
+                        </a:rPr>
+                        <a:t>Deterministic. The reason the standards guarantee holds</a:t>
+                      </a:r>
+                    </a:p>
+                  </a:txBody>
+                  <a:tcPr anchor="ctr">
+                    <a:solidFill>
+                      <a:srgbClr val="0A0F1C"/>
+                    </a:solidFill>
+                    <a:lnL w="12700" cap="flat">
+                      <a:solidFill>
+                        <a:srgbClr val="1F2A40"/>
+                      </a:solidFill>
+                    </a:lnL>
+                    <a:lnR w="12700" cap="flat">
+                      <a:solidFill>
+                        <a:srgbClr val="1F2A40"/>
+                      </a:solidFill>
+                    </a:lnR>
+                    <a:lnT w="12700" cap="flat">
+                      <a:solidFill>
+                        <a:srgbClr val="1F2A40"/>
+                      </a:solidFill>
+                    </a:lnT>
+                    <a:lnB w="12700" cap="flat">
+                      <a:solidFill>
+                        <a:srgbClr val="1F2A40"/>
+                      </a:solidFill>
+                    </a:lnB>
+                  </a:tcPr>
+                </a:tc>
+              </a:tr>
+              <a:tr h="40640">
+                <a:tc>
+                  <a:txBody>
+                    <a:bodyPr/>
+                    <a:lstStyle/>
+                    <a:p>
+                      <a:r>
+                        <a:rPr sz="1300" b="1">
+                          <a:solidFill>
+                            <a:srgbClr val="E8EDF5"/>
+                          </a:solidFill>
+                          <a:latin typeface="Arial"/>
+                        </a:rPr>
+                        <a:t>Validation</a:t>
+                      </a:r>
+                    </a:p>
+                  </a:txBody>
+                  <a:tcPr anchor="ctr">
+                    <a:solidFill>
+                      <a:srgbClr val="0A0F1C"/>
+                    </a:solidFill>
+                    <a:lnL w="12700" cap="flat">
+                      <a:solidFill>
+                        <a:srgbClr val="1F2A40"/>
+                      </a:solidFill>
+                    </a:lnL>
+                    <a:lnR w="12700" cap="flat">
+                      <a:solidFill>
+                        <a:srgbClr val="1F2A40"/>
+                      </a:solidFill>
+                    </a:lnR>
+                    <a:lnT w="12700" cap="flat">
+                      <a:solidFill>
+                        <a:srgbClr val="1F2A40"/>
+                      </a:solidFill>
+                    </a:lnT>
+                    <a:lnB w="12700" cap="flat">
+                      <a:solidFill>
+                        <a:srgbClr val="1F2A40"/>
+                      </a:solidFill>
+                    </a:lnB>
+                  </a:tcPr>
+                </a:tc>
+                <a:tc>
+                  <a:txBody>
+                    <a:bodyPr/>
+                    <a:lstStyle/>
+                    <a:p>
+                      <a:r>
+                        <a:rPr sz="1300" b="0">
+                          <a:solidFill>
+                            <a:srgbClr val="8896B0"/>
+                          </a:solidFill>
+                          <a:latin typeface="Arial"/>
+                        </a:rPr>
+                        <a:t>ast + ruff + black + bandit</a:t>
+                      </a:r>
+                    </a:p>
+                  </a:txBody>
+                  <a:tcPr anchor="ctr">
+                    <a:solidFill>
+                      <a:srgbClr val="0A0F1C"/>
+                    </a:solidFill>
+                    <a:lnL w="12700" cap="flat">
+                      <a:solidFill>
+                        <a:srgbClr val="1F2A40"/>
+                      </a:solidFill>
+                    </a:lnL>
+                    <a:lnR w="12700" cap="flat">
+                      <a:solidFill>
+                        <a:srgbClr val="1F2A40"/>
+                      </a:solidFill>
+                    </a:lnR>
+                    <a:lnT w="12700" cap="flat">
+                      <a:solidFill>
+                        <a:srgbClr val="1F2A40"/>
+                      </a:solidFill>
+                    </a:lnT>
+                    <a:lnB w="12700" cap="flat">
+                      <a:solidFill>
+                        <a:srgbClr val="1F2A40"/>
+                      </a:solidFill>
+                    </a:lnB>
+                  </a:tcPr>
+                </a:tc>
+                <a:tc>
+                  <a:txBody>
+                    <a:bodyPr/>
+                    <a:lstStyle/>
+                    <a:p>
+                      <a:r>
+                        <a:rPr sz="1300" b="0">
+                          <a:solidFill>
+                            <a:srgbClr val="8896B0"/>
+                          </a:solidFill>
+                          <a:latin typeface="Arial"/>
+                        </a:rPr>
+                        <a:t>Parsed, never imported — importing runs it</a:t>
+                      </a:r>
+                    </a:p>
+                  </a:txBody>
+                  <a:tcPr anchor="ctr">
+                    <a:solidFill>
+                      <a:srgbClr val="0A0F1C"/>
+                    </a:solidFill>
+                    <a:lnL w="12700" cap="flat">
+                      <a:solidFill>
+                        <a:srgbClr val="1F2A40"/>
+                      </a:solidFill>
+                    </a:lnL>
+                    <a:lnR w="12700" cap="flat">
+                      <a:solidFill>
+                        <a:srgbClr val="1F2A40"/>
+                      </a:solidFill>
+                    </a:lnR>
+                    <a:lnT w="12700" cap="flat">
+                      <a:solidFill>
+                        <a:srgbClr val="1F2A40"/>
+                      </a:solidFill>
+                    </a:lnT>
+                    <a:lnB w="12700" cap="flat">
+                      <a:solidFill>
+                        <a:srgbClr val="1F2A40"/>
+                      </a:solidFill>
+                    </a:lnB>
+                  </a:tcPr>
+                </a:tc>
+              </a:tr>
+              <a:tr h="40640">
+                <a:tc>
+                  <a:txBody>
+                    <a:bodyPr/>
+                    <a:lstStyle/>
+                    <a:p>
+                      <a:r>
+                        <a:rPr sz="1300" b="1">
+                          <a:solidFill>
+                            <a:srgbClr val="E8EDF5"/>
+                          </a:solidFill>
+                          <a:latin typeface="Arial"/>
+                        </a:rPr>
+                        <a:t>Database</a:t>
+                      </a:r>
+                    </a:p>
+                  </a:txBody>
+                  <a:tcPr anchor="ctr">
+                    <a:solidFill>
+                      <a:srgbClr val="0A0F1C"/>
+                    </a:solidFill>
+                    <a:lnL w="12700" cap="flat">
+                      <a:solidFill>
+                        <a:srgbClr val="1F2A40"/>
+                      </a:solidFill>
+                    </a:lnL>
+                    <a:lnR w="12700" cap="flat">
+                      <a:solidFill>
+                        <a:srgbClr val="1F2A40"/>
+                      </a:solidFill>
+                    </a:lnR>
+                    <a:lnT w="12700" cap="flat">
+                      <a:solidFill>
+                        <a:srgbClr val="1F2A40"/>
+                      </a:solidFill>
+                    </a:lnT>
+                    <a:lnB w="12700" cap="flat">
+                      <a:solidFill>
+                        <a:srgbClr val="1F2A40"/>
+                      </a:solidFill>
+                    </a:lnB>
+                  </a:tcPr>
+                </a:tc>
+                <a:tc>
+                  <a:txBody>
+                    <a:bodyPr/>
+                    <a:lstStyle/>
+                    <a:p>
+                      <a:r>
+                        <a:rPr sz="1300" b="0">
+                          <a:solidFill>
+                            <a:srgbClr val="8896B0"/>
+                          </a:solidFill>
+                          <a:latin typeface="Arial"/>
+                        </a:rPr>
+                        <a:t>SQLAlchemy 2.0</a:t>
+                      </a:r>
+                    </a:p>
+                  </a:txBody>
+                  <a:tcPr anchor="ctr">
+                    <a:solidFill>
+                      <a:srgbClr val="0A0F1C"/>
+                    </a:solidFill>
+                    <a:lnL w="12700" cap="flat">
+                      <a:solidFill>
+                        <a:srgbClr val="1F2A40"/>
+                      </a:solidFill>
+                    </a:lnL>
+                    <a:lnR w="12700" cap="flat">
+                      <a:solidFill>
+                        <a:srgbClr val="1F2A40"/>
+                      </a:solidFill>
+                    </a:lnR>
+                    <a:lnT w="12700" cap="flat">
+                      <a:solidFill>
+                        <a:srgbClr val="1F2A40"/>
+                      </a:solidFill>
+                    </a:lnT>
+                    <a:lnB w="12700" cap="flat">
+                      <a:solidFill>
+                        <a:srgbClr val="1F2A40"/>
+                      </a:solidFill>
+                    </a:lnB>
+                  </a:tcPr>
+                </a:tc>
+                <a:tc>
+                  <a:txBody>
+                    <a:bodyPr/>
+                    <a:lstStyle/>
+                    <a:p>
+                      <a:r>
+                        <a:rPr sz="1300" b="0">
+                          <a:solidFill>
+                            <a:srgbClr val="8896B0"/>
+                          </a:solidFill>
+                          <a:latin typeface="Arial"/>
+                        </a:rPr>
+                        <a:t>One connector shape across three SQL dialects</a:t>
+                      </a:r>
+                    </a:p>
+                  </a:txBody>
+                  <a:tcPr anchor="ctr">
+                    <a:solidFill>
+                      <a:srgbClr val="0A0F1C"/>
+                    </a:solidFill>
+                    <a:lnL w="12700" cap="flat">
+                      <a:solidFill>
+                        <a:srgbClr val="1F2A40"/>
+                      </a:solidFill>
+                    </a:lnL>
+                    <a:lnR w="12700" cap="flat">
+                      <a:solidFill>
+                        <a:srgbClr val="1F2A40"/>
+                      </a:solidFill>
+                    </a:lnR>
+                    <a:lnT w="12700" cap="flat">
+                      <a:solidFill>
+                        <a:srgbClr val="1F2A40"/>
+                      </a:solidFill>
+                    </a:lnT>
+                    <a:lnB w="12700" cap="flat">
+                      <a:solidFill>
+                        <a:srgbClr val="1F2A40"/>
+                      </a:solidFill>
+                    </a:lnB>
+                  </a:tcPr>
+                </a:tc>
+              </a:tr>
+              <a:tr h="40640">
+                <a:tc>
+                  <a:txBody>
+                    <a:bodyPr/>
+                    <a:lstStyle/>
+                    <a:p>
+                      <a:r>
+                        <a:rPr sz="1300" b="1">
+                          <a:solidFill>
+                            <a:srgbClr val="E8EDF5"/>
+                          </a:solidFill>
+                          <a:latin typeface="Arial"/>
+                        </a:rPr>
+                        <a:t>Sandbox</a:t>
+                      </a:r>
+                    </a:p>
+                  </a:txBody>
+                  <a:tcPr anchor="ctr">
+                    <a:solidFill>
+                      <a:srgbClr val="0A0F1C"/>
+                    </a:solidFill>
+                    <a:lnL w="12700" cap="flat">
+                      <a:solidFill>
+                        <a:srgbClr val="1F2A40"/>
+                      </a:solidFill>
+                    </a:lnL>
+                    <a:lnR w="12700" cap="flat">
+                      <a:solidFill>
+                        <a:srgbClr val="1F2A40"/>
+                      </a:solidFill>
+                    </a:lnR>
+                    <a:lnT w="12700" cap="flat">
+                      <a:solidFill>
+                        <a:srgbClr val="1F2A40"/>
+                      </a:solidFill>
+                    </a:lnT>
+                    <a:lnB w="12700" cap="flat">
+                      <a:solidFill>
+                        <a:srgbClr val="1F2A40"/>
+                      </a:solidFill>
+                    </a:lnB>
+                  </a:tcPr>
+                </a:tc>
+                <a:tc>
+                  <a:txBody>
+                    <a:bodyPr/>
+                    <a:lstStyle/>
+                    <a:p>
+                      <a:r>
+                        <a:rPr sz="1300" b="0">
+                          <a:solidFill>
+                            <a:srgbClr val="8896B0"/>
+                          </a:solidFill>
+                          <a:latin typeface="Arial"/>
+                        </a:rPr>
+                        <a:t>subprocess + rlimits</a:t>
+                      </a:r>
+                    </a:p>
+                  </a:txBody>
+                  <a:tcPr anchor="ctr">
+                    <a:solidFill>
+                      <a:srgbClr val="0A0F1C"/>
+                    </a:solidFill>
+                    <a:lnL w="12700" cap="flat">
+                      <a:solidFill>
+                        <a:srgbClr val="1F2A40"/>
+                      </a:solidFill>
+                    </a:lnL>
+                    <a:lnR w="12700" cap="flat">
+                      <a:solidFill>
+                        <a:srgbClr val="1F2A40"/>
+                      </a:solidFill>
+                    </a:lnR>
+                    <a:lnT w="12700" cap="flat">
+                      <a:solidFill>
+                        <a:srgbClr val="1F2A40"/>
+                      </a:solidFill>
+                    </a:lnT>
+                    <a:lnB w="12700" cap="flat">
+                      <a:solidFill>
+                        <a:srgbClr val="1F2A40"/>
+                      </a:solidFill>
+                    </a:lnB>
+                  </a:tcPr>
+                </a:tc>
+                <a:tc>
+                  <a:txBody>
+                    <a:bodyPr/>
+                    <a:lstStyle/>
+                    <a:p>
+                      <a:r>
+                        <a:rPr sz="1300" b="0">
+                          <a:solidFill>
+                            <a:srgbClr val="8896B0"/>
+                          </a:solidFill>
+                          <a:latin typeface="Arial"/>
+                        </a:rPr>
+                        <a:t>Timeout, memory cap, allowlisted environment</a:t>
+                      </a:r>
+                    </a:p>
+                  </a:txBody>
+                  <a:tcPr anchor="ctr">
+                    <a:solidFill>
+                      <a:srgbClr val="0A0F1C"/>
+                    </a:solidFill>
+                    <a:lnL w="12700" cap="flat">
+                      <a:solidFill>
+                        <a:srgbClr val="1F2A40"/>
+                      </a:solidFill>
+                    </a:lnL>
+                    <a:lnR w="12700" cap="flat">
+                      <a:solidFill>
+                        <a:srgbClr val="1F2A40"/>
+                      </a:solidFill>
+                    </a:lnR>
+                    <a:lnT w="12700" cap="flat">
+                      <a:solidFill>
+                        <a:srgbClr val="1F2A40"/>
+                      </a:solidFill>
+                    </a:lnT>
+                    <a:lnB w="12700" cap="flat">
+                      <a:solidFill>
+                        <a:srgbClr val="1F2A40"/>
+                      </a:solidFill>
+                    </a:lnB>
+                  </a:tcPr>
+                </a:tc>
+              </a:tr>
+              <a:tr h="40640">
+                <a:tc>
+                  <a:txBody>
+                    <a:bodyPr/>
+                    <a:lstStyle/>
+                    <a:p>
+                      <a:r>
+                        <a:rPr sz="1300" b="1">
+                          <a:solidFill>
+                            <a:srgbClr val="E8EDF5"/>
+                          </a:solidFill>
+                          <a:latin typeface="Arial"/>
+                        </a:rPr>
+                        <a:t>Front end</a:t>
+                      </a:r>
+                    </a:p>
+                  </a:txBody>
+                  <a:tcPr anchor="ctr">
+                    <a:solidFill>
+                      <a:srgbClr val="0A0F1C"/>
+                    </a:solidFill>
+                    <a:lnL w="12700" cap="flat">
+                      <a:solidFill>
+                        <a:srgbClr val="1F2A40"/>
+                      </a:solidFill>
+                    </a:lnL>
+                    <a:lnR w="12700" cap="flat">
+                      <a:solidFill>
+                        <a:srgbClr val="1F2A40"/>
+                      </a:solidFill>
+                    </a:lnR>
+                    <a:lnT w="12700" cap="flat">
+                      <a:solidFill>
+                        <a:srgbClr val="1F2A40"/>
+                      </a:solidFill>
+                    </a:lnT>
+                    <a:lnB w="12700" cap="flat">
+                      <a:solidFill>
+                        <a:srgbClr val="1F2A40"/>
+                      </a:solidFill>
+                    </a:lnB>
+                  </a:tcPr>
+                </a:tc>
+                <a:tc>
+                  <a:txBody>
+                    <a:bodyPr/>
+                    <a:lstStyle/>
+                    <a:p>
+                      <a:r>
+                        <a:rPr sz="1300" b="0">
+                          <a:solidFill>
+                            <a:srgbClr val="8896B0"/>
+                          </a:solidFill>
+                          <a:latin typeface="Arial"/>
+                        </a:rPr>
+                        <a:t>React 18 + TypeScript + Vite</a:t>
+                      </a:r>
+                    </a:p>
+                  </a:txBody>
+                  <a:tcPr anchor="ctr">
+                    <a:solidFill>
+                      <a:srgbClr val="0A0F1C"/>
+                    </a:solidFill>
+                    <a:lnL w="12700" cap="flat">
+                      <a:solidFill>
+                        <a:srgbClr val="1F2A40"/>
+                      </a:solidFill>
+                    </a:lnL>
+                    <a:lnR w="12700" cap="flat">
+                      <a:solidFill>
+                        <a:srgbClr val="1F2A40"/>
+                      </a:solidFill>
+                    </a:lnR>
+                    <a:lnT w="12700" cap="flat">
+                      <a:solidFill>
+                        <a:srgbClr val="1F2A40"/>
+                      </a:solidFill>
+                    </a:lnT>
+                    <a:lnB w="12700" cap="flat">
+                      <a:solidFill>
+                        <a:srgbClr val="1F2A40"/>
+                      </a:solidFill>
+                    </a:lnB>
+                  </a:tcPr>
+                </a:tc>
+                <a:tc>
+                  <a:txBody>
+                    <a:bodyPr/>
+                    <a:lstStyle/>
+                    <a:p>
+                      <a:r>
+                        <a:rPr sz="1300" b="0">
+                          <a:solidFill>
+                            <a:srgbClr val="8896B0"/>
+                          </a:solidFill>
+                          <a:latin typeface="Arial"/>
+                        </a:rPr>
+                        <a:t>Built to static files, served by the same process</a:t>
+                      </a:r>
+                    </a:p>
+                  </a:txBody>
+                  <a:tcPr anchor="ctr">
+                    <a:solidFill>
+                      <a:srgbClr val="0A0F1C"/>
+                    </a:solidFill>
+                    <a:lnL w="12700" cap="flat">
+                      <a:solidFill>
+                        <a:srgbClr val="1F2A40"/>
+                      </a:solidFill>
+                    </a:lnL>
+                    <a:lnR w="12700" cap="flat">
+                      <a:solidFill>
+                        <a:srgbClr val="1F2A40"/>
+                      </a:solidFill>
+                    </a:lnR>
+                    <a:lnT w="12700" cap="flat">
+                      <a:solidFill>
+                        <a:srgbClr val="1F2A40"/>
+                      </a:solidFill>
+                    </a:lnT>
+                    <a:lnB w="12700" cap="flat">
+                      <a:solidFill>
+                        <a:srgbClr val="1F2A40"/>
+                      </a:solidFill>
+                    </a:lnB>
+                  </a:tcPr>
+                </a:tc>
+              </a:tr>
+              <a:tr h="40640">
+                <a:tc>
+                  <a:txBody>
+                    <a:bodyPr/>
+                    <a:lstStyle/>
+                    <a:p>
+                      <a:r>
+                        <a:rPr sz="1300" b="1">
+                          <a:solidFill>
+                            <a:srgbClr val="E8EDF5"/>
+                          </a:solidFill>
+                          <a:latin typeface="Arial"/>
+                        </a:rPr>
+                        <a:t>Tests</a:t>
+                      </a:r>
+                    </a:p>
+                  </a:txBody>
+                  <a:tcPr anchor="ctr">
+                    <a:solidFill>
+                      <a:srgbClr val="0A0F1C"/>
+                    </a:solidFill>
+                    <a:lnL w="12700" cap="flat">
+                      <a:solidFill>
+                        <a:srgbClr val="1F2A40"/>
+                      </a:solidFill>
+                    </a:lnL>
+                    <a:lnR w="12700" cap="flat">
+                      <a:solidFill>
+                        <a:srgbClr val="1F2A40"/>
+                      </a:solidFill>
+                    </a:lnR>
+                    <a:lnT w="12700" cap="flat">
+                      <a:solidFill>
+                        <a:srgbClr val="1F2A40"/>
+                      </a:solidFill>
+                    </a:lnT>
+                    <a:lnB w="12700" cap="flat">
+                      <a:solidFill>
+                        <a:srgbClr val="1F2A40"/>
+                      </a:solidFill>
+                    </a:lnB>
+                  </a:tcPr>
+                </a:tc>
+                <a:tc>
+                  <a:txBody>
+                    <a:bodyPr/>
+                    <a:lstStyle/>
+                    <a:p>
+                      <a:r>
+                        <a:rPr sz="1300" b="0">
+                          <a:solidFill>
+                            <a:srgbClr val="8896B0"/>
+                          </a:solidFill>
+                          <a:latin typeface="Arial"/>
+                        </a:rPr>
+                        <a:t>pytest — 280 of them</a:t>
+                      </a:r>
+                    </a:p>
+                  </a:txBody>
+                  <a:tcPr anchor="ctr">
+                    <a:solidFill>
+                      <a:srgbClr val="0A0F1C"/>
+                    </a:solidFill>
+                    <a:lnL w="12700" cap="flat">
+                      <a:solidFill>
+                        <a:srgbClr val="1F2A40"/>
+                      </a:solidFill>
+                    </a:lnL>
+                    <a:lnR w="12700" cap="flat">
+                      <a:solidFill>
+                        <a:srgbClr val="1F2A40"/>
+                      </a:solidFill>
+                    </a:lnR>
+                    <a:lnT w="12700" cap="flat">
+                      <a:solidFill>
+                        <a:srgbClr val="1F2A40"/>
+                      </a:solidFill>
+                    </a:lnT>
+                    <a:lnB w="12700" cap="flat">
+                      <a:solidFill>
+                        <a:srgbClr val="1F2A40"/>
+                      </a:solidFill>
+                    </a:lnB>
+                  </a:tcPr>
+                </a:tc>
+                <a:tc>
+                  <a:txBody>
+                    <a:bodyPr/>
+                    <a:lstStyle/>
+                    <a:p>
+                      <a:r>
+                        <a:rPr sz="1300" b="0">
+                          <a:solidFill>
+                            <a:srgbClr val="8896B0"/>
+                          </a:solidFill>
+                          <a:latin typeface="Arial"/>
+                        </a:rPr>
+                        <a:t>Including deliberate fault injection</a:t>
+                      </a:r>
+                    </a:p>
+                  </a:txBody>
+                  <a:tcPr anchor="ctr">
+                    <a:solidFill>
+                      <a:srgbClr val="0A0F1C"/>
+                    </a:solidFill>
+                    <a:lnL w="12700" cap="flat">
+                      <a:solidFill>
+                        <a:srgbClr val="1F2A40"/>
+                      </a:solidFill>
+                    </a:lnL>
+                    <a:lnR w="12700" cap="flat">
+                      <a:solidFill>
+                        <a:srgbClr val="1F2A40"/>
+                      </a:solidFill>
+                    </a:lnR>
+                    <a:lnT w="12700" cap="flat">
+                      <a:solidFill>
+                        <a:srgbClr val="1F2A40"/>
+                      </a:solidFill>
+                    </a:lnT>
+                    <a:lnB w="12700" cap="flat">
+                      <a:solidFill>
+                        <a:srgbClr val="1F2A40"/>
+                      </a:solidFill>
+                    </a:lnB>
+                  </a:tcPr>
+                </a:tc>
+              </a:tr>
+            </a:tbl>
+          </a:graphicData>
+        </a:graphic>
+      </p:graphicFrame>
+      <p:sp>
+        <p:nvSpPr>
+          <p:cNvPr id="7" name="TextBox 6"/>
+          <p:cNvSpPr txBox="1"/>
+          <p:nvPr/>
+        </p:nvSpPr>
+        <p:spPr>
+          <a:xfrm>
+            <a:off x="685800" y="5943600"/>
+            <a:ext cx="10789920" cy="548640"/>
+          </a:xfrm>
+          <a:prstGeom prst="rect">
+            <a:avLst/>
+          </a:prstGeom>
+          <a:noFill/>
+        </p:spPr>
+        <p:txBody>
+          <a:bodyPr wrap="square" lIns="0" rIns="0" tIns="0" bIns="0">
+            <a:spAutoFit/>
+          </a:bodyPr>
+          <a:lstStyle/>
+          <a:p>
+            <a:pPr>
+              <a:spcAft>
+                <a:spcPts val="600"/>
+              </a:spcAft>
+            </a:pPr>
+            <a:r>
+              <a:rPr sz="1250" b="0">
+                <a:solidFill>
+                  <a:srgbClr val="8896B0"/>
+                </a:solidFill>
+                <a:latin typeface="Courier New"/>
+              </a:rPr>
+              <a:t>No orchestration framework. The pipeline is six modules and a function call chain.</a:t>
+            </a:r>
+          </a:p>
+        </p:txBody>
+      </p:sp>
+    </p:spTree>
+  </p:cSld>
+  <p:clrMapOvr>
+    <a:masterClrMapping/>
+  </p:clrMapOvr>
+</p:sld>
+</file>
+
+<file path=ppt/slides/slide6.xml><?xml version="1.0" encoding="utf-8"?>
+<p:sld xmlns:a="http://schemas.openxmlformats.org/drawingml/2006/main" xmlns:p="http://schemas.openxmlformats.org/presentationml/2006/main" xmlns:r="http://schemas.openxmlformats.org/officeDocument/2006/relationships">
+  <p:cSld>
+    <p:spTree>
+      <p:nvGrpSpPr>
+        <p:cNvPr id="1" name=""/>
+        <p:cNvGrpSpPr/>
+        <p:nvPr/>
+      </p:nvGrpSpPr>
+      <p:grpSpPr/>
+      <p:sp>
+        <p:nvSpPr>
+          <p:cNvPr id="2" name="Rectangle 1"/>
+          <p:cNvSpPr/>
+          <p:nvPr/>
+        </p:nvSpPr>
+        <p:spPr>
+          <a:xfrm>
+            <a:off x="0" y="0"/>
+            <a:ext cx="12191695" cy="6858000"/>
+          </a:xfrm>
+          <a:prstGeom prst="rect">
+            <a:avLst/>
+          </a:prstGeom>
+          <a:solidFill>
+            <a:srgbClr val="0A0F1C"/>
+          </a:solidFill>
+          <a:ln>
+            <a:noFill/>
+          </a:ln>
+          <a:effectLst/>
+        </p:spPr>
+        <p:style>
+          <a:lnRef idx="1">
+            <a:schemeClr val="accent1"/>
+          </a:lnRef>
+          <a:fillRef idx="3">
+            <a:schemeClr val="accent1"/>
+          </a:fillRef>
+          <a:effectRef idx="2">
+            <a:schemeClr val="accent1"/>
+          </a:effectRef>
+          <a:fontRef idx="minor">
+            <a:schemeClr val="lt1"/>
+          </a:fontRef>
+        </p:style>
+        <p:txBody>
+          <a:bodyPr rtlCol="0" anchor="ctr"/>
+          <a:lstStyle/>
+          <a:p>
+            <a:pPr algn="ctr"/>
+          </a:p>
+        </p:txBody>
+      </p:sp>
+      <p:sp>
+        <p:nvSpPr>
+          <p:cNvPr id="3" name="TextBox 2"/>
+          <p:cNvSpPr txBox="1"/>
+          <p:nvPr/>
+        </p:nvSpPr>
+        <p:spPr>
+          <a:xfrm>
+            <a:off x="685800" y="384048"/>
+            <a:ext cx="10058400" cy="274320"/>
+          </a:xfrm>
+          <a:prstGeom prst="rect">
+            <a:avLst/>
+          </a:prstGeom>
+          <a:noFill/>
+        </p:spPr>
+        <p:txBody>
+          <a:bodyPr wrap="square" lIns="0" rIns="0" tIns="0" bIns="0">
+            <a:spAutoFit/>
+          </a:bodyPr>
+          <a:lstStyle/>
+          <a:p>
+            <a:pPr>
+              <a:spcAft>
+                <a:spcPts val="600"/>
+              </a:spcAft>
+            </a:pPr>
+            <a:r>
+              <a:rPr sz="1100" b="1">
+                <a:solidFill>
+                  <a:srgbClr val="4B5975"/>
+                </a:solidFill>
+                <a:latin typeface="Courier New"/>
+              </a:rPr>
+              <a:t>THE PRODUCT · 1 OF 6</a:t>
+            </a:r>
+          </a:p>
+        </p:txBody>
+      </p:sp>
+      <p:sp>
+        <p:nvSpPr>
+          <p:cNvPr id="4" name="TextBox 3"/>
+          <p:cNvSpPr txBox="1"/>
+          <p:nvPr/>
+        </p:nvSpPr>
+        <p:spPr>
+          <a:xfrm>
+            <a:off x="685800" y="658368"/>
+            <a:ext cx="10789920" cy="457200"/>
+          </a:xfrm>
+          <a:prstGeom prst="rect">
+            <a:avLst/>
+          </a:prstGeom>
+          <a:noFill/>
+        </p:spPr>
+        <p:txBody>
+          <a:bodyPr wrap="square" lIns="0" rIns="0" tIns="0" bIns="0">
+            <a:spAutoFit/>
+          </a:bodyPr>
+          <a:lstStyle/>
+          <a:p>
+            <a:pPr>
+              <a:spcAft>
+                <a:spcPts val="600"/>
+              </a:spcAft>
+            </a:pPr>
+            <a:r>
+              <a:rPr sz="2400" b="1">
+                <a:solidFill>
+                  <a:srgbClr val="E8EDF5"/>
+                </a:solidFill>
+                <a:latin typeface="Arial"/>
+              </a:rPr>
+              <a:t>Describe the source in plain English</a:t>
+            </a:r>
+          </a:p>
+        </p:txBody>
+      </p:sp>
+      <p:pic>
+        <p:nvPicPr>
+          <p:cNvPr id="5" name="Picture 4" descr="01-welcome.png"/>
+          <p:cNvPicPr>
+            <a:picLocks noChangeAspect="1"/>
+          </p:cNvPicPr>
+          <p:nvPr/>
+        </p:nvPicPr>
+        <p:blipFill>
+          <a:blip r:embed="rId2"/>
+          <a:stretch>
+            <a:fillRect/>
+          </a:stretch>
+        </p:blipFill>
+        <p:spPr>
+          <a:xfrm>
+            <a:off x="1853031" y="1188720"/>
+            <a:ext cx="8485632" cy="4773168"/>
+          </a:xfrm>
+          <a:prstGeom prst="rect">
+            <a:avLst/>
+          </a:prstGeom>
+        </p:spPr>
+      </p:pic>
+      <p:sp>
+        <p:nvSpPr>
+          <p:cNvPr id="6" name="TextBox 5"/>
+          <p:cNvSpPr txBox="1"/>
+          <p:nvPr/>
+        </p:nvSpPr>
+        <p:spPr>
+          <a:xfrm>
+            <a:off x="685800" y="6108192"/>
+            <a:ext cx="10789920" cy="502920"/>
+          </a:xfrm>
+          <a:prstGeom prst="rect">
+            <a:avLst/>
+          </a:prstGeom>
+          <a:noFill/>
+        </p:spPr>
+        <p:txBody>
+          <a:bodyPr wrap="square" lIns="0" rIns="0" tIns="0" bIns="0">
+            <a:spAutoFit/>
+          </a:bodyPr>
+          <a:lstStyle/>
+          <a:p>
+            <a:pPr>
+              <a:spcAft>
+                <a:spcPts val="600"/>
+              </a:spcAft>
+            </a:pPr>
+            <a:r>
+              <a:rPr sz="1300" b="0">
+                <a:solidFill>
+                  <a:srgbClr val="8896B0"/>
+                </a:solidFill>
+                <a:latin typeface="Arial"/>
+              </a:rPr>
+              <a:t>No forms, no connection wizard. Three worked examples are built in for a cold start.</a:t>
+            </a:r>
+          </a:p>
+        </p:txBody>
+      </p:sp>
+    </p:spTree>
+  </p:cSld>
+  <p:clrMapOvr>
+    <a:masterClrMapping/>
+  </p:clrMapOvr>
+</p:sld>
+</file>
+
+<file path=ppt/slides/slide7.xml><?xml version="1.0" encoding="utf-8"?>
+<p:sld xmlns:a="http://schemas.openxmlformats.org/drawingml/2006/main" xmlns:p="http://schemas.openxmlformats.org/presentationml/2006/main" xmlns:r="http://schemas.openxmlformats.org/officeDocument/2006/relationships">
+  <p:cSld>
+    <p:spTree>
+      <p:nvGrpSpPr>
+        <p:cNvPr id="1" name=""/>
+        <p:cNvGrpSpPr/>
+        <p:nvPr/>
+      </p:nvGrpSpPr>
+      <p:grpSpPr/>
+      <p:sp>
+        <p:nvSpPr>
+          <p:cNvPr id="2" name="Rectangle 1"/>
+          <p:cNvSpPr/>
+          <p:nvPr/>
+        </p:nvSpPr>
+        <p:spPr>
+          <a:xfrm>
+            <a:off x="0" y="0"/>
+            <a:ext cx="12191695" cy="6858000"/>
+          </a:xfrm>
+          <a:prstGeom prst="rect">
+            <a:avLst/>
+          </a:prstGeom>
+          <a:solidFill>
+            <a:srgbClr val="0A0F1C"/>
+          </a:solidFill>
+          <a:ln>
+            <a:noFill/>
+          </a:ln>
+          <a:effectLst/>
+        </p:spPr>
+        <p:style>
+          <a:lnRef idx="1">
+            <a:schemeClr val="accent1"/>
+          </a:lnRef>
+          <a:fillRef idx="3">
+            <a:schemeClr val="accent1"/>
+          </a:fillRef>
+          <a:effectRef idx="2">
+            <a:schemeClr val="accent1"/>
+          </a:effectRef>
+          <a:fontRef idx="minor">
+            <a:schemeClr val="lt1"/>
+          </a:fontRef>
+        </p:style>
+        <p:txBody>
+          <a:bodyPr rtlCol="0" anchor="ctr"/>
+          <a:lstStyle/>
+          <a:p>
+            <a:pPr algn="ctr"/>
+          </a:p>
+        </p:txBody>
+      </p:sp>
+      <p:sp>
+        <p:nvSpPr>
+          <p:cNvPr id="3" name="TextBox 2"/>
+          <p:cNvSpPr txBox="1"/>
+          <p:nvPr/>
+        </p:nvSpPr>
+        <p:spPr>
+          <a:xfrm>
+            <a:off x="685800" y="384048"/>
+            <a:ext cx="10058400" cy="274320"/>
+          </a:xfrm>
+          <a:prstGeom prst="rect">
+            <a:avLst/>
+          </a:prstGeom>
+          <a:noFill/>
+        </p:spPr>
+        <p:txBody>
+          <a:bodyPr wrap="square" lIns="0" rIns="0" tIns="0" bIns="0">
+            <a:spAutoFit/>
+          </a:bodyPr>
+          <a:lstStyle/>
+          <a:p>
+            <a:pPr>
+              <a:spcAft>
+                <a:spcPts val="600"/>
+              </a:spcAft>
+            </a:pPr>
+            <a:r>
+              <a:rPr sz="1100" b="1">
+                <a:solidFill>
+                  <a:srgbClr val="4B5975"/>
+                </a:solidFill>
+                <a:latin typeface="Courier New"/>
+              </a:rPr>
+              <a:t>THE PRODUCT · 2 OF 6</a:t>
+            </a:r>
+          </a:p>
+        </p:txBody>
+      </p:sp>
+      <p:sp>
+        <p:nvSpPr>
+          <p:cNvPr id="4" name="TextBox 3"/>
+          <p:cNvSpPr txBox="1"/>
+          <p:nvPr/>
+        </p:nvSpPr>
+        <p:spPr>
+          <a:xfrm>
+            <a:off x="685800" y="658368"/>
+            <a:ext cx="10789920" cy="457200"/>
+          </a:xfrm>
+          <a:prstGeom prst="rect">
+            <a:avLst/>
+          </a:prstGeom>
+          <a:noFill/>
+        </p:spPr>
+        <p:txBody>
+          <a:bodyPr wrap="square" lIns="0" rIns="0" tIns="0" bIns="0">
+            <a:spAutoFit/>
+          </a:bodyPr>
+          <a:lstStyle/>
+          <a:p>
+            <a:pPr>
+              <a:spcAft>
+                <a:spcPts val="600"/>
+              </a:spcAft>
+            </a:pPr>
+            <a:r>
+              <a:rPr sz="2400" b="1">
+                <a:solidFill>
+                  <a:srgbClr val="E8EDF5"/>
+                </a:solidFill>
+                <a:latin typeface="Arial"/>
+              </a:rPr>
+              <a:t>When the request is incomplete, the agent asks</a:t>
+            </a:r>
+          </a:p>
+        </p:txBody>
+      </p:sp>
+      <p:pic>
+        <p:nvPicPr>
+          <p:cNvPr id="5" name="Picture 4" descr="02-clarification.png"/>
+          <p:cNvPicPr>
+            <a:picLocks noChangeAspect="1"/>
+          </p:cNvPicPr>
+          <p:nvPr/>
+        </p:nvPicPr>
+        <p:blipFill>
+          <a:blip r:embed="rId2"/>
+          <a:stretch>
+            <a:fillRect/>
+          </a:stretch>
+        </p:blipFill>
+        <p:spPr>
+          <a:xfrm>
+            <a:off x="1853031" y="1188720"/>
+            <a:ext cx="8485632" cy="4773168"/>
+          </a:xfrm>
+          <a:prstGeom prst="rect">
+            <a:avLst/>
+          </a:prstGeom>
+        </p:spPr>
+      </p:pic>
+      <p:sp>
+        <p:nvSpPr>
+          <p:cNvPr id="6" name="TextBox 5"/>
+          <p:cNvSpPr txBox="1"/>
+          <p:nvPr/>
+        </p:nvSpPr>
+        <p:spPr>
+          <a:xfrm>
+            <a:off x="685800" y="6108192"/>
+            <a:ext cx="10789920" cy="502920"/>
+          </a:xfrm>
+          <a:prstGeom prst="rect">
+            <a:avLst/>
+          </a:prstGeom>
+          <a:noFill/>
+        </p:spPr>
+        <p:txBody>
+          <a:bodyPr wrap="square" lIns="0" rIns="0" tIns="0" bIns="0">
+            <a:spAutoFit/>
+          </a:bodyPr>
+          <a:lstStyle/>
+          <a:p>
+            <a:pPr>
+              <a:spcAft>
+                <a:spcPts val="600"/>
+              </a:spcAft>
+            </a:pPr>
+            <a:r>
+              <a:rPr sz="1300" b="0">
+                <a:solidFill>
+                  <a:srgbClr val="8896B0"/>
+                </a:solidFill>
+                <a:latin typeface="Arial"/>
+              </a:rPr>
+              <a:t>Host was never stated, so it is not invented. Confidence drops to 55%, the missing field is named, and the question carries an example.</a:t>
+            </a:r>
+          </a:p>
+        </p:txBody>
+      </p:sp>
+    </p:spTree>
+  </p:cSld>
+  <p:clrMapOvr>
+    <a:masterClrMapping/>
+  </p:clrMapOvr>
+</p:sld>
+</file>
+
 <file path=ppt/slides/slide8.xml><?xml version="1.0" encoding="utf-8"?>
 <p:sld xmlns:a="http://schemas.openxmlformats.org/drawingml/2006/main" xmlns:p="http://schemas.openxmlformats.org/presentationml/2006/main" xmlns:r="http://schemas.openxmlformats.org/officeDocument/2006/relationships">
   <p:cSld>
@@ -13404,7 +9116,7 @@
                 </a:solidFill>
                 <a:latin typeface="Courier New"/>
               </a:rPr>
-              <a:t>THE PRODUCT · 1 OF 6</a:t>
+              <a:t>THE PRODUCT · 3 OF 6</a:t>
             </a:r>
           </a:p>
         </p:txBody>
@@ -13443,14 +9155,14 @@
                 </a:solidFill>
                 <a:latin typeface="Arial"/>
               </a:rPr>
-              <a:t>Describe the source in plain English</a:t>
+              <a:t>Extraction, generation, and the standards gate</a:t>
             </a:r>
           </a:p>
         </p:txBody>
       </p:sp>
       <p:pic>
         <p:nvPicPr>
-          <p:cNvPr id="5" name="Picture 4" descr="01-welcome.png"/>
+          <p:cNvPr id="5" name="Picture 4" descr="04-standards.png"/>
           <p:cNvPicPr>
             <a:picLocks noChangeAspect="1"/>
           </p:cNvPicPr>
@@ -13506,7 +9218,7 @@
                 </a:solidFill>
                 <a:latin typeface="Arial"/>
               </a:rPr>
-              <a:t>No forms, no connection wizard. Three worked examples are built in for a cold start.</a:t>
+              <a:t>Everything the agent understood is shown for review — including what it assumed. 13 of 13 checks pass, so the artifact is accepted.</a:t>
             </a:r>
           </a:p>
         </p:txBody>
@@ -13607,7 +9319,7 @@
                 </a:solidFill>
                 <a:latin typeface="Courier New"/>
               </a:rPr>
-              <a:t>THE PRODUCT · 2 OF 6</a:t>
+              <a:t>THE PRODUCT · 4 OF 6</a:t>
             </a:r>
           </a:p>
         </p:txBody>
@@ -13646,14 +9358,14 @@
                 </a:solidFill>
                 <a:latin typeface="Arial"/>
               </a:rPr>
-              <a:t>When the request is incomplete, the agent asks</a:t>
+              <a:t>The generated connector</a:t>
             </a:r>
           </a:p>
         </p:txBody>
       </p:sp>
       <p:pic>
         <p:nvPicPr>
-          <p:cNvPr id="5" name="Picture 4" descr="02-clarification.png"/>
+          <p:cNvPr id="5" name="Picture 4" descr="05-code.png"/>
           <p:cNvPicPr>
             <a:picLocks noChangeAspect="1"/>
           </p:cNvPicPr>
@@ -13709,7 +9421,7 @@
                 </a:solidFill>
                 <a:latin typeface="Arial"/>
               </a:rPr>
-              <a:t>Host was never stated, so it is not invented. Confidence drops to 55%, the missing field isnamed, and the question carries an example — a templated question, not model-authored prose.</a:t>
+              <a:t>Provenance above the code: template version, spec checksum, code checksum, repair count. Written by a template, never by the model.</a:t>
             </a:r>
           </a:p>
         </p:txBody>

--- a/docs/Data-Source-Onboarding-Agent.pptx
+++ b/docs/Data-Source-Onboarding-Agent.pptx
@@ -16,6 +16,7 @@
     <p:sldId id="264" r:id="rId15"/>
     <p:sldId id="265" r:id="rId16"/>
     <p:sldId id="266" r:id="rId17"/>
+    <p:sldId id="267" r:id="rId18"/>
   </p:sldIdLst>
   <p:sldSz cx="12191695" cy="6858000" type="screen4x3"/>
   <p:notesSz cx="6858000" cy="9144000"/>
@@ -3682,6 +3683,380 @@
                 <a:latin typeface="Arial"/>
               </a:rPr>
               <a:t>Connector, README, requirements, explanation and a manifest, packaged as a versioned zip. The model reads intent; the template writes the code; the checker decides what ships.</a:t>
+            </a:r>
+          </a:p>
+        </p:txBody>
+      </p:sp>
+    </p:spTree>
+  </p:cSld>
+  <p:clrMapOvr>
+    <a:masterClrMapping/>
+  </p:clrMapOvr>
+</p:sld>
+</file>
+
+<file path=ppt/slides/slide12.xml><?xml version="1.0" encoding="utf-8"?>
+<p:sld xmlns:a="http://schemas.openxmlformats.org/drawingml/2006/main" xmlns:p="http://schemas.openxmlformats.org/presentationml/2006/main" xmlns:r="http://schemas.openxmlformats.org/officeDocument/2006/relationships">
+  <p:cSld>
+    <p:spTree>
+      <p:nvGrpSpPr>
+        <p:cNvPr id="1" name=""/>
+        <p:cNvGrpSpPr/>
+        <p:nvPr/>
+      </p:nvGrpSpPr>
+      <p:grpSpPr/>
+      <p:sp>
+        <p:nvSpPr>
+          <p:cNvPr id="2" name="Rectangle 1"/>
+          <p:cNvSpPr/>
+          <p:nvPr/>
+        </p:nvSpPr>
+        <p:spPr>
+          <a:xfrm>
+            <a:off x="0" y="0"/>
+            <a:ext cx="12191695" cy="6858000"/>
+          </a:xfrm>
+          <a:prstGeom prst="rect">
+            <a:avLst/>
+          </a:prstGeom>
+          <a:solidFill>
+            <a:srgbClr val="0A0F1C"/>
+          </a:solidFill>
+          <a:ln>
+            <a:noFill/>
+          </a:ln>
+          <a:effectLst/>
+        </p:spPr>
+        <p:style>
+          <a:lnRef idx="1">
+            <a:schemeClr val="accent1"/>
+          </a:lnRef>
+          <a:fillRef idx="3">
+            <a:schemeClr val="accent1"/>
+          </a:fillRef>
+          <a:effectRef idx="2">
+            <a:schemeClr val="accent1"/>
+          </a:effectRef>
+          <a:fontRef idx="minor">
+            <a:schemeClr val="lt1"/>
+          </a:fontRef>
+        </p:style>
+        <p:txBody>
+          <a:bodyPr rtlCol="0" anchor="ctr"/>
+          <a:lstStyle/>
+          <a:p>
+            <a:pPr algn="ctr"/>
+          </a:p>
+        </p:txBody>
+      </p:sp>
+      <p:sp>
+        <p:nvSpPr>
+          <p:cNvPr id="3" name="TextBox 2"/>
+          <p:cNvSpPr txBox="1"/>
+          <p:nvPr/>
+        </p:nvSpPr>
+        <p:spPr>
+          <a:xfrm>
+            <a:off x="685800" y="457200"/>
+            <a:ext cx="10058400" cy="274320"/>
+          </a:xfrm>
+          <a:prstGeom prst="rect">
+            <a:avLst/>
+          </a:prstGeom>
+          <a:noFill/>
+        </p:spPr>
+        <p:txBody>
+          <a:bodyPr wrap="square" lIns="0" rIns="0" tIns="0" bIns="0">
+            <a:spAutoFit/>
+          </a:bodyPr>
+          <a:lstStyle/>
+          <a:p>
+            <a:pPr>
+              <a:spcAft>
+                <a:spcPts val="600"/>
+              </a:spcAft>
+            </a:pPr>
+            <a:r>
+              <a:rPr sz="1100" b="1">
+                <a:solidFill>
+                  <a:srgbClr val="4B5975"/>
+                </a:solidFill>
+                <a:latin typeface="Courier New"/>
+              </a:rPr>
+              <a:t>LONGEVITY</a:t>
+            </a:r>
+          </a:p>
+        </p:txBody>
+      </p:sp>
+      <p:sp>
+        <p:nvSpPr>
+          <p:cNvPr id="4" name="TextBox 3"/>
+          <p:cNvSpPr txBox="1"/>
+          <p:nvPr/>
+        </p:nvSpPr>
+        <p:spPr>
+          <a:xfrm>
+            <a:off x="685800" y="777240"/>
+            <a:ext cx="10789920" cy="914400"/>
+          </a:xfrm>
+          <a:prstGeom prst="rect">
+            <a:avLst/>
+          </a:prstGeom>
+          <a:noFill/>
+        </p:spPr>
+        <p:txBody>
+          <a:bodyPr wrap="square" lIns="0" rIns="0" tIns="0" bIns="0">
+            <a:spAutoFit/>
+          </a:bodyPr>
+          <a:lstStyle/>
+          <a:p>
+            <a:pPr>
+              <a:spcAft>
+                <a:spcPts val="600"/>
+              </a:spcAft>
+            </a:pPr>
+            <a:r>
+              <a:rPr sz="3000" b="1">
+                <a:solidFill>
+                  <a:srgbClr val="E8EDF5"/>
+                </a:solidFill>
+                <a:latin typeface="Arial"/>
+              </a:rPr>
+              <a:t>Six months later, when someone asks why</a:t>
+            </a:r>
+          </a:p>
+        </p:txBody>
+      </p:sp>
+      <p:sp>
+        <p:nvSpPr>
+          <p:cNvPr id="5" name="Rectangle 4"/>
+          <p:cNvSpPr/>
+          <p:nvPr/>
+        </p:nvSpPr>
+        <p:spPr>
+          <a:xfrm>
+            <a:off x="685800" y="1691640"/>
+            <a:ext cx="10789920" cy="9525"/>
+          </a:xfrm>
+          <a:prstGeom prst="rect">
+            <a:avLst/>
+          </a:prstGeom>
+          <a:solidFill>
+            <a:srgbClr val="1F2A40"/>
+          </a:solidFill>
+          <a:ln>
+            <a:noFill/>
+          </a:ln>
+          <a:effectLst/>
+        </p:spPr>
+        <p:style>
+          <a:lnRef idx="1">
+            <a:schemeClr val="accent1"/>
+          </a:lnRef>
+          <a:fillRef idx="3">
+            <a:schemeClr val="accent1"/>
+          </a:fillRef>
+          <a:effectRef idx="2">
+            <a:schemeClr val="accent1"/>
+          </a:effectRef>
+          <a:fontRef idx="minor">
+            <a:schemeClr val="lt1"/>
+          </a:fontRef>
+        </p:style>
+        <p:txBody>
+          <a:bodyPr rtlCol="0" anchor="ctr"/>
+          <a:lstStyle/>
+          <a:p>
+            <a:pPr algn="ctr"/>
+          </a:p>
+        </p:txBody>
+      </p:sp>
+      <p:sp>
+        <p:nvSpPr>
+          <p:cNvPr id="6" name="TextBox 5"/>
+          <p:cNvSpPr txBox="1"/>
+          <p:nvPr/>
+        </p:nvSpPr>
+        <p:spPr>
+          <a:xfrm>
+            <a:off x="685800" y="1965960"/>
+            <a:ext cx="10789920" cy="4023360"/>
+          </a:xfrm>
+          <a:prstGeom prst="rect">
+            <a:avLst/>
+          </a:prstGeom>
+          <a:noFill/>
+        </p:spPr>
+        <p:txBody>
+          <a:bodyPr wrap="square" lIns="0" rIns="0" tIns="0" bIns="0">
+            <a:spAutoFit/>
+          </a:bodyPr>
+          <a:lstStyle/>
+          <a:p>
+            <a:pPr>
+              <a:spcAft>
+                <a:spcPts val="300"/>
+              </a:spcAft>
+            </a:pPr>
+            <a:r>
+              <a:rPr sz="1700" b="1">
+                <a:solidFill>
+                  <a:srgbClr val="E8EDF5"/>
+                </a:solidFill>
+                <a:latin typeface="Arial"/>
+              </a:rPr>
+              <a:t>Every artifact carries four independent identities</a:t>
+            </a:r>
+          </a:p>
+          <a:p>
+            <a:pPr>
+              <a:spcAft>
+                <a:spcPts val="1600"/>
+              </a:spcAft>
+            </a:pPr>
+            <a:r>
+              <a:rPr sz="1450" b="0">
+                <a:solidFill>
+                  <a:srgbClr val="8896B0"/>
+                </a:solidFill>
+                <a:latin typeface="Arial"/>
+              </a:rPr>
+              <a:t>The template version that shaped it, a checksum of the request it came from, a checksum of the exact bytes emitted, and a version whose patch number is the repair count — so 1.0.2 reads as “template 1.0, needed two repair passes”, and a connector that struggled is visible at a glance.</a:t>
+            </a:r>
+          </a:p>
+          <a:p>
+            <a:pPr>
+              <a:spcAft>
+                <a:spcPts val="300"/>
+              </a:spcAft>
+            </a:pPr>
+            <a:r>
+              <a:rPr sz="1700" b="1">
+                <a:solidFill>
+                  <a:srgbClr val="E8EDF5"/>
+                </a:solidFill>
+                <a:latin typeface="Arial"/>
+              </a:rPr>
+              <a:t>Packaging is byte-reproducible</a:t>
+            </a:r>
+          </a:p>
+          <a:p>
+            <a:pPr>
+              <a:spcAft>
+                <a:spcPts val="1600"/>
+              </a:spcAft>
+            </a:pPr>
+            <a:r>
+              <a:rPr sz="1450" b="0">
+                <a:solidFill>
+                  <a:srgbClr val="8896B0"/>
+                </a:solidFill>
+                <a:latin typeface="Arial"/>
+              </a:rPr>
+              <a:t>The bundle is written with a fixed timestamp rather than the clock, so building the same artifact twice produces identical bytes. “Is this the file we shipped?” becomes a comparison instead of a memory.</a:t>
+            </a:r>
+          </a:p>
+          <a:p>
+            <a:pPr>
+              <a:spcAft>
+                <a:spcPts val="300"/>
+              </a:spcAft>
+            </a:pPr>
+            <a:r>
+              <a:rPr sz="1700" b="1">
+                <a:solidFill>
+                  <a:srgbClr val="E8EDF5"/>
+                </a:solidFill>
+                <a:latin typeface="Arial"/>
+              </a:rPr>
+              <a:t>The parts that change most often are data, not code</a:t>
+            </a:r>
+          </a:p>
+          <a:p>
+            <a:pPr>
+              <a:spcAft>
+                <a:spcPts val="1600"/>
+              </a:spcAft>
+            </a:pPr>
+            <a:r>
+              <a:rPr sz="1450" b="0">
+                <a:solidFill>
+                  <a:srgbClr val="8896B0"/>
+                </a:solidFill>
+                <a:latin typeface="Arial"/>
+              </a:rPr>
+              <a:t>Source types are generated from a JSON file at import — one entry brings the dialect profile, the clarifying-question options and the registry key with it. Adding a fourteenth standards check is one function and one list entry.</a:t>
+            </a:r>
+          </a:p>
+          <a:p>
+            <a:pPr>
+              <a:spcAft>
+                <a:spcPts val="300"/>
+              </a:spcAft>
+            </a:pPr>
+            <a:r>
+              <a:rPr sz="1700" b="1">
+                <a:solidFill>
+                  <a:srgbClr val="E8EDF5"/>
+                </a:solidFill>
+                <a:latin typeface="Arial"/>
+              </a:rPr>
+              <a:t>Where that stops being true, it is written down</a:t>
+            </a:r>
+          </a:p>
+          <a:p>
+            <a:pPr>
+              <a:spcAft>
+                <a:spcPts val="1600"/>
+              </a:spcAft>
+            </a:pPr>
+            <a:r>
+              <a:rPr sz="1450" b="0">
+                <a:solidFill>
+                  <a:srgbClr val="8896B0"/>
+                </a:solidFill>
+                <a:latin typeface="Arial"/>
+              </a:rPr>
+              <a:t>Oracle is a config change; Snowflake needs a new authentication method as well, because key-pair and SSO do not fit the username/password shape. Saying which is which is more useful than claiming both are easy.</a:t>
+            </a:r>
+          </a:p>
+        </p:txBody>
+      </p:sp>
+      <p:sp>
+        <p:nvSpPr>
+          <p:cNvPr id="7" name="TextBox 6"/>
+          <p:cNvSpPr txBox="1"/>
+          <p:nvPr/>
+        </p:nvSpPr>
+        <p:spPr>
+          <a:xfrm>
+            <a:off x="685800" y="5989320"/>
+            <a:ext cx="10789920" cy="548640"/>
+          </a:xfrm>
+          <a:prstGeom prst="rect">
+            <a:avLst/>
+          </a:prstGeom>
+          <a:noFill/>
+        </p:spPr>
+        <p:txBody>
+          <a:bodyPr wrap="square" lIns="0" rIns="0" tIns="0" bIns="0">
+            <a:spAutoFit/>
+          </a:bodyPr>
+          <a:lstStyle/>
+          <a:p>
+            <a:pPr>
+              <a:spcAft>
+                <a:spcPts val="600"/>
+              </a:spcAft>
+            </a:pPr>
+            <a:r>
+              <a:rPr sz="1250" b="0">
+                <a:solidFill>
+                  <a:srgbClr val="8896B0"/>
+                </a:solidFill>
+                <a:latin typeface="Courier New"/>
+              </a:rPr>
+              <a:t>None of this depends on someone remembering to fill it in — provenance is recorded by the pipeline that produces the artifact.</a:t>
             </a:r>
           </a:p>
         </p:txBody>

--- a/docs/Data-Source-Onboarding-Agent.pptx
+++ b/docs/Data-Source-Onboarding-Agent.pptx
@@ -3783,7 +3783,7 @@
                 </a:solidFill>
                 <a:latin typeface="Courier New"/>
               </a:rPr>
-              <a:t>LONGEVITY</a:t>
+              <a:t>CONCLUSION</a:t>
             </a:r>
           </a:p>
         </p:txBody>
@@ -3822,7 +3822,7 @@
                 </a:solidFill>
                 <a:latin typeface="Arial"/>
               </a:rPr>
-              <a:t>Six months later, when someone asks why</a:t>
+              <a:t>Standards you can prove, not standards you hope for</a:t>
             </a:r>
           </a:p>
         </p:txBody>
@@ -3905,7 +3905,7 @@
                 </a:solidFill>
                 <a:latin typeface="Arial"/>
               </a:rPr>
-              <a:t>Every artifact carries four independent identities</a:t>
+              <a:t>It works end to end, today</a:t>
             </a:r>
           </a:p>
           <a:p>
@@ -3921,7 +3921,7 @@
                 </a:solidFill>
                 <a:latin typeface="Arial"/>
               </a:rPr>
-              <a:t>The template version that shaped it, a checksum of the request it came from, a checksum of the exact bytes emitted, and a version whose patch number is the repair count — so 1.0.2 reads as “template 1.0, needed two repair passes”, and a connector that struggled is visible at a glance.</a:t>
+              <a:t>Plain English to a spec, a spec to a rendered connector, thirteen machine checks, a live connection test against a real PostgreSQL, and a versioned bundle you can hand over. Every screenshot in this deck is that pipeline running — none of it is a mockup.</a:t>
             </a:r>
           </a:p>
           <a:p>
@@ -3937,7 +3937,7 @@
                 </a:solidFill>
                 <a:latin typeface="Arial"/>
               </a:rPr>
-              <a:t>Packaging is byte-reproducible</a:t>
+              <a:t>The guarantee is structural, not aspirational</a:t>
             </a:r>
           </a:p>
           <a:p>
@@ -3953,7 +3953,7 @@
                 </a:solidFill>
                 <a:latin typeface="Arial"/>
               </a:rPr>
-              <a:t>The bundle is written with a fixed timestamp rather than the clock, so building the same artifact twice produces identical bytes. “Is this the file we shipped?” becomes a comparison instead of a memory.</a:t>
+              <a:t>The model fills a form; a template writes the code; a checker decides what ships. That separation is why the promise holds for the fortieth connector and not just the one being demonstrated.</a:t>
             </a:r>
           </a:p>
           <a:p>
@@ -3969,7 +3969,7 @@
                 </a:solidFill>
                 <a:latin typeface="Arial"/>
               </a:rPr>
-              <a:t>The parts that change most often are data, not code</a:t>
+              <a:t>Every artifact can account for itself</a:t>
             </a:r>
           </a:p>
           <a:p>
@@ -3985,7 +3985,7 @@
                 </a:solidFill>
                 <a:latin typeface="Arial"/>
               </a:rPr>
-              <a:t>Source types are generated from a JSON file at import — one entry brings the dialect profile, the clarifying-question options and the registry key with it. Adding a fourteenth standards check is one function and one list entry.</a:t>
+              <a:t>Template version, spec checksum, code checksum, and a repair count carried in the version number — packaged byte-reproducibly. Six months on, “why is this in production?” is a lookup rather than an argument.</a:t>
             </a:r>
           </a:p>
           <a:p>
@@ -4001,7 +4001,7 @@
                 </a:solidFill>
                 <a:latin typeface="Arial"/>
               </a:rPr>
-              <a:t>Where that stops being true, it is written down</a:t>
+              <a:t>It runs where the team runs</a:t>
             </a:r>
           </a:p>
           <a:p>
@@ -4017,7 +4017,7 @@
                 </a:solidFill>
                 <a:latin typeface="Arial"/>
               </a:rPr>
-              <a:t>Oracle is a config change; Snowflake needs a new authentication method as well, because key-pair and SSO do not fit the username/password shape. Saying which is which is more useful than claiming both are easy.</a:t>
+              <a:t>macOS, Linux and Windows, with the cross-platform invariants asserted by the test suite rather than assumed — so a change that would only break one of them fails on all of them.</a:t>
             </a:r>
           </a:p>
         </p:txBody>
@@ -4056,7 +4056,7 @@
                 </a:solidFill>
                 <a:latin typeface="Courier New"/>
               </a:rPr>
-              <a:t>None of this depends on someone remembering to fill it in — provenance is recorded by the pipeline that produces the artifact.</a:t>
+              <a:t>294 tests · 13 standards checks · 4 source types · 100% conformance on accepted artifacts</a:t>
             </a:r>
           </a:p>
         </p:txBody>
@@ -8873,7 +8873,7 @@
                           </a:solidFill>
                           <a:latin typeface="Arial"/>
                         </a:rPr>
-                        <a:t>pytest — 280 of them</a:t>
+                        <a:t>pytest — 294 of them</a:t>
                       </a:r>
                     </a:p>
                   </a:txBody>

--- a/docs/Data-Source-Onboarding-Agent.pptx
+++ b/docs/Data-Source-Onboarding-Agent.pptx
@@ -17,6 +17,7 @@
     <p:sldId id="265" r:id="rId16"/>
     <p:sldId id="266" r:id="rId17"/>
     <p:sldId id="267" r:id="rId18"/>
+    <p:sldId id="268" r:id="rId19"/>
   </p:sldIdLst>
   <p:sldSz cx="12191695" cy="6858000" type="screen4x3"/>
   <p:notesSz cx="6858000" cy="9144000"/>
@@ -3696,6 +3697,1147 @@
 </file>
 
 <file path=ppt/slides/slide12.xml><?xml version="1.0" encoding="utf-8"?>
+<p:sld xmlns:a="http://schemas.openxmlformats.org/drawingml/2006/main" xmlns:p="http://schemas.openxmlformats.org/presentationml/2006/main" xmlns:r="http://schemas.openxmlformats.org/officeDocument/2006/relationships">
+  <p:cSld>
+    <p:spTree>
+      <p:nvGrpSpPr>
+        <p:cNvPr id="1" name=""/>
+        <p:cNvGrpSpPr/>
+        <p:nvPr/>
+      </p:nvGrpSpPr>
+      <p:grpSpPr/>
+      <p:sp>
+        <p:nvSpPr>
+          <p:cNvPr id="2" name="Rectangle 1"/>
+          <p:cNvSpPr/>
+          <p:nvPr/>
+        </p:nvSpPr>
+        <p:spPr>
+          <a:xfrm>
+            <a:off x="0" y="0"/>
+            <a:ext cx="12191695" cy="6858000"/>
+          </a:xfrm>
+          <a:prstGeom prst="rect">
+            <a:avLst/>
+          </a:prstGeom>
+          <a:solidFill>
+            <a:srgbClr val="0A0F1C"/>
+          </a:solidFill>
+          <a:ln>
+            <a:noFill/>
+          </a:ln>
+          <a:effectLst/>
+        </p:spPr>
+        <p:style>
+          <a:lnRef idx="1">
+            <a:schemeClr val="accent1"/>
+          </a:lnRef>
+          <a:fillRef idx="3">
+            <a:schemeClr val="accent1"/>
+          </a:fillRef>
+          <a:effectRef idx="2">
+            <a:schemeClr val="accent1"/>
+          </a:effectRef>
+          <a:fontRef idx="minor">
+            <a:schemeClr val="lt1"/>
+          </a:fontRef>
+        </p:style>
+        <p:txBody>
+          <a:bodyPr rtlCol="0" anchor="ctr"/>
+          <a:lstStyle/>
+          <a:p>
+            <a:pPr algn="ctr"/>
+          </a:p>
+        </p:txBody>
+      </p:sp>
+      <p:sp>
+        <p:nvSpPr>
+          <p:cNvPr id="3" name="TextBox 2"/>
+          <p:cNvSpPr txBox="1"/>
+          <p:nvPr/>
+        </p:nvSpPr>
+        <p:spPr>
+          <a:xfrm>
+            <a:off x="685800" y="457200"/>
+            <a:ext cx="10058400" cy="274320"/>
+          </a:xfrm>
+          <a:prstGeom prst="rect">
+            <a:avLst/>
+          </a:prstGeom>
+          <a:noFill/>
+        </p:spPr>
+        <p:txBody>
+          <a:bodyPr wrap="square" lIns="0" rIns="0" tIns="0" bIns="0">
+            <a:spAutoFit/>
+          </a:bodyPr>
+          <a:lstStyle/>
+          <a:p>
+            <a:pPr>
+              <a:spcAft>
+                <a:spcPts val="600"/>
+              </a:spcAft>
+            </a:pPr>
+            <a:r>
+              <a:rPr sz="1100" b="1">
+                <a:solidFill>
+                  <a:srgbClr val="4B5975"/>
+                </a:solidFill>
+                <a:latin typeface="Courier New"/>
+              </a:rPr>
+              <a:t>FUTURE SCOPE</a:t>
+            </a:r>
+          </a:p>
+        </p:txBody>
+      </p:sp>
+      <p:sp>
+        <p:nvSpPr>
+          <p:cNvPr id="4" name="TextBox 3"/>
+          <p:cNvSpPr txBox="1"/>
+          <p:nvPr/>
+        </p:nvSpPr>
+        <p:spPr>
+          <a:xfrm>
+            <a:off x="685800" y="777240"/>
+            <a:ext cx="10789920" cy="914400"/>
+          </a:xfrm>
+          <a:prstGeom prst="rect">
+            <a:avLst/>
+          </a:prstGeom>
+          <a:noFill/>
+        </p:spPr>
+        <p:txBody>
+          <a:bodyPr wrap="square" lIns="0" rIns="0" tIns="0" bIns="0">
+            <a:spAutoFit/>
+          </a:bodyPr>
+          <a:lstStyle/>
+          <a:p>
+            <a:pPr>
+              <a:spcAft>
+                <a:spcPts val="600"/>
+              </a:spcAft>
+            </a:pPr>
+            <a:r>
+              <a:rPr sz="2700" b="1">
+                <a:solidFill>
+                  <a:srgbClr val="E8EDF5"/>
+                </a:solidFill>
+                <a:latin typeface="Arial"/>
+              </a:rPr>
+              <a:t>From a working system to a production one</a:t>
+            </a:r>
+          </a:p>
+        </p:txBody>
+      </p:sp>
+      <p:sp>
+        <p:nvSpPr>
+          <p:cNvPr id="5" name="TextBox 4"/>
+          <p:cNvSpPr txBox="1"/>
+          <p:nvPr/>
+        </p:nvSpPr>
+        <p:spPr>
+          <a:xfrm>
+            <a:off x="685800" y="1481328"/>
+            <a:ext cx="10241280" cy="731520"/>
+          </a:xfrm>
+          <a:prstGeom prst="rect">
+            <a:avLst/>
+          </a:prstGeom>
+          <a:noFill/>
+        </p:spPr>
+        <p:txBody>
+          <a:bodyPr wrap="square" lIns="0" rIns="0" tIns="0" bIns="0">
+            <a:spAutoFit/>
+          </a:bodyPr>
+          <a:lstStyle/>
+          <a:p>
+            <a:pPr>
+              <a:spcAft>
+                <a:spcPts val="600"/>
+              </a:spcAft>
+            </a:pPr>
+            <a:r>
+              <a:rPr sz="1500" b="0">
+                <a:solidFill>
+                  <a:srgbClr val="8896B0"/>
+                </a:solidFill>
+                <a:latin typeface="Arial"/>
+              </a:rPr>
+              <a:t>None of this is a redesign — every row swaps one component behind an interface that already exists.</a:t>
+            </a:r>
+          </a:p>
+        </p:txBody>
+      </p:sp>
+      <p:graphicFrame>
+        <p:nvGraphicFramePr>
+          <p:cNvPr id="6" name="Table 5"/>
+          <p:cNvGraphicFramePr>
+            <a:graphicFrameLocks noGrp="1"/>
+          </p:cNvGraphicFramePr>
+          <p:nvPr/>
+        </p:nvGraphicFramePr>
+        <p:xfrm>
+          <a:off x="685800" y="2249424"/>
+          <a:ext cx="10789920" cy="365760"/>
+        </p:xfrm>
+        <a:graphic>
+          <a:graphicData uri="http://schemas.openxmlformats.org/drawingml/2006/table">
+            <a:tbl>
+              <a:tblPr firstRow="1" bandRow="1">
+                <a:tableStyleId>{5C22544A-7EE6-4342-B048-85BDC9FD1C3A}</a:tableStyleId>
+              </a:tblPr>
+              <a:tblGrid>
+                <a:gridCol w="3596640"/>
+                <a:gridCol w="3596640"/>
+                <a:gridCol w="3596640"/>
+              </a:tblGrid>
+              <a:tr h="52251">
+                <a:tc>
+                  <a:txBody>
+                    <a:bodyPr/>
+                    <a:lstStyle/>
+                    <a:p>
+                      <a:r>
+                        <a:rPr sz="1200" b="1">
+                          <a:solidFill>
+                            <a:srgbClr val="8896B0"/>
+                          </a:solidFill>
+                          <a:latin typeface="Courier New"/>
+                        </a:rPr>
+                        <a:t>Area</a:t>
+                      </a:r>
+                    </a:p>
+                  </a:txBody>
+                  <a:tcPr anchor="ctr">
+                    <a:solidFill>
+                      <a:srgbClr val="111827"/>
+                    </a:solidFill>
+                    <a:lnL w="12700" cap="flat">
+                      <a:solidFill>
+                        <a:srgbClr val="1F2A40"/>
+                      </a:solidFill>
+                    </a:lnL>
+                    <a:lnR w="12700" cap="flat">
+                      <a:solidFill>
+                        <a:srgbClr val="1F2A40"/>
+                      </a:solidFill>
+                    </a:lnR>
+                    <a:lnT w="12700" cap="flat">
+                      <a:solidFill>
+                        <a:srgbClr val="1F2A40"/>
+                      </a:solidFill>
+                    </a:lnT>
+                    <a:lnB w="12700" cap="flat">
+                      <a:solidFill>
+                        <a:srgbClr val="1F2A40"/>
+                      </a:solidFill>
+                    </a:lnB>
+                  </a:tcPr>
+                </a:tc>
+                <a:tc>
+                  <a:txBody>
+                    <a:bodyPr/>
+                    <a:lstStyle/>
+                    <a:p>
+                      <a:r>
+                        <a:rPr sz="1200" b="1">
+                          <a:solidFill>
+                            <a:srgbClr val="8896B0"/>
+                          </a:solidFill>
+                          <a:latin typeface="Courier New"/>
+                        </a:rPr>
+                        <a:t>Where it is today</a:t>
+                      </a:r>
+                    </a:p>
+                  </a:txBody>
+                  <a:tcPr anchor="ctr">
+                    <a:solidFill>
+                      <a:srgbClr val="111827"/>
+                    </a:solidFill>
+                    <a:lnL w="12700" cap="flat">
+                      <a:solidFill>
+                        <a:srgbClr val="1F2A40"/>
+                      </a:solidFill>
+                    </a:lnL>
+                    <a:lnR w="12700" cap="flat">
+                      <a:solidFill>
+                        <a:srgbClr val="1F2A40"/>
+                      </a:solidFill>
+                    </a:lnR>
+                    <a:lnT w="12700" cap="flat">
+                      <a:solidFill>
+                        <a:srgbClr val="1F2A40"/>
+                      </a:solidFill>
+                    </a:lnT>
+                    <a:lnB w="12700" cap="flat">
+                      <a:solidFill>
+                        <a:srgbClr val="1F2A40"/>
+                      </a:solidFill>
+                    </a:lnB>
+                  </a:tcPr>
+                </a:tc>
+                <a:tc>
+                  <a:txBody>
+                    <a:bodyPr/>
+                    <a:lstStyle/>
+                    <a:p>
+                      <a:r>
+                        <a:rPr sz="1200" b="1">
+                          <a:solidFill>
+                            <a:srgbClr val="8896B0"/>
+                          </a:solidFill>
+                          <a:latin typeface="Courier New"/>
+                        </a:rPr>
+                        <a:t>What production needs</a:t>
+                      </a:r>
+                    </a:p>
+                  </a:txBody>
+                  <a:tcPr anchor="ctr">
+                    <a:solidFill>
+                      <a:srgbClr val="111827"/>
+                    </a:solidFill>
+                    <a:lnL w="12700" cap="flat">
+                      <a:solidFill>
+                        <a:srgbClr val="1F2A40"/>
+                      </a:solidFill>
+                    </a:lnL>
+                    <a:lnR w="12700" cap="flat">
+                      <a:solidFill>
+                        <a:srgbClr val="1F2A40"/>
+                      </a:solidFill>
+                    </a:lnR>
+                    <a:lnT w="12700" cap="flat">
+                      <a:solidFill>
+                        <a:srgbClr val="1F2A40"/>
+                      </a:solidFill>
+                    </a:lnT>
+                    <a:lnB w="12700" cap="flat">
+                      <a:solidFill>
+                        <a:srgbClr val="1F2A40"/>
+                      </a:solidFill>
+                    </a:lnB>
+                  </a:tcPr>
+                </a:tc>
+              </a:tr>
+              <a:tr h="52251">
+                <a:tc>
+                  <a:txBody>
+                    <a:bodyPr/>
+                    <a:lstStyle/>
+                    <a:p>
+                      <a:r>
+                        <a:rPr sz="1300" b="1">
+                          <a:solidFill>
+                            <a:srgbClr val="E8EDF5"/>
+                          </a:solidFill>
+                          <a:latin typeface="Arial"/>
+                        </a:rPr>
+                        <a:t>State &amp; concurrency</a:t>
+                      </a:r>
+                    </a:p>
+                  </a:txBody>
+                  <a:tcPr anchor="ctr">
+                    <a:solidFill>
+                      <a:srgbClr val="0A0F1C"/>
+                    </a:solidFill>
+                    <a:lnL w="12700" cap="flat">
+                      <a:solidFill>
+                        <a:srgbClr val="1F2A40"/>
+                      </a:solidFill>
+                    </a:lnL>
+                    <a:lnR w="12700" cap="flat">
+                      <a:solidFill>
+                        <a:srgbClr val="1F2A40"/>
+                      </a:solidFill>
+                    </a:lnR>
+                    <a:lnT w="12700" cap="flat">
+                      <a:solidFill>
+                        <a:srgbClr val="1F2A40"/>
+                      </a:solidFill>
+                    </a:lnT>
+                    <a:lnB w="12700" cap="flat">
+                      <a:solidFill>
+                        <a:srgbClr val="1F2A40"/>
+                      </a:solidFill>
+                    </a:lnB>
+                  </a:tcPr>
+                </a:tc>
+                <a:tc>
+                  <a:txBody>
+                    <a:bodyPr/>
+                    <a:lstStyle/>
+                    <a:p>
+                      <a:r>
+                        <a:rPr sz="1300" b="0">
+                          <a:solidFill>
+                            <a:srgbClr val="8896B0"/>
+                          </a:solidFill>
+                          <a:latin typeface="Arial"/>
+                        </a:rPr>
+                        <a:t>In memory, synchronous — one request at a time</a:t>
+                      </a:r>
+                    </a:p>
+                  </a:txBody>
+                  <a:tcPr anchor="ctr">
+                    <a:solidFill>
+                      <a:srgbClr val="0A0F1C"/>
+                    </a:solidFill>
+                    <a:lnL w="12700" cap="flat">
+                      <a:solidFill>
+                        <a:srgbClr val="1F2A40"/>
+                      </a:solidFill>
+                    </a:lnL>
+                    <a:lnR w="12700" cap="flat">
+                      <a:solidFill>
+                        <a:srgbClr val="1F2A40"/>
+                      </a:solidFill>
+                    </a:lnR>
+                    <a:lnT w="12700" cap="flat">
+                      <a:solidFill>
+                        <a:srgbClr val="1F2A40"/>
+                      </a:solidFill>
+                    </a:lnT>
+                    <a:lnB w="12700" cap="flat">
+                      <a:solidFill>
+                        <a:srgbClr val="1F2A40"/>
+                      </a:solidFill>
+                    </a:lnB>
+                  </a:tcPr>
+                </a:tc>
+                <a:tc>
+                  <a:txBody>
+                    <a:bodyPr/>
+                    <a:lstStyle/>
+                    <a:p>
+                      <a:r>
+                        <a:rPr sz="1300" b="0">
+                          <a:solidFill>
+                            <a:srgbClr val="8896B0"/>
+                          </a:solidFill>
+                          <a:latin typeface="Arial"/>
+                        </a:rPr>
+                        <a:t>Postgres plus a worker queue. The store is four methods, so it is a swap</a:t>
+                      </a:r>
+                    </a:p>
+                  </a:txBody>
+                  <a:tcPr anchor="ctr">
+                    <a:solidFill>
+                      <a:srgbClr val="0A0F1C"/>
+                    </a:solidFill>
+                    <a:lnL w="12700" cap="flat">
+                      <a:solidFill>
+                        <a:srgbClr val="1F2A40"/>
+                      </a:solidFill>
+                    </a:lnL>
+                    <a:lnR w="12700" cap="flat">
+                      <a:solidFill>
+                        <a:srgbClr val="1F2A40"/>
+                      </a:solidFill>
+                    </a:lnR>
+                    <a:lnT w="12700" cap="flat">
+                      <a:solidFill>
+                        <a:srgbClr val="1F2A40"/>
+                      </a:solidFill>
+                    </a:lnT>
+                    <a:lnB w="12700" cap="flat">
+                      <a:solidFill>
+                        <a:srgbClr val="1F2A40"/>
+                      </a:solidFill>
+                    </a:lnB>
+                  </a:tcPr>
+                </a:tc>
+              </a:tr>
+              <a:tr h="52251">
+                <a:tc>
+                  <a:txBody>
+                    <a:bodyPr/>
+                    <a:lstStyle/>
+                    <a:p>
+                      <a:r>
+                        <a:rPr sz="1300" b="1">
+                          <a:solidFill>
+                            <a:srgbClr val="E8EDF5"/>
+                          </a:solidFill>
+                          <a:latin typeface="Arial"/>
+                        </a:rPr>
+                        <a:t>Sandbox</a:t>
+                      </a:r>
+                    </a:p>
+                  </a:txBody>
+                  <a:tcPr anchor="ctr">
+                    <a:solidFill>
+                      <a:srgbClr val="0A0F1C"/>
+                    </a:solidFill>
+                    <a:lnL w="12700" cap="flat">
+                      <a:solidFill>
+                        <a:srgbClr val="1F2A40"/>
+                      </a:solidFill>
+                    </a:lnL>
+                    <a:lnR w="12700" cap="flat">
+                      <a:solidFill>
+                        <a:srgbClr val="1F2A40"/>
+                      </a:solidFill>
+                    </a:lnR>
+                    <a:lnT w="12700" cap="flat">
+                      <a:solidFill>
+                        <a:srgbClr val="1F2A40"/>
+                      </a:solidFill>
+                    </a:lnT>
+                    <a:lnB w="12700" cap="flat">
+                      <a:solidFill>
+                        <a:srgbClr val="1F2A40"/>
+                      </a:solidFill>
+                    </a:lnB>
+                  </a:tcPr>
+                </a:tc>
+                <a:tc>
+                  <a:txBody>
+                    <a:bodyPr/>
+                    <a:lstStyle/>
+                    <a:p>
+                      <a:r>
+                        <a:rPr sz="1300" b="0">
+                          <a:solidFill>
+                            <a:srgbClr val="8896B0"/>
+                          </a:solidFill>
+                          <a:latin typeface="Arial"/>
+                        </a:rPr>
+                        <a:t>Process isolation: timeout, memory cap, scrubbed environment</a:t>
+                      </a:r>
+                    </a:p>
+                  </a:txBody>
+                  <a:tcPr anchor="ctr">
+                    <a:solidFill>
+                      <a:srgbClr val="0A0F1C"/>
+                    </a:solidFill>
+                    <a:lnL w="12700" cap="flat">
+                      <a:solidFill>
+                        <a:srgbClr val="1F2A40"/>
+                      </a:solidFill>
+                    </a:lnL>
+                    <a:lnR w="12700" cap="flat">
+                      <a:solidFill>
+                        <a:srgbClr val="1F2A40"/>
+                      </a:solidFill>
+                    </a:lnR>
+                    <a:lnT w="12700" cap="flat">
+                      <a:solidFill>
+                        <a:srgbClr val="1F2A40"/>
+                      </a:solidFill>
+                    </a:lnT>
+                    <a:lnB w="12700" cap="flat">
+                      <a:solidFill>
+                        <a:srgbClr val="1F2A40"/>
+                      </a:solidFill>
+                    </a:lnB>
+                  </a:tcPr>
+                </a:tc>
+                <a:tc>
+                  <a:txBody>
+                    <a:bodyPr/>
+                    <a:lstStyle/>
+                    <a:p>
+                      <a:r>
+                        <a:rPr sz="1300" b="0">
+                          <a:solidFill>
+                            <a:srgbClr val="8896B0"/>
+                          </a:solidFill>
+                          <a:latin typeface="Arial"/>
+                        </a:rPr>
+                        <a:t>The same runner inside a non-root container, egress allowlisted to the target</a:t>
+                      </a:r>
+                    </a:p>
+                  </a:txBody>
+                  <a:tcPr anchor="ctr">
+                    <a:solidFill>
+                      <a:srgbClr val="0A0F1C"/>
+                    </a:solidFill>
+                    <a:lnL w="12700" cap="flat">
+                      <a:solidFill>
+                        <a:srgbClr val="1F2A40"/>
+                      </a:solidFill>
+                    </a:lnL>
+                    <a:lnR w="12700" cap="flat">
+                      <a:solidFill>
+                        <a:srgbClr val="1F2A40"/>
+                      </a:solidFill>
+                    </a:lnR>
+                    <a:lnT w="12700" cap="flat">
+                      <a:solidFill>
+                        <a:srgbClr val="1F2A40"/>
+                      </a:solidFill>
+                    </a:lnT>
+                    <a:lnB w="12700" cap="flat">
+                      <a:solidFill>
+                        <a:srgbClr val="1F2A40"/>
+                      </a:solidFill>
+                    </a:lnB>
+                  </a:tcPr>
+                </a:tc>
+              </a:tr>
+              <a:tr h="52251">
+                <a:tc>
+                  <a:txBody>
+                    <a:bodyPr/>
+                    <a:lstStyle/>
+                    <a:p>
+                      <a:r>
+                        <a:rPr sz="1300" b="1">
+                          <a:solidFill>
+                            <a:srgbClr val="E8EDF5"/>
+                          </a:solidFill>
+                          <a:latin typeface="Arial"/>
+                        </a:rPr>
+                        <a:t>Secrets</a:t>
+                      </a:r>
+                    </a:p>
+                  </a:txBody>
+                  <a:tcPr anchor="ctr">
+                    <a:solidFill>
+                      <a:srgbClr val="0A0F1C"/>
+                    </a:solidFill>
+                    <a:lnL w="12700" cap="flat">
+                      <a:solidFill>
+                        <a:srgbClr val="1F2A40"/>
+                      </a:solidFill>
+                    </a:lnL>
+                    <a:lnR w="12700" cap="flat">
+                      <a:solidFill>
+                        <a:srgbClr val="1F2A40"/>
+                      </a:solidFill>
+                    </a:lnR>
+                    <a:lnT w="12700" cap="flat">
+                      <a:solidFill>
+                        <a:srgbClr val="1F2A40"/>
+                      </a:solidFill>
+                    </a:lnT>
+                    <a:lnB w="12700" cap="flat">
+                      <a:solidFill>
+                        <a:srgbClr val="1F2A40"/>
+                      </a:solidFill>
+                    </a:lnB>
+                  </a:tcPr>
+                </a:tc>
+                <a:tc>
+                  <a:txBody>
+                    <a:bodyPr/>
+                    <a:lstStyle/>
+                    <a:p>
+                      <a:r>
+                        <a:rPr sz="1300" b="0">
+                          <a:solidFill>
+                            <a:srgbClr val="8896B0"/>
+                          </a:solidFill>
+                          <a:latin typeface="Arial"/>
+                        </a:rPr>
+                        <a:t>Passed transiently for one call, never stored</a:t>
+                      </a:r>
+                    </a:p>
+                  </a:txBody>
+                  <a:tcPr anchor="ctr">
+                    <a:solidFill>
+                      <a:srgbClr val="0A0F1C"/>
+                    </a:solidFill>
+                    <a:lnL w="12700" cap="flat">
+                      <a:solidFill>
+                        <a:srgbClr val="1F2A40"/>
+                      </a:solidFill>
+                    </a:lnL>
+                    <a:lnR w="12700" cap="flat">
+                      <a:solidFill>
+                        <a:srgbClr val="1F2A40"/>
+                      </a:solidFill>
+                    </a:lnR>
+                    <a:lnT w="12700" cap="flat">
+                      <a:solidFill>
+                        <a:srgbClr val="1F2A40"/>
+                      </a:solidFill>
+                    </a:lnT>
+                    <a:lnB w="12700" cap="flat">
+                      <a:solidFill>
+                        <a:srgbClr val="1F2A40"/>
+                      </a:solidFill>
+                    </a:lnB>
+                  </a:tcPr>
+                </a:tc>
+                <a:tc>
+                  <a:txBody>
+                    <a:bodyPr/>
+                    <a:lstStyle/>
+                    <a:p>
+                      <a:r>
+                        <a:rPr sz="1300" b="0">
+                          <a:solidFill>
+                            <a:srgbClr val="8896B0"/>
+                          </a:solidFill>
+                          <a:latin typeface="Arial"/>
+                        </a:rPr>
+                        <a:t>A broker issuing scoped, time-boxed leases, audited on redemption</a:t>
+                      </a:r>
+                    </a:p>
+                  </a:txBody>
+                  <a:tcPr anchor="ctr">
+                    <a:solidFill>
+                      <a:srgbClr val="0A0F1C"/>
+                    </a:solidFill>
+                    <a:lnL w="12700" cap="flat">
+                      <a:solidFill>
+                        <a:srgbClr val="1F2A40"/>
+                      </a:solidFill>
+                    </a:lnL>
+                    <a:lnR w="12700" cap="flat">
+                      <a:solidFill>
+                        <a:srgbClr val="1F2A40"/>
+                      </a:solidFill>
+                    </a:lnR>
+                    <a:lnT w="12700" cap="flat">
+                      <a:solidFill>
+                        <a:srgbClr val="1F2A40"/>
+                      </a:solidFill>
+                    </a:lnT>
+                    <a:lnB w="12700" cap="flat">
+                      <a:solidFill>
+                        <a:srgbClr val="1F2A40"/>
+                      </a:solidFill>
+                    </a:lnB>
+                  </a:tcPr>
+                </a:tc>
+              </a:tr>
+              <a:tr h="52251">
+                <a:tc>
+                  <a:txBody>
+                    <a:bodyPr/>
+                    <a:lstStyle/>
+                    <a:p>
+                      <a:r>
+                        <a:rPr sz="1300" b="1">
+                          <a:solidFill>
+                            <a:srgbClr val="E8EDF5"/>
+                          </a:solidFill>
+                          <a:latin typeface="Arial"/>
+                        </a:rPr>
+                        <a:t>Orchestration</a:t>
+                      </a:r>
+                    </a:p>
+                  </a:txBody>
+                  <a:tcPr anchor="ctr">
+                    <a:solidFill>
+                      <a:srgbClr val="0A0F1C"/>
+                    </a:solidFill>
+                    <a:lnL w="12700" cap="flat">
+                      <a:solidFill>
+                        <a:srgbClr val="1F2A40"/>
+                      </a:solidFill>
+                    </a:lnL>
+                    <a:lnR w="12700" cap="flat">
+                      <a:solidFill>
+                        <a:srgbClr val="1F2A40"/>
+                      </a:solidFill>
+                    </a:lnR>
+                    <a:lnT w="12700" cap="flat">
+                      <a:solidFill>
+                        <a:srgbClr val="1F2A40"/>
+                      </a:solidFill>
+                    </a:lnT>
+                    <a:lnB w="12700" cap="flat">
+                      <a:solidFill>
+                        <a:srgbClr val="1F2A40"/>
+                      </a:solidFill>
+                    </a:lnB>
+                  </a:tcPr>
+                </a:tc>
+                <a:tc>
+                  <a:txBody>
+                    <a:bodyPr/>
+                    <a:lstStyle/>
+                    <a:p>
+                      <a:r>
+                        <a:rPr sz="1300" b="0">
+                          <a:solidFill>
+                            <a:srgbClr val="8896B0"/>
+                          </a:solidFill>
+                          <a:latin typeface="Arial"/>
+                        </a:rPr>
+                        <a:t>Run once, by hand, from the browser</a:t>
+                      </a:r>
+                    </a:p>
+                  </a:txBody>
+                  <a:tcPr anchor="ctr">
+                    <a:solidFill>
+                      <a:srgbClr val="0A0F1C"/>
+                    </a:solidFill>
+                    <a:lnL w="12700" cap="flat">
+                      <a:solidFill>
+                        <a:srgbClr val="1F2A40"/>
+                      </a:solidFill>
+                    </a:lnL>
+                    <a:lnR w="12700" cap="flat">
+                      <a:solidFill>
+                        <a:srgbClr val="1F2A40"/>
+                      </a:solidFill>
+                    </a:lnR>
+                    <a:lnT w="12700" cap="flat">
+                      <a:solidFill>
+                        <a:srgbClr val="1F2A40"/>
+                      </a:solidFill>
+                    </a:lnT>
+                    <a:lnB w="12700" cap="flat">
+                      <a:solidFill>
+                        <a:srgbClr val="1F2A40"/>
+                      </a:solidFill>
+                    </a:lnB>
+                  </a:tcPr>
+                </a:tc>
+                <a:tc>
+                  <a:txBody>
+                    <a:bodyPr/>
+                    <a:lstStyle/>
+                    <a:p>
+                      <a:r>
+                        <a:rPr sz="1300" b="0">
+                          <a:solidFill>
+                            <a:srgbClr val="8896B0"/>
+                          </a:solidFill>
+                          <a:latin typeface="Arial"/>
+                        </a:rPr>
+                        <a:t>An Airflow DAG imports the connector; from_env() maps onto an Airflow Connection</a:t>
+                      </a:r>
+                    </a:p>
+                  </a:txBody>
+                  <a:tcPr anchor="ctr">
+                    <a:solidFill>
+                      <a:srgbClr val="0A0F1C"/>
+                    </a:solidFill>
+                    <a:lnL w="12700" cap="flat">
+                      <a:solidFill>
+                        <a:srgbClr val="1F2A40"/>
+                      </a:solidFill>
+                    </a:lnL>
+                    <a:lnR w="12700" cap="flat">
+                      <a:solidFill>
+                        <a:srgbClr val="1F2A40"/>
+                      </a:solidFill>
+                    </a:lnR>
+                    <a:lnT w="12700" cap="flat">
+                      <a:solidFill>
+                        <a:srgbClr val="1F2A40"/>
+                      </a:solidFill>
+                    </a:lnT>
+                    <a:lnB w="12700" cap="flat">
+                      <a:solidFill>
+                        <a:srgbClr val="1F2A40"/>
+                      </a:solidFill>
+                    </a:lnB>
+                  </a:tcPr>
+                </a:tc>
+              </a:tr>
+              <a:tr h="52251">
+                <a:tc>
+                  <a:txBody>
+                    <a:bodyPr/>
+                    <a:lstStyle/>
+                    <a:p>
+                      <a:r>
+                        <a:rPr sz="1300" b="1">
+                          <a:solidFill>
+                            <a:srgbClr val="E8EDF5"/>
+                          </a:solidFill>
+                          <a:latin typeface="Arial"/>
+                        </a:rPr>
+                        <a:t>Ingestion</a:t>
+                      </a:r>
+                    </a:p>
+                  </a:txBody>
+                  <a:tcPr anchor="ctr">
+                    <a:solidFill>
+                      <a:srgbClr val="0A0F1C"/>
+                    </a:solidFill>
+                    <a:lnL w="12700" cap="flat">
+                      <a:solidFill>
+                        <a:srgbClr val="1F2A40"/>
+                      </a:solidFill>
+                    </a:lnL>
+                    <a:lnR w="12700" cap="flat">
+                      <a:solidFill>
+                        <a:srgbClr val="1F2A40"/>
+                      </a:solidFill>
+                    </a:lnR>
+                    <a:lnT w="12700" cap="flat">
+                      <a:solidFill>
+                        <a:srgbClr val="1F2A40"/>
+                      </a:solidFill>
+                    </a:lnT>
+                    <a:lnB w="12700" cap="flat">
+                      <a:solidFill>
+                        <a:srgbClr val="1F2A40"/>
+                      </a:solidFill>
+                    </a:lnB>
+                  </a:tcPr>
+                </a:tc>
+                <a:tc>
+                  <a:txBody>
+                    <a:bodyPr/>
+                    <a:lstStyle/>
+                    <a:p>
+                      <a:r>
+                        <a:rPr sz="1300" b="0">
+                          <a:solidFill>
+                            <a:srgbClr val="8896B0"/>
+                          </a:solidFill>
+                          <a:latin typeface="Arial"/>
+                        </a:rPr>
+                        <a:t>Schema discovery only</a:t>
+                      </a:r>
+                    </a:p>
+                  </a:txBody>
+                  <a:tcPr anchor="ctr">
+                    <a:solidFill>
+                      <a:srgbClr val="0A0F1C"/>
+                    </a:solidFill>
+                    <a:lnL w="12700" cap="flat">
+                      <a:solidFill>
+                        <a:srgbClr val="1F2A40"/>
+                      </a:solidFill>
+                    </a:lnL>
+                    <a:lnR w="12700" cap="flat">
+                      <a:solidFill>
+                        <a:srgbClr val="1F2A40"/>
+                      </a:solidFill>
+                    </a:lnR>
+                    <a:lnT w="12700" cap="flat">
+                      <a:solidFill>
+                        <a:srgbClr val="1F2A40"/>
+                      </a:solidFill>
+                    </a:lnT>
+                    <a:lnB w="12700" cap="flat">
+                      <a:solidFill>
+                        <a:srgbClr val="1F2A40"/>
+                      </a:solidFill>
+                    </a:lnB>
+                  </a:tcPr>
+                </a:tc>
+                <a:tc>
+                  <a:txBody>
+                    <a:bodyPr/>
+                    <a:lstStyle/>
+                    <a:p>
+                      <a:r>
+                        <a:rPr sz="1300" b="0">
+                          <a:solidFill>
+                            <a:srgbClr val="8896B0"/>
+                          </a:solidFill>
+                          <a:latin typeface="Arial"/>
+                        </a:rPr>
+                        <a:t>Discover → extract on a watermark → load, as three tasks in one DAG</a:t>
+                      </a:r>
+                    </a:p>
+                  </a:txBody>
+                  <a:tcPr anchor="ctr">
+                    <a:solidFill>
+                      <a:srgbClr val="0A0F1C"/>
+                    </a:solidFill>
+                    <a:lnL w="12700" cap="flat">
+                      <a:solidFill>
+                        <a:srgbClr val="1F2A40"/>
+                      </a:solidFill>
+                    </a:lnL>
+                    <a:lnR w="12700" cap="flat">
+                      <a:solidFill>
+                        <a:srgbClr val="1F2A40"/>
+                      </a:solidFill>
+                    </a:lnR>
+                    <a:lnT w="12700" cap="flat">
+                      <a:solidFill>
+                        <a:srgbClr val="1F2A40"/>
+                      </a:solidFill>
+                    </a:lnT>
+                    <a:lnB w="12700" cap="flat">
+                      <a:solidFill>
+                        <a:srgbClr val="1F2A40"/>
+                      </a:solidFill>
+                    </a:lnB>
+                  </a:tcPr>
+                </a:tc>
+              </a:tr>
+              <a:tr h="52254">
+                <a:tc>
+                  <a:txBody>
+                    <a:bodyPr/>
+                    <a:lstStyle/>
+                    <a:p>
+                      <a:r>
+                        <a:rPr sz="1300" b="1">
+                          <a:solidFill>
+                            <a:srgbClr val="E8EDF5"/>
+                          </a:solidFill>
+                          <a:latin typeface="Arial"/>
+                        </a:rPr>
+                        <a:t>Drift</a:t>
+                      </a:r>
+                    </a:p>
+                  </a:txBody>
+                  <a:tcPr anchor="ctr">
+                    <a:solidFill>
+                      <a:srgbClr val="0A0F1C"/>
+                    </a:solidFill>
+                    <a:lnL w="12700" cap="flat">
+                      <a:solidFill>
+                        <a:srgbClr val="1F2A40"/>
+                      </a:solidFill>
+                    </a:lnL>
+                    <a:lnR w="12700" cap="flat">
+                      <a:solidFill>
+                        <a:srgbClr val="1F2A40"/>
+                      </a:solidFill>
+                    </a:lnR>
+                    <a:lnT w="12700" cap="flat">
+                      <a:solidFill>
+                        <a:srgbClr val="1F2A40"/>
+                      </a:solidFill>
+                    </a:lnT>
+                    <a:lnB w="12700" cap="flat">
+                      <a:solidFill>
+                        <a:srgbClr val="1F2A40"/>
+                      </a:solidFill>
+                    </a:lnB>
+                  </a:tcPr>
+                </a:tc>
+                <a:tc>
+                  <a:txBody>
+                    <a:bodyPr/>
+                    <a:lstStyle/>
+                    <a:p>
+                      <a:r>
+                        <a:rPr sz="1300" b="0">
+                          <a:solidFill>
+                            <a:srgbClr val="8896B0"/>
+                          </a:solidFill>
+                          <a:latin typeface="Arial"/>
+                        </a:rPr>
+                        <a:t>Nobody notices when the source changes</a:t>
+                      </a:r>
+                    </a:p>
+                  </a:txBody>
+                  <a:tcPr anchor="ctr">
+                    <a:solidFill>
+                      <a:srgbClr val="0A0F1C"/>
+                    </a:solidFill>
+                    <a:lnL w="12700" cap="flat">
+                      <a:solidFill>
+                        <a:srgbClr val="1F2A40"/>
+                      </a:solidFill>
+                    </a:lnL>
+                    <a:lnR w="12700" cap="flat">
+                      <a:solidFill>
+                        <a:srgbClr val="1F2A40"/>
+                      </a:solidFill>
+                    </a:lnR>
+                    <a:lnT w="12700" cap="flat">
+                      <a:solidFill>
+                        <a:srgbClr val="1F2A40"/>
+                      </a:solidFill>
+                    </a:lnT>
+                    <a:lnB w="12700" cap="flat">
+                      <a:solidFill>
+                        <a:srgbClr val="1F2A40"/>
+                      </a:solidFill>
+                    </a:lnB>
+                  </a:tcPr>
+                </a:tc>
+                <a:tc>
+                  <a:txBody>
+                    <a:bodyPr/>
+                    <a:lstStyle/>
+                    <a:p>
+                      <a:r>
+                        <a:rPr sz="1300" b="0">
+                          <a:solidFill>
+                            <a:srgbClr val="8896B0"/>
+                          </a:solidFill>
+                          <a:latin typeface="Arial"/>
+                        </a:rPr>
+                        <a:t>Scheduled fetch_schema(), diffed against the spec; divergence opens a PR</a:t>
+                      </a:r>
+                    </a:p>
+                  </a:txBody>
+                  <a:tcPr anchor="ctr">
+                    <a:solidFill>
+                      <a:srgbClr val="0A0F1C"/>
+                    </a:solidFill>
+                    <a:lnL w="12700" cap="flat">
+                      <a:solidFill>
+                        <a:srgbClr val="1F2A40"/>
+                      </a:solidFill>
+                    </a:lnL>
+                    <a:lnR w="12700" cap="flat">
+                      <a:solidFill>
+                        <a:srgbClr val="1F2A40"/>
+                      </a:solidFill>
+                    </a:lnR>
+                    <a:lnT w="12700" cap="flat">
+                      <a:solidFill>
+                        <a:srgbClr val="1F2A40"/>
+                      </a:solidFill>
+                    </a:lnT>
+                    <a:lnB w="12700" cap="flat">
+                      <a:solidFill>
+                        <a:srgbClr val="1F2A40"/>
+                      </a:solidFill>
+                    </a:lnB>
+                  </a:tcPr>
+                </a:tc>
+              </a:tr>
+            </a:tbl>
+          </a:graphicData>
+        </a:graphic>
+      </p:graphicFrame>
+      <p:sp>
+        <p:nvSpPr>
+          <p:cNvPr id="7" name="TextBox 6"/>
+          <p:cNvSpPr txBox="1"/>
+          <p:nvPr/>
+        </p:nvSpPr>
+        <p:spPr>
+          <a:xfrm>
+            <a:off x="685800" y="5943600"/>
+            <a:ext cx="10789920" cy="548640"/>
+          </a:xfrm>
+          <a:prstGeom prst="rect">
+            <a:avLst/>
+          </a:prstGeom>
+          <a:noFill/>
+        </p:spPr>
+        <p:txBody>
+          <a:bodyPr wrap="square" lIns="0" rIns="0" tIns="0" bIns="0">
+            <a:spAutoFit/>
+          </a:bodyPr>
+          <a:lstStyle/>
+          <a:p>
+            <a:pPr>
+              <a:spcAft>
+                <a:spcPts val="600"/>
+              </a:spcAft>
+            </a:pPr>
+            <a:r>
+              <a:rPr sz="1250" b="0">
+                <a:solidFill>
+                  <a:srgbClr val="8896B0"/>
+                </a:solidFill>
+                <a:latin typeface="Courier New"/>
+              </a:rPr>
+              <a:t>The manifest already lists required_env by name, and that is precisely the set of fields an Airflow Connection has to carry. The handover was built for this.</a:t>
+            </a:r>
+          </a:p>
+        </p:txBody>
+      </p:sp>
+    </p:spTree>
+  </p:cSld>
+  <p:clrMapOvr>
+    <a:masterClrMapping/>
+  </p:clrMapOvr>
+</p:sld>
+</file>
+
+<file path=ppt/slides/slide13.xml><?xml version="1.0" encoding="utf-8"?>
 <p:sld xmlns:a="http://schemas.openxmlformats.org/drawingml/2006/main" xmlns:p="http://schemas.openxmlformats.org/presentationml/2006/main" xmlns:r="http://schemas.openxmlformats.org/officeDocument/2006/relationships">
   <p:cSld>
     <p:spTree>
